--- a/10-causal-machine-learning/slides.pptx
+++ b/10-causal-machine-learning/slides.pptx
@@ -942,7 +942,7 @@
           <a:bodyPr anchor="t"/>
           <a:lstStyle>
             <a:lvl1pPr algn="l">
-              <a:defRPr sz="3000" b="1" cap="all"/>
+              <a:defRPr sz="2350" b="1" cap="all"/>
             </a:lvl1pPr>
           </a:lstStyle>
           <a:p>
@@ -974,7 +974,7 @@
           <a:lstStyle>
             <a:lvl1pPr marL="0" indent="0">
               <a:buNone/>
-              <a:defRPr sz="1500">
+              <a:defRPr sz="1150">
                 <a:solidFill>
                   <a:schemeClr val="tx1">
                     <a:tint val="75000"/>
@@ -984,7 +984,7 @@
             </a:lvl1pPr>
             <a:lvl2pPr marL="342900" indent="0">
               <a:buNone/>
-              <a:defRPr sz="1350">
+              <a:defRPr sz="1050">
                 <a:solidFill>
                   <a:schemeClr val="tx1">
                     <a:tint val="75000"/>
@@ -994,7 +994,7 @@
             </a:lvl2pPr>
             <a:lvl3pPr marL="685800" indent="0">
               <a:buNone/>
-              <a:defRPr sz="1200">
+              <a:defRPr sz="950">
                 <a:solidFill>
                   <a:schemeClr val="tx1">
                     <a:tint val="75000"/>
@@ -1004,7 +1004,7 @@
             </a:lvl3pPr>
             <a:lvl4pPr marL="1028700" indent="0">
               <a:buNone/>
-              <a:defRPr sz="1050">
+              <a:defRPr sz="800">
                 <a:solidFill>
                   <a:schemeClr val="tx1">
                     <a:tint val="75000"/>
@@ -1014,7 +1014,7 @@
             </a:lvl4pPr>
             <a:lvl5pPr marL="1371600" indent="0">
               <a:buNone/>
-              <a:defRPr sz="1050">
+              <a:defRPr sz="800">
                 <a:solidFill>
                   <a:schemeClr val="tx1">
                     <a:tint val="75000"/>
@@ -1024,7 +1024,7 @@
             </a:lvl5pPr>
             <a:lvl6pPr marL="1714500" indent="0">
               <a:buNone/>
-              <a:defRPr sz="1050">
+              <a:defRPr sz="800">
                 <a:solidFill>
                   <a:schemeClr val="tx1">
                     <a:tint val="75000"/>
@@ -1034,7 +1034,7 @@
             </a:lvl6pPr>
             <a:lvl7pPr marL="2057400" indent="0">
               <a:buNone/>
-              <a:defRPr sz="1050">
+              <a:defRPr sz="800">
                 <a:solidFill>
                   <a:schemeClr val="tx1">
                     <a:tint val="75000"/>
@@ -1044,7 +1044,7 @@
             </a:lvl7pPr>
             <a:lvl8pPr marL="2400300" indent="0">
               <a:buNone/>
-              <a:defRPr sz="1050">
+              <a:defRPr sz="800">
                 <a:solidFill>
                   <a:schemeClr val="tx1">
                     <a:tint val="75000"/>
@@ -1054,7 +1054,7 @@
             </a:lvl8pPr>
             <a:lvl9pPr marL="2743200" indent="0">
               <a:buNone/>
-              <a:defRPr sz="1050">
+              <a:defRPr sz="800">
                 <a:solidFill>
                   <a:schemeClr val="tx1">
                     <a:tint val="75000"/>
@@ -1209,31 +1209,31 @@
           <a:bodyPr/>
           <a:lstStyle>
             <a:lvl1pPr>
-              <a:defRPr sz="2100"/>
+              <a:defRPr sz="1650"/>
             </a:lvl1pPr>
             <a:lvl2pPr>
-              <a:defRPr sz="1800"/>
+              <a:defRPr sz="1400"/>
             </a:lvl2pPr>
             <a:lvl3pPr>
-              <a:defRPr sz="1500"/>
+              <a:defRPr sz="1150"/>
             </a:lvl3pPr>
             <a:lvl4pPr>
-              <a:defRPr sz="1350"/>
+              <a:defRPr sz="1050"/>
             </a:lvl4pPr>
             <a:lvl5pPr>
-              <a:defRPr sz="1350"/>
+              <a:defRPr sz="1050"/>
             </a:lvl5pPr>
             <a:lvl6pPr>
-              <a:defRPr sz="1350"/>
+              <a:defRPr sz="1050"/>
             </a:lvl6pPr>
             <a:lvl7pPr>
-              <a:defRPr sz="1350"/>
+              <a:defRPr sz="1050"/>
             </a:lvl7pPr>
             <a:lvl8pPr>
-              <a:defRPr sz="1350"/>
+              <a:defRPr sz="1050"/>
             </a:lvl8pPr>
             <a:lvl9pPr>
-              <a:defRPr sz="1350"/>
+              <a:defRPr sz="1050"/>
             </a:lvl9pPr>
           </a:lstStyle>
           <a:p>
@@ -1293,31 +1293,31 @@
           <a:bodyPr/>
           <a:lstStyle>
             <a:lvl1pPr>
-              <a:defRPr sz="2100"/>
+              <a:defRPr sz="1650"/>
             </a:lvl1pPr>
             <a:lvl2pPr>
-              <a:defRPr sz="1800"/>
+              <a:defRPr sz="1400"/>
             </a:lvl2pPr>
             <a:lvl3pPr>
-              <a:defRPr sz="1500"/>
+              <a:defRPr sz="1150"/>
             </a:lvl3pPr>
             <a:lvl4pPr>
-              <a:defRPr sz="1350"/>
+              <a:defRPr sz="1050"/>
             </a:lvl4pPr>
             <a:lvl5pPr>
-              <a:defRPr sz="1350"/>
+              <a:defRPr sz="1050"/>
             </a:lvl5pPr>
             <a:lvl6pPr>
-              <a:defRPr sz="1350"/>
+              <a:defRPr sz="1050"/>
             </a:lvl6pPr>
             <a:lvl7pPr>
-              <a:defRPr sz="1350"/>
+              <a:defRPr sz="1050"/>
             </a:lvl7pPr>
             <a:lvl8pPr>
-              <a:defRPr sz="1350"/>
+              <a:defRPr sz="1050"/>
             </a:lvl8pPr>
             <a:lvl9pPr>
-              <a:defRPr sz="1350"/>
+              <a:defRPr sz="1050"/>
             </a:lvl9pPr>
           </a:lstStyle>
           <a:p>
@@ -1499,39 +1499,39 @@
           <a:lstStyle>
             <a:lvl1pPr marL="0" indent="0">
               <a:buNone/>
-              <a:defRPr sz="1800" b="1"/>
+              <a:defRPr sz="1400" b="1"/>
             </a:lvl1pPr>
             <a:lvl2pPr marL="342900" indent="0">
               <a:buNone/>
-              <a:defRPr sz="1500" b="1"/>
+              <a:defRPr sz="1150" b="1"/>
             </a:lvl2pPr>
             <a:lvl3pPr marL="685800" indent="0">
               <a:buNone/>
-              <a:defRPr sz="1350" b="1"/>
+              <a:defRPr sz="1050" b="1"/>
             </a:lvl3pPr>
             <a:lvl4pPr marL="1028700" indent="0">
               <a:buNone/>
-              <a:defRPr sz="1200" b="1"/>
+              <a:defRPr sz="950" b="1"/>
             </a:lvl4pPr>
             <a:lvl5pPr marL="1371600" indent="0">
               <a:buNone/>
-              <a:defRPr sz="1200" b="1"/>
+              <a:defRPr sz="950" b="1"/>
             </a:lvl5pPr>
             <a:lvl6pPr marL="1714500" indent="0">
               <a:buNone/>
-              <a:defRPr sz="1200" b="1"/>
+              <a:defRPr sz="950" b="1"/>
             </a:lvl6pPr>
             <a:lvl7pPr marL="2057400" indent="0">
               <a:buNone/>
-              <a:defRPr sz="1200" b="1"/>
+              <a:defRPr sz="950" b="1"/>
             </a:lvl7pPr>
             <a:lvl8pPr marL="2400300" indent="0">
               <a:buNone/>
-              <a:defRPr sz="1200" b="1"/>
+              <a:defRPr sz="950" b="1"/>
             </a:lvl8pPr>
             <a:lvl9pPr marL="2743200" indent="0">
               <a:buNone/>
-              <a:defRPr sz="1200" b="1"/>
+              <a:defRPr sz="950" b="1"/>
             </a:lvl9pPr>
           </a:lstStyle>
           <a:p>
@@ -1563,31 +1563,31 @@
           <a:bodyPr/>
           <a:lstStyle>
             <a:lvl1pPr>
-              <a:defRPr sz="1800"/>
+              <a:defRPr sz="1400"/>
             </a:lvl1pPr>
             <a:lvl2pPr>
-              <a:defRPr sz="1500"/>
+              <a:defRPr sz="1150"/>
             </a:lvl2pPr>
             <a:lvl3pPr>
-              <a:defRPr sz="1350"/>
+              <a:defRPr sz="1050"/>
             </a:lvl3pPr>
             <a:lvl4pPr>
-              <a:defRPr sz="1200"/>
+              <a:defRPr sz="950"/>
             </a:lvl4pPr>
             <a:lvl5pPr>
-              <a:defRPr sz="1200"/>
+              <a:defRPr sz="950"/>
             </a:lvl5pPr>
             <a:lvl6pPr>
-              <a:defRPr sz="1200"/>
+              <a:defRPr sz="950"/>
             </a:lvl6pPr>
             <a:lvl7pPr>
-              <a:defRPr sz="1200"/>
+              <a:defRPr sz="950"/>
             </a:lvl7pPr>
             <a:lvl8pPr>
-              <a:defRPr sz="1200"/>
+              <a:defRPr sz="950"/>
             </a:lvl8pPr>
             <a:lvl9pPr>
-              <a:defRPr sz="1200"/>
+              <a:defRPr sz="950"/>
             </a:lvl9pPr>
           </a:lstStyle>
           <a:p>
@@ -1648,39 +1648,39 @@
           <a:lstStyle>
             <a:lvl1pPr marL="0" indent="0">
               <a:buNone/>
-              <a:defRPr sz="1800" b="1"/>
+              <a:defRPr sz="1400" b="1"/>
             </a:lvl1pPr>
             <a:lvl2pPr marL="342900" indent="0">
               <a:buNone/>
-              <a:defRPr sz="1500" b="1"/>
+              <a:defRPr sz="1150" b="1"/>
             </a:lvl2pPr>
             <a:lvl3pPr marL="685800" indent="0">
               <a:buNone/>
-              <a:defRPr sz="1350" b="1"/>
+              <a:defRPr sz="1050" b="1"/>
             </a:lvl3pPr>
             <a:lvl4pPr marL="1028700" indent="0">
               <a:buNone/>
-              <a:defRPr sz="1200" b="1"/>
+              <a:defRPr sz="950" b="1"/>
             </a:lvl4pPr>
             <a:lvl5pPr marL="1371600" indent="0">
               <a:buNone/>
-              <a:defRPr sz="1200" b="1"/>
+              <a:defRPr sz="950" b="1"/>
             </a:lvl5pPr>
             <a:lvl6pPr marL="1714500" indent="0">
               <a:buNone/>
-              <a:defRPr sz="1200" b="1"/>
+              <a:defRPr sz="950" b="1"/>
             </a:lvl6pPr>
             <a:lvl7pPr marL="2057400" indent="0">
               <a:buNone/>
-              <a:defRPr sz="1200" b="1"/>
+              <a:defRPr sz="950" b="1"/>
             </a:lvl7pPr>
             <a:lvl8pPr marL="2400300" indent="0">
               <a:buNone/>
-              <a:defRPr sz="1200" b="1"/>
+              <a:defRPr sz="950" b="1"/>
             </a:lvl8pPr>
             <a:lvl9pPr marL="2743200" indent="0">
               <a:buNone/>
-              <a:defRPr sz="1200" b="1"/>
+              <a:defRPr sz="950" b="1"/>
             </a:lvl9pPr>
           </a:lstStyle>
           <a:p>
@@ -1712,31 +1712,31 @@
           <a:bodyPr/>
           <a:lstStyle>
             <a:lvl1pPr>
-              <a:defRPr sz="1800"/>
+              <a:defRPr sz="1400"/>
             </a:lvl1pPr>
             <a:lvl2pPr>
-              <a:defRPr sz="1500"/>
+              <a:defRPr sz="1150"/>
             </a:lvl2pPr>
             <a:lvl3pPr>
-              <a:defRPr sz="1350"/>
+              <a:defRPr sz="1050"/>
             </a:lvl3pPr>
             <a:lvl4pPr>
-              <a:defRPr sz="1200"/>
+              <a:defRPr sz="950"/>
             </a:lvl4pPr>
             <a:lvl5pPr>
-              <a:defRPr sz="1200"/>
+              <a:defRPr sz="950"/>
             </a:lvl5pPr>
             <a:lvl6pPr>
-              <a:defRPr sz="1200"/>
+              <a:defRPr sz="950"/>
             </a:lvl6pPr>
             <a:lvl7pPr>
-              <a:defRPr sz="1200"/>
+              <a:defRPr sz="950"/>
             </a:lvl7pPr>
             <a:lvl8pPr>
-              <a:defRPr sz="1200"/>
+              <a:defRPr sz="950"/>
             </a:lvl8pPr>
             <a:lvl9pPr>
-              <a:defRPr sz="1200"/>
+              <a:defRPr sz="950"/>
             </a:lvl9pPr>
           </a:lstStyle>
           <a:p>
@@ -2103,7 +2103,7 @@
           <a:bodyPr anchor="b"/>
           <a:lstStyle>
             <a:lvl1pPr algn="l">
-              <a:defRPr sz="1500" b="1"/>
+              <a:defRPr sz="1150" b="1"/>
             </a:lvl1pPr>
           </a:lstStyle>
           <a:p>
@@ -2134,31 +2134,31 @@
           <a:bodyPr/>
           <a:lstStyle>
             <a:lvl1pPr>
-              <a:defRPr sz="2400"/>
+              <a:defRPr sz="1850"/>
             </a:lvl1pPr>
             <a:lvl2pPr>
-              <a:defRPr sz="2100"/>
+              <a:defRPr sz="1650"/>
             </a:lvl2pPr>
             <a:lvl3pPr>
-              <a:defRPr sz="1800"/>
+              <a:defRPr sz="1400"/>
             </a:lvl3pPr>
             <a:lvl4pPr>
-              <a:defRPr sz="1500"/>
+              <a:defRPr sz="1150"/>
             </a:lvl4pPr>
             <a:lvl5pPr>
-              <a:defRPr sz="1500"/>
+              <a:defRPr sz="1150"/>
             </a:lvl5pPr>
             <a:lvl6pPr>
-              <a:defRPr sz="1500"/>
+              <a:defRPr sz="1150"/>
             </a:lvl6pPr>
             <a:lvl7pPr>
-              <a:defRPr sz="1500"/>
+              <a:defRPr sz="1150"/>
             </a:lvl7pPr>
             <a:lvl8pPr>
-              <a:defRPr sz="1500"/>
+              <a:defRPr sz="1150"/>
             </a:lvl8pPr>
             <a:lvl9pPr>
-              <a:defRPr sz="1500"/>
+              <a:defRPr sz="1150"/>
             </a:lvl9pPr>
           </a:lstStyle>
           <a:p>
@@ -2219,39 +2219,39 @@
           <a:lstStyle>
             <a:lvl1pPr marL="0" indent="0">
               <a:buNone/>
-              <a:defRPr sz="1050"/>
+              <a:defRPr sz="800"/>
             </a:lvl1pPr>
             <a:lvl2pPr marL="342900" indent="0">
               <a:buNone/>
-              <a:defRPr sz="900"/>
+              <a:defRPr sz="700"/>
             </a:lvl2pPr>
             <a:lvl3pPr marL="685800" indent="0">
               <a:buNone/>
-              <a:defRPr sz="750"/>
+              <a:defRPr sz="700"/>
             </a:lvl3pPr>
             <a:lvl4pPr marL="1028700" indent="0">
               <a:buNone/>
-              <a:defRPr sz="675"/>
+              <a:defRPr sz="700"/>
             </a:lvl4pPr>
             <a:lvl5pPr marL="1371600" indent="0">
               <a:buNone/>
-              <a:defRPr sz="675"/>
+              <a:defRPr sz="700"/>
             </a:lvl5pPr>
             <a:lvl6pPr marL="1714500" indent="0">
               <a:buNone/>
-              <a:defRPr sz="675"/>
+              <a:defRPr sz="700"/>
             </a:lvl6pPr>
             <a:lvl7pPr marL="2057400" indent="0">
               <a:buNone/>
-              <a:defRPr sz="675"/>
+              <a:defRPr sz="700"/>
             </a:lvl7pPr>
             <a:lvl8pPr marL="2400300" indent="0">
               <a:buNone/>
-              <a:defRPr sz="675"/>
+              <a:defRPr sz="700"/>
             </a:lvl8pPr>
             <a:lvl9pPr marL="2743200" indent="0">
               <a:buNone/>
-              <a:defRPr sz="675"/>
+              <a:defRPr sz="700"/>
             </a:lvl9pPr>
           </a:lstStyle>
           <a:p>
@@ -2378,7 +2378,7 @@
           <a:bodyPr anchor="b"/>
           <a:lstStyle>
             <a:lvl1pPr algn="l">
-              <a:defRPr sz="1500" b="1"/>
+              <a:defRPr sz="1150" b="1"/>
             </a:lvl1pPr>
           </a:lstStyle>
           <a:p>
@@ -2410,39 +2410,39 @@
           <a:lstStyle>
             <a:lvl1pPr marL="0" indent="0">
               <a:buNone/>
-              <a:defRPr sz="2400"/>
+              <a:defRPr sz="1850"/>
             </a:lvl1pPr>
             <a:lvl2pPr marL="342900" indent="0">
               <a:buNone/>
-              <a:defRPr sz="2100"/>
+              <a:defRPr sz="1650"/>
             </a:lvl2pPr>
             <a:lvl3pPr marL="685800" indent="0">
               <a:buNone/>
-              <a:defRPr sz="1800"/>
+              <a:defRPr sz="1400"/>
             </a:lvl3pPr>
             <a:lvl4pPr marL="1028700" indent="0">
               <a:buNone/>
-              <a:defRPr sz="1500"/>
+              <a:defRPr sz="1150"/>
             </a:lvl4pPr>
             <a:lvl5pPr marL="1371600" indent="0">
               <a:buNone/>
-              <a:defRPr sz="1500"/>
+              <a:defRPr sz="1150"/>
             </a:lvl5pPr>
             <a:lvl6pPr marL="1714500" indent="0">
               <a:buNone/>
-              <a:defRPr sz="1500"/>
+              <a:defRPr sz="1150"/>
             </a:lvl6pPr>
             <a:lvl7pPr marL="2057400" indent="0">
               <a:buNone/>
-              <a:defRPr sz="1500"/>
+              <a:defRPr sz="1150"/>
             </a:lvl7pPr>
             <a:lvl8pPr marL="2400300" indent="0">
               <a:buNone/>
-              <a:defRPr sz="1500"/>
+              <a:defRPr sz="1150"/>
             </a:lvl8pPr>
             <a:lvl9pPr marL="2743200" indent="0">
               <a:buNone/>
-              <a:defRPr sz="1500"/>
+              <a:defRPr sz="1150"/>
             </a:lvl9pPr>
           </a:lstStyle>
           <a:p>
@@ -2471,39 +2471,39 @@
           <a:lstStyle>
             <a:lvl1pPr marL="0" indent="0">
               <a:buNone/>
-              <a:defRPr sz="1050"/>
+              <a:defRPr sz="800"/>
             </a:lvl1pPr>
             <a:lvl2pPr marL="342900" indent="0">
               <a:buNone/>
-              <a:defRPr sz="900"/>
+              <a:defRPr sz="700"/>
             </a:lvl2pPr>
             <a:lvl3pPr marL="685800" indent="0">
               <a:buNone/>
-              <a:defRPr sz="750"/>
+              <a:defRPr sz="700"/>
             </a:lvl3pPr>
             <a:lvl4pPr marL="1028700" indent="0">
               <a:buNone/>
-              <a:defRPr sz="675"/>
+              <a:defRPr sz="700"/>
             </a:lvl4pPr>
             <a:lvl5pPr marL="1371600" indent="0">
               <a:buNone/>
-              <a:defRPr sz="675"/>
+              <a:defRPr sz="700"/>
             </a:lvl5pPr>
             <a:lvl6pPr marL="1714500" indent="0">
               <a:buNone/>
-              <a:defRPr sz="675"/>
+              <a:defRPr sz="700"/>
             </a:lvl6pPr>
             <a:lvl7pPr marL="2057400" indent="0">
               <a:buNone/>
-              <a:defRPr sz="675"/>
+              <a:defRPr sz="700"/>
             </a:lvl7pPr>
             <a:lvl8pPr marL="2400300" indent="0">
               <a:buNone/>
-              <a:defRPr sz="675"/>
+              <a:defRPr sz="700"/>
             </a:lvl8pPr>
             <a:lvl9pPr marL="2743200" indent="0">
               <a:buNone/>
-              <a:defRPr sz="675"/>
+              <a:defRPr sz="700"/>
             </a:lvl9pPr>
           </a:lstStyle>
           <a:p>
@@ -2731,7 +2731,7 @@
           <a:bodyPr anchor="ctr" bIns="45720" lIns="91440" rIns="91440" rtlCol="0" tIns="45720" vert="horz"/>
           <a:lstStyle>
             <a:lvl1pPr algn="l">
-              <a:defRPr sz="900">
+              <a:defRPr sz="700">
                 <a:solidFill>
                   <a:schemeClr val="tx1">
                     <a:tint val="75000"/>
@@ -2772,7 +2772,7 @@
           <a:bodyPr anchor="ctr" bIns="45720" lIns="91440" rIns="91440" rtlCol="0" tIns="45720" vert="horz"/>
           <a:lstStyle>
             <a:lvl1pPr algn="ctr">
-              <a:defRPr sz="900">
+              <a:defRPr sz="700">
                 <a:solidFill>
                   <a:schemeClr val="tx1">
                     <a:tint val="75000"/>
@@ -2809,7 +2809,7 @@
           <a:bodyPr anchor="ctr" bIns="45720" lIns="91440" rIns="91440" rtlCol="0" tIns="45720" vert="horz"/>
           <a:lstStyle>
             <a:lvl1pPr algn="r">
-              <a:defRPr sz="900">
+              <a:defRPr sz="700">
                 <a:solidFill>
                   <a:schemeClr val="tx1">
                     <a:tint val="75000"/>
@@ -2855,7 +2855,7 @@
           <a:spcPct val="0"/>
         </a:spcBef>
         <a:buNone/>
-        <a:defRPr kern="1200" sz="3300">
+        <a:defRPr kern="1200" sz="2550">
           <a:solidFill>
             <a:schemeClr val="tx1"/>
           </a:solidFill>
@@ -2872,7 +2872,7 @@
         </a:spcBef>
         <a:buFont typeface="Arial"/>
         <a:buChar char="•"/>
-        <a:defRPr kern="1200" sz="2400">
+        <a:defRPr kern="1200" sz="1850">
           <a:solidFill>
             <a:schemeClr val="tx1"/>
           </a:solidFill>
@@ -2887,7 +2887,7 @@
         </a:spcBef>
         <a:buFont typeface="Arial"/>
         <a:buChar char="–"/>
-        <a:defRPr kern="1200" sz="2100">
+        <a:defRPr kern="1200" sz="1650">
           <a:solidFill>
             <a:schemeClr val="tx1"/>
           </a:solidFill>
@@ -2902,7 +2902,7 @@
         </a:spcBef>
         <a:buFont typeface="Arial"/>
         <a:buChar char="•"/>
-        <a:defRPr kern="1200" sz="1800">
+        <a:defRPr kern="1200" sz="1400">
           <a:solidFill>
             <a:schemeClr val="tx1"/>
           </a:solidFill>
@@ -2917,7 +2917,7 @@
         </a:spcBef>
         <a:buFont typeface="Arial"/>
         <a:buChar char="–"/>
-        <a:defRPr kern="1200" sz="1500">
+        <a:defRPr kern="1200" sz="1150">
           <a:solidFill>
             <a:schemeClr val="tx1"/>
           </a:solidFill>
@@ -2932,7 +2932,7 @@
         </a:spcBef>
         <a:buFont typeface="Arial"/>
         <a:buChar char="»"/>
-        <a:defRPr kern="1200" sz="1500">
+        <a:defRPr kern="1200" sz="1150">
           <a:solidFill>
             <a:schemeClr val="tx1"/>
           </a:solidFill>
@@ -2947,7 +2947,7 @@
         </a:spcBef>
         <a:buFont typeface="Arial"/>
         <a:buChar char="•"/>
-        <a:defRPr kern="1200" sz="1500">
+        <a:defRPr kern="1200" sz="1150">
           <a:solidFill>
             <a:schemeClr val="tx1"/>
           </a:solidFill>
@@ -2962,7 +2962,7 @@
         </a:spcBef>
         <a:buFont typeface="Arial"/>
         <a:buChar char="•"/>
-        <a:defRPr kern="1200" sz="1500">
+        <a:defRPr kern="1200" sz="1150">
           <a:solidFill>
             <a:schemeClr val="tx1"/>
           </a:solidFill>
@@ -2977,7 +2977,7 @@
         </a:spcBef>
         <a:buFont typeface="Arial"/>
         <a:buChar char="•"/>
-        <a:defRPr kern="1200" sz="1500">
+        <a:defRPr kern="1200" sz="1150">
           <a:solidFill>
             <a:schemeClr val="tx1"/>
           </a:solidFill>
@@ -2992,7 +2992,7 @@
         </a:spcBef>
         <a:buFont typeface="Arial"/>
         <a:buChar char="•"/>
-        <a:defRPr kern="1200" sz="1500">
+        <a:defRPr kern="1200" sz="1150">
           <a:solidFill>
             <a:schemeClr val="tx1"/>
           </a:solidFill>
@@ -3007,7 +3007,7 @@
         <a:defRPr lang="en-US"/>
       </a:defPPr>
       <a:lvl1pPr algn="l" defTabSz="342900" eaLnBrk="1" hangingPunct="1" latinLnBrk="0" marL="0" rtl="0">
-        <a:defRPr kern="1200" sz="1350">
+        <a:defRPr kern="1200" sz="1050">
           <a:solidFill>
             <a:schemeClr val="tx1"/>
           </a:solidFill>
@@ -3017,7 +3017,7 @@
         </a:defRPr>
       </a:lvl1pPr>
       <a:lvl2pPr algn="l" defTabSz="342900" eaLnBrk="1" hangingPunct="1" latinLnBrk="0" marL="342900" rtl="0">
-        <a:defRPr kern="1200" sz="1350">
+        <a:defRPr kern="1200" sz="1050">
           <a:solidFill>
             <a:schemeClr val="tx1"/>
           </a:solidFill>
@@ -3027,7 +3027,7 @@
         </a:defRPr>
       </a:lvl2pPr>
       <a:lvl3pPr algn="l" defTabSz="342900" eaLnBrk="1" hangingPunct="1" latinLnBrk="0" marL="685800" rtl="0">
-        <a:defRPr kern="1200" sz="1350">
+        <a:defRPr kern="1200" sz="1050">
           <a:solidFill>
             <a:schemeClr val="tx1"/>
           </a:solidFill>
@@ -3037,7 +3037,7 @@
         </a:defRPr>
       </a:lvl3pPr>
       <a:lvl4pPr algn="l" defTabSz="342900" eaLnBrk="1" hangingPunct="1" latinLnBrk="0" marL="1028700" rtl="0">
-        <a:defRPr kern="1200" sz="1350">
+        <a:defRPr kern="1200" sz="1050">
           <a:solidFill>
             <a:schemeClr val="tx1"/>
           </a:solidFill>
@@ -3047,7 +3047,7 @@
         </a:defRPr>
       </a:lvl4pPr>
       <a:lvl5pPr algn="l" defTabSz="342900" eaLnBrk="1" hangingPunct="1" latinLnBrk="0" marL="1371600" rtl="0">
-        <a:defRPr kern="1200" sz="1350">
+        <a:defRPr kern="1200" sz="1050">
           <a:solidFill>
             <a:schemeClr val="tx1"/>
           </a:solidFill>
@@ -3057,7 +3057,7 @@
         </a:defRPr>
       </a:lvl5pPr>
       <a:lvl6pPr algn="l" defTabSz="342900" eaLnBrk="1" hangingPunct="1" latinLnBrk="0" marL="1714500" rtl="0">
-        <a:defRPr kern="1200" sz="1350">
+        <a:defRPr kern="1200" sz="1050">
           <a:solidFill>
             <a:schemeClr val="tx1"/>
           </a:solidFill>
@@ -3067,7 +3067,7 @@
         </a:defRPr>
       </a:lvl6pPr>
       <a:lvl7pPr algn="l" defTabSz="342900" eaLnBrk="1" hangingPunct="1" latinLnBrk="0" marL="2057400" rtl="0">
-        <a:defRPr kern="1200" sz="1350">
+        <a:defRPr kern="1200" sz="1050">
           <a:solidFill>
             <a:schemeClr val="tx1"/>
           </a:solidFill>
@@ -3077,7 +3077,7 @@
         </a:defRPr>
       </a:lvl7pPr>
       <a:lvl8pPr algn="l" defTabSz="342900" eaLnBrk="1" hangingPunct="1" latinLnBrk="0" marL="2400300" rtl="0">
-        <a:defRPr kern="1200" sz="1350">
+        <a:defRPr kern="1200" sz="1050">
           <a:solidFill>
             <a:schemeClr val="tx1"/>
           </a:solidFill>
@@ -3087,7 +3087,7 @@
         </a:defRPr>
       </a:lvl8pPr>
       <a:lvl9pPr algn="l" defTabSz="342900" eaLnBrk="1" hangingPunct="1" latinLnBrk="0" marL="2743200" rtl="0">
-        <a:defRPr kern="1200" sz="1350">
+        <a:defRPr kern="1200" sz="1050">
           <a:solidFill>
             <a:schemeClr val="tx1"/>
           </a:solidFill>

--- a/10-causal-machine-learning/slides.pptx
+++ b/10-causal-machine-learning/slides.pptx
@@ -942,7 +942,7 @@
           <a:bodyPr anchor="t"/>
           <a:lstStyle>
             <a:lvl1pPr algn="l">
-              <a:defRPr sz="2350" b="1" cap="all"/>
+              <a:defRPr sz="1850" b="1" cap="all"/>
             </a:lvl1pPr>
           </a:lstStyle>
           <a:p>
@@ -974,7 +974,7 @@
           <a:lstStyle>
             <a:lvl1pPr marL="0" indent="0">
               <a:buNone/>
-              <a:defRPr sz="1150">
+              <a:defRPr sz="950">
                 <a:solidFill>
                   <a:schemeClr val="tx1">
                     <a:tint val="75000"/>
@@ -984,7 +984,7 @@
             </a:lvl1pPr>
             <a:lvl2pPr marL="342900" indent="0">
               <a:buNone/>
-              <a:defRPr sz="1050">
+              <a:defRPr sz="850">
                 <a:solidFill>
                   <a:schemeClr val="tx1">
                     <a:tint val="75000"/>
@@ -994,7 +994,7 @@
             </a:lvl2pPr>
             <a:lvl3pPr marL="685800" indent="0">
               <a:buNone/>
-              <a:defRPr sz="950">
+              <a:defRPr sz="750">
                 <a:solidFill>
                   <a:schemeClr val="tx1">
                     <a:tint val="75000"/>
@@ -1004,7 +1004,7 @@
             </a:lvl3pPr>
             <a:lvl4pPr marL="1028700" indent="0">
               <a:buNone/>
-              <a:defRPr sz="800">
+              <a:defRPr sz="650">
                 <a:solidFill>
                   <a:schemeClr val="tx1">
                     <a:tint val="75000"/>
@@ -1014,7 +1014,7 @@
             </a:lvl4pPr>
             <a:lvl5pPr marL="1371600" indent="0">
               <a:buNone/>
-              <a:defRPr sz="800">
+              <a:defRPr sz="650">
                 <a:solidFill>
                   <a:schemeClr val="tx1">
                     <a:tint val="75000"/>
@@ -1024,7 +1024,7 @@
             </a:lvl5pPr>
             <a:lvl6pPr marL="1714500" indent="0">
               <a:buNone/>
-              <a:defRPr sz="800">
+              <a:defRPr sz="650">
                 <a:solidFill>
                   <a:schemeClr val="tx1">
                     <a:tint val="75000"/>
@@ -1034,7 +1034,7 @@
             </a:lvl6pPr>
             <a:lvl7pPr marL="2057400" indent="0">
               <a:buNone/>
-              <a:defRPr sz="800">
+              <a:defRPr sz="650">
                 <a:solidFill>
                   <a:schemeClr val="tx1">
                     <a:tint val="75000"/>
@@ -1044,7 +1044,7 @@
             </a:lvl7pPr>
             <a:lvl8pPr marL="2400300" indent="0">
               <a:buNone/>
-              <a:defRPr sz="800">
+              <a:defRPr sz="650">
                 <a:solidFill>
                   <a:schemeClr val="tx1">
                     <a:tint val="75000"/>
@@ -1054,7 +1054,7 @@
             </a:lvl8pPr>
             <a:lvl9pPr marL="2743200" indent="0">
               <a:buNone/>
-              <a:defRPr sz="800">
+              <a:defRPr sz="650">
                 <a:solidFill>
                   <a:schemeClr val="tx1">
                     <a:tint val="75000"/>
@@ -1209,31 +1209,31 @@
           <a:bodyPr/>
           <a:lstStyle>
             <a:lvl1pPr>
-              <a:defRPr sz="1650"/>
+              <a:defRPr sz="1300"/>
             </a:lvl1pPr>
             <a:lvl2pPr>
-              <a:defRPr sz="1400"/>
+              <a:defRPr sz="1100"/>
             </a:lvl2pPr>
             <a:lvl3pPr>
-              <a:defRPr sz="1150"/>
+              <a:defRPr sz="950"/>
             </a:lvl3pPr>
             <a:lvl4pPr>
-              <a:defRPr sz="1050"/>
+              <a:defRPr sz="850"/>
             </a:lvl4pPr>
             <a:lvl5pPr>
-              <a:defRPr sz="1050"/>
+              <a:defRPr sz="850"/>
             </a:lvl5pPr>
             <a:lvl6pPr>
-              <a:defRPr sz="1050"/>
+              <a:defRPr sz="850"/>
             </a:lvl6pPr>
             <a:lvl7pPr>
-              <a:defRPr sz="1050"/>
+              <a:defRPr sz="850"/>
             </a:lvl7pPr>
             <a:lvl8pPr>
-              <a:defRPr sz="1050"/>
+              <a:defRPr sz="850"/>
             </a:lvl8pPr>
             <a:lvl9pPr>
-              <a:defRPr sz="1050"/>
+              <a:defRPr sz="850"/>
             </a:lvl9pPr>
           </a:lstStyle>
           <a:p>
@@ -1293,31 +1293,31 @@
           <a:bodyPr/>
           <a:lstStyle>
             <a:lvl1pPr>
-              <a:defRPr sz="1650"/>
+              <a:defRPr sz="1300"/>
             </a:lvl1pPr>
             <a:lvl2pPr>
-              <a:defRPr sz="1400"/>
+              <a:defRPr sz="1100"/>
             </a:lvl2pPr>
             <a:lvl3pPr>
-              <a:defRPr sz="1150"/>
+              <a:defRPr sz="950"/>
             </a:lvl3pPr>
             <a:lvl4pPr>
-              <a:defRPr sz="1050"/>
+              <a:defRPr sz="850"/>
             </a:lvl4pPr>
             <a:lvl5pPr>
-              <a:defRPr sz="1050"/>
+              <a:defRPr sz="850"/>
             </a:lvl5pPr>
             <a:lvl6pPr>
-              <a:defRPr sz="1050"/>
+              <a:defRPr sz="850"/>
             </a:lvl6pPr>
             <a:lvl7pPr>
-              <a:defRPr sz="1050"/>
+              <a:defRPr sz="850"/>
             </a:lvl7pPr>
             <a:lvl8pPr>
-              <a:defRPr sz="1050"/>
+              <a:defRPr sz="850"/>
             </a:lvl8pPr>
             <a:lvl9pPr>
-              <a:defRPr sz="1050"/>
+              <a:defRPr sz="850"/>
             </a:lvl9pPr>
           </a:lstStyle>
           <a:p>
@@ -1499,39 +1499,39 @@
           <a:lstStyle>
             <a:lvl1pPr marL="0" indent="0">
               <a:buNone/>
-              <a:defRPr sz="1400" b="1"/>
+              <a:defRPr sz="1100" b="1"/>
             </a:lvl1pPr>
             <a:lvl2pPr marL="342900" indent="0">
               <a:buNone/>
-              <a:defRPr sz="1150" b="1"/>
+              <a:defRPr sz="950" b="1"/>
             </a:lvl2pPr>
             <a:lvl3pPr marL="685800" indent="0">
               <a:buNone/>
-              <a:defRPr sz="1050" b="1"/>
+              <a:defRPr sz="850" b="1"/>
             </a:lvl3pPr>
             <a:lvl4pPr marL="1028700" indent="0">
               <a:buNone/>
-              <a:defRPr sz="950" b="1"/>
+              <a:defRPr sz="750" b="1"/>
             </a:lvl4pPr>
             <a:lvl5pPr marL="1371600" indent="0">
               <a:buNone/>
-              <a:defRPr sz="950" b="1"/>
+              <a:defRPr sz="750" b="1"/>
             </a:lvl5pPr>
             <a:lvl6pPr marL="1714500" indent="0">
               <a:buNone/>
-              <a:defRPr sz="950" b="1"/>
+              <a:defRPr sz="750" b="1"/>
             </a:lvl6pPr>
             <a:lvl7pPr marL="2057400" indent="0">
               <a:buNone/>
-              <a:defRPr sz="950" b="1"/>
+              <a:defRPr sz="750" b="1"/>
             </a:lvl7pPr>
             <a:lvl8pPr marL="2400300" indent="0">
               <a:buNone/>
-              <a:defRPr sz="950" b="1"/>
+              <a:defRPr sz="750" b="1"/>
             </a:lvl8pPr>
             <a:lvl9pPr marL="2743200" indent="0">
               <a:buNone/>
-              <a:defRPr sz="950" b="1"/>
+              <a:defRPr sz="750" b="1"/>
             </a:lvl9pPr>
           </a:lstStyle>
           <a:p>
@@ -1563,31 +1563,31 @@
           <a:bodyPr/>
           <a:lstStyle>
             <a:lvl1pPr>
-              <a:defRPr sz="1400"/>
+              <a:defRPr sz="1100"/>
             </a:lvl1pPr>
             <a:lvl2pPr>
-              <a:defRPr sz="1150"/>
+              <a:defRPr sz="950"/>
             </a:lvl2pPr>
             <a:lvl3pPr>
-              <a:defRPr sz="1050"/>
+              <a:defRPr sz="850"/>
             </a:lvl3pPr>
             <a:lvl4pPr>
-              <a:defRPr sz="950"/>
+              <a:defRPr sz="750"/>
             </a:lvl4pPr>
             <a:lvl5pPr>
-              <a:defRPr sz="950"/>
+              <a:defRPr sz="750"/>
             </a:lvl5pPr>
             <a:lvl6pPr>
-              <a:defRPr sz="950"/>
+              <a:defRPr sz="750"/>
             </a:lvl6pPr>
             <a:lvl7pPr>
-              <a:defRPr sz="950"/>
+              <a:defRPr sz="750"/>
             </a:lvl7pPr>
             <a:lvl8pPr>
-              <a:defRPr sz="950"/>
+              <a:defRPr sz="750"/>
             </a:lvl8pPr>
             <a:lvl9pPr>
-              <a:defRPr sz="950"/>
+              <a:defRPr sz="750"/>
             </a:lvl9pPr>
           </a:lstStyle>
           <a:p>
@@ -1648,39 +1648,39 @@
           <a:lstStyle>
             <a:lvl1pPr marL="0" indent="0">
               <a:buNone/>
-              <a:defRPr sz="1400" b="1"/>
+              <a:defRPr sz="1100" b="1"/>
             </a:lvl1pPr>
             <a:lvl2pPr marL="342900" indent="0">
               <a:buNone/>
-              <a:defRPr sz="1150" b="1"/>
+              <a:defRPr sz="950" b="1"/>
             </a:lvl2pPr>
             <a:lvl3pPr marL="685800" indent="0">
               <a:buNone/>
-              <a:defRPr sz="1050" b="1"/>
+              <a:defRPr sz="850" b="1"/>
             </a:lvl3pPr>
             <a:lvl4pPr marL="1028700" indent="0">
               <a:buNone/>
-              <a:defRPr sz="950" b="1"/>
+              <a:defRPr sz="750" b="1"/>
             </a:lvl4pPr>
             <a:lvl5pPr marL="1371600" indent="0">
               <a:buNone/>
-              <a:defRPr sz="950" b="1"/>
+              <a:defRPr sz="750" b="1"/>
             </a:lvl5pPr>
             <a:lvl6pPr marL="1714500" indent="0">
               <a:buNone/>
-              <a:defRPr sz="950" b="1"/>
+              <a:defRPr sz="750" b="1"/>
             </a:lvl6pPr>
             <a:lvl7pPr marL="2057400" indent="0">
               <a:buNone/>
-              <a:defRPr sz="950" b="1"/>
+              <a:defRPr sz="750" b="1"/>
             </a:lvl7pPr>
             <a:lvl8pPr marL="2400300" indent="0">
               <a:buNone/>
-              <a:defRPr sz="950" b="1"/>
+              <a:defRPr sz="750" b="1"/>
             </a:lvl8pPr>
             <a:lvl9pPr marL="2743200" indent="0">
               <a:buNone/>
-              <a:defRPr sz="950" b="1"/>
+              <a:defRPr sz="750" b="1"/>
             </a:lvl9pPr>
           </a:lstStyle>
           <a:p>
@@ -1712,31 +1712,31 @@
           <a:bodyPr/>
           <a:lstStyle>
             <a:lvl1pPr>
-              <a:defRPr sz="1400"/>
+              <a:defRPr sz="1100"/>
             </a:lvl1pPr>
             <a:lvl2pPr>
-              <a:defRPr sz="1150"/>
+              <a:defRPr sz="950"/>
             </a:lvl2pPr>
             <a:lvl3pPr>
-              <a:defRPr sz="1050"/>
+              <a:defRPr sz="850"/>
             </a:lvl3pPr>
             <a:lvl4pPr>
-              <a:defRPr sz="950"/>
+              <a:defRPr sz="750"/>
             </a:lvl4pPr>
             <a:lvl5pPr>
-              <a:defRPr sz="950"/>
+              <a:defRPr sz="750"/>
             </a:lvl5pPr>
             <a:lvl6pPr>
-              <a:defRPr sz="950"/>
+              <a:defRPr sz="750"/>
             </a:lvl6pPr>
             <a:lvl7pPr>
-              <a:defRPr sz="950"/>
+              <a:defRPr sz="750"/>
             </a:lvl7pPr>
             <a:lvl8pPr>
-              <a:defRPr sz="950"/>
+              <a:defRPr sz="750"/>
             </a:lvl8pPr>
             <a:lvl9pPr>
-              <a:defRPr sz="950"/>
+              <a:defRPr sz="750"/>
             </a:lvl9pPr>
           </a:lstStyle>
           <a:p>
@@ -2103,7 +2103,7 @@
           <a:bodyPr anchor="b"/>
           <a:lstStyle>
             <a:lvl1pPr algn="l">
-              <a:defRPr sz="1150" b="1"/>
+              <a:defRPr sz="950" b="1"/>
             </a:lvl1pPr>
           </a:lstStyle>
           <a:p>
@@ -2134,31 +2134,31 @@
           <a:bodyPr/>
           <a:lstStyle>
             <a:lvl1pPr>
-              <a:defRPr sz="1850"/>
+              <a:defRPr sz="1500"/>
             </a:lvl1pPr>
             <a:lvl2pPr>
-              <a:defRPr sz="1650"/>
+              <a:defRPr sz="1300"/>
             </a:lvl2pPr>
             <a:lvl3pPr>
-              <a:defRPr sz="1400"/>
+              <a:defRPr sz="1100"/>
             </a:lvl3pPr>
             <a:lvl4pPr>
-              <a:defRPr sz="1150"/>
+              <a:defRPr sz="950"/>
             </a:lvl4pPr>
             <a:lvl5pPr>
-              <a:defRPr sz="1150"/>
+              <a:defRPr sz="950"/>
             </a:lvl5pPr>
             <a:lvl6pPr>
-              <a:defRPr sz="1150"/>
+              <a:defRPr sz="950"/>
             </a:lvl6pPr>
             <a:lvl7pPr>
-              <a:defRPr sz="1150"/>
+              <a:defRPr sz="950"/>
             </a:lvl7pPr>
             <a:lvl8pPr>
-              <a:defRPr sz="1150"/>
+              <a:defRPr sz="950"/>
             </a:lvl8pPr>
             <a:lvl9pPr>
-              <a:defRPr sz="1150"/>
+              <a:defRPr sz="950"/>
             </a:lvl9pPr>
           </a:lstStyle>
           <a:p>
@@ -2219,39 +2219,39 @@
           <a:lstStyle>
             <a:lvl1pPr marL="0" indent="0">
               <a:buNone/>
-              <a:defRPr sz="800"/>
+              <a:defRPr sz="650"/>
             </a:lvl1pPr>
             <a:lvl2pPr marL="342900" indent="0">
               <a:buNone/>
-              <a:defRPr sz="700"/>
+              <a:defRPr sz="550"/>
             </a:lvl2pPr>
             <a:lvl3pPr marL="685800" indent="0">
               <a:buNone/>
-              <a:defRPr sz="700"/>
+              <a:defRPr sz="550"/>
             </a:lvl3pPr>
             <a:lvl4pPr marL="1028700" indent="0">
               <a:buNone/>
-              <a:defRPr sz="700"/>
+              <a:defRPr sz="550"/>
             </a:lvl4pPr>
             <a:lvl5pPr marL="1371600" indent="0">
               <a:buNone/>
-              <a:defRPr sz="700"/>
+              <a:defRPr sz="550"/>
             </a:lvl5pPr>
             <a:lvl6pPr marL="1714500" indent="0">
               <a:buNone/>
-              <a:defRPr sz="700"/>
+              <a:defRPr sz="550"/>
             </a:lvl6pPr>
             <a:lvl7pPr marL="2057400" indent="0">
               <a:buNone/>
-              <a:defRPr sz="700"/>
+              <a:defRPr sz="550"/>
             </a:lvl7pPr>
             <a:lvl8pPr marL="2400300" indent="0">
               <a:buNone/>
-              <a:defRPr sz="700"/>
+              <a:defRPr sz="550"/>
             </a:lvl8pPr>
             <a:lvl9pPr marL="2743200" indent="0">
               <a:buNone/>
-              <a:defRPr sz="700"/>
+              <a:defRPr sz="550"/>
             </a:lvl9pPr>
           </a:lstStyle>
           <a:p>
@@ -2378,7 +2378,7 @@
           <a:bodyPr anchor="b"/>
           <a:lstStyle>
             <a:lvl1pPr algn="l">
-              <a:defRPr sz="1150" b="1"/>
+              <a:defRPr sz="950" b="1"/>
             </a:lvl1pPr>
           </a:lstStyle>
           <a:p>
@@ -2410,39 +2410,39 @@
           <a:lstStyle>
             <a:lvl1pPr marL="0" indent="0">
               <a:buNone/>
-              <a:defRPr sz="1850"/>
+              <a:defRPr sz="1500"/>
             </a:lvl1pPr>
             <a:lvl2pPr marL="342900" indent="0">
               <a:buNone/>
-              <a:defRPr sz="1650"/>
+              <a:defRPr sz="1300"/>
             </a:lvl2pPr>
             <a:lvl3pPr marL="685800" indent="0">
               <a:buNone/>
-              <a:defRPr sz="1400"/>
+              <a:defRPr sz="1100"/>
             </a:lvl3pPr>
             <a:lvl4pPr marL="1028700" indent="0">
               <a:buNone/>
-              <a:defRPr sz="1150"/>
+              <a:defRPr sz="950"/>
             </a:lvl4pPr>
             <a:lvl5pPr marL="1371600" indent="0">
               <a:buNone/>
-              <a:defRPr sz="1150"/>
+              <a:defRPr sz="950"/>
             </a:lvl5pPr>
             <a:lvl6pPr marL="1714500" indent="0">
               <a:buNone/>
-              <a:defRPr sz="1150"/>
+              <a:defRPr sz="950"/>
             </a:lvl6pPr>
             <a:lvl7pPr marL="2057400" indent="0">
               <a:buNone/>
-              <a:defRPr sz="1150"/>
+              <a:defRPr sz="950"/>
             </a:lvl7pPr>
             <a:lvl8pPr marL="2400300" indent="0">
               <a:buNone/>
-              <a:defRPr sz="1150"/>
+              <a:defRPr sz="950"/>
             </a:lvl8pPr>
             <a:lvl9pPr marL="2743200" indent="0">
               <a:buNone/>
-              <a:defRPr sz="1150"/>
+              <a:defRPr sz="950"/>
             </a:lvl9pPr>
           </a:lstStyle>
           <a:p>
@@ -2471,39 +2471,39 @@
           <a:lstStyle>
             <a:lvl1pPr marL="0" indent="0">
               <a:buNone/>
-              <a:defRPr sz="800"/>
+              <a:defRPr sz="650"/>
             </a:lvl1pPr>
             <a:lvl2pPr marL="342900" indent="0">
               <a:buNone/>
-              <a:defRPr sz="700"/>
+              <a:defRPr sz="550"/>
             </a:lvl2pPr>
             <a:lvl3pPr marL="685800" indent="0">
               <a:buNone/>
-              <a:defRPr sz="700"/>
+              <a:defRPr sz="550"/>
             </a:lvl3pPr>
             <a:lvl4pPr marL="1028700" indent="0">
               <a:buNone/>
-              <a:defRPr sz="700"/>
+              <a:defRPr sz="550"/>
             </a:lvl4pPr>
             <a:lvl5pPr marL="1371600" indent="0">
               <a:buNone/>
-              <a:defRPr sz="700"/>
+              <a:defRPr sz="550"/>
             </a:lvl5pPr>
             <a:lvl6pPr marL="1714500" indent="0">
               <a:buNone/>
-              <a:defRPr sz="700"/>
+              <a:defRPr sz="550"/>
             </a:lvl6pPr>
             <a:lvl7pPr marL="2057400" indent="0">
               <a:buNone/>
-              <a:defRPr sz="700"/>
+              <a:defRPr sz="550"/>
             </a:lvl7pPr>
             <a:lvl8pPr marL="2400300" indent="0">
               <a:buNone/>
-              <a:defRPr sz="700"/>
+              <a:defRPr sz="550"/>
             </a:lvl8pPr>
             <a:lvl9pPr marL="2743200" indent="0">
               <a:buNone/>
-              <a:defRPr sz="700"/>
+              <a:defRPr sz="550"/>
             </a:lvl9pPr>
           </a:lstStyle>
           <a:p>
@@ -2731,7 +2731,7 @@
           <a:bodyPr anchor="ctr" bIns="45720" lIns="91440" rIns="91440" rtlCol="0" tIns="45720" vert="horz"/>
           <a:lstStyle>
             <a:lvl1pPr algn="l">
-              <a:defRPr sz="700">
+              <a:defRPr sz="550">
                 <a:solidFill>
                   <a:schemeClr val="tx1">
                     <a:tint val="75000"/>
@@ -2772,7 +2772,7 @@
           <a:bodyPr anchor="ctr" bIns="45720" lIns="91440" rIns="91440" rtlCol="0" tIns="45720" vert="horz"/>
           <a:lstStyle>
             <a:lvl1pPr algn="ctr">
-              <a:defRPr sz="700">
+              <a:defRPr sz="550">
                 <a:solidFill>
                   <a:schemeClr val="tx1">
                     <a:tint val="75000"/>
@@ -2809,7 +2809,7 @@
           <a:bodyPr anchor="ctr" bIns="45720" lIns="91440" rIns="91440" rtlCol="0" tIns="45720" vert="horz"/>
           <a:lstStyle>
             <a:lvl1pPr algn="r">
-              <a:defRPr sz="700">
+              <a:defRPr sz="550">
                 <a:solidFill>
                   <a:schemeClr val="tx1">
                     <a:tint val="75000"/>
@@ -2855,7 +2855,7 @@
           <a:spcPct val="0"/>
         </a:spcBef>
         <a:buNone/>
-        <a:defRPr kern="1200" sz="2550">
+        <a:defRPr kern="1200" sz="2050">
           <a:solidFill>
             <a:schemeClr val="tx1"/>
           </a:solidFill>
@@ -2872,7 +2872,7 @@
         </a:spcBef>
         <a:buFont typeface="Arial"/>
         <a:buChar char="•"/>
-        <a:defRPr kern="1200" sz="1850">
+        <a:defRPr kern="1200" sz="1500">
           <a:solidFill>
             <a:schemeClr val="tx1"/>
           </a:solidFill>
@@ -2887,7 +2887,7 @@
         </a:spcBef>
         <a:buFont typeface="Arial"/>
         <a:buChar char="–"/>
-        <a:defRPr kern="1200" sz="1650">
+        <a:defRPr kern="1200" sz="1300">
           <a:solidFill>
             <a:schemeClr val="tx1"/>
           </a:solidFill>
@@ -2902,7 +2902,7 @@
         </a:spcBef>
         <a:buFont typeface="Arial"/>
         <a:buChar char="•"/>
-        <a:defRPr kern="1200" sz="1400">
+        <a:defRPr kern="1200" sz="1100">
           <a:solidFill>
             <a:schemeClr val="tx1"/>
           </a:solidFill>
@@ -2917,7 +2917,7 @@
         </a:spcBef>
         <a:buFont typeface="Arial"/>
         <a:buChar char="–"/>
-        <a:defRPr kern="1200" sz="1150">
+        <a:defRPr kern="1200" sz="950">
           <a:solidFill>
             <a:schemeClr val="tx1"/>
           </a:solidFill>
@@ -2932,7 +2932,7 @@
         </a:spcBef>
         <a:buFont typeface="Arial"/>
         <a:buChar char="»"/>
-        <a:defRPr kern="1200" sz="1150">
+        <a:defRPr kern="1200" sz="950">
           <a:solidFill>
             <a:schemeClr val="tx1"/>
           </a:solidFill>
@@ -2947,7 +2947,7 @@
         </a:spcBef>
         <a:buFont typeface="Arial"/>
         <a:buChar char="•"/>
-        <a:defRPr kern="1200" sz="1150">
+        <a:defRPr kern="1200" sz="950">
           <a:solidFill>
             <a:schemeClr val="tx1"/>
           </a:solidFill>
@@ -2962,7 +2962,7 @@
         </a:spcBef>
         <a:buFont typeface="Arial"/>
         <a:buChar char="•"/>
-        <a:defRPr kern="1200" sz="1150">
+        <a:defRPr kern="1200" sz="950">
           <a:solidFill>
             <a:schemeClr val="tx1"/>
           </a:solidFill>
@@ -2977,7 +2977,7 @@
         </a:spcBef>
         <a:buFont typeface="Arial"/>
         <a:buChar char="•"/>
-        <a:defRPr kern="1200" sz="1150">
+        <a:defRPr kern="1200" sz="950">
           <a:solidFill>
             <a:schemeClr val="tx1"/>
           </a:solidFill>
@@ -2992,7 +2992,7 @@
         </a:spcBef>
         <a:buFont typeface="Arial"/>
         <a:buChar char="•"/>
-        <a:defRPr kern="1200" sz="1150">
+        <a:defRPr kern="1200" sz="950">
           <a:solidFill>
             <a:schemeClr val="tx1"/>
           </a:solidFill>
@@ -3007,7 +3007,7 @@
         <a:defRPr lang="en-US"/>
       </a:defPPr>
       <a:lvl1pPr algn="l" defTabSz="342900" eaLnBrk="1" hangingPunct="1" latinLnBrk="0" marL="0" rtl="0">
-        <a:defRPr kern="1200" sz="1050">
+        <a:defRPr kern="1200" sz="850">
           <a:solidFill>
             <a:schemeClr val="tx1"/>
           </a:solidFill>
@@ -3017,7 +3017,7 @@
         </a:defRPr>
       </a:lvl1pPr>
       <a:lvl2pPr algn="l" defTabSz="342900" eaLnBrk="1" hangingPunct="1" latinLnBrk="0" marL="342900" rtl="0">
-        <a:defRPr kern="1200" sz="1050">
+        <a:defRPr kern="1200" sz="850">
           <a:solidFill>
             <a:schemeClr val="tx1"/>
           </a:solidFill>
@@ -3027,7 +3027,7 @@
         </a:defRPr>
       </a:lvl2pPr>
       <a:lvl3pPr algn="l" defTabSz="342900" eaLnBrk="1" hangingPunct="1" latinLnBrk="0" marL="685800" rtl="0">
-        <a:defRPr kern="1200" sz="1050">
+        <a:defRPr kern="1200" sz="850">
           <a:solidFill>
             <a:schemeClr val="tx1"/>
           </a:solidFill>
@@ -3037,7 +3037,7 @@
         </a:defRPr>
       </a:lvl3pPr>
       <a:lvl4pPr algn="l" defTabSz="342900" eaLnBrk="1" hangingPunct="1" latinLnBrk="0" marL="1028700" rtl="0">
-        <a:defRPr kern="1200" sz="1050">
+        <a:defRPr kern="1200" sz="850">
           <a:solidFill>
             <a:schemeClr val="tx1"/>
           </a:solidFill>
@@ -3047,7 +3047,7 @@
         </a:defRPr>
       </a:lvl4pPr>
       <a:lvl5pPr algn="l" defTabSz="342900" eaLnBrk="1" hangingPunct="1" latinLnBrk="0" marL="1371600" rtl="0">
-        <a:defRPr kern="1200" sz="1050">
+        <a:defRPr kern="1200" sz="850">
           <a:solidFill>
             <a:schemeClr val="tx1"/>
           </a:solidFill>
@@ -3057,7 +3057,7 @@
         </a:defRPr>
       </a:lvl5pPr>
       <a:lvl6pPr algn="l" defTabSz="342900" eaLnBrk="1" hangingPunct="1" latinLnBrk="0" marL="1714500" rtl="0">
-        <a:defRPr kern="1200" sz="1050">
+        <a:defRPr kern="1200" sz="850">
           <a:solidFill>
             <a:schemeClr val="tx1"/>
           </a:solidFill>
@@ -3067,7 +3067,7 @@
         </a:defRPr>
       </a:lvl6pPr>
       <a:lvl7pPr algn="l" defTabSz="342900" eaLnBrk="1" hangingPunct="1" latinLnBrk="0" marL="2057400" rtl="0">
-        <a:defRPr kern="1200" sz="1050">
+        <a:defRPr kern="1200" sz="850">
           <a:solidFill>
             <a:schemeClr val="tx1"/>
           </a:solidFill>
@@ -3077,7 +3077,7 @@
         </a:defRPr>
       </a:lvl7pPr>
       <a:lvl8pPr algn="l" defTabSz="342900" eaLnBrk="1" hangingPunct="1" latinLnBrk="0" marL="2400300" rtl="0">
-        <a:defRPr kern="1200" sz="1050">
+        <a:defRPr kern="1200" sz="850">
           <a:solidFill>
             <a:schemeClr val="tx1"/>
           </a:solidFill>
@@ -3087,7 +3087,7 @@
         </a:defRPr>
       </a:lvl8pPr>
       <a:lvl9pPr algn="l" defTabSz="342900" eaLnBrk="1" hangingPunct="1" latinLnBrk="0" marL="2743200" rtl="0">
-        <a:defRPr kern="1200" sz="1050">
+        <a:defRPr kern="1200" sz="850">
           <a:solidFill>
             <a:schemeClr val="tx1"/>
           </a:solidFill>

--- a/10-causal-machine-learning/slides.pptx
+++ b/10-causal-machine-learning/slides.pptx
@@ -2824,6 +2824,72 @@
               <a:t>‹#›</a:t>
             </a:fld>
             <a:endParaRPr lang="en-US"/>
+          </a:p>
+        </p:txBody>
+      </p:sp>
+      <p:sp>
+        <p:nvSpPr>
+          <p:cNvPr id="7" name="Author Footer"/>
+          <p:cNvSpPr txBox="1"/>
+          <p:nvPr/>
+        </p:nvSpPr>
+        <p:spPr>
+          <a:xfrm>
+            <a:off x="457200" y="4735000"/>
+            <a:ext cx="5000000" cy="260000"/>
+          </a:xfrm>
+          <a:prstGeom prst="rect">
+            <a:avLst/>
+          </a:prstGeom>
+          <a:noFill/>
+        </p:spPr>
+        <p:txBody>
+          <a:bodyPr anchor="ctr" bIns="0" lIns="0" rIns="0" tIns="0" wrap="square"/>
+          <a:lstStyle/>
+          <a:p>
+            <a:pPr algn="l"/>
+            <a:r>
+              <a:rPr dirty="0" lang="en-US" sz="900">
+                <a:solidFill>
+                  <a:srgbClr val="6E7275"/>
+                </a:solidFill>
+                <a:latin typeface="+mn-lt"/>
+              </a:rPr>
+              <a:t>Thierry Warin, PhD</a:t>
+            </a:r>
+          </a:p>
+        </p:txBody>
+      </p:sp>
+      <p:sp>
+        <p:nvSpPr>
+          <p:cNvPr id="8" name="Slide Number Footer"/>
+          <p:cNvSpPr txBox="1"/>
+          <p:nvPr/>
+        </p:nvSpPr>
+        <p:spPr>
+          <a:xfrm>
+            <a:off x="7200000" y="4735000"/>
+            <a:ext cx="1486800" cy="260000"/>
+          </a:xfrm>
+          <a:prstGeom prst="rect">
+            <a:avLst/>
+          </a:prstGeom>
+          <a:noFill/>
+        </p:spPr>
+        <p:txBody>
+          <a:bodyPr anchor="ctr" bIns="0" lIns="0" rIns="0" tIns="0" wrap="square"/>
+          <a:lstStyle/>
+          <a:p>
+            <a:pPr algn="r"/>
+            <a:fld id="{9B1A2C3D-4E5F-6A7B-8C9D-0E1F2A3B4C5D}" type="slidenum">
+              <a:rPr dirty="0" lang="en-US" sz="900">
+                <a:solidFill>
+                  <a:srgbClr val="6E7275"/>
+                </a:solidFill>
+                <a:latin typeface="+mn-lt"/>
+              </a:rPr>
+              <a:t>2</a:t>
+            </a:fld>
           </a:p>
         </p:txBody>
       </p:sp>
@@ -3204,7 +3270,7 @@
             </a:pPr>
             <a:r>
               <a:rPr/>
-              <a:t>18 August 2026</a:t>
+              <a:t>19 August 2026</a:t>
             </a:r>
           </a:p>
         </p:txBody>

--- a/10-causal-machine-learning/slides.pptx
+++ b/10-causal-machine-learning/slides.pptx
@@ -34,6 +34,9 @@
     <p:sldId id="282" r:id="rId28"/>
     <p:sldId id="283" r:id="rId29"/>
     <p:sldId id="284" r:id="rId30"/>
+    <p:sldId id="285" r:id="rId31"/>
+    <p:sldId id="286" r:id="rId32"/>
+    <p:sldId id="287" r:id="rId33"/>
   </p:sldIdLst>
   <p:sldSz cx="9144000" cy="5143500" type="screen16x9"/>
   <p:notesSz cx="6858000" cy="9144000"/>
@@ -3209,7 +3212,7 @@
             </a:pPr>
             <a:r>
               <a:rPr/>
-              <a:t>Causal Machine Learning</a:t>
+              <a:t>Causal Machine Learning: Double/Debiased ML</a:t>
             </a:r>
           </a:p>
         </p:txBody>
@@ -3239,7 +3242,7 @@
             </a:pPr>
             <a:r>
               <a:rPr/>
-              <a:t>Session 10 · Double/debiased ML, and the difference between predicting and intervening</a:t>
+              <a:t>Session 10 · Lecture, first half</a:t>
             </a:r>
             <a:br/>
             <a:br/>
@@ -3270,7 +3273,7 @@
             </a:pPr>
             <a:r>
               <a:rPr/>
-              <a:t>19 August 2026</a:t>
+              <a:t>20 August 2026</a:t>
             </a:r>
           </a:p>
         </p:txBody>
@@ -3307,12 +3310,7 @@
             <p:ph type="title"/>
           </p:nvPr>
         </p:nvSpPr>
-        <p:spPr>
-          <a:xfrm>
-            <a:off x="722313" y="3305176"/>
-            <a:ext cx="7772400" cy="1021556"/>
-          </a:xfrm>
-        </p:spPr>
+        <p:spPr/>
         <p:txBody>
           <a:bodyPr/>
           <a:lstStyle/>
@@ -3322,11 +3320,316 @@
             </a:pPr>
             <a:r>
               <a:rPr/>
-              <a:t>Why naive ML fails</a:t>
+              <a:t>The decomposition</a:t>
             </a:r>
           </a:p>
         </p:txBody>
       </p:sp>
+      <mc:AlternateContent xmlns:mc="http://schemas.openxmlformats.org/markup-compatibility/2006">
+        <mc:Choice xmlns:a14="http://schemas.microsoft.com/office/drawing/2010/main" Requires="a14">
+          <p:sp>
+            <p:nvSpPr>
+              <p:cNvPr id="3" name="Content Placeholder 2"/>
+              <p:cNvSpPr>
+                <a:spLocks noGrp="1"/>
+              </p:cNvSpPr>
+              <p:nvPr>
+                <p:ph idx="1"/>
+              </p:nvPr>
+            </p:nvSpPr>
+            <p:spPr/>
+            <p:txBody>
+              <a:bodyPr/>
+              <a:lstStyle/>
+              <a:p>
+                <a:pPr lvl="0" indent="0" marL="0">
+                  <a:buNone/>
+                </a:pPr>
+                <a:r>
+                  <a:rPr/>
+                  <a:t>Estimate </a:t>
+                </a:r>
+                <a14:m>
+                  <m:oMath xmlns:m="http://schemas.openxmlformats.org/officeDocument/2006/math">
+                    <m:sSub>
+                      <m:e>
+                        <m:acc>
+                          <m:accPr>
+                            <m:chr m:val="̂"/>
+                          </m:accPr>
+                          <m:e>
+                            <m:r>
+                              <m:t>g</m:t>
+                            </m:r>
+                          </m:e>
+                        </m:acc>
+                      </m:e>
+                      <m:sub>
+                        <m:r>
+                          <m:t>0</m:t>
+                        </m:r>
+                      </m:sub>
+                    </m:sSub>
+                  </m:oMath>
+                </a14:m>
+                <a:r>
+                  <a:rPr/>
+                  <a:t> by lasso or a forest on the full sample, then regress </a:t>
+                </a:r>
+                <a14:m>
+                  <m:oMath xmlns:m="http://schemas.openxmlformats.org/officeDocument/2006/math">
+                    <m:r>
+                      <m:t>Y</m:t>
+                    </m:r>
+                    <m:r>
+                      <m:rPr>
+                        <m:sty m:val="p"/>
+                      </m:rPr>
+                      <m:t>−</m:t>
+                    </m:r>
+                    <m:sSub>
+                      <m:e>
+                        <m:acc>
+                          <m:accPr>
+                            <m:chr m:val="̂"/>
+                          </m:accPr>
+                          <m:e>
+                            <m:r>
+                              <m:t>g</m:t>
+                            </m:r>
+                          </m:e>
+                        </m:acc>
+                      </m:e>
+                      <m:sub>
+                        <m:r>
+                          <m:t>0</m:t>
+                        </m:r>
+                      </m:sub>
+                    </m:sSub>
+                    <m:d>
+                      <m:dPr>
+                        <m:begChr m:val="("/>
+                        <m:sepChr m:val=""/>
+                        <m:endChr m:val=")"/>
+                        <m:grow/>
+                      </m:dPr>
+                      <m:e>
+                        <m:r>
+                          <m:t>X</m:t>
+                        </m:r>
+                      </m:e>
+                    </m:d>
+                  </m:oMath>
+                </a14:m>
+                <a:r>
+                  <a:rPr/>
+                  <a:t> on </a:t>
+                </a:r>
+                <a14:m>
+                  <m:oMath xmlns:m="http://schemas.openxmlformats.org/officeDocument/2006/math">
+                    <m:r>
+                      <m:t>D</m:t>
+                    </m:r>
+                  </m:oMath>
+                </a14:m>
+                <a:r>
+                  <a:rPr/>
+                  <a:t>. Schematically:</a:t>
+                </a:r>
+              </a:p>
+              <a:p>
+                <a:pPr lvl="0" indent="0" marL="0">
+                  <a:buNone/>
+                </a:pPr>
+                <a14:m>
+                  <m:oMathPara xmlns:m="http://schemas.openxmlformats.org/officeDocument/2006/math">
+                    <m:oMathParaPr>
+                      <m:jc m:val="center"/>
+                    </m:oMathParaPr>
+                    <m:oMath>
+                      <m:rad>
+                        <m:radPr>
+                          <m:degHide m:val="on"/>
+                        </m:radPr>
+                        <m:deg/>
+                        <m:e>
+                          <m:r>
+                            <m:t>n</m:t>
+                          </m:r>
+                        </m:e>
+                      </m:rad>
+                      <m:d>
+                        <m:dPr>
+                          <m:begChr m:val="("/>
+                          <m:sepChr m:val=""/>
+                          <m:endChr m:val=")"/>
+                          <m:grow/>
+                        </m:dPr>
+                        <m:e>
+                          <m:acc>
+                            <m:accPr>
+                              <m:chr m:val="̂"/>
+                            </m:accPr>
+                            <m:e>
+                              <m:r>
+                                <m:t>θ</m:t>
+                              </m:r>
+                            </m:e>
+                          </m:acc>
+                          <m:r>
+                            <m:rPr>
+                              <m:sty m:val="p"/>
+                            </m:rPr>
+                            <m:t>−</m:t>
+                          </m:r>
+                          <m:sSub>
+                            <m:e>
+                              <m:r>
+                                <m:t>θ</m:t>
+                              </m:r>
+                            </m:e>
+                            <m:sub>
+                              <m:r>
+                                <m:t>0</m:t>
+                              </m:r>
+                            </m:sub>
+                          </m:sSub>
+                        </m:e>
+                      </m:d>
+                      <m:r>
+                        <m:rPr>
+                          <m:sty m:val="p"/>
+                        </m:rPr>
+                        <m:t>=</m:t>
+                      </m:r>
+                      <m:limLow>
+                        <m:e>
+                          <m:limLow>
+                            <m:e>
+                              <m:r>
+                                <m:t>a</m:t>
+                              </m:r>
+                            </m:e>
+                            <m:lim>
+                              <m:r>
+                                <m:rPr>
+                                  <m:sty m:val="p"/>
+                                </m:rPr>
+                                <m:t>⏟</m:t>
+                              </m:r>
+                            </m:lim>
+                          </m:limLow>
+                        </m:e>
+                        <m:lim>
+                          <m:r>
+                            <m:rPr>
+                              <m:sty m:val="p"/>
+                            </m:rPr>
+                            <m:t>→</m:t>
+                          </m:r>
+                          <m:r>
+                            <m:t>N</m:t>
+                          </m:r>
+                          <m:d>
+                            <m:dPr>
+                              <m:begChr m:val="("/>
+                              <m:sepChr m:val=""/>
+                              <m:endChr m:val=")"/>
+                              <m:grow/>
+                            </m:dPr>
+                            <m:e>
+                              <m:r>
+                                <m:t>0</m:t>
+                              </m:r>
+                              <m:r>
+                                <m:rPr>
+                                  <m:sty m:val="p"/>
+                                </m:rPr>
+                                <m:t>,</m:t>
+                              </m:r>
+                              <m:r>
+                                <m:t>Σ</m:t>
+                              </m:r>
+                            </m:e>
+                          </m:d>
+                        </m:lim>
+                      </m:limLow>
+                      <m:r>
+                        <m:rPr>
+                          <m:sty m:val="p"/>
+                        </m:rPr>
+                        <m:t>+</m:t>
+                      </m:r>
+                      <m:limLow>
+                        <m:e>
+                          <m:limLow>
+                            <m:e>
+                              <m:r>
+                                <m:t>b</m:t>
+                              </m:r>
+                            </m:e>
+                            <m:lim>
+                              <m:r>
+                                <m:rPr>
+                                  <m:sty m:val="p"/>
+                                </m:rPr>
+                                <m:t>⏟</m:t>
+                              </m:r>
+                            </m:lim>
+                          </m:limLow>
+                        </m:e>
+                        <m:lim>
+                          <m:r>
+                            <m:rPr>
+                              <m:nor/>
+                              <m:sty m:val="p"/>
+                            </m:rPr>
+                            <m:t>regularisation bias</m:t>
+                          </m:r>
+                        </m:lim>
+                      </m:limLow>
+                      <m:r>
+                        <m:rPr>
+                          <m:sty m:val="p"/>
+                        </m:rPr>
+                        <m:t>+</m:t>
+                      </m:r>
+                      <m:limLow>
+                        <m:e>
+                          <m:limLow>
+                            <m:e>
+                              <m:r>
+                                <m:t>c</m:t>
+                              </m:r>
+                            </m:e>
+                            <m:lim>
+                              <m:r>
+                                <m:rPr>
+                                  <m:sty m:val="p"/>
+                                </m:rPr>
+                                <m:t>⏟</m:t>
+                              </m:r>
+                            </m:lim>
+                          </m:limLow>
+                        </m:e>
+                        <m:lim>
+                          <m:r>
+                            <m:rPr>
+                              <m:nor/>
+                              <m:sty m:val="p"/>
+                            </m:rPr>
+                            <m:t>overfitting bias</m:t>
+                          </m:r>
+                        </m:lim>
+                      </m:limLow>
+                    </m:oMath>
+                  </m:oMathPara>
+                </a14:m>
+              </a:p>
+            </p:txBody>
+          </p:sp>
+        </mc:Choice>
+      </mc:AlternateContent>
     </p:spTree>
   </p:cSld>
 </p:sld>
@@ -3349,31 +3652,46 @@
           <a:chExt cx="0" cy="0"/>
         </a:xfrm>
       </p:grpSpPr>
-      <p:sp>
-        <p:nvSpPr>
-          <p:cNvPr id="2" name="Title 1"/>
-          <p:cNvSpPr>
-            <a:spLocks noGrp="1"/>
-          </p:cNvSpPr>
-          <p:nvPr>
-            <p:ph type="title"/>
-          </p:nvPr>
-        </p:nvSpPr>
-        <p:spPr/>
-        <p:txBody>
-          <a:bodyPr/>
-          <a:lstStyle/>
-          <a:p>
-            <a:pPr lvl="0" indent="0" marL="0">
-              <a:buNone/>
-            </a:pPr>
-            <a:r>
-              <a:rPr/>
-              <a:t>The obvious thing to do</a:t>
-            </a:r>
-          </a:p>
-        </p:txBody>
-      </p:sp>
+      <mc:AlternateContent xmlns:mc="http://schemas.openxmlformats.org/markup-compatibility/2006">
+        <mc:Choice xmlns:a14="http://schemas.microsoft.com/office/drawing/2010/main" Requires="a14">
+          <p:sp>
+            <p:nvSpPr>
+              <p:cNvPr id="2" name="Title 1"/>
+              <p:cNvSpPr>
+                <a:spLocks noGrp="1"/>
+              </p:cNvSpPr>
+              <p:nvPr>
+                <p:ph type="title"/>
+              </p:nvPr>
+            </p:nvSpPr>
+            <p:spPr/>
+            <p:txBody>
+              <a:bodyPr/>
+              <a:lstStyle/>
+              <a:p>
+                <a:pPr lvl="0" indent="0" marL="0">
+                  <a:buNone/>
+                </a:pPr>
+                <a:r>
+                  <a:rPr/>
+                  <a:t>Term </a:t>
+                </a:r>
+                <a14:m>
+                  <m:oMath xmlns:m="http://schemas.openxmlformats.org/officeDocument/2006/math">
+                    <m:r>
+                      <m:t>b</m:t>
+                    </m:r>
+                  </m:oMath>
+                </a14:m>
+                <a:r>
+                  <a:rPr/>
+                  <a:t> diverges</a:t>
+                </a:r>
+              </a:p>
+            </p:txBody>
+          </p:sp>
+        </mc:Choice>
+      </mc:AlternateContent>
       <mc:AlternateContent xmlns:mc="http://schemas.openxmlformats.org/markup-compatibility/2006">
         <mc:Choice xmlns:a14="http://schemas.microsoft.com/office/drawing/2010/main" Requires="a14">
           <p:sp>
@@ -3394,50 +3712,90 @@
                 <a:pPr lvl="0" indent="0" marL="0">
                   <a:buNone/>
                 </a:pPr>
+                <a14:m>
+                  <m:oMath xmlns:m="http://schemas.openxmlformats.org/officeDocument/2006/math">
+                    <m:r>
+                      <m:t>b</m:t>
+                    </m:r>
+                  </m:oMath>
+                </a14:m>
                 <a:r>
                   <a:rPr/>
-                  <a:t>Throw the covariates into a flexible model and read off the treatment coefficient:</a:t>
-                </a:r>
-              </a:p>
-              <a:p>
-                <a:pPr lvl="0" indent="0">
-                  <a:buNone/>
-                </a:pPr>
-                <a:r>
-                  <a:rPr>
-                    <a:latin typeface="Courier"/>
-                  </a:rPr>
-                  <a:t>y </a:t>
-                </a:r>
-                <a:r>
-                  <a:rPr>
-                    <a:solidFill>
-                      <a:srgbClr val="666666"/>
-                    </a:solidFill>
-                    <a:latin typeface="Courier"/>
-                  </a:rPr>
-                  <a:t>~</a:t>
-                </a:r>
-                <a:r>
-                  <a:rPr>
-                    <a:latin typeface="Courier"/>
-                  </a:rPr>
-                  <a:t> D </a:t>
-                </a:r>
-                <a:r>
-                  <a:rPr>
-                    <a:solidFill>
-                      <a:srgbClr val="666666"/>
-                    </a:solidFill>
-                    <a:latin typeface="Courier"/>
-                  </a:rPr>
-                  <a:t>+</a:t>
-                </a:r>
-                <a:r>
-                  <a:rPr>
-                    <a:latin typeface="Courier"/>
-                  </a:rPr>
-                  <a:t> RandomForest(X)</a:t>
+                  <a:t> scales like </a:t>
+                </a:r>
+                <a14:m>
+                  <m:oMath xmlns:m="http://schemas.openxmlformats.org/officeDocument/2006/math">
+                    <m:rad>
+                      <m:radPr>
+                        <m:degHide m:val="on"/>
+                      </m:radPr>
+                      <m:deg/>
+                      <m:e>
+                        <m:r>
+                          <m:t>n</m:t>
+                        </m:r>
+                      </m:e>
+                    </m:rad>
+                    <m:r>
+                      <m:rPr>
+                        <m:sty m:val="p"/>
+                      </m:rPr>
+                      <m:t>×</m:t>
+                    </m:r>
+                    <m:r>
+                      <m:rPr>
+                        <m:sty m:val="p"/>
+                      </m:rPr>
+                      <m:t>∥</m:t>
+                    </m:r>
+                    <m:sSub>
+                      <m:e>
+                        <m:acc>
+                          <m:accPr>
+                            <m:chr m:val="̂"/>
+                          </m:accPr>
+                          <m:e>
+                            <m:r>
+                              <m:t>g</m:t>
+                            </m:r>
+                          </m:e>
+                        </m:acc>
+                      </m:e>
+                      <m:sub>
+                        <m:r>
+                          <m:t>0</m:t>
+                        </m:r>
+                      </m:sub>
+                    </m:sSub>
+                    <m:r>
+                      <m:rPr>
+                        <m:sty m:val="p"/>
+                      </m:rPr>
+                      <m:t>−</m:t>
+                    </m:r>
+                    <m:sSub>
+                      <m:e>
+                        <m:r>
+                          <m:t>g</m:t>
+                        </m:r>
+                      </m:e>
+                      <m:sub>
+                        <m:r>
+                          <m:t>0</m:t>
+                        </m:r>
+                      </m:sub>
+                    </m:sSub>
+                    <m:r>
+                      <m:rPr>
+                        <m:sty m:val="p"/>
+                      </m:rPr>
+                      <m:t>∥</m:t>
+                    </m:r>
+                  </m:oMath>
+                </a14:m>
+                <a:r>
+                  <a:rPr/>
+                  <a:t>.</a:t>
                 </a:r>
               </a:p>
               <a:p>
@@ -3446,26 +3804,78 @@
                 </a:pPr>
                 <a:r>
                   <a:rPr/>
-                  <a:t>This is biased, and the bias does </a:t>
+                  <a:t>ML estimators converge at rates </a:t>
                 </a:r>
                 <a:r>
                   <a:rPr b="1"/>
-                  <a:t>not</a:t>
+                  <a:t>slower</a:t>
                 </a:r>
                 <a:r>
                   <a:rPr/>
-                  <a:t> vanish as </a:t>
+                  <a:t> than </a:t>
+                </a:r>
+                <a14:m>
+                  <m:oMath xmlns:m="http://schemas.openxmlformats.org/officeDocument/2006/math">
+                    <m:sSup>
+                      <m:e>
+                        <m:r>
+                          <m:t>n</m:t>
+                        </m:r>
+                      </m:e>
+                      <m:sup>
+                        <m:r>
+                          <m:rPr>
+                            <m:sty m:val="p"/>
+                          </m:rPr>
+                          <m:t>−</m:t>
+                        </m:r>
+                        <m:r>
+                          <m:t>1</m:t>
+                        </m:r>
+                        <m:r>
+                          <m:rPr>
+                            <m:sty m:val="p"/>
+                          </m:rPr>
+                          <m:t>/</m:t>
+                        </m:r>
+                        <m:r>
+                          <m:t>2</m:t>
+                        </m:r>
+                      </m:sup>
+                    </m:sSup>
+                  </m:oMath>
+                </a14:m>
+                <a:r>
+                  <a:rPr/>
+                  <a:t> — that is the price of flexibility — so </a:t>
                 </a:r>
                 <a14:m>
                   <m:oMath xmlns:m="http://schemas.openxmlformats.org/officeDocument/2006/math">
                     <m:r>
-                      <m:t>n</m:t>
+                      <m:t>b</m:t>
                     </m:r>
                   </m:oMath>
                 </a14:m>
                 <a:r>
                   <a:rPr/>
-                  <a:t> grows. The problem is structural, not a small-sample issue.</a:t>
+                  <a:t> </a:t>
+                </a:r>
+                <a:r>
+                  <a:rPr b="1"/>
+                  <a:t>diverges</a:t>
+                </a:r>
+                <a:r>
+                  <a:rPr/>
+                  <a:t>.</a:t>
+                </a:r>
+              </a:p>
+              <a:p>
+                <a:pPr lvl="0" indent="0" marL="0">
+                  <a:buNone/>
+                </a:pPr>
+                <a:r>
+                  <a:rPr/>
+                  <a:t>The estimator is not even consistent at the parametric rate, and confidence intervals are meaningless.</a:t>
                 </a:r>
               </a:p>
             </p:txBody>
@@ -3494,31 +3904,42 @@
           <a:chExt cx="0" cy="0"/>
         </a:xfrm>
       </p:grpSpPr>
-      <p:sp>
-        <p:nvSpPr>
-          <p:cNvPr id="2" name="Title 1"/>
-          <p:cNvSpPr>
-            <a:spLocks noGrp="1"/>
-          </p:cNvSpPr>
-          <p:nvPr>
-            <p:ph type="title"/>
-          </p:nvPr>
-        </p:nvSpPr>
-        <p:spPr/>
-        <p:txBody>
-          <a:bodyPr/>
-          <a:lstStyle/>
-          <a:p>
-            <a:pPr lvl="0" indent="0" marL="0">
-              <a:buNone/>
-            </a:pPr>
-            <a:r>
-              <a:rPr/>
-              <a:t>Two sources of bias</a:t>
-            </a:r>
-          </a:p>
-        </p:txBody>
-      </p:sp>
+      <mc:AlternateContent xmlns:mc="http://schemas.openxmlformats.org/markup-compatibility/2006">
+        <mc:Choice xmlns:a14="http://schemas.microsoft.com/office/drawing/2010/main" Requires="a14">
+          <p:sp>
+            <p:nvSpPr>
+              <p:cNvPr id="2" name="Title 1"/>
+              <p:cNvSpPr>
+                <a:spLocks noGrp="1"/>
+              </p:cNvSpPr>
+              <p:nvPr>
+                <p:ph type="title"/>
+              </p:nvPr>
+            </p:nvSpPr>
+            <p:spPr/>
+            <p:txBody>
+              <a:bodyPr/>
+              <a:lstStyle/>
+              <a:p>
+                <a:pPr lvl="0" indent="0" marL="0">
+                  <a:buNone/>
+                </a:pPr>
+                <a:r>
+                  <a:rPr/>
+                  <a:t>Term </a:t>
+                </a:r>
+                <a14:m>
+                  <m:oMath xmlns:m="http://schemas.openxmlformats.org/officeDocument/2006/math">
+                    <m:r>
+                      <m:t>c</m:t>
+                    </m:r>
+                  </m:oMath>
+                </a14:m>
+              </a:p>
+            </p:txBody>
+          </p:sp>
+        </mc:Choice>
+      </mc:AlternateContent>
       <mc:AlternateContent xmlns:mc="http://schemas.openxmlformats.org/markup-compatibility/2006">
         <mc:Choice xmlns:a14="http://schemas.microsoft.com/office/drawing/2010/main" Requires="a14">
           <p:sp>
@@ -3536,102 +3957,43 @@
               <a:bodyPr/>
               <a:lstStyle/>
               <a:p>
-                <a:pPr lvl="0" indent="-342900" marL="342900">
-                  <a:buAutoNum type="arabicPeriod"/>
+                <a:pPr lvl="0" indent="0" marL="0">
+                  <a:buNone/>
                 </a:pPr>
-                <a:r>
-                  <a:rPr b="1"/>
-                  <a:t>Regularisation bias.</a:t>
-                </a:r>
-                <a:r>
-                  <a:rPr/>
-                  <a:t> Every ML estimator shrinks. Shrinkage in the nuisance function </a:t>
-                </a:r>
                 <a14:m>
                   <m:oMath xmlns:m="http://schemas.openxmlformats.org/officeDocument/2006/math">
-                    <m:r>
-                      <m:rPr>
-                        <m:sty m:val="p"/>
-                        <m:scr m:val="double-struck"/>
-                      </m:rPr>
-                      <m:t>E</m:t>
-                    </m:r>
-                    <m:d>
-                      <m:dPr>
-                        <m:begChr m:val="["/>
-                        <m:sepChr m:val=""/>
-                        <m:endChr m:val="]"/>
-                        <m:grow/>
-                      </m:dPr>
+                    <m:sSub>
                       <m:e>
+                        <m:acc>
+                          <m:accPr>
+                            <m:chr m:val="̂"/>
+                          </m:accPr>
+                          <m:e>
+                            <m:r>
+                              <m:t>g</m:t>
+                            </m:r>
+                          </m:e>
+                        </m:acc>
+                      </m:e>
+                      <m:sub>
                         <m:r>
-                          <m:t>Y</m:t>
+                          <m:t>0</m:t>
                         </m:r>
-                        <m:r>
-                          <m:rPr>
-                            <m:sty m:val="p"/>
-                          </m:rPr>
-                          <m:t>|</m:t>
-                        </m:r>
-                        <m:r>
-                          <m:t>X</m:t>
-                        </m:r>
-                      </m:e>
-                    </m:d>
+                      </m:sub>
+                    </m:sSub>
                   </m:oMath>
                 </a14:m>
                 <a:r>
                   <a:rPr/>
-                  <a:t> leaks directly into </a:t>
-                </a:r>
-                <a14:m>
-                  <m:oMath xmlns:m="http://schemas.openxmlformats.org/officeDocument/2006/math">
-                    <m:acc>
-                      <m:accPr>
-                        <m:chr m:val="̂"/>
-                      </m:accPr>
-                      <m:e>
-                        <m:r>
-                          <m:t>τ</m:t>
-                        </m:r>
-                      </m:e>
-                    </m:acc>
-                  </m:oMath>
-                </a14:m>
+                  <a:t> was fitted using the </a:t>
+                </a:r>
+                <a:r>
+                  <a:rPr b="1"/>
+                  <a:t>same observations</a:t>
+                </a:r>
                 <a:r>
                   <a:rPr/>
-                  <a:t>.</a:t>
-                </a:r>
-              </a:p>
-              <a:p>
-                <a:pPr lvl="0" indent="-342900" marL="342900">
-                  <a:buAutoNum type="arabicPeriod"/>
-                </a:pPr>
-                <a:r>
-                  <a:rPr b="1"/>
-                  <a:t>Overfitting bias.</a:t>
-                </a:r>
-                <a:r>
-                  <a:rPr/>
-                  <a:t> If the same rows fit the nuisance model and estimate the effect, the nuisance model has partly fitted the noise that </a:t>
-                </a:r>
-                <a14:m>
-                  <m:oMath xmlns:m="http://schemas.openxmlformats.org/officeDocument/2006/math">
-                    <m:acc>
-                      <m:accPr>
-                        <m:chr m:val="̂"/>
-                      </m:accPr>
-                      <m:e>
-                        <m:r>
-                          <m:t>τ</m:t>
-                        </m:r>
-                      </m:e>
-                    </m:acc>
-                  </m:oMath>
-                </a14:m>
-                <a:r>
-                  <a:rPr/>
-                  <a:t> is then computed from.</a:t>
+                  <a:t> at which it is evaluated, inducing correlation between the estimated nuisance and the residual.</a:t>
                 </a:r>
               </a:p>
               <a:p>
@@ -3640,23 +4002,7 @@
                 </a:pPr>
                 <a:r>
                   <a:rPr/>
-                  <a:t>DML fixes the first with </a:t>
-                </a:r>
-                <a:r>
-                  <a:rPr b="1"/>
-                  <a:t>orthogonalisation</a:t>
-                </a:r>
-                <a:r>
-                  <a:rPr/>
-                  <a:t> and the second with </a:t>
-                </a:r>
-                <a:r>
-                  <a:rPr b="1"/>
-                  <a:t>cross-fitting</a:t>
-                </a:r>
-                <a:r>
-                  <a:rPr/>
-                  <a:t>. Two problems, two devices.</a:t>
+                  <a:t>Two distinct problems requiring two distinct fixes.</a:t>
                 </a:r>
               </a:p>
             </p:txBody>
@@ -3695,6 +4041,58 @@
             <p:ph type="title"/>
           </p:nvPr>
         </p:nvSpPr>
+        <p:spPr>
+          <a:xfrm>
+            <a:off x="722313" y="3305176"/>
+            <a:ext cx="7772400" cy="1021556"/>
+          </a:xfrm>
+        </p:spPr>
+        <p:txBody>
+          <a:bodyPr/>
+          <a:lstStyle/>
+          <a:p>
+            <a:pPr lvl="0" indent="0" marL="0">
+              <a:buNone/>
+            </a:pPr>
+            <a:r>
+              <a:rPr/>
+              <a:t>10.3 Neyman orthogonality</a:t>
+            </a:r>
+          </a:p>
+        </p:txBody>
+      </p:sp>
+    </p:spTree>
+  </p:cSld>
+</p:sld>
+</file>
+
+<file path=ppt/slides/slide14.xml><?xml version="1.0" encoding="utf-8"?>
+<p:sld xmlns:a="http://schemas.openxmlformats.org/drawingml/2006/main" xmlns:r="http://schemas.openxmlformats.org/officeDocument/2006/relationships" xmlns:p="http://schemas.openxmlformats.org/presentationml/2006/main">
+  <p:cSld>
+    <p:spTree>
+      <p:nvGrpSpPr>
+        <p:cNvPr id="1" name=""/>
+        <p:cNvGrpSpPr/>
+        <p:nvPr/>
+      </p:nvGrpSpPr>
+      <p:grpSpPr>
+        <a:xfrm>
+          <a:off x="0" y="0"/>
+          <a:ext cx="0" cy="0"/>
+          <a:chOff x="0" y="0"/>
+          <a:chExt cx="0" cy="0"/>
+        </a:xfrm>
+      </p:grpSpPr>
+      <p:sp>
+        <p:nvSpPr>
+          <p:cNvPr id="2" name="Title 1"/>
+          <p:cNvSpPr>
+            <a:spLocks noGrp="1"/>
+          </p:cNvSpPr>
+          <p:nvPr>
+            <p:ph type="title"/>
+          </p:nvPr>
+        </p:nvSpPr>
         <p:spPr/>
         <p:txBody>
           <a:bodyPr/>
@@ -3705,7 +4103,7 @@
             </a:pPr>
             <a:r>
               <a:rPr/>
-              <a:t>Orthogonalisation: FWL returns</a:t>
+              <a:t>The partialling-out score</a:t>
             </a:r>
           </a:p>
         </p:txBody>
@@ -3730,9 +4128,932 @@
                 <a:pPr lvl="0" indent="0" marL="0">
                   <a:buNone/>
                 </a:pPr>
+                <a14:m>
+                  <m:oMathPara xmlns:m="http://schemas.openxmlformats.org/officeDocument/2006/math">
+                    <m:oMathParaPr>
+                      <m:jc m:val="center"/>
+                    </m:oMathParaPr>
+                    <m:oMath>
+                      <m:r>
+                        <m:t>ψ</m:t>
+                      </m:r>
+                      <m:d>
+                        <m:dPr>
+                          <m:begChr m:val="("/>
+                          <m:sepChr m:val=""/>
+                          <m:endChr m:val=")"/>
+                          <m:grow/>
+                        </m:dPr>
+                        <m:e>
+                          <m:r>
+                            <m:t>W</m:t>
+                          </m:r>
+                          <m:r>
+                            <m:rPr>
+                              <m:sty m:val="p"/>
+                            </m:rPr>
+                            <m:t>;</m:t>
+                          </m:r>
+                          <m:r>
+                            <m:t>θ</m:t>
+                          </m:r>
+                          <m:r>
+                            <m:rPr>
+                              <m:sty m:val="p"/>
+                            </m:rPr>
+                            <m:t>,</m:t>
+                          </m:r>
+                          <m:r>
+                            <m:t>η</m:t>
+                          </m:r>
+                        </m:e>
+                      </m:d>
+                      <m:r>
+                        <m:rPr>
+                          <m:sty m:val="p"/>
+                        </m:rPr>
+                        <m:t>=</m:t>
+                      </m:r>
+                      <m:d>
+                        <m:dPr>
+                          <m:begChr m:val="("/>
+                          <m:sepChr m:val=""/>
+                          <m:endChr m:val=")"/>
+                          <m:grow/>
+                        </m:dPr>
+                        <m:e>
+                          <m:r>
+                            <m:t>Y</m:t>
+                          </m:r>
+                          <m:r>
+                            <m:rPr>
+                              <m:sty m:val="p"/>
+                            </m:rPr>
+                            <m:t>−</m:t>
+                          </m:r>
+                          <m:sSub>
+                            <m:e>
+                              <m:r>
+                                <m:rPr>
+                                  <m:sty m:val="p"/>
+                                </m:rPr>
+                                <m:t>ℓ</m:t>
+                              </m:r>
+                            </m:e>
+                            <m:sub>
+                              <m:r>
+                                <m:t>0</m:t>
+                              </m:r>
+                            </m:sub>
+                          </m:sSub>
+                          <m:d>
+                            <m:dPr>
+                              <m:begChr m:val="("/>
+                              <m:sepChr m:val=""/>
+                              <m:endChr m:val=")"/>
+                              <m:grow/>
+                            </m:dPr>
+                            <m:e>
+                              <m:r>
+                                <m:t>X</m:t>
+                              </m:r>
+                            </m:e>
+                          </m:d>
+                          <m:r>
+                            <m:rPr>
+                              <m:sty m:val="p"/>
+                            </m:rPr>
+                            <m:t>−</m:t>
+                          </m:r>
+                          <m:r>
+                            <m:t>θ</m:t>
+                          </m:r>
+                          <m:r>
+                            <m:t> </m:t>
+                          </m:r>
+                          <m:d>
+                            <m:dPr>
+                              <m:begChr m:val="("/>
+                              <m:sepChr m:val=""/>
+                              <m:endChr m:val=")"/>
+                              <m:grow/>
+                            </m:dPr>
+                            <m:e>
+                              <m:r>
+                                <m:t>D</m:t>
+                              </m:r>
+                              <m:r>
+                                <m:rPr>
+                                  <m:sty m:val="p"/>
+                                </m:rPr>
+                                <m:t>−</m:t>
+                              </m:r>
+                              <m:sSub>
+                                <m:e>
+                                  <m:r>
+                                    <m:t>m</m:t>
+                                  </m:r>
+                                </m:e>
+                                <m:sub>
+                                  <m:r>
+                                    <m:t>0</m:t>
+                                  </m:r>
+                                </m:sub>
+                              </m:sSub>
+                              <m:d>
+                                <m:dPr>
+                                  <m:begChr m:val="("/>
+                                  <m:sepChr m:val=""/>
+                                  <m:endChr m:val=")"/>
+                                  <m:grow/>
+                                </m:dPr>
+                                <m:e>
+                                  <m:r>
+                                    <m:t>X</m:t>
+                                  </m:r>
+                                </m:e>
+                              </m:d>
+                            </m:e>
+                          </m:d>
+                        </m:e>
+                      </m:d>
+                      <m:d>
+                        <m:dPr>
+                          <m:begChr m:val="("/>
+                          <m:sepChr m:val=""/>
+                          <m:endChr m:val=")"/>
+                          <m:grow/>
+                        </m:dPr>
+                        <m:e>
+                          <m:r>
+                            <m:t>D</m:t>
+                          </m:r>
+                          <m:r>
+                            <m:rPr>
+                              <m:sty m:val="p"/>
+                            </m:rPr>
+                            <m:t>−</m:t>
+                          </m:r>
+                          <m:sSub>
+                            <m:e>
+                              <m:r>
+                                <m:t>m</m:t>
+                              </m:r>
+                            </m:e>
+                            <m:sub>
+                              <m:r>
+                                <m:t>0</m:t>
+                              </m:r>
+                            </m:sub>
+                          </m:sSub>
+                          <m:d>
+                            <m:dPr>
+                              <m:begChr m:val="("/>
+                              <m:sepChr m:val=""/>
+                              <m:endChr m:val=")"/>
+                              <m:grow/>
+                            </m:dPr>
+                            <m:e>
+                              <m:r>
+                                <m:t>X</m:t>
+                              </m:r>
+                            </m:e>
+                          </m:d>
+                        </m:e>
+                      </m:d>
+                    </m:oMath>
+                  </m:oMathPara>
+                </a14:m>
+              </a:p>
+              <a:p>
+                <a:pPr lvl="0" indent="0" marL="0">
+                  <a:buNone/>
+                </a:pPr>
                 <a:r>
                   <a:rPr/>
-                  <a:t>Session 02’s theorem, now doing causal work. Residualise both sides:</a:t>
+                  <a:t>with </a:t>
+                </a:r>
+                <a14:m>
+                  <m:oMath xmlns:m="http://schemas.openxmlformats.org/officeDocument/2006/math">
+                    <m:r>
+                      <m:t>η</m:t>
+                    </m:r>
+                    <m:r>
+                      <m:rPr>
+                        <m:sty m:val="p"/>
+                      </m:rPr>
+                      <m:t>=</m:t>
+                    </m:r>
+                    <m:d>
+                      <m:dPr>
+                        <m:begChr m:val="("/>
+                        <m:sepChr m:val=""/>
+                        <m:endChr m:val=")"/>
+                        <m:grow/>
+                      </m:dPr>
+                      <m:e>
+                        <m:sSub>
+                          <m:e>
+                            <m:r>
+                              <m:rPr>
+                                <m:sty m:val="p"/>
+                              </m:rPr>
+                              <m:t>ℓ</m:t>
+                            </m:r>
+                          </m:e>
+                          <m:sub>
+                            <m:r>
+                              <m:t>0</m:t>
+                            </m:r>
+                          </m:sub>
+                        </m:sSub>
+                        <m:r>
+                          <m:rPr>
+                            <m:sty m:val="p"/>
+                          </m:rPr>
+                          <m:t>,</m:t>
+                        </m:r>
+                        <m:sSub>
+                          <m:e>
+                            <m:r>
+                              <m:t>m</m:t>
+                            </m:r>
+                          </m:e>
+                          <m:sub>
+                            <m:r>
+                              <m:t>0</m:t>
+                            </m:r>
+                          </m:sub>
+                        </m:sSub>
+                      </m:e>
+                    </m:d>
+                  </m:oMath>
+                </a14:m>
+                <a:r>
+                  <a:rPr/>
+                  <a:t>, </a:t>
+                </a:r>
+                <a14:m>
+                  <m:oMath xmlns:m="http://schemas.openxmlformats.org/officeDocument/2006/math">
+                    <m:sSub>
+                      <m:e>
+                        <m:r>
+                          <m:rPr>
+                            <m:sty m:val="p"/>
+                          </m:rPr>
+                          <m:t>ℓ</m:t>
+                        </m:r>
+                      </m:e>
+                      <m:sub>
+                        <m:r>
+                          <m:t>0</m:t>
+                        </m:r>
+                      </m:sub>
+                    </m:sSub>
+                    <m:d>
+                      <m:dPr>
+                        <m:begChr m:val="("/>
+                        <m:sepChr m:val=""/>
+                        <m:endChr m:val=")"/>
+                        <m:grow/>
+                      </m:dPr>
+                      <m:e>
+                        <m:r>
+                          <m:t>X</m:t>
+                        </m:r>
+                      </m:e>
+                    </m:d>
+                    <m:r>
+                      <m:rPr>
+                        <m:sty m:val="p"/>
+                      </m:rPr>
+                      <m:t>=</m:t>
+                    </m:r>
+                    <m:r>
+                      <m:rPr>
+                        <m:sty m:val="p"/>
+                        <m:scr m:val="double-struck"/>
+                      </m:rPr>
+                      <m:t>E</m:t>
+                    </m:r>
+                    <m:d>
+                      <m:dPr>
+                        <m:begChr m:val="["/>
+                        <m:sepChr m:val=""/>
+                        <m:endChr m:val="]"/>
+                        <m:grow/>
+                      </m:dPr>
+                      <m:e>
+                        <m:r>
+                          <m:t>Y</m:t>
+                        </m:r>
+                        <m:r>
+                          <m:rPr>
+                            <m:sty m:val="p"/>
+                          </m:rPr>
+                          <m:t>∣</m:t>
+                        </m:r>
+                        <m:r>
+                          <m:t>X</m:t>
+                        </m:r>
+                      </m:e>
+                    </m:d>
+                  </m:oMath>
+                </a14:m>
+                <a:r>
+                  <a:rPr/>
+                  <a:t>, </a:t>
+                </a:r>
+                <a14:m>
+                  <m:oMath xmlns:m="http://schemas.openxmlformats.org/officeDocument/2006/math">
+                    <m:sSub>
+                      <m:e>
+                        <m:r>
+                          <m:t>m</m:t>
+                        </m:r>
+                      </m:e>
+                      <m:sub>
+                        <m:r>
+                          <m:t>0</m:t>
+                        </m:r>
+                      </m:sub>
+                    </m:sSub>
+                    <m:d>
+                      <m:dPr>
+                        <m:begChr m:val="("/>
+                        <m:sepChr m:val=""/>
+                        <m:endChr m:val=")"/>
+                        <m:grow/>
+                      </m:dPr>
+                      <m:e>
+                        <m:r>
+                          <m:t>X</m:t>
+                        </m:r>
+                      </m:e>
+                    </m:d>
+                    <m:r>
+                      <m:rPr>
+                        <m:sty m:val="p"/>
+                      </m:rPr>
+                      <m:t>=</m:t>
+                    </m:r>
+                    <m:r>
+                      <m:rPr>
+                        <m:sty m:val="p"/>
+                        <m:scr m:val="double-struck"/>
+                      </m:rPr>
+                      <m:t>E</m:t>
+                    </m:r>
+                    <m:d>
+                      <m:dPr>
+                        <m:begChr m:val="["/>
+                        <m:sepChr m:val=""/>
+                        <m:endChr m:val="]"/>
+                        <m:grow/>
+                      </m:dPr>
+                      <m:e>
+                        <m:r>
+                          <m:t>D</m:t>
+                        </m:r>
+                        <m:r>
+                          <m:rPr>
+                            <m:sty m:val="p"/>
+                          </m:rPr>
+                          <m:t>∣</m:t>
+                        </m:r>
+                        <m:r>
+                          <m:t>X</m:t>
+                        </m:r>
+                      </m:e>
+                    </m:d>
+                  </m:oMath>
+                </a14:m>
+                <a:r>
+                  <a:rPr/>
+                  <a:t>.</a:t>
+                </a:r>
+              </a:p>
+            </p:txBody>
+          </p:sp>
+        </mc:Choice>
+      </mc:AlternateContent>
+    </p:spTree>
+  </p:cSld>
+</p:sld>
+</file>
+
+<file path=ppt/slides/slide15.xml><?xml version="1.0" encoding="utf-8"?>
+<p:sld xmlns:a="http://schemas.openxmlformats.org/drawingml/2006/main" xmlns:r="http://schemas.openxmlformats.org/officeDocument/2006/relationships" xmlns:p="http://schemas.openxmlformats.org/presentationml/2006/main">
+  <p:cSld>
+    <p:spTree>
+      <p:nvGrpSpPr>
+        <p:cNvPr id="1" name=""/>
+        <p:cNvGrpSpPr/>
+        <p:nvPr/>
+      </p:nvGrpSpPr>
+      <p:grpSpPr>
+        <a:xfrm>
+          <a:off x="0" y="0"/>
+          <a:ext cx="0" cy="0"/>
+          <a:chOff x="0" y="0"/>
+          <a:chExt cx="0" cy="0"/>
+        </a:xfrm>
+      </p:grpSpPr>
+      <p:sp>
+        <p:nvSpPr>
+          <p:cNvPr id="2" name="Title 1"/>
+          <p:cNvSpPr>
+            <a:spLocks noGrp="1"/>
+          </p:cNvSpPr>
+          <p:nvPr>
+            <p:ph type="title"/>
+          </p:nvPr>
+        </p:nvSpPr>
+        <p:spPr/>
+        <p:txBody>
+          <a:bodyPr/>
+          <a:lstStyle/>
+          <a:p>
+            <a:pPr lvl="0" indent="0" marL="0">
+              <a:buNone/>
+            </a:pPr>
+            <a:r>
+              <a:rPr/>
+              <a:t>Solving it gives FWL</a:t>
+            </a:r>
+          </a:p>
+        </p:txBody>
+      </p:sp>
+      <mc:AlternateContent xmlns:mc="http://schemas.openxmlformats.org/markup-compatibility/2006">
+        <mc:Choice xmlns:a14="http://schemas.microsoft.com/office/drawing/2010/main" Requires="a14">
+          <p:sp>
+            <p:nvSpPr>
+              <p:cNvPr id="3" name="Content Placeholder 2"/>
+              <p:cNvSpPr>
+                <a:spLocks noGrp="1"/>
+              </p:cNvSpPr>
+              <p:nvPr>
+                <p:ph idx="1"/>
+              </p:nvPr>
+            </p:nvSpPr>
+            <p:spPr/>
+            <p:txBody>
+              <a:bodyPr/>
+              <a:lstStyle/>
+              <a:p>
+                <a:pPr lvl="0" indent="0" marL="0">
+                  <a:buNone/>
+                </a:pPr>
+                <a14:m>
+                  <m:oMathPara xmlns:m="http://schemas.openxmlformats.org/officeDocument/2006/math">
+                    <m:oMathParaPr>
+                      <m:jc m:val="center"/>
+                    </m:oMathParaPr>
+                    <m:oMath>
+                      <m:sSub>
+                        <m:e>
+                          <m:r>
+                            <m:t>θ</m:t>
+                          </m:r>
+                        </m:e>
+                        <m:sub>
+                          <m:r>
+                            <m:t>0</m:t>
+                          </m:r>
+                        </m:sub>
+                      </m:sSub>
+                      <m:r>
+                        <m:rPr>
+                          <m:sty m:val="p"/>
+                        </m:rPr>
+                        <m:t>=</m:t>
+                      </m:r>
+                      <m:f>
+                        <m:fPr>
+                          <m:type m:val="bar"/>
+                        </m:fPr>
+                        <m:num>
+                          <m:r>
+                            <m:rPr>
+                              <m:sty m:val="p"/>
+                              <m:scr m:val="double-struck"/>
+                            </m:rPr>
+                            <m:t>E</m:t>
+                          </m:r>
+                          <m:d>
+                            <m:dPr>
+                              <m:begChr m:val="["/>
+                              <m:sepChr m:val=""/>
+                              <m:endChr m:val="]"/>
+                              <m:grow/>
+                            </m:dPr>
+                            <m:e>
+                              <m:d>
+                                <m:dPr>
+                                  <m:begChr m:val="("/>
+                                  <m:sepChr m:val=""/>
+                                  <m:endChr m:val=")"/>
+                                  <m:grow/>
+                                </m:dPr>
+                                <m:e>
+                                  <m:r>
+                                    <m:t>Y</m:t>
+                                  </m:r>
+                                  <m:r>
+                                    <m:rPr>
+                                      <m:sty m:val="p"/>
+                                    </m:rPr>
+                                    <m:t>−</m:t>
+                                  </m:r>
+                                  <m:sSub>
+                                    <m:e>
+                                      <m:r>
+                                        <m:rPr>
+                                          <m:sty m:val="p"/>
+                                        </m:rPr>
+                                        <m:t>ℓ</m:t>
+                                      </m:r>
+                                    </m:e>
+                                    <m:sub>
+                                      <m:r>
+                                        <m:t>0</m:t>
+                                      </m:r>
+                                    </m:sub>
+                                  </m:sSub>
+                                  <m:d>
+                                    <m:dPr>
+                                      <m:begChr m:val="("/>
+                                      <m:sepChr m:val=""/>
+                                      <m:endChr m:val=")"/>
+                                      <m:grow/>
+                                    </m:dPr>
+                                    <m:e>
+                                      <m:r>
+                                        <m:t>X</m:t>
+                                      </m:r>
+                                    </m:e>
+                                  </m:d>
+                                </m:e>
+                              </m:d>
+                              <m:d>
+                                <m:dPr>
+                                  <m:begChr m:val="("/>
+                                  <m:sepChr m:val=""/>
+                                  <m:endChr m:val=")"/>
+                                  <m:grow/>
+                                </m:dPr>
+                                <m:e>
+                                  <m:r>
+                                    <m:t>D</m:t>
+                                  </m:r>
+                                  <m:r>
+                                    <m:rPr>
+                                      <m:sty m:val="p"/>
+                                    </m:rPr>
+                                    <m:t>−</m:t>
+                                  </m:r>
+                                  <m:sSub>
+                                    <m:e>
+                                      <m:r>
+                                        <m:t>m</m:t>
+                                      </m:r>
+                                    </m:e>
+                                    <m:sub>
+                                      <m:r>
+                                        <m:t>0</m:t>
+                                      </m:r>
+                                    </m:sub>
+                                  </m:sSub>
+                                  <m:d>
+                                    <m:dPr>
+                                      <m:begChr m:val="("/>
+                                      <m:sepChr m:val=""/>
+                                      <m:endChr m:val=")"/>
+                                      <m:grow/>
+                                    </m:dPr>
+                                    <m:e>
+                                      <m:r>
+                                        <m:t>X</m:t>
+                                      </m:r>
+                                    </m:e>
+                                  </m:d>
+                                </m:e>
+                              </m:d>
+                            </m:e>
+                          </m:d>
+                        </m:num>
+                        <m:den>
+                          <m:r>
+                            <m:rPr>
+                              <m:sty m:val="p"/>
+                              <m:scr m:val="double-struck"/>
+                            </m:rPr>
+                            <m:t>E</m:t>
+                          </m:r>
+                          <m:d>
+                            <m:dPr>
+                              <m:begChr m:val="["/>
+                              <m:sepChr m:val=""/>
+                              <m:endChr m:val="]"/>
+                              <m:grow/>
+                            </m:dPr>
+                            <m:e>
+                              <m:sSup>
+                                <m:e>
+                                  <m:d>
+                                    <m:dPr>
+                                      <m:begChr m:val="("/>
+                                      <m:sepChr m:val=""/>
+                                      <m:endChr m:val=")"/>
+                                      <m:grow/>
+                                    </m:dPr>
+                                    <m:e>
+                                      <m:r>
+                                        <m:t>D</m:t>
+                                      </m:r>
+                                      <m:r>
+                                        <m:rPr>
+                                          <m:sty m:val="p"/>
+                                        </m:rPr>
+                                        <m:t>−</m:t>
+                                      </m:r>
+                                      <m:sSub>
+                                        <m:e>
+                                          <m:r>
+                                            <m:t>m</m:t>
+                                          </m:r>
+                                        </m:e>
+                                        <m:sub>
+                                          <m:r>
+                                            <m:t>0</m:t>
+                                          </m:r>
+                                        </m:sub>
+                                      </m:sSub>
+                                      <m:d>
+                                        <m:dPr>
+                                          <m:begChr m:val="("/>
+                                          <m:sepChr m:val=""/>
+                                          <m:endChr m:val=")"/>
+                                          <m:grow/>
+                                        </m:dPr>
+                                        <m:e>
+                                          <m:r>
+                                            <m:t>X</m:t>
+                                          </m:r>
+                                        </m:e>
+                                      </m:d>
+                                    </m:e>
+                                  </m:d>
+                                </m:e>
+                                <m:sup>
+                                  <m:r>
+                                    <m:t>2</m:t>
+                                  </m:r>
+                                </m:sup>
+                              </m:sSup>
+                            </m:e>
+                          </m:d>
+                        </m:den>
+                      </m:f>
+                      <m:r>
+                        <m:rPr>
+                          <m:sty m:val="p"/>
+                        </m:rPr>
+                        <m:t>=</m:t>
+                      </m:r>
+                      <m:f>
+                        <m:fPr>
+                          <m:type m:val="bar"/>
+                        </m:fPr>
+                        <m:num>
+                          <m:r>
+                            <m:rPr>
+                              <m:sty m:val="p"/>
+                            </m:rPr>
+                            <m:t>Cov</m:t>
+                          </m:r>
+                          <m:d>
+                            <m:dPr>
+                              <m:begChr m:val="("/>
+                              <m:sepChr m:val=""/>
+                              <m:endChr m:val=")"/>
+                              <m:grow/>
+                            </m:dPr>
+                            <m:e>
+                              <m:acc>
+                                <m:accPr>
+                                  <m:chr m:val="̃"/>
+                                </m:accPr>
+                                <m:e>
+                                  <m:r>
+                                    <m:t>Y</m:t>
+                                  </m:r>
+                                </m:e>
+                              </m:acc>
+                              <m:r>
+                                <m:rPr>
+                                  <m:sty m:val="p"/>
+                                </m:rPr>
+                                <m:t>,</m:t>
+                              </m:r>
+                              <m:acc>
+                                <m:accPr>
+                                  <m:chr m:val="̃"/>
+                                </m:accPr>
+                                <m:e>
+                                  <m:r>
+                                    <m:t>D</m:t>
+                                  </m:r>
+                                </m:e>
+                              </m:acc>
+                            </m:e>
+                          </m:d>
+                        </m:num>
+                        <m:den>
+                          <m:r>
+                            <m:rPr>
+                              <m:sty m:val="p"/>
+                            </m:rPr>
+                            <m:t>Var</m:t>
+                          </m:r>
+                          <m:d>
+                            <m:dPr>
+                              <m:begChr m:val="("/>
+                              <m:sepChr m:val=""/>
+                              <m:endChr m:val=")"/>
+                              <m:grow/>
+                            </m:dPr>
+                            <m:e>
+                              <m:acc>
+                                <m:accPr>
+                                  <m:chr m:val="̃"/>
+                                </m:accPr>
+                                <m:e>
+                                  <m:r>
+                                    <m:t>D</m:t>
+                                  </m:r>
+                                </m:e>
+                              </m:acc>
+                            </m:e>
+                          </m:d>
+                        </m:den>
+                      </m:f>
+                    </m:oMath>
+                  </m:oMathPara>
+                </a14:m>
+              </a:p>
+              <a:p>
+                <a:pPr lvl="0" indent="0" marL="0">
+                  <a:buNone/>
+                </a:pPr>
+                <a:r>
+                  <a:rPr/>
+                  <a:t>Precisely Frisch–Waugh–Lovell from Session 02: </a:t>
+                </a:r>
+                <a:r>
+                  <a:rPr b="1"/>
+                  <a:t>regress residualised </a:t>
+                </a:r>
+                <a14:m>
+                  <m:oMath xmlns:m="http://schemas.openxmlformats.org/officeDocument/2006/math">
+                    <m:r>
+                      <m:t>Y</m:t>
+                    </m:r>
+                  </m:oMath>
+                </a14:m>
+                <a:r>
+                  <a:rPr b="1"/>
+                  <a:t> on residualised </a:t>
+                </a:r>
+                <a14:m>
+                  <m:oMath xmlns:m="http://schemas.openxmlformats.org/officeDocument/2006/math">
+                    <m:r>
+                      <m:t>D</m:t>
+                    </m:r>
+                  </m:oMath>
+                </a14:m>
+                <a:r>
+                  <a:rPr b="1"/>
+                  <a:t>.</a:t>
+                </a:r>
+                <a:r>
+                  <a:rPr/>
+                  <a:t> Eight sessions later, the same theorem.</a:t>
+                </a:r>
+              </a:p>
+            </p:txBody>
+          </p:sp>
+        </mc:Choice>
+      </mc:AlternateContent>
+    </p:spTree>
+  </p:cSld>
+</p:sld>
+</file>
+
+<file path=ppt/slides/slide16.xml><?xml version="1.0" encoding="utf-8"?>
+<p:sld xmlns:a="http://schemas.openxmlformats.org/drawingml/2006/main" xmlns:r="http://schemas.openxmlformats.org/officeDocument/2006/relationships" xmlns:p="http://schemas.openxmlformats.org/presentationml/2006/main">
+  <p:cSld>
+    <p:spTree>
+      <p:nvGrpSpPr>
+        <p:cNvPr id="1" name=""/>
+        <p:cNvGrpSpPr/>
+        <p:nvPr/>
+      </p:nvGrpSpPr>
+      <p:grpSpPr>
+        <a:xfrm>
+          <a:off x="0" y="0"/>
+          <a:ext cx="0" cy="0"/>
+          <a:chOff x="0" y="0"/>
+          <a:chExt cx="0" cy="0"/>
+        </a:xfrm>
+      </p:grpSpPr>
+      <p:sp>
+        <p:nvSpPr>
+          <p:cNvPr id="2" name="Title 1"/>
+          <p:cNvSpPr>
+            <a:spLocks noGrp="1"/>
+          </p:cNvSpPr>
+          <p:nvPr>
+            <p:ph type="title"/>
+          </p:nvPr>
+        </p:nvSpPr>
+        <p:spPr/>
+        <p:txBody>
+          <a:bodyPr/>
+          <a:lstStyle/>
+          <a:p>
+            <a:pPr lvl="0" indent="0" marL="0">
+              <a:buNone/>
+            </a:pPr>
+            <a:r>
+              <a:rPr/>
+              <a:t>The orthogonality property</a:t>
+            </a:r>
+          </a:p>
+        </p:txBody>
+      </p:sp>
+      <mc:AlternateContent xmlns:mc="http://schemas.openxmlformats.org/markup-compatibility/2006">
+        <mc:Choice xmlns:a14="http://schemas.microsoft.com/office/drawing/2010/main" Requires="a14">
+          <p:sp>
+            <p:nvSpPr>
+              <p:cNvPr id="3" name="Content Placeholder 2"/>
+              <p:cNvSpPr>
+                <a:spLocks noGrp="1"/>
+              </p:cNvSpPr>
+              <p:nvPr>
+                <p:ph idx="1"/>
+              </p:nvPr>
+            </p:nvSpPr>
+            <p:spPr/>
+            <p:txBody>
+              <a:bodyPr/>
+              <a:lstStyle/>
+              <a:p>
+                <a:pPr lvl="0" indent="0" marL="0">
+                  <a:buNone/>
+                </a:pPr>
+                <a:r>
+                  <a:rPr/>
+                  <a:t>The Gateaux derivative of </a:t>
+                </a:r>
+                <a14:m>
+                  <m:oMath xmlns:m="http://schemas.openxmlformats.org/officeDocument/2006/math">
+                    <m:r>
+                      <m:rPr>
+                        <m:sty m:val="p"/>
+                        <m:scr m:val="double-struck"/>
+                      </m:rPr>
+                      <m:t>E</m:t>
+                    </m:r>
+                    <m:d>
+                      <m:dPr>
+                        <m:begChr m:val="["/>
+                        <m:sepChr m:val=""/>
+                        <m:endChr m:val="]"/>
+                        <m:grow/>
+                      </m:dPr>
+                      <m:e>
+                        <m:r>
+                          <m:t>ψ</m:t>
+                        </m:r>
+                      </m:e>
+                    </m:d>
+                  </m:oMath>
+                </a14:m>
+                <a:r>
+                  <a:rPr/>
+                  <a:t> with respect to </a:t>
+                </a:r>
+                <a14:m>
+                  <m:oMath xmlns:m="http://schemas.openxmlformats.org/officeDocument/2006/math">
+                    <m:r>
+                      <m:t>η</m:t>
+                    </m:r>
+                  </m:oMath>
+                </a14:m>
+                <a:r>
+                  <a:rPr/>
+                  <a:t>, at the truth, is zero:</a:t>
                 </a:r>
               </a:p>
               <a:p>
@@ -3745,16 +5066,124 @@
                       <m:jc m:val="center"/>
                     </m:oMathParaPr>
                     <m:oMath>
-                      <m:acc>
-                        <m:accPr>
-                          <m:chr m:val="̃"/>
-                        </m:accPr>
+                      <m:sSub>
                         <m:e>
                           <m:r>
-                            <m:t>Y</m:t>
+                            <m:rPr>
+                              <m:sty m:val="p"/>
+                            </m:rPr>
+                            <m:t>∂</m:t>
                           </m:r>
                         </m:e>
-                      </m:acc>
+                        <m:sub>
+                          <m:r>
+                            <m:t>η</m:t>
+                          </m:r>
+                        </m:sub>
+                      </m:sSub>
+                      <m:r>
+                        <m:t> </m:t>
+                      </m:r>
+                      <m:r>
+                        <m:rPr>
+                          <m:sty m:val="p"/>
+                          <m:scr m:val="double-struck"/>
+                        </m:rPr>
+                        <m:t>E</m:t>
+                      </m:r>
+                      <m:d>
+                        <m:dPr>
+                          <m:begChr m:val="["/>
+                          <m:sepChr m:val=""/>
+                          <m:endChr m:val="]"/>
+                          <m:grow/>
+                        </m:dPr>
+                        <m:e>
+                          <m:r>
+                            <m:t>ψ</m:t>
+                          </m:r>
+                          <m:d>
+                            <m:dPr>
+                              <m:begChr m:val="("/>
+                              <m:sepChr m:val=""/>
+                              <m:endChr m:val=")"/>
+                              <m:grow/>
+                            </m:dPr>
+                            <m:e>
+                              <m:r>
+                                <m:t>W</m:t>
+                              </m:r>
+                              <m:r>
+                                <m:rPr>
+                                  <m:sty m:val="p"/>
+                                </m:rPr>
+                                <m:t>;</m:t>
+                              </m:r>
+                              <m:sSub>
+                                <m:e>
+                                  <m:r>
+                                    <m:t>θ</m:t>
+                                  </m:r>
+                                </m:e>
+                                <m:sub>
+                                  <m:r>
+                                    <m:t>0</m:t>
+                                  </m:r>
+                                </m:sub>
+                              </m:sSub>
+                              <m:r>
+                                <m:rPr>
+                                  <m:sty m:val="p"/>
+                                </m:rPr>
+                                <m:t>,</m:t>
+                              </m:r>
+                              <m:sSub>
+                                <m:e>
+                                  <m:r>
+                                    <m:t>η</m:t>
+                                  </m:r>
+                                </m:e>
+                                <m:sub>
+                                  <m:r>
+                                    <m:t>0</m:t>
+                                  </m:r>
+                                </m:sub>
+                              </m:sSub>
+                            </m:e>
+                          </m:d>
+                        </m:e>
+                      </m:d>
+                      <m:d>
+                        <m:dPr>
+                          <m:begChr m:val="["/>
+                          <m:sepChr m:val=""/>
+                          <m:endChr m:val="]"/>
+                          <m:grow/>
+                        </m:dPr>
+                        <m:e>
+                          <m:r>
+                            <m:t>η</m:t>
+                          </m:r>
+                          <m:r>
+                            <m:rPr>
+                              <m:sty m:val="p"/>
+                            </m:rPr>
+                            <m:t>−</m:t>
+                          </m:r>
+                          <m:sSub>
+                            <m:e>
+                              <m:r>
+                                <m:t>η</m:t>
+                              </m:r>
+                            </m:e>
+                            <m:sub>
+                              <m:r>
+                                <m:t>0</m:t>
+                              </m:r>
+                            </m:sub>
+                          </m:sSub>
+                        </m:e>
+                      </m:d>
                       <m:r>
                         <m:rPr>
                           <m:sty m:val="p"/>
@@ -3762,13 +5191,173 @@
                         <m:t>=</m:t>
                       </m:r>
                       <m:r>
-                        <m:t>Y</m:t>
+                        <m:t>0</m:t>
+                      </m:r>
+                    </m:oMath>
+                  </m:oMathPara>
+                </a14:m>
+              </a:p>
+              <a:p>
+                <a:pPr lvl="0" indent="0" marL="0">
+                  <a:buNone/>
+                </a:pPr>
+                <a:r>
+                  <a:rPr/>
+                  <a:t>Consequently small errors in </a:t>
+                </a:r>
+                <a14:m>
+                  <m:oMath xmlns:m="http://schemas.openxmlformats.org/officeDocument/2006/math">
+                    <m:acc>
+                      <m:accPr>
+                        <m:chr m:val="̂"/>
+                      </m:accPr>
+                      <m:e>
+                        <m:r>
+                          <m:t>η</m:t>
+                        </m:r>
+                      </m:e>
+                    </m:acc>
+                  </m:oMath>
+                </a14:m>
+                <a:r>
+                  <a:rPr/>
+                  <a:t> have only a </a:t>
+                </a:r>
+                <a:r>
+                  <a:rPr b="1"/>
+                  <a:t>second-order</a:t>
+                </a:r>
+                <a:r>
+                  <a:rPr/>
+                  <a:t> effect on </a:t>
+                </a:r>
+                <a14:m>
+                  <m:oMath xmlns:m="http://schemas.openxmlformats.org/officeDocument/2006/math">
+                    <m:acc>
+                      <m:accPr>
+                        <m:chr m:val="̂"/>
+                      </m:accPr>
+                      <m:e>
+                        <m:r>
+                          <m:t>θ</m:t>
+                        </m:r>
+                      </m:e>
+                    </m:acc>
+                  </m:oMath>
+                </a14:m>
+                <a:r>
+                  <a:rPr/>
+                  <a:t>.</a:t>
+                </a:r>
+              </a:p>
+            </p:txBody>
+          </p:sp>
+        </mc:Choice>
+      </mc:AlternateContent>
+    </p:spTree>
+  </p:cSld>
+</p:sld>
+</file>
+
+<file path=ppt/slides/slide17.xml><?xml version="1.0" encoding="utf-8"?>
+<p:sld xmlns:a="http://schemas.openxmlformats.org/drawingml/2006/main" xmlns:r="http://schemas.openxmlformats.org/officeDocument/2006/relationships" xmlns:p="http://schemas.openxmlformats.org/presentationml/2006/main">
+  <p:cSld>
+    <p:spTree>
+      <p:nvGrpSpPr>
+        <p:cNvPr id="1" name=""/>
+        <p:cNvGrpSpPr/>
+        <p:nvPr/>
+      </p:nvGrpSpPr>
+      <p:grpSpPr>
+        <a:xfrm>
+          <a:off x="0" y="0"/>
+          <a:ext cx="0" cy="0"/>
+          <a:chOff x="0" y="0"/>
+          <a:chExt cx="0" cy="0"/>
+        </a:xfrm>
+      </p:grpSpPr>
+      <p:sp>
+        <p:nvSpPr>
+          <p:cNvPr id="2" name="Title 1"/>
+          <p:cNvSpPr>
+            <a:spLocks noGrp="1"/>
+          </p:cNvSpPr>
+          <p:nvPr>
+            <p:ph type="title"/>
+          </p:nvPr>
+        </p:nvSpPr>
+        <p:spPr/>
+        <p:txBody>
+          <a:bodyPr/>
+          <a:lstStyle/>
+          <a:p>
+            <a:pPr lvl="0" indent="0" marL="0">
+              <a:buNone/>
+            </a:pPr>
+            <a:r>
+              <a:rPr/>
+              <a:t>Two slow rates multiply</a:t>
+            </a:r>
+          </a:p>
+        </p:txBody>
+      </p:sp>
+      <mc:AlternateContent xmlns:mc="http://schemas.openxmlformats.org/markup-compatibility/2006">
+        <mc:Choice xmlns:a14="http://schemas.microsoft.com/office/drawing/2010/main" Requires="a14">
+          <p:sp>
+            <p:nvSpPr>
+              <p:cNvPr id="3" name="Content Placeholder 2"/>
+              <p:cNvSpPr>
+                <a:spLocks noGrp="1"/>
+              </p:cNvSpPr>
+              <p:nvPr>
+                <p:ph idx="1"/>
+              </p:nvPr>
+            </p:nvSpPr>
+            <p:spPr/>
+            <p:txBody>
+              <a:bodyPr/>
+              <a:lstStyle/>
+              <a:p>
+                <a:pPr lvl="0" indent="0" marL="0">
+                  <a:buNone/>
+                </a:pPr>
+                <a:r>
+                  <a:rPr/>
+                  <a:t>The bias term becomes of order</a:t>
+                </a:r>
+              </a:p>
+              <a:p>
+                <a:pPr lvl="0" indent="0" marL="0">
+                  <a:buNone/>
+                </a:pPr>
+                <a14:m>
+                  <m:oMathPara xmlns:m="http://schemas.openxmlformats.org/officeDocument/2006/math">
+                    <m:oMathParaPr>
+                      <m:jc m:val="center"/>
+                    </m:oMathParaPr>
+                    <m:oMath>
+                      <m:rad>
+                        <m:radPr>
+                          <m:degHide m:val="on"/>
+                        </m:radPr>
+                        <m:deg/>
+                        <m:e>
+                          <m:r>
+                            <m:t>n</m:t>
+                          </m:r>
+                        </m:e>
+                      </m:rad>
+                      <m:r>
+                        <m:rPr>
+                          <m:sty m:val="p"/>
+                        </m:rPr>
+                        <m:t>×</m:t>
                       </m:r>
                       <m:r>
                         <m:rPr>
                           <m:sty m:val="p"/>
                         </m:rPr>
-                        <m:t>−</m:t>
+                        <m:t>∥</m:t>
                       </m:r>
                       <m:acc>
                         <m:accPr>
@@ -3778,50 +5367,8 @@
                           <m:r>
                             <m:rPr>
                               <m:sty m:val="p"/>
-                              <m:scr m:val="double-struck"/>
                             </m:rPr>
-                            <m:t>E</m:t>
-                          </m:r>
-                        </m:e>
-                      </m:acc>
-                      <m:d>
-                        <m:dPr>
-                          <m:begChr m:val="["/>
-                          <m:sepChr m:val=""/>
-                          <m:endChr m:val="]"/>
-                          <m:grow/>
-                        </m:dPr>
-                        <m:e>
-                          <m:r>
-                            <m:t>Y</m:t>
-                          </m:r>
-                          <m:r>
-                            <m:rPr>
-                              <m:sty m:val="p"/>
-                            </m:rPr>
-                            <m:t>∣</m:t>
-                          </m:r>
-                          <m:r>
-                            <m:t>X</m:t>
-                          </m:r>
-                        </m:e>
-                      </m:d>
-                      <m:r>
-                        <m:rPr>
-                          <m:sty m:val="p"/>
-                        </m:rPr>
-                        <m:t>,</m:t>
-                      </m:r>
-                      <m:r>
-                        <m:t>  </m:t>
-                      </m:r>
-                      <m:acc>
-                        <m:accPr>
-                          <m:chr m:val="̃"/>
-                        </m:accPr>
-                        <m:e>
-                          <m:r>
-                            <m:t>D</m:t>
+                            <m:t>ℓ</m:t>
                           </m:r>
                         </m:e>
                       </m:acc>
@@ -3829,16 +5376,40 @@
                         <m:rPr>
                           <m:sty m:val="p"/>
                         </m:rPr>
-                        <m:t>=</m:t>
+                        <m:t>−</m:t>
                       </m:r>
+                      <m:sSub>
+                        <m:e>
+                          <m:r>
+                            <m:rPr>
+                              <m:sty m:val="p"/>
+                            </m:rPr>
+                            <m:t>ℓ</m:t>
+                          </m:r>
+                        </m:e>
+                        <m:sub>
+                          <m:r>
+                            <m:t>0</m:t>
+                          </m:r>
+                        </m:sub>
+                      </m:sSub>
                       <m:r>
-                        <m:t>D</m:t>
+                        <m:rPr>
+                          <m:sty m:val="p"/>
+                        </m:rPr>
+                        <m:t>∥</m:t>
                       </m:r>
                       <m:r>
                         <m:rPr>
                           <m:sty m:val="p"/>
                         </m:rPr>
-                        <m:t>−</m:t>
+                        <m:t>×</m:t>
+                      </m:r>
+                      <m:r>
+                        <m:rPr>
+                          <m:sty m:val="p"/>
+                        </m:rPr>
+                        <m:t>∥</m:t>
                       </m:r>
                       <m:acc>
                         <m:accPr>
@@ -3846,23 +5417,34 @@
                         </m:accPr>
                         <m:e>
                           <m:r>
-                            <m:t>e</m:t>
+                            <m:t>m</m:t>
                           </m:r>
                         </m:e>
                       </m:acc>
-                      <m:d>
-                        <m:dPr>
-                          <m:begChr m:val="("/>
-                          <m:sepChr m:val=""/>
-                          <m:endChr m:val=")"/>
-                          <m:grow/>
-                        </m:dPr>
+                      <m:r>
+                        <m:rPr>
+                          <m:sty m:val="p"/>
+                        </m:rPr>
+                        <m:t>−</m:t>
+                      </m:r>
+                      <m:sSub>
                         <m:e>
                           <m:r>
-                            <m:t>X</m:t>
+                            <m:t>m</m:t>
                           </m:r>
                         </m:e>
-                      </m:d>
+                        <m:sub>
+                          <m:r>
+                            <m:t>0</m:t>
+                          </m:r>
+                        </m:sub>
+                      </m:sSub>
+                      <m:r>
+                        <m:rPr>
+                          <m:sty m:val="p"/>
+                        </m:rPr>
+                        <m:t>∥</m:t>
+                      </m:r>
                     </m:oMath>
                   </m:oMathPara>
                 </a14:m>
@@ -3873,45 +5455,692 @@
                 </a:pPr>
                 <a:r>
                   <a:rPr/>
-                  <a:t>then regress </a:t>
+                  <a:t>so it vanishes provided each nuisance converges faster than </a:t>
                 </a:r>
                 <a14:m>
                   <m:oMath xmlns:m="http://schemas.openxmlformats.org/officeDocument/2006/math">
-                    <m:acc>
-                      <m:accPr>
-                        <m:chr m:val="̃"/>
-                      </m:accPr>
+                    <m:sSup>
+                      <m:e>
+                        <m:r>
+                          <m:t>n</m:t>
+                        </m:r>
+                      </m:e>
+                      <m:sup>
+                        <m:r>
+                          <m:rPr>
+                            <m:sty m:val="p"/>
+                          </m:rPr>
+                          <m:t>−</m:t>
+                        </m:r>
+                        <m:r>
+                          <m:t>1</m:t>
+                        </m:r>
+                        <m:r>
+                          <m:rPr>
+                            <m:sty m:val="p"/>
+                          </m:rPr>
+                          <m:t>/</m:t>
+                        </m:r>
+                        <m:r>
+                          <m:t>4</m:t>
+                        </m:r>
+                      </m:sup>
+                    </m:sSup>
+                  </m:oMath>
+                </a14:m>
+                <a:r>
+                  <a:rPr/>
+                  <a:t> — a rate lasso, forests and boosting </a:t>
+                </a:r>
+                <a:r>
+                  <a:rPr b="1"/>
+                  <a:t>can</a:t>
+                </a:r>
+                <a:r>
+                  <a:rPr/>
+                  <a:t> achieve under reasonable conditions.</a:t>
+                </a:r>
+              </a:p>
+              <a:p>
+                <a:pPr lvl="0" indent="0" marL="0">
+                  <a:buNone/>
+                </a:pPr>
+                <a:r>
+                  <a:rPr b="1"/>
+                  <a:t>Note the structure: two slow rates multiply into one fast enough rate.</a:t>
+                </a:r>
+                <a:r>
+                  <a:rPr/>
+                  <a:t> That is the whole trick, and it is why the method is called </a:t>
+                </a:r>
+                <a:r>
+                  <a:rPr i="1"/>
+                  <a:t>double</a:t>
+                </a:r>
+                <a:r>
+                  <a:rPr/>
+                  <a:t>.</a:t>
+                </a:r>
+              </a:p>
+            </p:txBody>
+          </p:sp>
+        </mc:Choice>
+      </mc:AlternateContent>
+    </p:spTree>
+  </p:cSld>
+</p:sld>
+</file>
+
+<file path=ppt/slides/slide18.xml><?xml version="1.0" encoding="utf-8"?>
+<p:sld xmlns:a="http://schemas.openxmlformats.org/drawingml/2006/main" xmlns:r="http://schemas.openxmlformats.org/officeDocument/2006/relationships" xmlns:p="http://schemas.openxmlformats.org/presentationml/2006/main">
+  <p:cSld>
+    <p:spTree>
+      <p:nvGrpSpPr>
+        <p:cNvPr id="1" name=""/>
+        <p:cNvGrpSpPr/>
+        <p:nvPr/>
+      </p:nvGrpSpPr>
+      <p:grpSpPr>
+        <a:xfrm>
+          <a:off x="0" y="0"/>
+          <a:ext cx="0" cy="0"/>
+          <a:chOff x="0" y="0"/>
+          <a:chExt cx="0" cy="0"/>
+        </a:xfrm>
+      </p:grpSpPr>
+      <p:sp>
+        <p:nvSpPr>
+          <p:cNvPr id="2" name="Title 1"/>
+          <p:cNvSpPr>
+            <a:spLocks noGrp="1"/>
+          </p:cNvSpPr>
+          <p:nvPr>
+            <p:ph type="title"/>
+          </p:nvPr>
+        </p:nvSpPr>
+        <p:spPr>
+          <a:xfrm>
+            <a:off x="722313" y="3305176"/>
+            <a:ext cx="7772400" cy="1021556"/>
+          </a:xfrm>
+        </p:spPr>
+        <p:txBody>
+          <a:bodyPr/>
+          <a:lstStyle/>
+          <a:p>
+            <a:pPr lvl="0" indent="0" marL="0">
+              <a:buNone/>
+            </a:pPr>
+            <a:r>
+              <a:rPr/>
+              <a:t>10.4 Cross-fitting</a:t>
+            </a:r>
+          </a:p>
+        </p:txBody>
+      </p:sp>
+    </p:spTree>
+  </p:cSld>
+</p:sld>
+</file>
+
+<file path=ppt/slides/slide19.xml><?xml version="1.0" encoding="utf-8"?>
+<p:sld xmlns:a="http://schemas.openxmlformats.org/drawingml/2006/main" xmlns:r="http://schemas.openxmlformats.org/officeDocument/2006/relationships" xmlns:p="http://schemas.openxmlformats.org/presentationml/2006/main">
+  <p:cSld>
+    <p:spTree>
+      <p:nvGrpSpPr>
+        <p:cNvPr id="1" name=""/>
+        <p:cNvGrpSpPr/>
+        <p:nvPr/>
+      </p:nvGrpSpPr>
+      <p:grpSpPr>
+        <a:xfrm>
+          <a:off x="0" y="0"/>
+          <a:ext cx="0" cy="0"/>
+          <a:chOff x="0" y="0"/>
+          <a:chExt cx="0" cy="0"/>
+        </a:xfrm>
+      </p:grpSpPr>
+      <p:sp>
+        <p:nvSpPr>
+          <p:cNvPr id="2" name="Title 1"/>
+          <p:cNvSpPr>
+            <a:spLocks noGrp="1"/>
+          </p:cNvSpPr>
+          <p:nvPr>
+            <p:ph type="title"/>
+          </p:nvPr>
+        </p:nvSpPr>
+        <p:spPr/>
+        <p:txBody>
+          <a:bodyPr/>
+          <a:lstStyle/>
+          <a:p>
+            <a:pPr lvl="0" indent="0" marL="0">
+              <a:buNone/>
+            </a:pPr>
+            <a:r>
+              <a:rPr/>
+              <a:t>The procedure</a:t>
+            </a:r>
+          </a:p>
+        </p:txBody>
+      </p:sp>
+      <mc:AlternateContent xmlns:mc="http://schemas.openxmlformats.org/markup-compatibility/2006">
+        <mc:Choice xmlns:a14="http://schemas.microsoft.com/office/drawing/2010/main" Requires="a14">
+          <p:sp>
+            <p:nvSpPr>
+              <p:cNvPr id="3" name="Content Placeholder 2"/>
+              <p:cNvSpPr>
+                <a:spLocks noGrp="1"/>
+              </p:cNvSpPr>
+              <p:nvPr>
+                <p:ph idx="1"/>
+              </p:nvPr>
+            </p:nvSpPr>
+            <p:spPr/>
+            <p:txBody>
+              <a:bodyPr/>
+              <a:lstStyle/>
+              <a:p>
+                <a:pPr lvl="0" indent="0" marL="0">
+                  <a:buNone/>
+                </a:pPr>
+                <a:r>
+                  <a:rPr/>
+                  <a:t>Split into </a:t>
+                </a:r>
+                <a14:m>
+                  <m:oMath xmlns:m="http://schemas.openxmlformats.org/officeDocument/2006/math">
+                    <m:r>
+                      <m:t>K</m:t>
+                    </m:r>
+                  </m:oMath>
+                </a14:m>
+                <a:r>
+                  <a:rPr/>
+                  <a:t> folds. For each </a:t>
+                </a:r>
+                <a14:m>
+                  <m:oMath xmlns:m="http://schemas.openxmlformats.org/officeDocument/2006/math">
+                    <m:r>
+                      <m:t>k</m:t>
+                    </m:r>
+                  </m:oMath>
+                </a14:m>
+                <a:r>
+                  <a:rPr/>
+                  <a:t>:</a:t>
+                </a:r>
+              </a:p>
+              <a:p>
+                <a:pPr lvl="0" indent="-342900" marL="342900">
+                  <a:buAutoNum type="arabicPeriod"/>
+                </a:pPr>
+                <a:r>
+                  <a:rPr/>
+                  <a:t>Estimate </a:t>
+                </a:r>
+                <a14:m>
+                  <m:oMath xmlns:m="http://schemas.openxmlformats.org/officeDocument/2006/math">
+                    <m:sSup>
+                      <m:e>
+                        <m:acc>
+                          <m:accPr>
+                            <m:chr m:val="̂"/>
+                          </m:accPr>
+                          <m:e>
+                            <m:r>
+                              <m:rPr>
+                                <m:sty m:val="p"/>
+                              </m:rPr>
+                              <m:t>ℓ</m:t>
+                            </m:r>
+                          </m:e>
+                        </m:acc>
+                      </m:e>
+                      <m:sup>
+                        <m:d>
+                          <m:dPr>
+                            <m:begChr m:val="("/>
+                            <m:sepChr m:val=""/>
+                            <m:endChr m:val=")"/>
+                            <m:grow/>
+                          </m:dPr>
+                          <m:e>
+                            <m:r>
+                              <m:rPr>
+                                <m:sty m:val="p"/>
+                              </m:rPr>
+                              <m:t>−</m:t>
+                            </m:r>
+                            <m:r>
+                              <m:t>k</m:t>
+                            </m:r>
+                          </m:e>
+                        </m:d>
+                      </m:sup>
+                    </m:sSup>
+                  </m:oMath>
+                </a14:m>
+                <a:r>
+                  <a:rPr/>
+                  <a:t> and </a:t>
+                </a:r>
+                <a14:m>
+                  <m:oMath xmlns:m="http://schemas.openxmlformats.org/officeDocument/2006/math">
+                    <m:sSup>
+                      <m:e>
+                        <m:acc>
+                          <m:accPr>
+                            <m:chr m:val="̂"/>
+                          </m:accPr>
+                          <m:e>
+                            <m:r>
+                              <m:t>m</m:t>
+                            </m:r>
+                          </m:e>
+                        </m:acc>
+                      </m:e>
+                      <m:sup>
+                        <m:d>
+                          <m:dPr>
+                            <m:begChr m:val="("/>
+                            <m:sepChr m:val=""/>
+                            <m:endChr m:val=")"/>
+                            <m:grow/>
+                          </m:dPr>
+                          <m:e>
+                            <m:r>
+                              <m:rPr>
+                                <m:sty m:val="p"/>
+                              </m:rPr>
+                              <m:t>−</m:t>
+                            </m:r>
+                            <m:r>
+                              <m:t>k</m:t>
+                            </m:r>
+                          </m:e>
+                        </m:d>
+                      </m:sup>
+                    </m:sSup>
+                  </m:oMath>
+                </a14:m>
+                <a:r>
+                  <a:rPr/>
+                  <a:t> on all folds </a:t>
+                </a:r>
+                <a:r>
+                  <a:rPr b="1"/>
+                  <a:t>except</a:t>
+                </a:r>
+                <a:r>
+                  <a:rPr/>
+                  <a:t> </a:t>
+                </a:r>
+                <a14:m>
+                  <m:oMath xmlns:m="http://schemas.openxmlformats.org/officeDocument/2006/math">
+                    <m:r>
+                      <m:t>k</m:t>
+                    </m:r>
+                  </m:oMath>
+                </a14:m>
+              </a:p>
+              <a:p>
+                <a:pPr lvl="0" indent="-342900" marL="342900">
+                  <a:buAutoNum type="arabicPeriod"/>
+                </a:pPr>
+                <a:r>
+                  <a:rPr/>
+                  <a:t>Form residuals </a:t>
+                </a:r>
+                <a:r>
+                  <a:rPr b="1"/>
+                  <a:t>on fold </a:t>
+                </a:r>
+                <a14:m>
+                  <m:oMath xmlns:m="http://schemas.openxmlformats.org/officeDocument/2006/math">
+                    <m:r>
+                      <m:t>k</m:t>
+                    </m:r>
+                  </m:oMath>
+                </a14:m>
+                <a:r>
+                  <a:rPr/>
+                  <a:t>: </a:t>
+                </a:r>
+                <a14:m>
+                  <m:oMath xmlns:m="http://schemas.openxmlformats.org/officeDocument/2006/math">
+                    <m:sSub>
+                      <m:e>
+                        <m:acc>
+                          <m:accPr>
+                            <m:chr m:val="̃"/>
+                          </m:accPr>
+                          <m:e>
+                            <m:r>
+                              <m:t>Y</m:t>
+                            </m:r>
+                          </m:e>
+                        </m:acc>
+                      </m:e>
+                      <m:sub>
+                        <m:r>
+                          <m:t>i</m:t>
+                        </m:r>
+                      </m:sub>
+                    </m:sSub>
+                    <m:r>
+                      <m:rPr>
+                        <m:sty m:val="p"/>
+                      </m:rPr>
+                      <m:t>=</m:t>
+                    </m:r>
+                    <m:sSub>
                       <m:e>
                         <m:r>
                           <m:t>Y</m:t>
                         </m:r>
                       </m:e>
-                    </m:acc>
+                      <m:sub>
+                        <m:r>
+                          <m:t>i</m:t>
+                        </m:r>
+                      </m:sub>
+                    </m:sSub>
+                    <m:r>
+                      <m:rPr>
+                        <m:sty m:val="p"/>
+                      </m:rPr>
+                      <m:t>−</m:t>
+                    </m:r>
+                    <m:sSup>
+                      <m:e>
+                        <m:acc>
+                          <m:accPr>
+                            <m:chr m:val="̂"/>
+                          </m:accPr>
+                          <m:e>
+                            <m:r>
+                              <m:rPr>
+                                <m:sty m:val="p"/>
+                              </m:rPr>
+                              <m:t>ℓ</m:t>
+                            </m:r>
+                          </m:e>
+                        </m:acc>
+                      </m:e>
+                      <m:sup>
+                        <m:d>
+                          <m:dPr>
+                            <m:begChr m:val="("/>
+                            <m:sepChr m:val=""/>
+                            <m:endChr m:val=")"/>
+                            <m:grow/>
+                          </m:dPr>
+                          <m:e>
+                            <m:r>
+                              <m:rPr>
+                                <m:sty m:val="p"/>
+                              </m:rPr>
+                              <m:t>−</m:t>
+                            </m:r>
+                            <m:r>
+                              <m:t>k</m:t>
+                            </m:r>
+                          </m:e>
+                        </m:d>
+                      </m:sup>
+                    </m:sSup>
+                    <m:d>
+                      <m:dPr>
+                        <m:begChr m:val="("/>
+                        <m:sepChr m:val=""/>
+                        <m:endChr m:val=")"/>
+                        <m:grow/>
+                      </m:dPr>
+                      <m:e>
+                        <m:sSub>
+                          <m:e>
+                            <m:r>
+                              <m:t>X</m:t>
+                            </m:r>
+                          </m:e>
+                          <m:sub>
+                            <m:r>
+                              <m:t>i</m:t>
+                            </m:r>
+                          </m:sub>
+                        </m:sSub>
+                      </m:e>
+                    </m:d>
                   </m:oMath>
                 </a14:m>
                 <a:r>
                   <a:rPr/>
-                  <a:t> on </a:t>
+                  <a:t>, </a:t>
                 </a:r>
                 <a14:m>
                   <m:oMath xmlns:m="http://schemas.openxmlformats.org/officeDocument/2006/math">
-                    <m:acc>
-                      <m:accPr>
-                        <m:chr m:val="̃"/>
-                      </m:accPr>
+                    <m:sSub>
+                      <m:e>
+                        <m:acc>
+                          <m:accPr>
+                            <m:chr m:val="̃"/>
+                          </m:accPr>
+                          <m:e>
+                            <m:r>
+                              <m:t>D</m:t>
+                            </m:r>
+                          </m:e>
+                        </m:acc>
+                      </m:e>
+                      <m:sub>
+                        <m:r>
+                          <m:t>i</m:t>
+                        </m:r>
+                      </m:sub>
+                    </m:sSub>
+                    <m:r>
+                      <m:rPr>
+                        <m:sty m:val="p"/>
+                      </m:rPr>
+                      <m:t>=</m:t>
+                    </m:r>
+                    <m:sSub>
                       <m:e>
                         <m:r>
                           <m:t>D</m:t>
                         </m:r>
                       </m:e>
-                    </m:acc>
+                      <m:sub>
+                        <m:r>
+                          <m:t>i</m:t>
+                        </m:r>
+                      </m:sub>
+                    </m:sSub>
+                    <m:r>
+                      <m:rPr>
+                        <m:sty m:val="p"/>
+                      </m:rPr>
+                      <m:t>−</m:t>
+                    </m:r>
+                    <m:sSup>
+                      <m:e>
+                        <m:acc>
+                          <m:accPr>
+                            <m:chr m:val="̂"/>
+                          </m:accPr>
+                          <m:e>
+                            <m:r>
+                              <m:t>m</m:t>
+                            </m:r>
+                          </m:e>
+                        </m:acc>
+                      </m:e>
+                      <m:sup>
+                        <m:d>
+                          <m:dPr>
+                            <m:begChr m:val="("/>
+                            <m:sepChr m:val=""/>
+                            <m:endChr m:val=")"/>
+                            <m:grow/>
+                          </m:dPr>
+                          <m:e>
+                            <m:r>
+                              <m:rPr>
+                                <m:sty m:val="p"/>
+                              </m:rPr>
+                              <m:t>−</m:t>
+                            </m:r>
+                            <m:r>
+                              <m:t>k</m:t>
+                            </m:r>
+                          </m:e>
+                        </m:d>
+                      </m:sup>
+                    </m:sSup>
+                    <m:d>
+                      <m:dPr>
+                        <m:begChr m:val="("/>
+                        <m:sepChr m:val=""/>
+                        <m:endChr m:val=")"/>
+                        <m:grow/>
+                      </m:dPr>
+                      <m:e>
+                        <m:sSub>
+                          <m:e>
+                            <m:r>
+                              <m:t>X</m:t>
+                            </m:r>
+                          </m:e>
+                          <m:sub>
+                            <m:r>
+                              <m:t>i</m:t>
+                            </m:r>
+                          </m:sub>
+                        </m:sSub>
+                      </m:e>
+                    </m:d>
                   </m:oMath>
                 </a14:m>
-                <a:r>
-                  <a:rPr/>
-                  <a:t>:</a:t>
-                </a:r>
               </a:p>
+            </p:txBody>
+          </p:sp>
+        </mc:Choice>
+      </mc:AlternateContent>
+    </p:spTree>
+  </p:cSld>
+</p:sld>
+</file>
+
+<file path=ppt/slides/slide2.xml><?xml version="1.0" encoding="utf-8"?>
+<p:sld xmlns:a="http://schemas.openxmlformats.org/drawingml/2006/main" xmlns:r="http://schemas.openxmlformats.org/officeDocument/2006/relationships" xmlns:p="http://schemas.openxmlformats.org/presentationml/2006/main">
+  <p:cSld>
+    <p:spTree>
+      <p:nvGrpSpPr>
+        <p:cNvPr id="1" name=""/>
+        <p:cNvGrpSpPr/>
+        <p:nvPr/>
+      </p:nvGrpSpPr>
+      <p:grpSpPr>
+        <a:xfrm>
+          <a:off x="0" y="0"/>
+          <a:ext cx="0" cy="0"/>
+          <a:chOff x="0" y="0"/>
+          <a:chExt cx="0" cy="0"/>
+        </a:xfrm>
+      </p:grpSpPr>
+      <p:sp>
+        <p:nvSpPr>
+          <p:cNvPr id="3" name="Content Placeholder 2"/>
+          <p:cNvSpPr>
+            <a:spLocks noGrp="1"/>
+          </p:cNvSpPr>
+          <p:nvPr>
+            <p:ph idx="1"/>
+          </p:nvPr>
+        </p:nvSpPr>
+        <p:spPr/>
+        <p:txBody>
+          <a:bodyPr/>
+          <a:lstStyle/>
+          <a:p>
+            <a:pPr lvl="0" indent="0" marL="0">
+              <a:spcBef>
+                <a:spcPts val="3000"/>
+              </a:spcBef>
+              <a:buNone/>
+            </a:pPr>
+            <a:r>
+              <a:rPr b="1"/>
+              <a:t>You have a superb predictive model. Why can’t you choose a policy with it?</a:t>
+            </a:r>
+          </a:p>
+        </p:txBody>
+      </p:sp>
+    </p:spTree>
+  </p:cSld>
+</p:sld>
+</file>
+
+<file path=ppt/slides/slide20.xml><?xml version="1.0" encoding="utf-8"?>
+<p:sld xmlns:a="http://schemas.openxmlformats.org/drawingml/2006/main" xmlns:r="http://schemas.openxmlformats.org/officeDocument/2006/relationships" xmlns:p="http://schemas.openxmlformats.org/presentationml/2006/main">
+  <p:cSld>
+    <p:spTree>
+      <p:nvGrpSpPr>
+        <p:cNvPr id="1" name=""/>
+        <p:cNvGrpSpPr/>
+        <p:nvPr/>
+      </p:nvGrpSpPr>
+      <p:grpSpPr>
+        <a:xfrm>
+          <a:off x="0" y="0"/>
+          <a:ext cx="0" cy="0"/>
+          <a:chOff x="0" y="0"/>
+          <a:chExt cx="0" cy="0"/>
+        </a:xfrm>
+      </p:grpSpPr>
+      <p:sp>
+        <p:nvSpPr>
+          <p:cNvPr id="2" name="Title 1"/>
+          <p:cNvSpPr>
+            <a:spLocks noGrp="1"/>
+          </p:cNvSpPr>
+          <p:nvPr>
+            <p:ph type="title"/>
+          </p:nvPr>
+        </p:nvSpPr>
+        <p:spPr/>
+        <p:txBody>
+          <a:bodyPr/>
+          <a:lstStyle/>
+          <a:p>
+            <a:pPr lvl="0" indent="0" marL="0">
+              <a:buNone/>
+            </a:pPr>
+            <a:r>
+              <a:rPr/>
+              <a:t>Then pool</a:t>
+            </a:r>
+          </a:p>
+        </p:txBody>
+      </p:sp>
+      <mc:AlternateContent xmlns:mc="http://schemas.openxmlformats.org/markup-compatibility/2006">
+        <mc:Choice xmlns:a14="http://schemas.microsoft.com/office/drawing/2010/main" Requires="a14">
+          <p:sp>
+            <p:nvSpPr>
+              <p:cNvPr id="3" name="Content Placeholder 2"/>
+              <p:cNvSpPr>
+                <a:spLocks noGrp="1"/>
+              </p:cNvSpPr>
+              <p:nvPr>
+                <p:ph idx="1"/>
+              </p:nvPr>
+            </p:nvSpPr>
+            <p:spPr/>
+            <p:txBody>
+              <a:bodyPr/>
+              <a:lstStyle/>
               <a:p>
                 <a:pPr lvl="0" indent="0" marL="0">
                   <a:buNone/>
@@ -3928,7 +6157,7 @@
                         </m:accPr>
                         <m:e>
                           <m:r>
-                            <m:t>τ</m:t>
+                            <m:t>θ</m:t>
                           </m:r>
                         </m:e>
                       </m:acc>
@@ -4041,9 +6270,6 @@
                                 </m:sub>
                                 <m:sup>
                                   <m:r>
-                                    <m:t> </m:t>
-                                  </m:r>
-                                  <m:r>
                                     <m:t>2</m:t>
                                   </m:r>
                                 </m:sup>
@@ -4060,2491 +6286,294 @@
                 <a:pPr lvl="0" indent="0" marL="0">
                   <a:buNone/>
                 </a:pPr>
+                <a14:m>
+                  <m:oMathPara xmlns:m="http://schemas.openxmlformats.org/officeDocument/2006/math">
+                    <m:oMathParaPr>
+                      <m:jc m:val="center"/>
+                    </m:oMathParaPr>
+                    <m:oMath>
+                      <m:sSup>
+                        <m:e>
+                          <m:acc>
+                            <m:accPr>
+                              <m:chr m:val="̂"/>
+                            </m:accPr>
+                            <m:e>
+                              <m:r>
+                                <m:t>σ</m:t>
+                              </m:r>
+                            </m:e>
+                          </m:acc>
+                        </m:e>
+                        <m:sup>
+                          <m:r>
+                            <m:t>2</m:t>
+                          </m:r>
+                        </m:sup>
+                      </m:sSup>
+                      <m:r>
+                        <m:rPr>
+                          <m:sty m:val="p"/>
+                        </m:rPr>
+                        <m:t>=</m:t>
+                      </m:r>
+                      <m:f>
+                        <m:fPr>
+                          <m:type m:val="bar"/>
+                        </m:fPr>
+                        <m:num>
+                          <m:f>
+                            <m:fPr>
+                              <m:type m:val="bar"/>
+                            </m:fPr>
+                            <m:num>
+                              <m:r>
+                                <m:t>1</m:t>
+                              </m:r>
+                            </m:num>
+                            <m:den>
+                              <m:r>
+                                <m:t>n</m:t>
+                              </m:r>
+                            </m:den>
+                          </m:f>
+                          <m:nary>
+                            <m:naryPr>
+                              <m:chr m:val="∑"/>
+                              <m:limLoc m:val="undOvr"/>
+                              <m:subHide m:val="off"/>
+                              <m:supHide m:val="on"/>
+                            </m:naryPr>
+                            <m:sub>
+                              <m:r>
+                                <m:t>i</m:t>
+                              </m:r>
+                            </m:sub>
+                            <m:sup>
+                              <m:r>
+                                <m:t>​</m:t>
+                              </m:r>
+                            </m:sup>
+                            <m:e>
+                              <m:sSubSup>
+                                <m:e>
+                                  <m:acc>
+                                    <m:accPr>
+                                      <m:chr m:val="̃"/>
+                                    </m:accPr>
+                                    <m:e>
+                                      <m:r>
+                                        <m:t>D</m:t>
+                                      </m:r>
+                                    </m:e>
+                                  </m:acc>
+                                </m:e>
+                                <m:sub>
+                                  <m:r>
+                                    <m:t>i</m:t>
+                                  </m:r>
+                                </m:sub>
+                                <m:sup>
+                                  <m:r>
+                                    <m:t>2</m:t>
+                                  </m:r>
+                                </m:sup>
+                              </m:sSubSup>
+                            </m:e>
+                          </m:nary>
+                          <m:sSup>
+                            <m:e>
+                              <m:d>
+                                <m:dPr>
+                                  <m:begChr m:val="("/>
+                                  <m:sepChr m:val=""/>
+                                  <m:endChr m:val=")"/>
+                                  <m:grow/>
+                                </m:dPr>
+                                <m:e>
+                                  <m:sSub>
+                                    <m:e>
+                                      <m:acc>
+                                        <m:accPr>
+                                          <m:chr m:val="̃"/>
+                                        </m:accPr>
+                                        <m:e>
+                                          <m:r>
+                                            <m:t>Y</m:t>
+                                          </m:r>
+                                        </m:e>
+                                      </m:acc>
+                                    </m:e>
+                                    <m:sub>
+                                      <m:r>
+                                        <m:t>i</m:t>
+                                      </m:r>
+                                    </m:sub>
+                                  </m:sSub>
+                                  <m:r>
+                                    <m:rPr>
+                                      <m:sty m:val="p"/>
+                                    </m:rPr>
+                                    <m:t>−</m:t>
+                                  </m:r>
+                                  <m:acc>
+                                    <m:accPr>
+                                      <m:chr m:val="̂"/>
+                                    </m:accPr>
+                                    <m:e>
+                                      <m:r>
+                                        <m:t>θ</m:t>
+                                      </m:r>
+                                    </m:e>
+                                  </m:acc>
+                                  <m:sSub>
+                                    <m:e>
+                                      <m:acc>
+                                        <m:accPr>
+                                          <m:chr m:val="̃"/>
+                                        </m:accPr>
+                                        <m:e>
+                                          <m:r>
+                                            <m:t>D</m:t>
+                                          </m:r>
+                                        </m:e>
+                                      </m:acc>
+                                    </m:e>
+                                    <m:sub>
+                                      <m:r>
+                                        <m:t>i</m:t>
+                                      </m:r>
+                                    </m:sub>
+                                  </m:sSub>
+                                </m:e>
+                              </m:d>
+                            </m:e>
+                            <m:sup>
+                              <m:r>
+                                <m:t>2</m:t>
+                              </m:r>
+                            </m:sup>
+                          </m:sSup>
+                        </m:num>
+                        <m:den>
+                          <m:r>
+                            <m:rPr>
+                              <m:sty m:val="p"/>
+                            </m:rPr>
+                            <m:t>(</m:t>
+                          </m:r>
+                          <m:f>
+                            <m:fPr>
+                              <m:type m:val="bar"/>
+                            </m:fPr>
+                            <m:num>
+                              <m:r>
+                                <m:t>1</m:t>
+                              </m:r>
+                            </m:num>
+                            <m:den>
+                              <m:r>
+                                <m:t>n</m:t>
+                              </m:r>
+                            </m:den>
+                          </m:f>
+                          <m:nary>
+                            <m:naryPr>
+                              <m:chr m:val="∑"/>
+                              <m:limLoc m:val="undOvr"/>
+                              <m:subHide m:val="off"/>
+                              <m:supHide m:val="on"/>
+                            </m:naryPr>
+                            <m:sub>
+                              <m:r>
+                                <m:t>i</m:t>
+                              </m:r>
+                            </m:sub>
+                            <m:sup>
+                              <m:r>
+                                <m:t>​</m:t>
+                              </m:r>
+                            </m:sup>
+                            <m:e>
+                              <m:sSubSup>
+                                <m:e>
+                                  <m:acc>
+                                    <m:accPr>
+                                      <m:chr m:val="̃"/>
+                                    </m:accPr>
+                                    <m:e>
+                                      <m:r>
+                                        <m:t>D</m:t>
+                                      </m:r>
+                                    </m:e>
+                                  </m:acc>
+                                </m:e>
+                                <m:sub>
+                                  <m:r>
+                                    <m:t>i</m:t>
+                                  </m:r>
+                                </m:sub>
+                                <m:sup>
+                                  <m:r>
+                                    <m:t>2</m:t>
+                                  </m:r>
+                                </m:sup>
+                              </m:sSubSup>
+                            </m:e>
+                          </m:nary>
+                          <m:sSup>
+                            <m:e>
+                              <m:r>
+                                <m:rPr>
+                                  <m:sty m:val="p"/>
+                                </m:rPr>
+                                <m:t>)</m:t>
+                              </m:r>
+                            </m:e>
+                            <m:sup>
+                              <m:r>
+                                <m:t>2</m:t>
+                              </m:r>
+                            </m:sup>
+                          </m:sSup>
+                        </m:den>
+                      </m:f>
+                    </m:oMath>
+                  </m:oMathPara>
+                </a14:m>
+              </a:p>
+              <a:p>
+                <a:pPr lvl="0" indent="0" marL="0">
+                  <a:buNone/>
+                </a:pPr>
                 <a:r>
                   <a:rPr/>
-                  <a:t>This score is </a:t>
+                  <a:t>Because the nuisance was never fitted on the observation where it is evaluated, </a:t>
                 </a:r>
                 <a:r>
                   <a:rPr b="1"/>
-                  <a:t>Neyman orthogonal</a:t>
-                </a:r>
-                <a:r>
-                  <a:rPr/>
-                  <a:t>: small errors in either nuisance estimate have only second-order effect on </a:t>
+                  <a:t>term </a:t>
                 </a:r>
                 <a14:m>
                   <m:oMath xmlns:m="http://schemas.openxmlformats.org/officeDocument/2006/math">
-                    <m:acc>
-                      <m:accPr>
-                        <m:chr m:val="̂"/>
-                      </m:accPr>
-                      <m:e>
-                        <m:r>
-                          <m:t>τ</m:t>
-                        </m:r>
-                      </m:e>
-                    </m:acc>
+                    <m:r>
+                      <m:t>c</m:t>
+                    </m:r>
                   </m:oMath>
                 </a14:m>
                 <a:r>
+                  <a:rPr b="1"/>
+                  <a:t> vanishes</a:t>
+                </a:r>
+                <a:r>
                   <a:rPr/>
-                  <a:t>. That is the whole trick.</a:t>
+                  <a:t>.</a:t>
                 </a:r>
               </a:p>
             </p:txBody>
           </p:sp>
         </mc:Choice>
       </mc:AlternateContent>
-    </p:spTree>
-  </p:cSld>
-</p:sld>
-</file>
-
-<file path=ppt/slides/slide14.xml><?xml version="1.0" encoding="utf-8"?>
-<p:sld xmlns:a="http://schemas.openxmlformats.org/drawingml/2006/main" xmlns:r="http://schemas.openxmlformats.org/officeDocument/2006/relationships" xmlns:p="http://schemas.openxmlformats.org/presentationml/2006/main">
-  <p:cSld>
-    <p:spTree>
-      <p:nvGrpSpPr>
-        <p:cNvPr id="1" name=""/>
-        <p:cNvGrpSpPr/>
-        <p:nvPr/>
-      </p:nvGrpSpPr>
-      <p:grpSpPr>
-        <a:xfrm>
-          <a:off x="0" y="0"/>
-          <a:ext cx="0" cy="0"/>
-          <a:chOff x="0" y="0"/>
-          <a:chExt cx="0" cy="0"/>
-        </a:xfrm>
-      </p:grpSpPr>
-      <p:sp>
-        <p:nvSpPr>
-          <p:cNvPr id="2" name="Title 1"/>
-          <p:cNvSpPr>
-            <a:spLocks noGrp="1"/>
-          </p:cNvSpPr>
-          <p:nvPr>
-            <p:ph type="title"/>
-          </p:nvPr>
-        </p:nvSpPr>
-        <p:spPr/>
-        <p:txBody>
-          <a:bodyPr/>
-          <a:lstStyle/>
-          <a:p>
-            <a:pPr lvl="0" indent="0" marL="0">
-              <a:buNone/>
-            </a:pPr>
-            <a:r>
-              <a:rPr/>
-              <a:t>Cross-fitting</a:t>
-            </a:r>
-          </a:p>
-        </p:txBody>
-      </p:sp>
-      <mc:AlternateContent xmlns:mc="http://schemas.openxmlformats.org/markup-compatibility/2006">
-        <mc:Choice xmlns:a14="http://schemas.microsoft.com/office/drawing/2010/main" Requires="a14">
-          <p:sp>
-            <p:nvSpPr>
-              <p:cNvPr id="3" name="Content Placeholder 2"/>
-              <p:cNvSpPr>
-                <a:spLocks noGrp="1"/>
-              </p:cNvSpPr>
-              <p:nvPr>
-                <p:ph idx="1"/>
-              </p:nvPr>
-            </p:nvSpPr>
-            <p:spPr/>
-            <p:txBody>
-              <a:bodyPr/>
-              <a:lstStyle/>
-              <a:p>
-                <a:pPr lvl="0" indent="-342900" marL="342900">
-                  <a:buAutoNum type="arabicPeriod"/>
-                </a:pPr>
-                <a:r>
-                  <a:rPr/>
-                  <a:t>Split into </a:t>
-                </a:r>
-                <a14:m>
-                  <m:oMath xmlns:m="http://schemas.openxmlformats.org/officeDocument/2006/math">
-                    <m:r>
-                      <m:t>K</m:t>
-                    </m:r>
-                  </m:oMath>
-                </a14:m>
-                <a:r>
-                  <a:rPr/>
-                  <a:t> folds</a:t>
-                </a:r>
-              </a:p>
-              <a:p>
-                <a:pPr lvl="0" indent="-342900" marL="342900">
-                  <a:buAutoNum type="arabicPeriod"/>
-                </a:pPr>
-                <a:r>
-                  <a:rPr/>
-                  <a:t>Fit the nuisance models on </a:t>
-                </a:r>
-                <a14:m>
-                  <m:oMath xmlns:m="http://schemas.openxmlformats.org/officeDocument/2006/math">
-                    <m:r>
-                      <m:t>K</m:t>
-                    </m:r>
-                    <m:r>
-                      <m:rPr>
-                        <m:sty m:val="p"/>
-                      </m:rPr>
-                      <m:t>−</m:t>
-                    </m:r>
-                    <m:r>
-                      <m:t>1</m:t>
-                    </m:r>
-                  </m:oMath>
-                </a14:m>
-                <a:r>
-                  <a:rPr/>
-                  <a:t> folds</a:t>
-                </a:r>
-              </a:p>
-              <a:p>
-                <a:pPr lvl="0" indent="-342900" marL="342900">
-                  <a:buAutoNum type="arabicPeriod"/>
-                </a:pPr>
-                <a:r>
-                  <a:rPr/>
-                  <a:t>Predict the residuals on the </a:t>
-                </a:r>
-                <a:r>
-                  <a:rPr b="1"/>
-                  <a:t>held-out</a:t>
-                </a:r>
-                <a:r>
-                  <a:rPr/>
-                  <a:t> fold</a:t>
-                </a:r>
-              </a:p>
-              <a:p>
-                <a:pPr lvl="0" indent="-342900" marL="342900">
-                  <a:buAutoNum type="arabicPeriod"/>
-                </a:pPr>
-                <a:r>
-                  <a:rPr/>
-                  <a:t>Rotate, then combine</a:t>
-                </a:r>
-              </a:p>
-              <a:p>
-                <a:pPr lvl="0" indent="0" marL="0">
-                  <a:buNone/>
-                </a:pPr>
-                <a:r>
-                  <a:rPr/>
-                  <a:t>Without this, the nuisance model has seen the rows you estimate the effect from, and the effect inherits its overfitting. With it, </a:t>
-                </a:r>
-                <a14:m>
-                  <m:oMath xmlns:m="http://schemas.openxmlformats.org/officeDocument/2006/math">
-                    <m:acc>
-                      <m:accPr>
-                        <m:chr m:val="̂"/>
-                      </m:accPr>
-                      <m:e>
-                        <m:r>
-                          <m:t>τ</m:t>
-                        </m:r>
-                      </m:e>
-                    </m:acc>
-                  </m:oMath>
-                </a14:m>
-                <a:r>
-                  <a:rPr/>
-                  <a:t> is </a:t>
-                </a:r>
-                <a14:m>
-                  <m:oMath xmlns:m="http://schemas.openxmlformats.org/officeDocument/2006/math">
-                    <m:rad>
-                      <m:radPr>
-                        <m:degHide m:val="on"/>
-                      </m:radPr>
-                      <m:deg/>
-                      <m:e>
-                        <m:r>
-                          <m:t>n</m:t>
-                        </m:r>
-                      </m:e>
-                    </m:rad>
-                  </m:oMath>
-                </a14:m>
-                <a:r>
-                  <a:rPr/>
-                  <a:t>-consistent and asymptotically normal — so a confidence interval means something again.</a:t>
-                </a:r>
-              </a:p>
-            </p:txBody>
-          </p:sp>
-        </mc:Choice>
-      </mc:AlternateContent>
-    </p:spTree>
-  </p:cSld>
-</p:sld>
-</file>
-
-<file path=ppt/slides/slide15.xml><?xml version="1.0" encoding="utf-8"?>
-<p:sld xmlns:a="http://schemas.openxmlformats.org/drawingml/2006/main" xmlns:r="http://schemas.openxmlformats.org/officeDocument/2006/relationships" xmlns:p="http://schemas.openxmlformats.org/presentationml/2006/main">
-  <p:cSld>
-    <p:spTree>
-      <p:nvGrpSpPr>
-        <p:cNvPr id="1" name=""/>
-        <p:cNvGrpSpPr/>
-        <p:nvPr/>
-      </p:nvGrpSpPr>
-      <p:grpSpPr>
-        <a:xfrm>
-          <a:off x="0" y="0"/>
-          <a:ext cx="0" cy="0"/>
-          <a:chOff x="0" y="0"/>
-          <a:chExt cx="0" cy="0"/>
-        </a:xfrm>
-      </p:grpSpPr>
-      <p:sp>
-        <p:nvSpPr>
-          <p:cNvPr id="2" name="Title 1"/>
-          <p:cNvSpPr>
-            <a:spLocks noGrp="1"/>
-          </p:cNvSpPr>
-          <p:nvPr>
-            <p:ph type="title"/>
-          </p:nvPr>
-        </p:nvSpPr>
-        <p:spPr>
-          <a:xfrm>
-            <a:off x="722313" y="3305176"/>
-            <a:ext cx="7772400" cy="1021556"/>
-          </a:xfrm>
-        </p:spPr>
-        <p:txBody>
-          <a:bodyPr/>
-          <a:lstStyle/>
-          <a:p>
-            <a:pPr lvl="0" indent="0" marL="0">
-              <a:buNone/>
-            </a:pPr>
-            <a:r>
-              <a:rPr/>
-              <a:t>The data</a:t>
-            </a:r>
-          </a:p>
-        </p:txBody>
-      </p:sp>
-    </p:spTree>
-  </p:cSld>
-</p:sld>
-</file>
-
-<file path=ppt/slides/slide16.xml><?xml version="1.0" encoding="utf-8"?>
-<p:sld xmlns:a="http://schemas.openxmlformats.org/drawingml/2006/main" xmlns:r="http://schemas.openxmlformats.org/officeDocument/2006/relationships" xmlns:p="http://schemas.openxmlformats.org/presentationml/2006/main">
-  <p:cSld>
-    <p:spTree>
-      <p:nvGrpSpPr>
-        <p:cNvPr id="1" name=""/>
-        <p:cNvGrpSpPr/>
-        <p:nvPr/>
-      </p:nvGrpSpPr>
-      <p:grpSpPr>
-        <a:xfrm>
-          <a:off x="0" y="0"/>
-          <a:ext cx="0" cy="0"/>
-          <a:chOff x="0" y="0"/>
-          <a:chExt cx="0" cy="0"/>
-        </a:xfrm>
-      </p:grpSpPr>
-      <p:sp>
-        <p:nvSpPr>
-          <p:cNvPr id="2" name="Title 1"/>
-          <p:cNvSpPr>
-            <a:spLocks noGrp="1"/>
-          </p:cNvSpPr>
-          <p:nvPr>
-            <p:ph type="title"/>
-          </p:nvPr>
-        </p:nvSpPr>
-        <p:spPr/>
-        <p:txBody>
-          <a:bodyPr/>
-          <a:lstStyle/>
-          <a:p>
-            <a:pPr lvl="0" indent="0" marL="0">
-              <a:buNone/>
-            </a:pPr>
-            <a:r>
-              <a:rPr/>
-              <a:t>Treatment and covariates</a:t>
-            </a:r>
-          </a:p>
-        </p:txBody>
-      </p:sp>
-      <p:sp>
-        <p:nvSpPr>
-          <p:cNvPr id="3" name="Content Placeholder 2"/>
-          <p:cNvSpPr>
-            <a:spLocks noGrp="1"/>
-          </p:cNvSpPr>
-          <p:nvPr>
-            <p:ph idx="1"/>
-          </p:nvPr>
-        </p:nvSpPr>
-        <p:spPr/>
-        <p:txBody>
-          <a:bodyPr/>
-          <a:lstStyle/>
-          <a:p>
-            <a:pPr lvl="0" indent="0">
-              <a:buNone/>
-            </a:pPr>
-            <a:r>
-              <a:rPr b="1">
-                <a:solidFill>
-                  <a:srgbClr val="008000"/>
-                </a:solidFill>
-                <a:latin typeface="Courier"/>
-              </a:rPr>
-              <a:t>import</a:t>
-            </a:r>
-            <a:r>
-              <a:rPr>
-                <a:latin typeface="Courier"/>
-              </a:rPr>
-              <a:t> pandas </a:t>
-            </a:r>
-            <a:r>
-              <a:rPr b="1">
-                <a:solidFill>
-                  <a:srgbClr val="008000"/>
-                </a:solidFill>
-                <a:latin typeface="Courier"/>
-              </a:rPr>
-              <a:t>as</a:t>
-            </a:r>
-            <a:r>
-              <a:rPr>
-                <a:latin typeface="Courier"/>
-              </a:rPr>
-              <a:t> pd</a:t>
-            </a:r>
-            <a:br/>
-            <a:br/>
-            <a:r>
-              <a:rPr>
-                <a:latin typeface="Courier"/>
-              </a:rPr>
-              <a:t>c </a:t>
-            </a:r>
-            <a:r>
-              <a:rPr>
-                <a:solidFill>
-                  <a:srgbClr val="666666"/>
-                </a:solidFill>
-                <a:latin typeface="Courier"/>
-              </a:rPr>
-              <a:t>=</a:t>
-            </a:r>
-            <a:r>
-              <a:rPr>
-                <a:latin typeface="Courier"/>
-              </a:rPr>
-              <a:t> pd.read_parquet(</a:t>
-            </a:r>
-            <a:r>
-              <a:rPr>
-                <a:solidFill>
-                  <a:srgbClr val="4070A0"/>
-                </a:solidFill>
-                <a:latin typeface="Courier"/>
-              </a:rPr>
-              <a:t>"data/spine/angle_c_country.parquet"</a:t>
-            </a:r>
-            <a:r>
-              <a:rPr>
-                <a:latin typeface="Courier"/>
-              </a:rPr>
-              <a:t>)</a:t>
-            </a:r>
-            <a:br/>
-            <a:r>
-              <a:rPr>
-                <a:latin typeface="Courier"/>
-              </a:rPr>
-              <a:t>d </a:t>
-            </a:r>
-            <a:r>
-              <a:rPr>
-                <a:solidFill>
-                  <a:srgbClr val="666666"/>
-                </a:solidFill>
-                <a:latin typeface="Courier"/>
-              </a:rPr>
-              <a:t>=</a:t>
-            </a:r>
-            <a:r>
-              <a:rPr>
-                <a:latin typeface="Courier"/>
-              </a:rPr>
-              <a:t> c[c.time </a:t>
-            </a:r>
-            <a:r>
-              <a:rPr>
-                <a:solidFill>
-                  <a:srgbClr val="666666"/>
-                </a:solidFill>
-                <a:latin typeface="Courier"/>
-              </a:rPr>
-              <a:t>&gt;=</a:t>
-            </a:r>
-            <a:r>
-              <a:rPr>
-                <a:latin typeface="Courier"/>
-              </a:rPr>
-              <a:t> </a:t>
-            </a:r>
-            <a:r>
-              <a:rPr>
-                <a:solidFill>
-                  <a:srgbClr val="40A070"/>
-                </a:solidFill>
-                <a:latin typeface="Courier"/>
-              </a:rPr>
-              <a:t>2021</a:t>
-            </a:r>
-            <a:r>
-              <a:rPr>
-                <a:latin typeface="Courier"/>
-              </a:rPr>
-              <a:t>].dropna(subset</a:t>
-            </a:r>
-            <a:r>
-              <a:rPr>
-                <a:solidFill>
-                  <a:srgbClr val="666666"/>
-                </a:solidFill>
-                <a:latin typeface="Courier"/>
-              </a:rPr>
-              <a:t>=</a:t>
-            </a:r>
-            <a:r>
-              <a:rPr>
-                <a:latin typeface="Courier"/>
-              </a:rPr>
-              <a:t>[</a:t>
-            </a:r>
-            <a:r>
-              <a:rPr>
-                <a:solidFill>
-                  <a:srgbClr val="4070A0"/>
-                </a:solidFill>
-                <a:latin typeface="Courier"/>
-              </a:rPr>
-              <a:t>"ai_use_any"</a:t>
-            </a:r>
-            <a:r>
-              <a:rPr>
-                <a:latin typeface="Courier"/>
-              </a:rPr>
-              <a:t>]).copy()</a:t>
-            </a:r>
-            <a:br/>
-            <a:br/>
-            <a:r>
-              <a:rPr>
-                <a:solidFill>
-                  <a:srgbClr val="008000"/>
-                </a:solidFill>
-                <a:latin typeface="Courier"/>
-              </a:rPr>
-              <a:t>print</a:t>
-            </a:r>
-            <a:r>
-              <a:rPr>
-                <a:latin typeface="Courier"/>
-              </a:rPr>
-              <a:t>(</a:t>
-            </a:r>
-            <a:r>
-              <a:rPr>
-                <a:solidFill>
-                  <a:srgbClr val="008000"/>
-                </a:solidFill>
-                <a:latin typeface="Courier"/>
-              </a:rPr>
-              <a:t>len</a:t>
-            </a:r>
-            <a:r>
-              <a:rPr>
-                <a:latin typeface="Courier"/>
-              </a:rPr>
-              <a:t>(d), </a:t>
-            </a:r>
-            <a:r>
-              <a:rPr>
-                <a:solidFill>
-                  <a:srgbClr val="4070A0"/>
-                </a:solidFill>
-                <a:latin typeface="Courier"/>
-              </a:rPr>
-              <a:t>"rows |"</a:t>
-            </a:r>
-            <a:r>
-              <a:rPr>
-                <a:latin typeface="Courier"/>
-              </a:rPr>
-              <a:t>, d.has_ai_strategy.mean().</a:t>
-            </a:r>
-            <a:r>
-              <a:rPr>
-                <a:solidFill>
-                  <a:srgbClr val="008000"/>
-                </a:solidFill>
-                <a:latin typeface="Courier"/>
-              </a:rPr>
-              <a:t>round</a:t>
-            </a:r>
-            <a:r>
-              <a:rPr>
-                <a:latin typeface="Courier"/>
-              </a:rPr>
-              <a:t>(</a:t>
-            </a:r>
-            <a:r>
-              <a:rPr>
-                <a:solidFill>
-                  <a:srgbClr val="40A070"/>
-                </a:solidFill>
-                <a:latin typeface="Courier"/>
-              </a:rPr>
-              <a:t>3</a:t>
-            </a:r>
-            <a:r>
-              <a:rPr>
-                <a:latin typeface="Courier"/>
-              </a:rPr>
-              <a:t>), </a:t>
-            </a:r>
-            <a:r>
-              <a:rPr>
-                <a:solidFill>
-                  <a:srgbClr val="4070A0"/>
-                </a:solidFill>
-                <a:latin typeface="Courier"/>
-              </a:rPr>
-              <a:t>"treated"</a:t>
-            </a:r>
-            <a:r>
-              <a:rPr>
-                <a:latin typeface="Courier"/>
-              </a:rPr>
-              <a:t>)</a:t>
-            </a:r>
-          </a:p>
-          <a:p>
-            <a:pPr lvl="0" indent="0" marL="0">
-              <a:buNone/>
-            </a:pPr>
-            <a:r>
-              <a:rPr/>
-              <a:t>The spine was generated with treatment </a:t>
-            </a:r>
-            <a:r>
-              <a:rPr b="1"/>
-              <a:t>assigned on covariates</a:t>
-            </a:r>
-            <a:r>
-              <a:rPr/>
-              <a:t> and a known true effect. You are going to try to recover a number I already have.</a:t>
-            </a:r>
-          </a:p>
-        </p:txBody>
-      </p:sp>
-    </p:spTree>
-  </p:cSld>
-</p:sld>
-</file>
-
-<file path=ppt/slides/slide17.xml><?xml version="1.0" encoding="utf-8"?>
-<p:sld xmlns:a="http://schemas.openxmlformats.org/drawingml/2006/main" xmlns:r="http://schemas.openxmlformats.org/officeDocument/2006/relationships" xmlns:p="http://schemas.openxmlformats.org/presentationml/2006/main">
-  <p:cSld>
-    <p:spTree>
-      <p:nvGrpSpPr>
-        <p:cNvPr id="1" name=""/>
-        <p:cNvGrpSpPr/>
-        <p:nvPr/>
-      </p:nvGrpSpPr>
-      <p:grpSpPr>
-        <a:xfrm>
-          <a:off x="0" y="0"/>
-          <a:ext cx="0" cy="0"/>
-          <a:chOff x="0" y="0"/>
-          <a:chExt cx="0" cy="0"/>
-        </a:xfrm>
-      </p:grpSpPr>
-      <p:sp>
-        <p:nvSpPr>
-          <p:cNvPr id="2" name="Title 1"/>
-          <p:cNvSpPr>
-            <a:spLocks noGrp="1"/>
-          </p:cNvSpPr>
-          <p:nvPr>
-            <p:ph type="title"/>
-          </p:nvPr>
-        </p:nvSpPr>
-        <p:spPr/>
-        <p:txBody>
-          <a:bodyPr/>
-          <a:lstStyle/>
-          <a:p>
-            <a:pPr lvl="0" indent="0" marL="0">
-              <a:buNone/>
-            </a:pPr>
-            <a:r>
-              <a:rPr/>
-              <a:t>Check overlap first</a:t>
-            </a:r>
-          </a:p>
-        </p:txBody>
-      </p:sp>
-      <p:sp>
-        <p:nvSpPr>
-          <p:cNvPr id="3" name="Content Placeholder 2"/>
-          <p:cNvSpPr>
-            <a:spLocks noGrp="1"/>
-          </p:cNvSpPr>
-          <p:nvPr>
-            <p:ph idx="1"/>
-          </p:nvPr>
-        </p:nvSpPr>
-        <p:spPr/>
-        <p:txBody>
-          <a:bodyPr/>
-          <a:lstStyle/>
-          <a:p>
-            <a:pPr lvl="0" indent="0">
-              <a:buNone/>
-            </a:pPr>
-            <a:r>
-              <a:rPr b="1">
-                <a:solidFill>
-                  <a:srgbClr val="008000"/>
-                </a:solidFill>
-                <a:latin typeface="Courier"/>
-              </a:rPr>
-              <a:t>from</a:t>
-            </a:r>
-            <a:r>
-              <a:rPr>
-                <a:latin typeface="Courier"/>
-              </a:rPr>
-              <a:t> sklearn.ensemble </a:t>
-            </a:r>
-            <a:r>
-              <a:rPr b="1">
-                <a:solidFill>
-                  <a:srgbClr val="008000"/>
-                </a:solidFill>
-                <a:latin typeface="Courier"/>
-              </a:rPr>
-              <a:t>import</a:t>
-            </a:r>
-            <a:r>
-              <a:rPr>
-                <a:latin typeface="Courier"/>
-              </a:rPr>
-              <a:t> RandomForestClassifier</a:t>
-            </a:r>
-            <a:br/>
-            <a:br/>
-            <a:r>
-              <a:rPr>
-                <a:latin typeface="Courier"/>
-              </a:rPr>
-              <a:t>Xc </a:t>
-            </a:r>
-            <a:r>
-              <a:rPr>
-                <a:solidFill>
-                  <a:srgbClr val="666666"/>
-                </a:solidFill>
-                <a:latin typeface="Courier"/>
-              </a:rPr>
-              <a:t>=</a:t>
-            </a:r>
-            <a:r>
-              <a:rPr>
-                <a:latin typeface="Courier"/>
-              </a:rPr>
-              <a:t> d.drop(columns</a:t>
-            </a:r>
-            <a:r>
-              <a:rPr>
-                <a:solidFill>
-                  <a:srgbClr val="666666"/>
-                </a:solidFill>
-                <a:latin typeface="Courier"/>
-              </a:rPr>
-              <a:t>=</a:t>
-            </a:r>
-            <a:r>
-              <a:rPr>
-                <a:latin typeface="Courier"/>
-              </a:rPr>
-              <a:t>[</a:t>
-            </a:r>
-            <a:r>
-              <a:rPr>
-                <a:solidFill>
-                  <a:srgbClr val="4070A0"/>
-                </a:solidFill>
-                <a:latin typeface="Courier"/>
-              </a:rPr>
-              <a:t>"geo"</a:t>
-            </a:r>
-            <a:r>
-              <a:rPr>
-                <a:latin typeface="Courier"/>
-              </a:rPr>
-              <a:t>, </a:t>
-            </a:r>
-            <a:r>
-              <a:rPr>
-                <a:solidFill>
-                  <a:srgbClr val="4070A0"/>
-                </a:solidFill>
-                <a:latin typeface="Courier"/>
-              </a:rPr>
-              <a:t>"time"</a:t>
-            </a:r>
-            <a:r>
-              <a:rPr>
-                <a:latin typeface="Courier"/>
-              </a:rPr>
-              <a:t>, </a:t>
-            </a:r>
-            <a:r>
-              <a:rPr>
-                <a:solidFill>
-                  <a:srgbClr val="4070A0"/>
-                </a:solidFill>
-                <a:latin typeface="Courier"/>
-              </a:rPr>
-              <a:t>"flag"</a:t>
-            </a:r>
-            <a:r>
-              <a:rPr>
-                <a:latin typeface="Courier"/>
-              </a:rPr>
-              <a:t>, </a:t>
-            </a:r>
-            <a:r>
-              <a:rPr>
-                <a:solidFill>
-                  <a:srgbClr val="4070A0"/>
-                </a:solidFill>
-                <a:latin typeface="Courier"/>
-              </a:rPr>
-              <a:t>"has_ai_strategy"</a:t>
-            </a:r>
-            <a:r>
-              <a:rPr>
-                <a:latin typeface="Courier"/>
-              </a:rPr>
-              <a:t>,</a:t>
-            </a:r>
-            <a:br/>
-            <a:r>
-              <a:rPr>
-                <a:latin typeface="Courier"/>
-              </a:rPr>
-              <a:t>                     </a:t>
-            </a:r>
-            <a:r>
-              <a:rPr>
-                <a:solidFill>
-                  <a:srgbClr val="4070A0"/>
-                </a:solidFill>
-                <a:latin typeface="Courier"/>
-              </a:rPr>
-              <a:t>"ai_use_any"</a:t>
-            </a:r>
-            <a:r>
-              <a:rPr>
-                <a:latin typeface="Courier"/>
-              </a:rPr>
-              <a:t>, </a:t>
-            </a:r>
-            <a:r>
-              <a:rPr>
-                <a:solidFill>
-                  <a:srgbClr val="4070A0"/>
-                </a:solidFill>
-                <a:latin typeface="Courier"/>
-              </a:rPr>
-              <a:t>"ai_use_ml"</a:t>
-            </a:r>
-            <a:r>
-              <a:rPr>
-                <a:latin typeface="Courier"/>
-              </a:rPr>
-              <a:t>, </a:t>
-            </a:r>
-            <a:r>
-              <a:rPr>
-                <a:solidFill>
-                  <a:srgbClr val="4070A0"/>
-                </a:solidFill>
-                <a:latin typeface="Courier"/>
-              </a:rPr>
-              <a:t>"ai_use_ge3"</a:t>
-            </a:r>
-            <a:r>
-              <a:rPr>
-                <a:latin typeface="Courier"/>
-              </a:rPr>
-              <a:t>])</a:t>
-            </a:r>
-            <a:br/>
-            <a:r>
-              <a:rPr>
-                <a:latin typeface="Courier"/>
-              </a:rPr>
-              <a:t>Xc </a:t>
-            </a:r>
-            <a:r>
-              <a:rPr>
-                <a:solidFill>
-                  <a:srgbClr val="666666"/>
-                </a:solidFill>
-                <a:latin typeface="Courier"/>
-              </a:rPr>
-              <a:t>=</a:t>
-            </a:r>
-            <a:r>
-              <a:rPr>
-                <a:latin typeface="Courier"/>
-              </a:rPr>
-              <a:t> Xc.fillna(Xc.median(numeric_only</a:t>
-            </a:r>
-            <a:r>
-              <a:rPr>
-                <a:solidFill>
-                  <a:srgbClr val="666666"/>
-                </a:solidFill>
-                <a:latin typeface="Courier"/>
-              </a:rPr>
-              <a:t>=</a:t>
-            </a:r>
-            <a:r>
-              <a:rPr>
-                <a:solidFill>
-                  <a:srgbClr val="19177C"/>
-                </a:solidFill>
-                <a:latin typeface="Courier"/>
-              </a:rPr>
-              <a:t>True</a:t>
-            </a:r>
-            <a:r>
-              <a:rPr>
-                <a:latin typeface="Courier"/>
-              </a:rPr>
-              <a:t>))</a:t>
-            </a:r>
-            <a:br/>
-            <a:r>
-              <a:rPr>
-                <a:latin typeface="Courier"/>
-              </a:rPr>
-              <a:t>ps </a:t>
-            </a:r>
-            <a:r>
-              <a:rPr>
-                <a:solidFill>
-                  <a:srgbClr val="666666"/>
-                </a:solidFill>
-                <a:latin typeface="Courier"/>
-              </a:rPr>
-              <a:t>=</a:t>
-            </a:r>
-            <a:r>
-              <a:rPr>
-                <a:latin typeface="Courier"/>
-              </a:rPr>
-              <a:t> RandomForestClassifier(</a:t>
-            </a:r>
-            <a:r>
-              <a:rPr>
-                <a:solidFill>
-                  <a:srgbClr val="40A070"/>
-                </a:solidFill>
-                <a:latin typeface="Courier"/>
-              </a:rPr>
-              <a:t>400</a:t>
-            </a:r>
-            <a:r>
-              <a:rPr>
-                <a:latin typeface="Courier"/>
-              </a:rPr>
-              <a:t>, min_samples_leaf</a:t>
-            </a:r>
-            <a:r>
-              <a:rPr>
-                <a:solidFill>
-                  <a:srgbClr val="666666"/>
-                </a:solidFill>
-                <a:latin typeface="Courier"/>
-              </a:rPr>
-              <a:t>=</a:t>
-            </a:r>
-            <a:r>
-              <a:rPr>
-                <a:solidFill>
-                  <a:srgbClr val="40A070"/>
-                </a:solidFill>
-                <a:latin typeface="Courier"/>
-              </a:rPr>
-              <a:t>5</a:t>
-            </a:r>
-            <a:r>
-              <a:rPr>
-                <a:latin typeface="Courier"/>
-              </a:rPr>
-              <a:t>, random_state</a:t>
-            </a:r>
-            <a:r>
-              <a:rPr>
-                <a:solidFill>
-                  <a:srgbClr val="666666"/>
-                </a:solidFill>
-                <a:latin typeface="Courier"/>
-              </a:rPr>
-              <a:t>=</a:t>
-            </a:r>
-            <a:r>
-              <a:rPr>
-                <a:solidFill>
-                  <a:srgbClr val="40A070"/>
-                </a:solidFill>
-                <a:latin typeface="Courier"/>
-              </a:rPr>
-              <a:t>60033</a:t>
-            </a:r>
-            <a:r>
-              <a:rPr>
-                <a:latin typeface="Courier"/>
-              </a:rPr>
-              <a:t>)</a:t>
-            </a:r>
-            <a:br/>
-            <a:r>
-              <a:rPr>
-                <a:latin typeface="Courier"/>
-              </a:rPr>
-              <a:t>ps.fit(Xc, d.has_ai_strategy)</a:t>
-            </a:r>
-            <a:br/>
-            <a:r>
-              <a:rPr>
-                <a:latin typeface="Courier"/>
-              </a:rPr>
-              <a:t>e </a:t>
-            </a:r>
-            <a:r>
-              <a:rPr>
-                <a:solidFill>
-                  <a:srgbClr val="666666"/>
-                </a:solidFill>
-                <a:latin typeface="Courier"/>
-              </a:rPr>
-              <a:t>=</a:t>
-            </a:r>
-            <a:r>
-              <a:rPr>
-                <a:latin typeface="Courier"/>
-              </a:rPr>
-              <a:t> ps.predict_proba(Xc)[:, </a:t>
-            </a:r>
-            <a:r>
-              <a:rPr>
-                <a:solidFill>
-                  <a:srgbClr val="40A070"/>
-                </a:solidFill>
-                <a:latin typeface="Courier"/>
-              </a:rPr>
-              <a:t>1</a:t>
-            </a:r>
-            <a:r>
-              <a:rPr>
-                <a:latin typeface="Courier"/>
-              </a:rPr>
-              <a:t>]</a:t>
-            </a:r>
-            <a:br/>
-            <a:r>
-              <a:rPr>
-                <a:solidFill>
-                  <a:srgbClr val="008000"/>
-                </a:solidFill>
-                <a:latin typeface="Courier"/>
-              </a:rPr>
-              <a:t>print</a:t>
-            </a:r>
-            <a:r>
-              <a:rPr>
-                <a:latin typeface="Courier"/>
-              </a:rPr>
-              <a:t>(</a:t>
-            </a:r>
-            <a:r>
-              <a:rPr>
-                <a:solidFill>
-                  <a:srgbClr val="4070A0"/>
-                </a:solidFill>
-                <a:latin typeface="Courier"/>
-              </a:rPr>
-              <a:t>"propensity range:"</a:t>
-            </a:r>
-            <a:r>
-              <a:rPr>
-                <a:latin typeface="Courier"/>
-              </a:rPr>
-              <a:t>, e.</a:t>
-            </a:r>
-            <a:r>
-              <a:rPr>
-                <a:solidFill>
-                  <a:srgbClr val="008000"/>
-                </a:solidFill>
-                <a:latin typeface="Courier"/>
-              </a:rPr>
-              <a:t>min</a:t>
-            </a:r>
-            <a:r>
-              <a:rPr>
-                <a:latin typeface="Courier"/>
-              </a:rPr>
-              <a:t>().</a:t>
-            </a:r>
-            <a:r>
-              <a:rPr>
-                <a:solidFill>
-                  <a:srgbClr val="008000"/>
-                </a:solidFill>
-                <a:latin typeface="Courier"/>
-              </a:rPr>
-              <a:t>round</a:t>
-            </a:r>
-            <a:r>
-              <a:rPr>
-                <a:latin typeface="Courier"/>
-              </a:rPr>
-              <a:t>(</a:t>
-            </a:r>
-            <a:r>
-              <a:rPr>
-                <a:solidFill>
-                  <a:srgbClr val="40A070"/>
-                </a:solidFill>
-                <a:latin typeface="Courier"/>
-              </a:rPr>
-              <a:t>3</a:t>
-            </a:r>
-            <a:r>
-              <a:rPr>
-                <a:latin typeface="Courier"/>
-              </a:rPr>
-              <a:t>), e.</a:t>
-            </a:r>
-            <a:r>
-              <a:rPr>
-                <a:solidFill>
-                  <a:srgbClr val="008000"/>
-                </a:solidFill>
-                <a:latin typeface="Courier"/>
-              </a:rPr>
-              <a:t>max</a:t>
-            </a:r>
-            <a:r>
-              <a:rPr>
-                <a:latin typeface="Courier"/>
-              </a:rPr>
-              <a:t>().</a:t>
-            </a:r>
-            <a:r>
-              <a:rPr>
-                <a:solidFill>
-                  <a:srgbClr val="008000"/>
-                </a:solidFill>
-                <a:latin typeface="Courier"/>
-              </a:rPr>
-              <a:t>round</a:t>
-            </a:r>
-            <a:r>
-              <a:rPr>
-                <a:latin typeface="Courier"/>
-              </a:rPr>
-              <a:t>(</a:t>
-            </a:r>
-            <a:r>
-              <a:rPr>
-                <a:solidFill>
-                  <a:srgbClr val="40A070"/>
-                </a:solidFill>
-                <a:latin typeface="Courier"/>
-              </a:rPr>
-              <a:t>3</a:t>
-            </a:r>
-            <a:r>
-              <a:rPr>
-                <a:latin typeface="Courier"/>
-              </a:rPr>
-              <a:t>))</a:t>
-            </a:r>
-          </a:p>
-          <a:p>
-            <a:pPr lvl="0" indent="0" marL="0">
-              <a:buNone/>
-            </a:pPr>
-            <a:r>
-              <a:rPr/>
-              <a:t>Propensities near 0 or 1 mean </a:t>
-            </a:r>
-            <a:r>
-              <a:rPr b="1"/>
-              <a:t>no comparable counterfactual</a:t>
-            </a:r>
-            <a:r>
-              <a:rPr/>
-              <a:t>. Those rows carry enormous weight and almost no information. Trim them, and report how many you dropped.</a:t>
-            </a:r>
-          </a:p>
-        </p:txBody>
-      </p:sp>
-    </p:spTree>
-  </p:cSld>
-</p:sld>
-</file>
-
-<file path=ppt/slides/slide18.xml><?xml version="1.0" encoding="utf-8"?>
-<p:sld xmlns:a="http://schemas.openxmlformats.org/drawingml/2006/main" xmlns:r="http://schemas.openxmlformats.org/officeDocument/2006/relationships" xmlns:p="http://schemas.openxmlformats.org/presentationml/2006/main">
-  <p:cSld>
-    <p:spTree>
-      <p:nvGrpSpPr>
-        <p:cNvPr id="1" name=""/>
-        <p:cNvGrpSpPr/>
-        <p:nvPr/>
-      </p:nvGrpSpPr>
-      <p:grpSpPr>
-        <a:xfrm>
-          <a:off x="0" y="0"/>
-          <a:ext cx="0" cy="0"/>
-          <a:chOff x="0" y="0"/>
-          <a:chExt cx="0" cy="0"/>
-        </a:xfrm>
-      </p:grpSpPr>
-      <p:sp>
-        <p:nvSpPr>
-          <p:cNvPr id="2" name="Title 1"/>
-          <p:cNvSpPr>
-            <a:spLocks noGrp="1"/>
-          </p:cNvSpPr>
-          <p:nvPr>
-            <p:ph type="title"/>
-          </p:nvPr>
-        </p:nvSpPr>
-        <p:spPr/>
-        <p:txBody>
-          <a:bodyPr/>
-          <a:lstStyle/>
-          <a:p>
-            <a:pPr lvl="0" indent="0" marL="0">
-              <a:buNone/>
-            </a:pPr>
-            <a:r>
-              <a:rPr/>
-              <a:t>The naive estimate, for contrast</a:t>
-            </a:r>
-          </a:p>
-        </p:txBody>
-      </p:sp>
-      <p:sp>
-        <p:nvSpPr>
-          <p:cNvPr id="3" name="Content Placeholder 2"/>
-          <p:cNvSpPr>
-            <a:spLocks noGrp="1"/>
-          </p:cNvSpPr>
-          <p:nvPr>
-            <p:ph idx="1"/>
-          </p:nvPr>
-        </p:nvSpPr>
-        <p:spPr/>
-        <p:txBody>
-          <a:bodyPr/>
-          <a:lstStyle/>
-          <a:p>
-            <a:pPr lvl="0" indent="0">
-              <a:buNone/>
-            </a:pPr>
-            <a:r>
-              <a:rPr b="1">
-                <a:solidFill>
-                  <a:srgbClr val="008000"/>
-                </a:solidFill>
-                <a:latin typeface="Courier"/>
-              </a:rPr>
-              <a:t>import</a:t>
-            </a:r>
-            <a:r>
-              <a:rPr>
-                <a:latin typeface="Courier"/>
-              </a:rPr>
-              <a:t> statsmodels.formula.api </a:t>
-            </a:r>
-            <a:r>
-              <a:rPr b="1">
-                <a:solidFill>
-                  <a:srgbClr val="008000"/>
-                </a:solidFill>
-                <a:latin typeface="Courier"/>
-              </a:rPr>
-              <a:t>as</a:t>
-            </a:r>
-            <a:r>
-              <a:rPr>
-                <a:latin typeface="Courier"/>
-              </a:rPr>
-              <a:t> smf</a:t>
-            </a:r>
-            <a:br/>
-            <a:r>
-              <a:rPr>
-                <a:latin typeface="Courier"/>
-              </a:rPr>
-              <a:t>naive </a:t>
-            </a:r>
-            <a:r>
-              <a:rPr>
-                <a:solidFill>
-                  <a:srgbClr val="666666"/>
-                </a:solidFill>
-                <a:latin typeface="Courier"/>
-              </a:rPr>
-              <a:t>=</a:t>
-            </a:r>
-            <a:r>
-              <a:rPr>
-                <a:latin typeface="Courier"/>
-              </a:rPr>
-              <a:t> smf.ols(</a:t>
-            </a:r>
-            <a:r>
-              <a:rPr>
-                <a:solidFill>
-                  <a:srgbClr val="4070A0"/>
-                </a:solidFill>
-                <a:latin typeface="Courier"/>
-              </a:rPr>
-              <a:t>"ai_use_any ~ has_ai_strategy"</a:t>
-            </a:r>
-            <a:r>
-              <a:rPr>
-                <a:latin typeface="Courier"/>
-              </a:rPr>
-              <a:t>, data</a:t>
-            </a:r>
-            <a:r>
-              <a:rPr>
-                <a:solidFill>
-                  <a:srgbClr val="666666"/>
-                </a:solidFill>
-                <a:latin typeface="Courier"/>
-              </a:rPr>
-              <a:t>=</a:t>
-            </a:r>
-            <a:r>
-              <a:rPr>
-                <a:latin typeface="Courier"/>
-              </a:rPr>
-              <a:t>d).fit()</a:t>
-            </a:r>
-            <a:br/>
-            <a:r>
-              <a:rPr>
-                <a:solidFill>
-                  <a:srgbClr val="008000"/>
-                </a:solidFill>
-                <a:latin typeface="Courier"/>
-              </a:rPr>
-              <a:t>print</a:t>
-            </a:r>
-            <a:r>
-              <a:rPr>
-                <a:latin typeface="Courier"/>
-              </a:rPr>
-              <a:t>(naive.params[</a:t>
-            </a:r>
-            <a:r>
-              <a:rPr>
-                <a:solidFill>
-                  <a:srgbClr val="4070A0"/>
-                </a:solidFill>
-                <a:latin typeface="Courier"/>
-              </a:rPr>
-              <a:t>"has_ai_strategy"</a:t>
-            </a:r>
-            <a:r>
-              <a:rPr>
-                <a:latin typeface="Courier"/>
-              </a:rPr>
-              <a:t>].</a:t>
-            </a:r>
-            <a:r>
-              <a:rPr>
-                <a:solidFill>
-                  <a:srgbClr val="008000"/>
-                </a:solidFill>
-                <a:latin typeface="Courier"/>
-              </a:rPr>
-              <a:t>round</a:t>
-            </a:r>
-            <a:r>
-              <a:rPr>
-                <a:latin typeface="Courier"/>
-              </a:rPr>
-              <a:t>(</a:t>
-            </a:r>
-            <a:r>
-              <a:rPr>
-                <a:solidFill>
-                  <a:srgbClr val="40A070"/>
-                </a:solidFill>
-                <a:latin typeface="Courier"/>
-              </a:rPr>
-              <a:t>3</a:t>
-            </a:r>
-            <a:r>
-              <a:rPr>
-                <a:latin typeface="Courier"/>
-              </a:rPr>
-              <a:t>))</a:t>
-            </a:r>
-          </a:p>
-          <a:p>
-            <a:pPr lvl="0" indent="0" marL="0">
-              <a:buNone/>
-            </a:pPr>
-            <a:r>
-              <a:rPr/>
-              <a:t>Write this number down. It is the number a careless analyst reports, and the gap between it and what follows is the lesson of the session.</a:t>
-            </a:r>
-          </a:p>
-        </p:txBody>
-      </p:sp>
-    </p:spTree>
-  </p:cSld>
-</p:sld>
-</file>
-
-<file path=ppt/slides/slide19.xml><?xml version="1.0" encoding="utf-8"?>
-<p:sld xmlns:a="http://schemas.openxmlformats.org/drawingml/2006/main" xmlns:r="http://schemas.openxmlformats.org/officeDocument/2006/relationships" xmlns:p="http://schemas.openxmlformats.org/presentationml/2006/main">
-  <p:cSld>
-    <p:spTree>
-      <p:nvGrpSpPr>
-        <p:cNvPr id="1" name=""/>
-        <p:cNvGrpSpPr/>
-        <p:nvPr/>
-      </p:nvGrpSpPr>
-      <p:grpSpPr>
-        <a:xfrm>
-          <a:off x="0" y="0"/>
-          <a:ext cx="0" cy="0"/>
-          <a:chOff x="0" y="0"/>
-          <a:chExt cx="0" cy="0"/>
-        </a:xfrm>
-      </p:grpSpPr>
-      <p:sp>
-        <p:nvSpPr>
-          <p:cNvPr id="2" name="Title 1"/>
-          <p:cNvSpPr>
-            <a:spLocks noGrp="1"/>
-          </p:cNvSpPr>
-          <p:nvPr>
-            <p:ph type="title"/>
-          </p:nvPr>
-        </p:nvSpPr>
-        <p:spPr>
-          <a:xfrm>
-            <a:off x="722313" y="3305176"/>
-            <a:ext cx="7772400" cy="1021556"/>
-          </a:xfrm>
-        </p:spPr>
-        <p:txBody>
-          <a:bodyPr/>
-          <a:lstStyle/>
-          <a:p>
-            <a:pPr lvl="0" indent="0" marL="0">
-              <a:buNone/>
-            </a:pPr>
-            <a:r>
-              <a:rPr/>
-              <a:t>DML</a:t>
-            </a:r>
-          </a:p>
-        </p:txBody>
-      </p:sp>
-    </p:spTree>
-  </p:cSld>
-</p:sld>
-</file>
-
-<file path=ppt/slides/slide2.xml><?xml version="1.0" encoding="utf-8"?>
-<p:sld xmlns:a="http://schemas.openxmlformats.org/drawingml/2006/main" xmlns:r="http://schemas.openxmlformats.org/officeDocument/2006/relationships" xmlns:p="http://schemas.openxmlformats.org/presentationml/2006/main">
-  <p:cSld>
-    <p:spTree>
-      <p:nvGrpSpPr>
-        <p:cNvPr id="1" name=""/>
-        <p:cNvGrpSpPr/>
-        <p:nvPr/>
-      </p:nvGrpSpPr>
-      <p:grpSpPr>
-        <a:xfrm>
-          <a:off x="0" y="0"/>
-          <a:ext cx="0" cy="0"/>
-          <a:chOff x="0" y="0"/>
-          <a:chExt cx="0" cy="0"/>
-        </a:xfrm>
-      </p:grpSpPr>
-      <p:sp>
-        <p:nvSpPr>
-          <p:cNvPr id="2" name="Title 1"/>
-          <p:cNvSpPr>
-            <a:spLocks noGrp="1"/>
-          </p:cNvSpPr>
-          <p:nvPr>
-            <p:ph type="title"/>
-          </p:nvPr>
-        </p:nvSpPr>
-        <p:spPr>
-          <a:xfrm>
-            <a:off x="722313" y="3305176"/>
-            <a:ext cx="7772400" cy="1021556"/>
-          </a:xfrm>
-        </p:spPr>
-        <p:txBody>
-          <a:bodyPr/>
-          <a:lstStyle/>
-          <a:p>
-            <a:pPr lvl="0" indent="0" marL="0">
-              <a:buNone/>
-            </a:pPr>
-            <a:r>
-              <a:rPr/>
-              <a:t>Where we are</a:t>
-            </a:r>
-          </a:p>
-        </p:txBody>
-      </p:sp>
-    </p:spTree>
-  </p:cSld>
-</p:sld>
-</file>
-
-<file path=ppt/slides/slide20.xml><?xml version="1.0" encoding="utf-8"?>
-<p:sld xmlns:a="http://schemas.openxmlformats.org/drawingml/2006/main" xmlns:r="http://schemas.openxmlformats.org/officeDocument/2006/relationships" xmlns:p="http://schemas.openxmlformats.org/presentationml/2006/main">
-  <p:cSld>
-    <p:spTree>
-      <p:nvGrpSpPr>
-        <p:cNvPr id="1" name=""/>
-        <p:cNvGrpSpPr/>
-        <p:nvPr/>
-      </p:nvGrpSpPr>
-      <p:grpSpPr>
-        <a:xfrm>
-          <a:off x="0" y="0"/>
-          <a:ext cx="0" cy="0"/>
-          <a:chOff x="0" y="0"/>
-          <a:chExt cx="0" cy="0"/>
-        </a:xfrm>
-      </p:grpSpPr>
-      <p:sp>
-        <p:nvSpPr>
-          <p:cNvPr id="2" name="Title 1"/>
-          <p:cNvSpPr>
-            <a:spLocks noGrp="1"/>
-          </p:cNvSpPr>
-          <p:nvPr>
-            <p:ph type="title"/>
-          </p:nvPr>
-        </p:nvSpPr>
-        <p:spPr/>
-        <p:txBody>
-          <a:bodyPr/>
-          <a:lstStyle/>
-          <a:p>
-            <a:pPr lvl="0" indent="0" marL="0">
-              <a:buNone/>
-            </a:pPr>
-            <a:r>
-              <a:rPr/>
-              <a:t>By hand, so you see the mechanism</a:t>
-            </a:r>
-          </a:p>
-        </p:txBody>
-      </p:sp>
-      <p:sp>
-        <p:nvSpPr>
-          <p:cNvPr id="3" name="Content Placeholder 2"/>
-          <p:cNvSpPr>
-            <a:spLocks noGrp="1"/>
-          </p:cNvSpPr>
-          <p:nvPr>
-            <p:ph idx="1"/>
-          </p:nvPr>
-        </p:nvSpPr>
-        <p:spPr/>
-        <p:txBody>
-          <a:bodyPr/>
-          <a:lstStyle/>
-          <a:p>
-            <a:pPr lvl="0" indent="0">
-              <a:buNone/>
-            </a:pPr>
-            <a:r>
-              <a:rPr b="1">
-                <a:solidFill>
-                  <a:srgbClr val="008000"/>
-                </a:solidFill>
-                <a:latin typeface="Courier"/>
-              </a:rPr>
-              <a:t>import</a:t>
-            </a:r>
-            <a:r>
-              <a:rPr>
-                <a:latin typeface="Courier"/>
-              </a:rPr>
-              <a:t> numpy </a:t>
-            </a:r>
-            <a:r>
-              <a:rPr b="1">
-                <a:solidFill>
-                  <a:srgbClr val="008000"/>
-                </a:solidFill>
-                <a:latin typeface="Courier"/>
-              </a:rPr>
-              <a:t>as</a:t>
-            </a:r>
-            <a:r>
-              <a:rPr>
-                <a:latin typeface="Courier"/>
-              </a:rPr>
-              <a:t> np</a:t>
-            </a:r>
-            <a:br/>
-            <a:r>
-              <a:rPr b="1">
-                <a:solidFill>
-                  <a:srgbClr val="008000"/>
-                </a:solidFill>
-                <a:latin typeface="Courier"/>
-              </a:rPr>
-              <a:t>from</a:t>
-            </a:r>
-            <a:r>
-              <a:rPr>
-                <a:latin typeface="Courier"/>
-              </a:rPr>
-              <a:t> sklearn.ensemble </a:t>
-            </a:r>
-            <a:r>
-              <a:rPr b="1">
-                <a:solidFill>
-                  <a:srgbClr val="008000"/>
-                </a:solidFill>
-                <a:latin typeface="Courier"/>
-              </a:rPr>
-              <a:t>import</a:t>
-            </a:r>
-            <a:r>
-              <a:rPr>
-                <a:latin typeface="Courier"/>
-              </a:rPr>
-              <a:t> RandomForestRegressor, RandomForestClassifier</a:t>
-            </a:r>
-            <a:br/>
-            <a:r>
-              <a:rPr b="1">
-                <a:solidFill>
-                  <a:srgbClr val="008000"/>
-                </a:solidFill>
-                <a:latin typeface="Courier"/>
-              </a:rPr>
-              <a:t>from</a:t>
-            </a:r>
-            <a:r>
-              <a:rPr>
-                <a:latin typeface="Courier"/>
-              </a:rPr>
-              <a:t> sklearn.model_selection </a:t>
-            </a:r>
-            <a:r>
-              <a:rPr b="1">
-                <a:solidFill>
-                  <a:srgbClr val="008000"/>
-                </a:solidFill>
-                <a:latin typeface="Courier"/>
-              </a:rPr>
-              <a:t>import</a:t>
-            </a:r>
-            <a:r>
-              <a:rPr>
-                <a:latin typeface="Courier"/>
-              </a:rPr>
-              <a:t> GroupKFold</a:t>
-            </a:r>
-            <a:br/>
-            <a:br/>
-            <a:r>
-              <a:rPr>
-                <a:latin typeface="Courier"/>
-              </a:rPr>
-              <a:t>Y, D, G </a:t>
-            </a:r>
-            <a:r>
-              <a:rPr>
-                <a:solidFill>
-                  <a:srgbClr val="666666"/>
-                </a:solidFill>
-                <a:latin typeface="Courier"/>
-              </a:rPr>
-              <a:t>=</a:t>
-            </a:r>
-            <a:r>
-              <a:rPr>
-                <a:latin typeface="Courier"/>
-              </a:rPr>
-              <a:t> d[</a:t>
-            </a:r>
-            <a:r>
-              <a:rPr>
-                <a:solidFill>
-                  <a:srgbClr val="4070A0"/>
-                </a:solidFill>
-                <a:latin typeface="Courier"/>
-              </a:rPr>
-              <a:t>"ai_use_any"</a:t>
-            </a:r>
-            <a:r>
-              <a:rPr>
-                <a:latin typeface="Courier"/>
-              </a:rPr>
-              <a:t>].to_numpy(), d[</a:t>
-            </a:r>
-            <a:r>
-              <a:rPr>
-                <a:solidFill>
-                  <a:srgbClr val="4070A0"/>
-                </a:solidFill>
-                <a:latin typeface="Courier"/>
-              </a:rPr>
-              <a:t>"has_ai_strategy"</a:t>
-            </a:r>
-            <a:r>
-              <a:rPr>
-                <a:latin typeface="Courier"/>
-              </a:rPr>
-              <a:t>].to_numpy(), d[</a:t>
-            </a:r>
-            <a:r>
-              <a:rPr>
-                <a:solidFill>
-                  <a:srgbClr val="4070A0"/>
-                </a:solidFill>
-                <a:latin typeface="Courier"/>
-              </a:rPr>
-              <a:t>"geo"</a:t>
-            </a:r>
-            <a:r>
-              <a:rPr>
-                <a:latin typeface="Courier"/>
-              </a:rPr>
-              <a:t>]</a:t>
-            </a:r>
-            <a:br/>
-            <a:r>
-              <a:rPr>
-                <a:latin typeface="Courier"/>
-              </a:rPr>
-              <a:t>yres, dres </a:t>
-            </a:r>
-            <a:r>
-              <a:rPr>
-                <a:solidFill>
-                  <a:srgbClr val="666666"/>
-                </a:solidFill>
-                <a:latin typeface="Courier"/>
-              </a:rPr>
-              <a:t>=</a:t>
-            </a:r>
-            <a:r>
-              <a:rPr>
-                <a:latin typeface="Courier"/>
-              </a:rPr>
-              <a:t> np.zeros(</a:t>
-            </a:r>
-            <a:r>
-              <a:rPr>
-                <a:solidFill>
-                  <a:srgbClr val="008000"/>
-                </a:solidFill>
-                <a:latin typeface="Courier"/>
-              </a:rPr>
-              <a:t>len</a:t>
-            </a:r>
-            <a:r>
-              <a:rPr>
-                <a:latin typeface="Courier"/>
-              </a:rPr>
-              <a:t>(d)), np.zeros(</a:t>
-            </a:r>
-            <a:r>
-              <a:rPr>
-                <a:solidFill>
-                  <a:srgbClr val="008000"/>
-                </a:solidFill>
-                <a:latin typeface="Courier"/>
-              </a:rPr>
-              <a:t>len</a:t>
-            </a:r>
-            <a:r>
-              <a:rPr>
-                <a:latin typeface="Courier"/>
-              </a:rPr>
-              <a:t>(d))</a:t>
-            </a:r>
-            <a:br/>
-            <a:br/>
-            <a:r>
-              <a:rPr b="1">
-                <a:solidFill>
-                  <a:srgbClr val="007020"/>
-                </a:solidFill>
-                <a:latin typeface="Courier"/>
-              </a:rPr>
-              <a:t>for</a:t>
-            </a:r>
-            <a:r>
-              <a:rPr>
-                <a:latin typeface="Courier"/>
-              </a:rPr>
-              <a:t> tr, te </a:t>
-            </a:r>
-            <a:r>
-              <a:rPr b="1">
-                <a:solidFill>
-                  <a:srgbClr val="007020"/>
-                </a:solidFill>
-                <a:latin typeface="Courier"/>
-              </a:rPr>
-              <a:t>in</a:t>
-            </a:r>
-            <a:r>
-              <a:rPr>
-                <a:latin typeface="Courier"/>
-              </a:rPr>
-              <a:t> GroupKFold(</a:t>
-            </a:r>
-            <a:r>
-              <a:rPr>
-                <a:solidFill>
-                  <a:srgbClr val="40A070"/>
-                </a:solidFill>
-                <a:latin typeface="Courier"/>
-              </a:rPr>
-              <a:t>5</a:t>
-            </a:r>
-            <a:r>
-              <a:rPr>
-                <a:latin typeface="Courier"/>
-              </a:rPr>
-              <a:t>).split(Xc, Y, G):</a:t>
-            </a:r>
-            <a:br/>
-            <a:r>
-              <a:rPr>
-                <a:latin typeface="Courier"/>
-              </a:rPr>
-              <a:t>    my </a:t>
-            </a:r>
-            <a:r>
-              <a:rPr>
-                <a:solidFill>
-                  <a:srgbClr val="666666"/>
-                </a:solidFill>
-                <a:latin typeface="Courier"/>
-              </a:rPr>
-              <a:t>=</a:t>
-            </a:r>
-            <a:r>
-              <a:rPr>
-                <a:latin typeface="Courier"/>
-              </a:rPr>
-              <a:t> RandomForestRegressor(</a:t>
-            </a:r>
-            <a:r>
-              <a:rPr>
-                <a:solidFill>
-                  <a:srgbClr val="40A070"/>
-                </a:solidFill>
-                <a:latin typeface="Courier"/>
-              </a:rPr>
-              <a:t>400</a:t>
-            </a:r>
-            <a:r>
-              <a:rPr>
-                <a:latin typeface="Courier"/>
-              </a:rPr>
-              <a:t>, min_samples_leaf</a:t>
-            </a:r>
-            <a:r>
-              <a:rPr>
-                <a:solidFill>
-                  <a:srgbClr val="666666"/>
-                </a:solidFill>
-                <a:latin typeface="Courier"/>
-              </a:rPr>
-              <a:t>=</a:t>
-            </a:r>
-            <a:r>
-              <a:rPr>
-                <a:solidFill>
-                  <a:srgbClr val="40A070"/>
-                </a:solidFill>
-                <a:latin typeface="Courier"/>
-              </a:rPr>
-              <a:t>5</a:t>
-            </a:r>
-            <a:r>
-              <a:rPr>
-                <a:latin typeface="Courier"/>
-              </a:rPr>
-              <a:t>, random_state</a:t>
-            </a:r>
-            <a:r>
-              <a:rPr>
-                <a:solidFill>
-                  <a:srgbClr val="666666"/>
-                </a:solidFill>
-                <a:latin typeface="Courier"/>
-              </a:rPr>
-              <a:t>=</a:t>
-            </a:r>
-            <a:r>
-              <a:rPr>
-                <a:solidFill>
-                  <a:srgbClr val="40A070"/>
-                </a:solidFill>
-                <a:latin typeface="Courier"/>
-              </a:rPr>
-              <a:t>60033</a:t>
-            </a:r>
-            <a:r>
-              <a:rPr>
-                <a:latin typeface="Courier"/>
-              </a:rPr>
-              <a:t>).fit(Xc.iloc[tr], Y[tr])</a:t>
-            </a:r>
-            <a:br/>
-            <a:r>
-              <a:rPr>
-                <a:latin typeface="Courier"/>
-              </a:rPr>
-              <a:t>    md </a:t>
-            </a:r>
-            <a:r>
-              <a:rPr>
-                <a:solidFill>
-                  <a:srgbClr val="666666"/>
-                </a:solidFill>
-                <a:latin typeface="Courier"/>
-              </a:rPr>
-              <a:t>=</a:t>
-            </a:r>
-            <a:r>
-              <a:rPr>
-                <a:latin typeface="Courier"/>
-              </a:rPr>
-              <a:t> RandomForestClassifier(</a:t>
-            </a:r>
-            <a:r>
-              <a:rPr>
-                <a:solidFill>
-                  <a:srgbClr val="40A070"/>
-                </a:solidFill>
-                <a:latin typeface="Courier"/>
-              </a:rPr>
-              <a:t>400</a:t>
-            </a:r>
-            <a:r>
-              <a:rPr>
-                <a:latin typeface="Courier"/>
-              </a:rPr>
-              <a:t>, min_samples_leaf</a:t>
-            </a:r>
-            <a:r>
-              <a:rPr>
-                <a:solidFill>
-                  <a:srgbClr val="666666"/>
-                </a:solidFill>
-                <a:latin typeface="Courier"/>
-              </a:rPr>
-              <a:t>=</a:t>
-            </a:r>
-            <a:r>
-              <a:rPr>
-                <a:solidFill>
-                  <a:srgbClr val="40A070"/>
-                </a:solidFill>
-                <a:latin typeface="Courier"/>
-              </a:rPr>
-              <a:t>5</a:t>
-            </a:r>
-            <a:r>
-              <a:rPr>
-                <a:latin typeface="Courier"/>
-              </a:rPr>
-              <a:t>, random_state</a:t>
-            </a:r>
-            <a:r>
-              <a:rPr>
-                <a:solidFill>
-                  <a:srgbClr val="666666"/>
-                </a:solidFill>
-                <a:latin typeface="Courier"/>
-              </a:rPr>
-              <a:t>=</a:t>
-            </a:r>
-            <a:r>
-              <a:rPr>
-                <a:solidFill>
-                  <a:srgbClr val="40A070"/>
-                </a:solidFill>
-                <a:latin typeface="Courier"/>
-              </a:rPr>
-              <a:t>60033</a:t>
-            </a:r>
-            <a:r>
-              <a:rPr>
-                <a:latin typeface="Courier"/>
-              </a:rPr>
-              <a:t>).fit(Xc.iloc[tr], D[tr])</a:t>
-            </a:r>
-            <a:br/>
-            <a:r>
-              <a:rPr>
-                <a:latin typeface="Courier"/>
-              </a:rPr>
-              <a:t>    yres[te] </a:t>
-            </a:r>
-            <a:r>
-              <a:rPr>
-                <a:solidFill>
-                  <a:srgbClr val="666666"/>
-                </a:solidFill>
-                <a:latin typeface="Courier"/>
-              </a:rPr>
-              <a:t>=</a:t>
-            </a:r>
-            <a:r>
-              <a:rPr>
-                <a:latin typeface="Courier"/>
-              </a:rPr>
-              <a:t> Y[te] </a:t>
-            </a:r>
-            <a:r>
-              <a:rPr>
-                <a:solidFill>
-                  <a:srgbClr val="666666"/>
-                </a:solidFill>
-                <a:latin typeface="Courier"/>
-              </a:rPr>
-              <a:t>-</a:t>
-            </a:r>
-            <a:r>
-              <a:rPr>
-                <a:latin typeface="Courier"/>
-              </a:rPr>
-              <a:t> my.predict(Xc.iloc[te])</a:t>
-            </a:r>
-            <a:br/>
-            <a:r>
-              <a:rPr>
-                <a:latin typeface="Courier"/>
-              </a:rPr>
-              <a:t>    dres[te] </a:t>
-            </a:r>
-            <a:r>
-              <a:rPr>
-                <a:solidFill>
-                  <a:srgbClr val="666666"/>
-                </a:solidFill>
-                <a:latin typeface="Courier"/>
-              </a:rPr>
-              <a:t>=</a:t>
-            </a:r>
-            <a:r>
-              <a:rPr>
-                <a:latin typeface="Courier"/>
-              </a:rPr>
-              <a:t> D[te] </a:t>
-            </a:r>
-            <a:r>
-              <a:rPr>
-                <a:solidFill>
-                  <a:srgbClr val="666666"/>
-                </a:solidFill>
-                <a:latin typeface="Courier"/>
-              </a:rPr>
-              <a:t>-</a:t>
-            </a:r>
-            <a:r>
-              <a:rPr>
-                <a:latin typeface="Courier"/>
-              </a:rPr>
-              <a:t> md.predict_proba(Xc.iloc[te])[:, </a:t>
-            </a:r>
-            <a:r>
-              <a:rPr>
-                <a:solidFill>
-                  <a:srgbClr val="40A070"/>
-                </a:solidFill>
-                <a:latin typeface="Courier"/>
-              </a:rPr>
-              <a:t>1</a:t>
-            </a:r>
-            <a:r>
-              <a:rPr>
-                <a:latin typeface="Courier"/>
-              </a:rPr>
-              <a:t>]</a:t>
-            </a:r>
-            <a:br/>
-            <a:br/>
-            <a:r>
-              <a:rPr>
-                <a:latin typeface="Courier"/>
-              </a:rPr>
-              <a:t>tau </a:t>
-            </a:r>
-            <a:r>
-              <a:rPr>
-                <a:solidFill>
-                  <a:srgbClr val="666666"/>
-                </a:solidFill>
-                <a:latin typeface="Courier"/>
-              </a:rPr>
-              <a:t>=</a:t>
-            </a:r>
-            <a:r>
-              <a:rPr>
-                <a:latin typeface="Courier"/>
-              </a:rPr>
-              <a:t> (yres </a:t>
-            </a:r>
-            <a:r>
-              <a:rPr>
-                <a:solidFill>
-                  <a:srgbClr val="666666"/>
-                </a:solidFill>
-                <a:latin typeface="Courier"/>
-              </a:rPr>
-              <a:t>*</a:t>
-            </a:r>
-            <a:r>
-              <a:rPr>
-                <a:latin typeface="Courier"/>
-              </a:rPr>
-              <a:t> dres).</a:t>
-            </a:r>
-            <a:r>
-              <a:rPr>
-                <a:solidFill>
-                  <a:srgbClr val="008000"/>
-                </a:solidFill>
-                <a:latin typeface="Courier"/>
-              </a:rPr>
-              <a:t>sum</a:t>
-            </a:r>
-            <a:r>
-              <a:rPr>
-                <a:latin typeface="Courier"/>
-              </a:rPr>
-              <a:t>() </a:t>
-            </a:r>
-            <a:r>
-              <a:rPr>
-                <a:solidFill>
-                  <a:srgbClr val="666666"/>
-                </a:solidFill>
-                <a:latin typeface="Courier"/>
-              </a:rPr>
-              <a:t>/</a:t>
-            </a:r>
-            <a:r>
-              <a:rPr>
-                <a:latin typeface="Courier"/>
-              </a:rPr>
-              <a:t> (dres </a:t>
-            </a:r>
-            <a:r>
-              <a:rPr>
-                <a:solidFill>
-                  <a:srgbClr val="666666"/>
-                </a:solidFill>
-                <a:latin typeface="Courier"/>
-              </a:rPr>
-              <a:t>**</a:t>
-            </a:r>
-            <a:r>
-              <a:rPr>
-                <a:latin typeface="Courier"/>
-              </a:rPr>
-              <a:t> </a:t>
-            </a:r>
-            <a:r>
-              <a:rPr>
-                <a:solidFill>
-                  <a:srgbClr val="40A070"/>
-                </a:solidFill>
-                <a:latin typeface="Courier"/>
-              </a:rPr>
-              <a:t>2</a:t>
-            </a:r>
-            <a:r>
-              <a:rPr>
-                <a:latin typeface="Courier"/>
-              </a:rPr>
-              <a:t>).</a:t>
-            </a:r>
-            <a:r>
-              <a:rPr>
-                <a:solidFill>
-                  <a:srgbClr val="008000"/>
-                </a:solidFill>
-                <a:latin typeface="Courier"/>
-              </a:rPr>
-              <a:t>sum</a:t>
-            </a:r>
-            <a:r>
-              <a:rPr>
-                <a:latin typeface="Courier"/>
-              </a:rPr>
-              <a:t>()</a:t>
-            </a:r>
-            <a:br/>
-            <a:r>
-              <a:rPr>
-                <a:latin typeface="Courier"/>
-              </a:rPr>
-              <a:t>se  </a:t>
-            </a:r>
-            <a:r>
-              <a:rPr>
-                <a:solidFill>
-                  <a:srgbClr val="666666"/>
-                </a:solidFill>
-                <a:latin typeface="Courier"/>
-              </a:rPr>
-              <a:t>=</a:t>
-            </a:r>
-            <a:r>
-              <a:rPr>
-                <a:latin typeface="Courier"/>
-              </a:rPr>
-              <a:t> np.sqrt(((yres </a:t>
-            </a:r>
-            <a:r>
-              <a:rPr>
-                <a:solidFill>
-                  <a:srgbClr val="666666"/>
-                </a:solidFill>
-                <a:latin typeface="Courier"/>
-              </a:rPr>
-              <a:t>-</a:t>
-            </a:r>
-            <a:r>
-              <a:rPr>
-                <a:latin typeface="Courier"/>
-              </a:rPr>
-              <a:t> tau </a:t>
-            </a:r>
-            <a:r>
-              <a:rPr>
-                <a:solidFill>
-                  <a:srgbClr val="666666"/>
-                </a:solidFill>
-                <a:latin typeface="Courier"/>
-              </a:rPr>
-              <a:t>*</a:t>
-            </a:r>
-            <a:r>
-              <a:rPr>
-                <a:latin typeface="Courier"/>
-              </a:rPr>
-              <a:t> dres) </a:t>
-            </a:r>
-            <a:r>
-              <a:rPr>
-                <a:solidFill>
-                  <a:srgbClr val="666666"/>
-                </a:solidFill>
-                <a:latin typeface="Courier"/>
-              </a:rPr>
-              <a:t>**</a:t>
-            </a:r>
-            <a:r>
-              <a:rPr>
-                <a:latin typeface="Courier"/>
-              </a:rPr>
-              <a:t> </a:t>
-            </a:r>
-            <a:r>
-              <a:rPr>
-                <a:solidFill>
-                  <a:srgbClr val="40A070"/>
-                </a:solidFill>
-                <a:latin typeface="Courier"/>
-              </a:rPr>
-              <a:t>2</a:t>
-            </a:r>
-            <a:r>
-              <a:rPr>
-                <a:latin typeface="Courier"/>
-              </a:rPr>
-              <a:t> </a:t>
-            </a:r>
-            <a:r>
-              <a:rPr>
-                <a:solidFill>
-                  <a:srgbClr val="666666"/>
-                </a:solidFill>
-                <a:latin typeface="Courier"/>
-              </a:rPr>
-              <a:t>*</a:t>
-            </a:r>
-            <a:r>
-              <a:rPr>
-                <a:latin typeface="Courier"/>
-              </a:rPr>
-              <a:t> dres </a:t>
-            </a:r>
-            <a:r>
-              <a:rPr>
-                <a:solidFill>
-                  <a:srgbClr val="666666"/>
-                </a:solidFill>
-                <a:latin typeface="Courier"/>
-              </a:rPr>
-              <a:t>**</a:t>
-            </a:r>
-            <a:r>
-              <a:rPr>
-                <a:latin typeface="Courier"/>
-              </a:rPr>
-              <a:t> </a:t>
-            </a:r>
-            <a:r>
-              <a:rPr>
-                <a:solidFill>
-                  <a:srgbClr val="40A070"/>
-                </a:solidFill>
-                <a:latin typeface="Courier"/>
-              </a:rPr>
-              <a:t>2</a:t>
-            </a:r>
-            <a:r>
-              <a:rPr>
-                <a:latin typeface="Courier"/>
-              </a:rPr>
-              <a:t>).</a:t>
-            </a:r>
-            <a:r>
-              <a:rPr>
-                <a:solidFill>
-                  <a:srgbClr val="008000"/>
-                </a:solidFill>
-                <a:latin typeface="Courier"/>
-              </a:rPr>
-              <a:t>sum</a:t>
-            </a:r>
-            <a:r>
-              <a:rPr>
-                <a:latin typeface="Courier"/>
-              </a:rPr>
-              <a:t>()) </a:t>
-            </a:r>
-            <a:r>
-              <a:rPr>
-                <a:solidFill>
-                  <a:srgbClr val="666666"/>
-                </a:solidFill>
-                <a:latin typeface="Courier"/>
-              </a:rPr>
-              <a:t>/</a:t>
-            </a:r>
-            <a:r>
-              <a:rPr>
-                <a:latin typeface="Courier"/>
-              </a:rPr>
-              <a:t> (dres </a:t>
-            </a:r>
-            <a:r>
-              <a:rPr>
-                <a:solidFill>
-                  <a:srgbClr val="666666"/>
-                </a:solidFill>
-                <a:latin typeface="Courier"/>
-              </a:rPr>
-              <a:t>**</a:t>
-            </a:r>
-            <a:r>
-              <a:rPr>
-                <a:latin typeface="Courier"/>
-              </a:rPr>
-              <a:t> </a:t>
-            </a:r>
-            <a:r>
-              <a:rPr>
-                <a:solidFill>
-                  <a:srgbClr val="40A070"/>
-                </a:solidFill>
-                <a:latin typeface="Courier"/>
-              </a:rPr>
-              <a:t>2</a:t>
-            </a:r>
-            <a:r>
-              <a:rPr>
-                <a:latin typeface="Courier"/>
-              </a:rPr>
-              <a:t>).</a:t>
-            </a:r>
-            <a:r>
-              <a:rPr>
-                <a:solidFill>
-                  <a:srgbClr val="008000"/>
-                </a:solidFill>
-                <a:latin typeface="Courier"/>
-              </a:rPr>
-              <a:t>sum</a:t>
-            </a:r>
-            <a:r>
-              <a:rPr>
-                <a:latin typeface="Courier"/>
-              </a:rPr>
-              <a:t>()</a:t>
-            </a:r>
-            <a:br/>
-            <a:r>
-              <a:rPr>
-                <a:solidFill>
-                  <a:srgbClr val="008000"/>
-                </a:solidFill>
-                <a:latin typeface="Courier"/>
-              </a:rPr>
-              <a:t>print</a:t>
-            </a:r>
-            <a:r>
-              <a:rPr>
-                <a:latin typeface="Courier"/>
-              </a:rPr>
-              <a:t>(</a:t>
-            </a:r>
-            <a:r>
-              <a:rPr>
-                <a:solidFill>
-                  <a:srgbClr val="BB6688"/>
-                </a:solidFill>
-                <a:latin typeface="Courier"/>
-              </a:rPr>
-              <a:t>f"DML ATE = </a:t>
-            </a:r>
-            <a:r>
-              <a:rPr>
-                <a:solidFill>
-                  <a:srgbClr val="4070A0"/>
-                </a:solidFill>
-                <a:latin typeface="Courier"/>
-              </a:rPr>
-              <a:t>{</a:t>
-            </a:r>
-            <a:r>
-              <a:rPr>
-                <a:latin typeface="Courier"/>
-              </a:rPr>
-              <a:t>tau</a:t>
-            </a:r>
-            <a:r>
-              <a:rPr>
-                <a:solidFill>
-                  <a:srgbClr val="4070A0"/>
-                </a:solidFill>
-                <a:latin typeface="Courier"/>
-              </a:rPr>
-              <a:t>:.3f}</a:t>
-            </a:r>
-            <a:r>
-              <a:rPr>
-                <a:solidFill>
-                  <a:srgbClr val="BB6688"/>
-                </a:solidFill>
-                <a:latin typeface="Courier"/>
-              </a:rPr>
-              <a:t>  (se </a:t>
-            </a:r>
-            <a:r>
-              <a:rPr>
-                <a:solidFill>
-                  <a:srgbClr val="4070A0"/>
-                </a:solidFill>
-                <a:latin typeface="Courier"/>
-              </a:rPr>
-              <a:t>{</a:t>
-            </a:r>
-            <a:r>
-              <a:rPr>
-                <a:latin typeface="Courier"/>
-              </a:rPr>
-              <a:t>se</a:t>
-            </a:r>
-            <a:r>
-              <a:rPr>
-                <a:solidFill>
-                  <a:srgbClr val="4070A0"/>
-                </a:solidFill>
-                <a:latin typeface="Courier"/>
-              </a:rPr>
-              <a:t>:.3f}</a:t>
-            </a:r>
-            <a:r>
-              <a:rPr>
-                <a:solidFill>
-                  <a:srgbClr val="BB6688"/>
-                </a:solidFill>
-                <a:latin typeface="Courier"/>
-              </a:rPr>
-              <a:t>)"</a:t>
-            </a:r>
-            <a:r>
-              <a:rPr>
-                <a:latin typeface="Courier"/>
-              </a:rPr>
-              <a:t>)</a:t>
-            </a:r>
-          </a:p>
-        </p:txBody>
-      </p:sp>
     </p:spTree>
   </p:cSld>
 </p:sld>
@@ -6587,350 +6616,66 @@
             </a:pPr>
             <a:r>
               <a:rPr/>
-              <a:t>Then with the library</a:t>
+              <a:t>Remove split sensitivity</a:t>
             </a:r>
           </a:p>
         </p:txBody>
       </p:sp>
-      <p:sp>
-        <p:nvSpPr>
-          <p:cNvPr id="3" name="Content Placeholder 2"/>
-          <p:cNvSpPr>
-            <a:spLocks noGrp="1"/>
-          </p:cNvSpPr>
-          <p:nvPr>
-            <p:ph idx="1"/>
-          </p:nvPr>
-        </p:nvSpPr>
-        <p:spPr/>
-        <p:txBody>
-          <a:bodyPr/>
-          <a:lstStyle/>
-          <a:p>
-            <a:pPr lvl="0" indent="0">
-              <a:buNone/>
-            </a:pPr>
-            <a:r>
-              <a:rPr b="1">
-                <a:solidFill>
-                  <a:srgbClr val="008000"/>
-                </a:solidFill>
-                <a:latin typeface="Courier"/>
-              </a:rPr>
-              <a:t>from</a:t>
-            </a:r>
-            <a:r>
-              <a:rPr>
-                <a:latin typeface="Courier"/>
-              </a:rPr>
-              <a:t> doubleml </a:t>
-            </a:r>
-            <a:r>
-              <a:rPr b="1">
-                <a:solidFill>
-                  <a:srgbClr val="008000"/>
-                </a:solidFill>
-                <a:latin typeface="Courier"/>
-              </a:rPr>
-              <a:t>import</a:t>
-            </a:r>
-            <a:r>
-              <a:rPr>
-                <a:latin typeface="Courier"/>
-              </a:rPr>
-              <a:t> DoubleMLData, DoubleMLPLR</a:t>
-            </a:r>
-            <a:br/>
-            <a:br/>
-            <a:r>
-              <a:rPr>
-                <a:latin typeface="Courier"/>
-              </a:rPr>
-              <a:t>dml_data </a:t>
-            </a:r>
-            <a:r>
-              <a:rPr>
-                <a:solidFill>
-                  <a:srgbClr val="666666"/>
-                </a:solidFill>
-                <a:latin typeface="Courier"/>
-              </a:rPr>
-              <a:t>=</a:t>
-            </a:r>
-            <a:r>
-              <a:rPr>
-                <a:latin typeface="Courier"/>
-              </a:rPr>
-              <a:t> DoubleMLData.from_arrays(Xc.to_numpy(), Y, D)</a:t>
-            </a:r>
-            <a:br/>
-            <a:r>
-              <a:rPr>
-                <a:latin typeface="Courier"/>
-              </a:rPr>
-              <a:t>dml </a:t>
-            </a:r>
-            <a:r>
-              <a:rPr>
-                <a:solidFill>
-                  <a:srgbClr val="666666"/>
-                </a:solidFill>
-                <a:latin typeface="Courier"/>
-              </a:rPr>
-              <a:t>=</a:t>
-            </a:r>
-            <a:r>
-              <a:rPr>
-                <a:latin typeface="Courier"/>
-              </a:rPr>
-              <a:t> DoubleMLPLR(dml_data,</a:t>
-            </a:r>
-            <a:br/>
-            <a:r>
-              <a:rPr>
-                <a:latin typeface="Courier"/>
-              </a:rPr>
-              <a:t>                  ml_l</a:t>
-            </a:r>
-            <a:r>
-              <a:rPr>
-                <a:solidFill>
-                  <a:srgbClr val="666666"/>
-                </a:solidFill>
-                <a:latin typeface="Courier"/>
-              </a:rPr>
-              <a:t>=</a:t>
-            </a:r>
-            <a:r>
-              <a:rPr>
-                <a:latin typeface="Courier"/>
-              </a:rPr>
-              <a:t>RandomForestRegressor(</a:t>
-            </a:r>
-            <a:r>
-              <a:rPr>
-                <a:solidFill>
-                  <a:srgbClr val="40A070"/>
-                </a:solidFill>
-                <a:latin typeface="Courier"/>
-              </a:rPr>
-              <a:t>400</a:t>
-            </a:r>
-            <a:r>
-              <a:rPr>
-                <a:latin typeface="Courier"/>
-              </a:rPr>
-              <a:t>, min_samples_leaf</a:t>
-            </a:r>
-            <a:r>
-              <a:rPr>
-                <a:solidFill>
-                  <a:srgbClr val="666666"/>
-                </a:solidFill>
-                <a:latin typeface="Courier"/>
-              </a:rPr>
-              <a:t>=</a:t>
-            </a:r>
-            <a:r>
-              <a:rPr>
-                <a:solidFill>
-                  <a:srgbClr val="40A070"/>
-                </a:solidFill>
-                <a:latin typeface="Courier"/>
-              </a:rPr>
-              <a:t>5</a:t>
-            </a:r>
-            <a:r>
-              <a:rPr>
-                <a:latin typeface="Courier"/>
-              </a:rPr>
-              <a:t>, random_state</a:t>
-            </a:r>
-            <a:r>
-              <a:rPr>
-                <a:solidFill>
-                  <a:srgbClr val="666666"/>
-                </a:solidFill>
-                <a:latin typeface="Courier"/>
-              </a:rPr>
-              <a:t>=</a:t>
-            </a:r>
-            <a:r>
-              <a:rPr>
-                <a:solidFill>
-                  <a:srgbClr val="40A070"/>
-                </a:solidFill>
-                <a:latin typeface="Courier"/>
-              </a:rPr>
-              <a:t>60033</a:t>
-            </a:r>
-            <a:r>
-              <a:rPr>
-                <a:latin typeface="Courier"/>
-              </a:rPr>
-              <a:t>),</a:t>
-            </a:r>
-            <a:br/>
-            <a:r>
-              <a:rPr>
-                <a:latin typeface="Courier"/>
-              </a:rPr>
-              <a:t>                  ml_m</a:t>
-            </a:r>
-            <a:r>
-              <a:rPr>
-                <a:solidFill>
-                  <a:srgbClr val="666666"/>
-                </a:solidFill>
-                <a:latin typeface="Courier"/>
-              </a:rPr>
-              <a:t>=</a:t>
-            </a:r>
-            <a:r>
-              <a:rPr>
-                <a:latin typeface="Courier"/>
-              </a:rPr>
-              <a:t>RandomForestClassifier(</a:t>
-            </a:r>
-            <a:r>
-              <a:rPr>
-                <a:solidFill>
-                  <a:srgbClr val="40A070"/>
-                </a:solidFill>
-                <a:latin typeface="Courier"/>
-              </a:rPr>
-              <a:t>400</a:t>
-            </a:r>
-            <a:r>
-              <a:rPr>
-                <a:latin typeface="Courier"/>
-              </a:rPr>
-              <a:t>, min_samples_leaf</a:t>
-            </a:r>
-            <a:r>
-              <a:rPr>
-                <a:solidFill>
-                  <a:srgbClr val="666666"/>
-                </a:solidFill>
-                <a:latin typeface="Courier"/>
-              </a:rPr>
-              <a:t>=</a:t>
-            </a:r>
-            <a:r>
-              <a:rPr>
-                <a:solidFill>
-                  <a:srgbClr val="40A070"/>
-                </a:solidFill>
-                <a:latin typeface="Courier"/>
-              </a:rPr>
-              <a:t>5</a:t>
-            </a:r>
-            <a:r>
-              <a:rPr>
-                <a:latin typeface="Courier"/>
-              </a:rPr>
-              <a:t>, random_state</a:t>
-            </a:r>
-            <a:r>
-              <a:rPr>
-                <a:solidFill>
-                  <a:srgbClr val="666666"/>
-                </a:solidFill>
-                <a:latin typeface="Courier"/>
-              </a:rPr>
-              <a:t>=</a:t>
-            </a:r>
-            <a:r>
-              <a:rPr>
-                <a:solidFill>
-                  <a:srgbClr val="40A070"/>
-                </a:solidFill>
-                <a:latin typeface="Courier"/>
-              </a:rPr>
-              <a:t>60033</a:t>
-            </a:r>
-            <a:r>
-              <a:rPr>
-                <a:latin typeface="Courier"/>
-              </a:rPr>
-              <a:t>),</a:t>
-            </a:r>
-            <a:br/>
-            <a:r>
-              <a:rPr>
-                <a:latin typeface="Courier"/>
-              </a:rPr>
-              <a:t>                  n_folds</a:t>
-            </a:r>
-            <a:r>
-              <a:rPr>
-                <a:solidFill>
-                  <a:srgbClr val="666666"/>
-                </a:solidFill>
-                <a:latin typeface="Courier"/>
-              </a:rPr>
-              <a:t>=</a:t>
-            </a:r>
-            <a:r>
-              <a:rPr>
-                <a:solidFill>
-                  <a:srgbClr val="40A070"/>
-                </a:solidFill>
-                <a:latin typeface="Courier"/>
-              </a:rPr>
-              <a:t>5</a:t>
-            </a:r>
-            <a:r>
-              <a:rPr>
-                <a:latin typeface="Courier"/>
-              </a:rPr>
-              <a:t>)</a:t>
-            </a:r>
-            <a:br/>
-            <a:r>
-              <a:rPr>
-                <a:latin typeface="Courier"/>
-              </a:rPr>
-              <a:t>dml.fit()</a:t>
-            </a:r>
-            <a:br/>
-            <a:r>
-              <a:rPr>
-                <a:solidFill>
-                  <a:srgbClr val="008000"/>
-                </a:solidFill>
-                <a:latin typeface="Courier"/>
-              </a:rPr>
-              <a:t>print</a:t>
-            </a:r>
-            <a:r>
-              <a:rPr>
-                <a:latin typeface="Courier"/>
-              </a:rPr>
-              <a:t>(dml.summary)</a:t>
-            </a:r>
-          </a:p>
-          <a:p>
-            <a:pPr lvl="0" indent="0" marL="0">
-              <a:buNone/>
-            </a:pPr>
-            <a:r>
-              <a:rPr/>
-              <a:t>The two should agree closely. Writing it by hand once is how you stop treating </a:t>
-            </a:r>
-            <a:r>
-              <a:rPr>
-                <a:latin typeface="Courier"/>
-              </a:rPr>
-              <a:t>DoubleMLPLR</a:t>
-            </a:r>
-            <a:r>
-              <a:rPr/>
-              <a:t> as a black box.</a:t>
-            </a:r>
-          </a:p>
-        </p:txBody>
-      </p:sp>
+      <mc:AlternateContent xmlns:mc="http://schemas.openxmlformats.org/markup-compatibility/2006">
+        <mc:Choice xmlns:a14="http://schemas.microsoft.com/office/drawing/2010/main" Requires="a14">
+          <p:sp>
+            <p:nvSpPr>
+              <p:cNvPr id="3" name="Content Placeholder 2"/>
+              <p:cNvSpPr>
+                <a:spLocks noGrp="1"/>
+              </p:cNvSpPr>
+              <p:nvPr>
+                <p:ph idx="1"/>
+              </p:nvPr>
+            </p:nvSpPr>
+            <p:spPr/>
+            <p:txBody>
+              <a:bodyPr/>
+              <a:lstStyle/>
+              <a:p>
+                <a:pPr lvl="0" indent="0" marL="0">
+                  <a:buNone/>
+                </a:pPr>
+                <a:r>
+                  <a:rPr/>
+                  <a:t>Repeat the whole procedure over several random splits and take the </a:t>
+                </a:r>
+                <a:r>
+                  <a:rPr b="1"/>
+                  <a:t>median</a:t>
+                </a:r>
+                <a:r>
+                  <a:rPr/>
+                  <a:t> of </a:t>
+                </a:r>
+                <a14:m>
+                  <m:oMath xmlns:m="http://schemas.openxmlformats.org/officeDocument/2006/math">
+                    <m:acc>
+                      <m:accPr>
+                        <m:chr m:val="̂"/>
+                      </m:accPr>
+                      <m:e>
+                        <m:r>
+                          <m:t>θ</m:t>
+                        </m:r>
+                      </m:e>
+                    </m:acc>
+                  </m:oMath>
+                </a14:m>
+                <a:r>
+                  <a:rPr/>
+                  <a:t>.</a:t>
+                </a:r>
+              </a:p>
+            </p:txBody>
+          </p:sp>
+        </mc:Choice>
+      </mc:AlternateContent>
     </p:spTree>
   </p:cSld>
 </p:sld>
@@ -6973,230 +6718,166 @@
             </a:pPr>
             <a:r>
               <a:rPr/>
-              <a:t>Compare the three numbers</a:t>
+              <a:t>The result</a:t>
             </a:r>
           </a:p>
         </p:txBody>
       </p:sp>
-      <p:graphicFrame>
-        <p:nvGraphicFramePr>
-          <p:cNvPr id="6" name="Content Placeholder 5"/>
-          <p:cNvGraphicFramePr>
-            <a:graphicFrameLocks noGrp="1"/>
-          </p:cNvGraphicFramePr>
-          <p:nvPr>
-            <p:ph idx="1"/>
-          </p:nvPr>
-        </p:nvGraphicFramePr>
-        <p:xfrm>
-          <a:off x="457200" y="1193800"/>
-          <a:ext cx="8229600" cy="3390900"/>
-        </p:xfrm>
-        <a:graphic>
-          <a:graphicData uri="http://schemas.openxmlformats.org/drawingml/2006/table">
-            <a:tbl>
-              <a:tblPr firstRow="1" bandRow="1">
-                <a:tableStyleId>{5C22544A-7EE6-4342-B048-85BDC9FD1C3A}</a:tableStyleId>
-              </a:tblPr>
-              <a:tblGrid>
-                <a:gridCol w="4114800"/>
-                <a:gridCol w="4114800"/>
-              </a:tblGrid>
-              <a:tr h="0">
-                <a:tc>
-                  <a:txBody>
-                    <a:bodyPr/>
-                    <a:lstStyle/>
-                    <a:p>
-                      <a:pPr lvl="0" indent="0" marL="0">
-                        <a:buNone/>
-                      </a:pPr>
-                      <a:r>
-                        <a:rPr/>
-                        <a:t>Estimator</a:t>
-                      </a:r>
-                    </a:p>
-                  </a:txBody>
-                  <a:tcPr/>
-                </a:tc>
-                <a:tc>
-                  <a:txBody>
-                    <a:bodyPr/>
-                    <a:lstStyle/>
-                    <a:p>
-                      <a:pPr lvl="0" indent="0" marL="0">
-                        <a:buNone/>
-                      </a:pPr>
-                      <a:r>
-                        <a:rPr/>
-                        <a:t>What it assumes</a:t>
-                      </a:r>
-                    </a:p>
-                  </a:txBody>
-                  <a:tcPr/>
-                </a:tc>
-              </a:tr>
-              <a:tr h="0">
-                <a:tc>
-                  <a:txBody>
-                    <a:bodyPr/>
-                    <a:lstStyle/>
-                    <a:p>
-                      <a:pPr lvl="0" indent="0" marL="0">
-                        <a:buNone/>
-                      </a:pPr>
-                      <a:r>
-                        <a:rPr/>
-                        <a:t>Naive OLS</a:t>
-                      </a:r>
-                    </a:p>
-                  </a:txBody>
-                </a:tc>
-                <a:tc>
-                  <a:txBody>
-                    <a:bodyPr/>
-                    <a:lstStyle/>
-                    <a:p>
-                      <a:pPr lvl="0" indent="0" marL="0">
-                        <a:buNone/>
-                      </a:pPr>
-                      <a:r>
-                        <a:rPr/>
-                        <a:t>Strategy adoption is unrelated to everything</a:t>
-                      </a:r>
-                    </a:p>
-                  </a:txBody>
-                </a:tc>
-              </a:tr>
-              <a:tr h="0">
-                <a:tc>
-                  <a:txBody>
-                    <a:bodyPr/>
-                    <a:lstStyle/>
-                    <a:p>
-                      <a:pPr lvl="0" indent="0" marL="0">
-                        <a:buNone/>
-                      </a:pPr>
-                      <a:r>
-                        <a:rPr/>
-                        <a:t>ML with controls</a:t>
-                      </a:r>
-                    </a:p>
-                  </a:txBody>
-                </a:tc>
-                <a:tc>
-                  <a:txBody>
-                    <a:bodyPr/>
-                    <a:lstStyle/>
-                    <a:p>
-                      <a:pPr lvl="0" indent="0" marL="0">
-                        <a:buNone/>
-                      </a:pPr>
-                      <a:r>
-                        <a:rPr/>
-                        <a:t>Regularisation bias is negligible — it is not</a:t>
-                      </a:r>
-                    </a:p>
-                  </a:txBody>
-                </a:tc>
-              </a:tr>
-              <a:tr h="0">
-                <a:tc>
-                  <a:txBody>
-                    <a:bodyPr/>
-                    <a:lstStyle/>
-                    <a:p>
-                      <a:pPr lvl="0" indent="0" marL="0">
-                        <a:buNone/>
-                      </a:pPr>
-                      <a:r>
-                        <a:rPr b="1"/>
-                        <a:t>DML</a:t>
-                      </a:r>
-                    </a:p>
-                  </a:txBody>
-                </a:tc>
-                <a:tc>
-                  <a:txBody>
-                    <a:bodyPr/>
-                    <a:lstStyle/>
-                    <a:p>
-                      <a:pPr lvl="0" indent="0" marL="0">
-                        <a:buNone/>
-                      </a:pPr>
-                      <a:r>
-                        <a:rPr/>
-                        <a:t>Unconfoundedness, overlap, and honest cross-fitting</a:t>
-                      </a:r>
-                    </a:p>
-                  </a:txBody>
-                </a:tc>
-              </a:tr>
-            </a:tbl>
-          </a:graphicData>
-        </a:graphic>
-      </p:graphicFrame>
+      <mc:AlternateContent xmlns:mc="http://schemas.openxmlformats.org/markup-compatibility/2006">
+        <mc:Choice xmlns:a14="http://schemas.microsoft.com/office/drawing/2010/main" Requires="a14">
+          <p:sp>
+            <p:nvSpPr>
+              <p:cNvPr id="3" name="Content Placeholder 2"/>
+              <p:cNvSpPr>
+                <a:spLocks noGrp="1"/>
+              </p:cNvSpPr>
+              <p:nvPr>
+                <p:ph idx="1"/>
+              </p:nvPr>
+            </p:nvSpPr>
+            <p:spPr/>
+            <p:txBody>
+              <a:bodyPr/>
+              <a:lstStyle/>
+              <a:p>
+                <a:pPr lvl="0" indent="0" marL="0">
+                  <a:buNone/>
+                </a:pPr>
+                <a14:m>
+                  <m:oMathPara xmlns:m="http://schemas.openxmlformats.org/officeDocument/2006/math">
+                    <m:oMathParaPr>
+                      <m:jc m:val="center"/>
+                    </m:oMathParaPr>
+                    <m:oMath>
+                      <m:rad>
+                        <m:radPr>
+                          <m:degHide m:val="on"/>
+                        </m:radPr>
+                        <m:deg/>
+                        <m:e>
+                          <m:r>
+                            <m:t>n</m:t>
+                          </m:r>
+                        </m:e>
+                      </m:rad>
+                      <m:d>
+                        <m:dPr>
+                          <m:begChr m:val="("/>
+                          <m:sepChr m:val=""/>
+                          <m:endChr m:val=")"/>
+                          <m:grow/>
+                        </m:dPr>
+                        <m:e>
+                          <m:acc>
+                            <m:accPr>
+                              <m:chr m:val="̂"/>
+                            </m:accPr>
+                            <m:e>
+                              <m:r>
+                                <m:t>θ</m:t>
+                              </m:r>
+                            </m:e>
+                          </m:acc>
+                          <m:r>
+                            <m:rPr>
+                              <m:sty m:val="p"/>
+                            </m:rPr>
+                            <m:t>−</m:t>
+                          </m:r>
+                          <m:sSub>
+                            <m:e>
+                              <m:r>
+                                <m:t>θ</m:t>
+                              </m:r>
+                            </m:e>
+                            <m:sub>
+                              <m:r>
+                                <m:t>0</m:t>
+                              </m:r>
+                            </m:sub>
+                          </m:sSub>
+                        </m:e>
+                      </m:d>
+                      <m:r>
+                        <m:rPr>
+                          <m:sty m:val="p"/>
+                        </m:rPr>
+                        <m:t>→</m:t>
+                      </m:r>
+                      <m:r>
+                        <m:t>N</m:t>
+                      </m:r>
+                      <m:d>
+                        <m:dPr>
+                          <m:begChr m:val="("/>
+                          <m:sepChr m:val=""/>
+                          <m:endChr m:val=")"/>
+                          <m:grow/>
+                        </m:dPr>
+                        <m:e>
+                          <m:r>
+                            <m:t>0</m:t>
+                          </m:r>
+                          <m:r>
+                            <m:rPr>
+                              <m:sty m:val="p"/>
+                            </m:rPr>
+                            <m:t>,</m:t>
+                          </m:r>
+                          <m:sSup>
+                            <m:e>
+                              <m:r>
+                                <m:t>σ</m:t>
+                              </m:r>
+                            </m:e>
+                            <m:sup>
+                              <m:r>
+                                <m:t>2</m:t>
+                              </m:r>
+                            </m:sup>
+                          </m:sSup>
+                        </m:e>
+                      </m:d>
+                    </m:oMath>
+                  </m:oMathPara>
+                </a14:m>
+              </a:p>
+              <a:p>
+                <a:pPr lvl="0" indent="0" marL="0">
+                  <a:buNone/>
+                </a:pPr>
+                <a:r>
+                  <a:rPr/>
+                  <a:t>so </a:t>
+                </a:r>
+                <a:r>
+                  <a:rPr b="1"/>
+                  <a:t>ordinary confidence intervals are valid</a:t>
+                </a:r>
+                <a:r>
+                  <a:rPr/>
+                  <a:t> — despite having used black-box learners for the nuisances.</a:t>
+                </a:r>
+              </a:p>
+              <a:p>
+                <a:pPr lvl="0" indent="0" marL="0">
+                  <a:buNone/>
+                </a:pPr>
+                <a:r>
+                  <a:rPr/>
+                  <a:t>This is the reconciliation of Sessions 05–07 with Session 03.</a:t>
+                </a:r>
+              </a:p>
+            </p:txBody>
+          </p:sp>
+        </mc:Choice>
+      </mc:AlternateContent>
     </p:spTree>
   </p:cSld>
 </p:sld>
 </file>
 
 <file path=ppt/slides/slide23.xml><?xml version="1.0" encoding="utf-8"?>
-<p:sld xmlns:a="http://schemas.openxmlformats.org/drawingml/2006/main" xmlns:r="http://schemas.openxmlformats.org/officeDocument/2006/relationships" xmlns:p="http://schemas.openxmlformats.org/presentationml/2006/main">
-  <p:cSld>
-    <p:spTree>
-      <p:nvGrpSpPr>
-        <p:cNvPr id="1" name=""/>
-        <p:cNvGrpSpPr/>
-        <p:nvPr/>
-      </p:nvGrpSpPr>
-      <p:grpSpPr>
-        <a:xfrm>
-          <a:off x="0" y="0"/>
-          <a:ext cx="0" cy="0"/>
-          <a:chOff x="0" y="0"/>
-          <a:chExt cx="0" cy="0"/>
-        </a:xfrm>
-      </p:grpSpPr>
-      <p:sp>
-        <p:nvSpPr>
-          <p:cNvPr id="3" name="Content Placeholder 2"/>
-          <p:cNvSpPr>
-            <a:spLocks noGrp="1"/>
-          </p:cNvSpPr>
-          <p:nvPr>
-            <p:ph idx="1"/>
-          </p:nvPr>
-        </p:nvSpPr>
-        <p:spPr/>
-        <p:txBody>
-          <a:bodyPr/>
-          <a:lstStyle/>
-          <a:p>
-            <a:pPr lvl="0" indent="0" marL="0">
-              <a:buNone/>
-            </a:pPr>
-            <a:r>
-              <a:rPr/>
-              <a:t>Report all three. The movement between them </a:t>
-            </a:r>
-            <a:r>
-              <a:rPr i="1"/>
-              <a:t>is</a:t>
-            </a:r>
-            <a:r>
-              <a:rPr/>
-              <a:t> your evidence that confounding mattered.</a:t>
-            </a:r>
-          </a:p>
-        </p:txBody>
-      </p:sp>
-    </p:spTree>
-  </p:cSld>
-</p:sld>
-</file>
-
-<file path=ppt/slides/slide24.xml><?xml version="1.0" encoding="utf-8"?>
 <p:sld xmlns:a="http://schemas.openxmlformats.org/drawingml/2006/main" xmlns:r="http://schemas.openxmlformats.org/officeDocument/2006/relationships" xmlns:p="http://schemas.openxmlformats.org/presentationml/2006/main">
   <p:cSld>
     <p:spTree>
@@ -7238,7 +6919,7 @@
             </a:pPr>
             <a:r>
               <a:rPr/>
-              <a:t>Heterogeneity</a:t>
+              <a:t>10.5 Heterogeneous effects</a:t>
             </a:r>
           </a:p>
         </p:txBody>
@@ -7248,7 +6929,7 @@
 </p:sld>
 </file>
 
-<file path=ppt/slides/slide25.xml><?xml version="1.0" encoding="utf-8"?>
+<file path=ppt/slides/slide24.xml><?xml version="1.0" encoding="utf-8"?>
 <p:sld xmlns:a="http://schemas.openxmlformats.org/drawingml/2006/main" xmlns:r="http://schemas.openxmlformats.org/officeDocument/2006/relationships" xmlns:p="http://schemas.openxmlformats.org/presentationml/2006/main">
   <p:cSld>
     <p:spTree>
@@ -7285,7 +6966,7 @@
             </a:pPr>
             <a:r>
               <a:rPr/>
-              <a:t>The average hides the policy question</a:t>
+              <a:t>For whom, not on average</a:t>
             </a:r>
           </a:p>
         </p:txBody>
@@ -7421,13 +7102,128 @@
                 </a:pPr>
                 <a:r>
                   <a:rPr/>
-                  <a:t>“Does a strategy help?” is less useful than “where does it help?” — and only the second tells anyone what to do.</a:t>
+                  <a:t>Often the interesting question. “Does a strategy help?” is less useful than “where does it help?” — and only the second tells anyone what to do.</a:t>
                 </a:r>
               </a:p>
             </p:txBody>
           </p:sp>
         </mc:Choice>
       </mc:AlternateContent>
+    </p:spTree>
+  </p:cSld>
+</p:sld>
+</file>
+
+<file path=ppt/slides/slide25.xml><?xml version="1.0" encoding="utf-8"?>
+<p:sld xmlns:a="http://schemas.openxmlformats.org/drawingml/2006/main" xmlns:r="http://schemas.openxmlformats.org/officeDocument/2006/relationships" xmlns:p="http://schemas.openxmlformats.org/presentationml/2006/main">
+  <p:cSld>
+    <p:spTree>
+      <p:nvGrpSpPr>
+        <p:cNvPr id="1" name=""/>
+        <p:cNvGrpSpPr/>
+        <p:nvPr/>
+      </p:nvGrpSpPr>
+      <p:grpSpPr>
+        <a:xfrm>
+          <a:off x="0" y="0"/>
+          <a:ext cx="0" cy="0"/>
+          <a:chOff x="0" y="0"/>
+          <a:chExt cx="0" cy="0"/>
+        </a:xfrm>
+      </p:grpSpPr>
+      <p:sp>
+        <p:nvSpPr>
+          <p:cNvPr id="2" name="Title 1"/>
+          <p:cNvSpPr>
+            <a:spLocks noGrp="1"/>
+          </p:cNvSpPr>
+          <p:nvPr>
+            <p:ph type="title"/>
+          </p:nvPr>
+        </p:nvSpPr>
+        <p:spPr/>
+        <p:txBody>
+          <a:bodyPr/>
+          <a:lstStyle/>
+          <a:p>
+            <a:pPr lvl="0" indent="0" marL="0">
+              <a:buNone/>
+            </a:pPr>
+            <a:r>
+              <a:rPr/>
+              <a:t>Causal forests</a:t>
+            </a:r>
+          </a:p>
+        </p:txBody>
+      </p:sp>
+      <p:sp>
+        <p:nvSpPr>
+          <p:cNvPr id="3" name="Content Placeholder 2"/>
+          <p:cNvSpPr>
+            <a:spLocks noGrp="1"/>
+          </p:cNvSpPr>
+          <p:nvPr>
+            <p:ph idx="1"/>
+          </p:nvPr>
+        </p:nvSpPr>
+        <p:spPr/>
+        <p:txBody>
+          <a:bodyPr/>
+          <a:lstStyle/>
+          <a:p>
+            <a:pPr lvl="0" indent="0" marL="0">
+              <a:buNone/>
+            </a:pPr>
+            <a:r>
+              <a:rPr/>
+              <a:t>Wager &amp; Athey adapt random forests in three ways:</a:t>
+            </a:r>
+          </a:p>
+          <a:p>
+            <a:pPr lvl="0" indent="-342900" marL="342900">
+              <a:buAutoNum type="arabicPeriod"/>
+            </a:pPr>
+            <a:r>
+              <a:rPr/>
+              <a:t>Splits are chosen to maximise </a:t>
+            </a:r>
+            <a:r>
+              <a:rPr b="1"/>
+              <a:t>heterogeneity in the treatment effect</a:t>
+            </a:r>
+            <a:r>
+              <a:rPr/>
+              <a:t>, not in the outcome</a:t>
+            </a:r>
+          </a:p>
+          <a:p>
+            <a:pPr lvl="0" indent="-342900" marL="342900">
+              <a:buAutoNum type="arabicPeriod"/>
+            </a:pPr>
+            <a:r>
+              <a:rPr b="1"/>
+              <a:t>Honesty</a:t>
+            </a:r>
+            <a:r>
+              <a:rPr/>
+              <a:t> — the observations used to choose splits are disjoint from those used to estimate the leaf effects</a:t>
+            </a:r>
+          </a:p>
+          <a:p>
+            <a:pPr lvl="0" indent="-342900" marL="342900">
+              <a:buAutoNum type="arabicPeriod"/>
+            </a:pPr>
+            <a:r>
+              <a:rPr/>
+              <a:t>The estimator is asymptotically normal and pointwise consistent, so </a:t>
+            </a:r>
+            <a:r>
+              <a:rPr b="1"/>
+              <a:t>confidence intervals are available</a:t>
+            </a:r>
+          </a:p>
+        </p:txBody>
+      </p:sp>
     </p:spTree>
   </p:cSld>
 </p:sld>
@@ -7470,548 +7266,124 @@
             </a:pPr>
             <a:r>
               <a:rPr/>
-              <a:t>Causal forests</a:t>
+              <a:t>Discipline in reporting heterogeneity</a:t>
             </a:r>
           </a:p>
         </p:txBody>
       </p:sp>
-      <p:sp>
-        <p:nvSpPr>
-          <p:cNvPr id="3" name="Content Placeholder 2"/>
-          <p:cNvSpPr>
-            <a:spLocks noGrp="1"/>
-          </p:cNvSpPr>
-          <p:nvPr>
-            <p:ph idx="1"/>
-          </p:nvPr>
-        </p:nvSpPr>
-        <p:spPr/>
-        <p:txBody>
-          <a:bodyPr/>
-          <a:lstStyle/>
-          <a:p>
-            <a:pPr lvl="0" indent="0">
-              <a:buNone/>
-            </a:pPr>
-            <a:r>
-              <a:rPr b="1">
-                <a:solidFill>
-                  <a:srgbClr val="008000"/>
-                </a:solidFill>
-                <a:latin typeface="Courier"/>
-              </a:rPr>
-              <a:t>from</a:t>
-            </a:r>
-            <a:r>
-              <a:rPr>
-                <a:latin typeface="Courier"/>
-              </a:rPr>
-              <a:t> econml.dml </a:t>
-            </a:r>
-            <a:r>
-              <a:rPr b="1">
-                <a:solidFill>
-                  <a:srgbClr val="008000"/>
-                </a:solidFill>
-                <a:latin typeface="Courier"/>
-              </a:rPr>
-              <a:t>import</a:t>
-            </a:r>
-            <a:r>
-              <a:rPr>
-                <a:latin typeface="Courier"/>
-              </a:rPr>
-              <a:t> CausalForestDML</a:t>
-            </a:r>
-            <a:br/>
-            <a:br/>
-            <a:r>
-              <a:rPr>
-                <a:latin typeface="Courier"/>
-              </a:rPr>
-              <a:t>cf </a:t>
-            </a:r>
-            <a:r>
-              <a:rPr>
-                <a:solidFill>
-                  <a:srgbClr val="666666"/>
-                </a:solidFill>
-                <a:latin typeface="Courier"/>
-              </a:rPr>
-              <a:t>=</a:t>
-            </a:r>
-            <a:r>
-              <a:rPr>
-                <a:latin typeface="Courier"/>
-              </a:rPr>
-              <a:t> CausalForestDML(</a:t>
-            </a:r>
-            <a:br/>
-            <a:r>
-              <a:rPr>
-                <a:latin typeface="Courier"/>
-              </a:rPr>
-              <a:t>    model_y</a:t>
-            </a:r>
-            <a:r>
-              <a:rPr>
-                <a:solidFill>
-                  <a:srgbClr val="666666"/>
-                </a:solidFill>
-                <a:latin typeface="Courier"/>
-              </a:rPr>
-              <a:t>=</a:t>
-            </a:r>
-            <a:r>
-              <a:rPr>
-                <a:latin typeface="Courier"/>
-              </a:rPr>
-              <a:t>RandomForestRegressor(</a:t>
-            </a:r>
-            <a:r>
-              <a:rPr>
-                <a:solidFill>
-                  <a:srgbClr val="40A070"/>
-                </a:solidFill>
-                <a:latin typeface="Courier"/>
-              </a:rPr>
-              <a:t>400</a:t>
-            </a:r>
-            <a:r>
-              <a:rPr>
-                <a:latin typeface="Courier"/>
-              </a:rPr>
-              <a:t>, min_samples_leaf</a:t>
-            </a:r>
-            <a:r>
-              <a:rPr>
-                <a:solidFill>
-                  <a:srgbClr val="666666"/>
-                </a:solidFill>
-                <a:latin typeface="Courier"/>
-              </a:rPr>
-              <a:t>=</a:t>
-            </a:r>
-            <a:r>
-              <a:rPr>
-                <a:solidFill>
-                  <a:srgbClr val="40A070"/>
-                </a:solidFill>
-                <a:latin typeface="Courier"/>
-              </a:rPr>
-              <a:t>5</a:t>
-            </a:r>
-            <a:r>
-              <a:rPr>
-                <a:latin typeface="Courier"/>
-              </a:rPr>
-              <a:t>, random_state</a:t>
-            </a:r>
-            <a:r>
-              <a:rPr>
-                <a:solidFill>
-                  <a:srgbClr val="666666"/>
-                </a:solidFill>
-                <a:latin typeface="Courier"/>
-              </a:rPr>
-              <a:t>=</a:t>
-            </a:r>
-            <a:r>
-              <a:rPr>
-                <a:solidFill>
-                  <a:srgbClr val="40A070"/>
-                </a:solidFill>
-                <a:latin typeface="Courier"/>
-              </a:rPr>
-              <a:t>60033</a:t>
-            </a:r>
-            <a:r>
-              <a:rPr>
-                <a:latin typeface="Courier"/>
-              </a:rPr>
-              <a:t>),</a:t>
-            </a:r>
-            <a:br/>
-            <a:r>
-              <a:rPr>
-                <a:latin typeface="Courier"/>
-              </a:rPr>
-              <a:t>    model_t</a:t>
-            </a:r>
-            <a:r>
-              <a:rPr>
-                <a:solidFill>
-                  <a:srgbClr val="666666"/>
-                </a:solidFill>
-                <a:latin typeface="Courier"/>
-              </a:rPr>
-              <a:t>=</a:t>
-            </a:r>
-            <a:r>
-              <a:rPr>
-                <a:latin typeface="Courier"/>
-              </a:rPr>
-              <a:t>RandomForestClassifier(</a:t>
-            </a:r>
-            <a:r>
-              <a:rPr>
-                <a:solidFill>
-                  <a:srgbClr val="40A070"/>
-                </a:solidFill>
-                <a:latin typeface="Courier"/>
-              </a:rPr>
-              <a:t>400</a:t>
-            </a:r>
-            <a:r>
-              <a:rPr>
-                <a:latin typeface="Courier"/>
-              </a:rPr>
-              <a:t>, min_samples_leaf</a:t>
-            </a:r>
-            <a:r>
-              <a:rPr>
-                <a:solidFill>
-                  <a:srgbClr val="666666"/>
-                </a:solidFill>
-                <a:latin typeface="Courier"/>
-              </a:rPr>
-              <a:t>=</a:t>
-            </a:r>
-            <a:r>
-              <a:rPr>
-                <a:solidFill>
-                  <a:srgbClr val="40A070"/>
-                </a:solidFill>
-                <a:latin typeface="Courier"/>
-              </a:rPr>
-              <a:t>5</a:t>
-            </a:r>
-            <a:r>
-              <a:rPr>
-                <a:latin typeface="Courier"/>
-              </a:rPr>
-              <a:t>, random_state</a:t>
-            </a:r>
-            <a:r>
-              <a:rPr>
-                <a:solidFill>
-                  <a:srgbClr val="666666"/>
-                </a:solidFill>
-                <a:latin typeface="Courier"/>
-              </a:rPr>
-              <a:t>=</a:t>
-            </a:r>
-            <a:r>
-              <a:rPr>
-                <a:solidFill>
-                  <a:srgbClr val="40A070"/>
-                </a:solidFill>
-                <a:latin typeface="Courier"/>
-              </a:rPr>
-              <a:t>60033</a:t>
-            </a:r>
-            <a:r>
-              <a:rPr>
-                <a:latin typeface="Courier"/>
-              </a:rPr>
-              <a:t>),</a:t>
-            </a:r>
-            <a:br/>
-            <a:r>
-              <a:rPr>
-                <a:latin typeface="Courier"/>
-              </a:rPr>
-              <a:t>    discrete_treatment</a:t>
-            </a:r>
-            <a:r>
-              <a:rPr>
-                <a:solidFill>
-                  <a:srgbClr val="666666"/>
-                </a:solidFill>
-                <a:latin typeface="Courier"/>
-              </a:rPr>
-              <a:t>=</a:t>
-            </a:r>
-            <a:r>
-              <a:rPr>
-                <a:solidFill>
-                  <a:srgbClr val="19177C"/>
-                </a:solidFill>
-                <a:latin typeface="Courier"/>
-              </a:rPr>
-              <a:t>True</a:t>
-            </a:r>
-            <a:r>
-              <a:rPr>
-                <a:latin typeface="Courier"/>
-              </a:rPr>
-              <a:t>, n_estimators</a:t>
-            </a:r>
-            <a:r>
-              <a:rPr>
-                <a:solidFill>
-                  <a:srgbClr val="666666"/>
-                </a:solidFill>
-                <a:latin typeface="Courier"/>
-              </a:rPr>
-              <a:t>=</a:t>
-            </a:r>
-            <a:r>
-              <a:rPr>
-                <a:solidFill>
-                  <a:srgbClr val="40A070"/>
-                </a:solidFill>
-                <a:latin typeface="Courier"/>
-              </a:rPr>
-              <a:t>800</a:t>
-            </a:r>
-            <a:r>
-              <a:rPr>
-                <a:latin typeface="Courier"/>
-              </a:rPr>
-              <a:t>, random_state</a:t>
-            </a:r>
-            <a:r>
-              <a:rPr>
-                <a:solidFill>
-                  <a:srgbClr val="666666"/>
-                </a:solidFill>
-                <a:latin typeface="Courier"/>
-              </a:rPr>
-              <a:t>=</a:t>
-            </a:r>
-            <a:r>
-              <a:rPr>
-                <a:solidFill>
-                  <a:srgbClr val="40A070"/>
-                </a:solidFill>
-                <a:latin typeface="Courier"/>
-              </a:rPr>
-              <a:t>60033</a:t>
-            </a:r>
-            <a:r>
-              <a:rPr>
-                <a:latin typeface="Courier"/>
-              </a:rPr>
-              <a:t>,</a:t>
-            </a:r>
-            <a:br/>
-            <a:r>
-              <a:rPr>
-                <a:latin typeface="Courier"/>
-              </a:rPr>
-              <a:t>)</a:t>
-            </a:r>
-            <a:br/>
-            <a:r>
-              <a:rPr>
-                <a:latin typeface="Courier"/>
-              </a:rPr>
-              <a:t>cf.fit(Y, D, X</a:t>
-            </a:r>
-            <a:r>
-              <a:rPr>
-                <a:solidFill>
-                  <a:srgbClr val="666666"/>
-                </a:solidFill>
-                <a:latin typeface="Courier"/>
-              </a:rPr>
-              <a:t>=</a:t>
-            </a:r>
-            <a:r>
-              <a:rPr>
-                <a:latin typeface="Courier"/>
-              </a:rPr>
-              <a:t>Xc)</a:t>
-            </a:r>
-            <a:br/>
-            <a:r>
-              <a:rPr>
-                <a:latin typeface="Courier"/>
-              </a:rPr>
-              <a:t>te </a:t>
-            </a:r>
-            <a:r>
-              <a:rPr>
-                <a:solidFill>
-                  <a:srgbClr val="666666"/>
-                </a:solidFill>
-                <a:latin typeface="Courier"/>
-              </a:rPr>
-              <a:t>=</a:t>
-            </a:r>
-            <a:r>
-              <a:rPr>
-                <a:latin typeface="Courier"/>
-              </a:rPr>
-              <a:t> cf.effect(Xc)</a:t>
-            </a:r>
-            <a:br/>
-            <a:r>
-              <a:rPr>
-                <a:solidFill>
-                  <a:srgbClr val="008000"/>
-                </a:solidFill>
-                <a:latin typeface="Courier"/>
-              </a:rPr>
-              <a:t>print</a:t>
-            </a:r>
-            <a:r>
-              <a:rPr>
-                <a:latin typeface="Courier"/>
-              </a:rPr>
-              <a:t>(</a:t>
-            </a:r>
-            <a:r>
-              <a:rPr>
-                <a:solidFill>
-                  <a:srgbClr val="4070A0"/>
-                </a:solidFill>
-                <a:latin typeface="Courier"/>
-              </a:rPr>
-              <a:t>"effect range:"</a:t>
-            </a:r>
-            <a:r>
-              <a:rPr>
-                <a:latin typeface="Courier"/>
-              </a:rPr>
-              <a:t>, te.</a:t>
-            </a:r>
-            <a:r>
-              <a:rPr>
-                <a:solidFill>
-                  <a:srgbClr val="008000"/>
-                </a:solidFill>
-                <a:latin typeface="Courier"/>
-              </a:rPr>
-              <a:t>min</a:t>
-            </a:r>
-            <a:r>
-              <a:rPr>
-                <a:latin typeface="Courier"/>
-              </a:rPr>
-              <a:t>().</a:t>
-            </a:r>
-            <a:r>
-              <a:rPr>
-                <a:solidFill>
-                  <a:srgbClr val="008000"/>
-                </a:solidFill>
-                <a:latin typeface="Courier"/>
-              </a:rPr>
-              <a:t>round</a:t>
-            </a:r>
-            <a:r>
-              <a:rPr>
-                <a:latin typeface="Courier"/>
-              </a:rPr>
-              <a:t>(</a:t>
-            </a:r>
-            <a:r>
-              <a:rPr>
-                <a:solidFill>
-                  <a:srgbClr val="40A070"/>
-                </a:solidFill>
-                <a:latin typeface="Courier"/>
-              </a:rPr>
-              <a:t>3</a:t>
-            </a:r>
-            <a:r>
-              <a:rPr>
-                <a:latin typeface="Courier"/>
-              </a:rPr>
-              <a:t>), </a:t>
-            </a:r>
-            <a:r>
-              <a:rPr>
-                <a:solidFill>
-                  <a:srgbClr val="4070A0"/>
-                </a:solidFill>
-                <a:latin typeface="Courier"/>
-              </a:rPr>
-              <a:t>"to"</a:t>
-            </a:r>
-            <a:r>
-              <a:rPr>
-                <a:latin typeface="Courier"/>
-              </a:rPr>
-              <a:t>, te.</a:t>
-            </a:r>
-            <a:r>
-              <a:rPr>
-                <a:solidFill>
-                  <a:srgbClr val="008000"/>
-                </a:solidFill>
-                <a:latin typeface="Courier"/>
-              </a:rPr>
-              <a:t>max</a:t>
-            </a:r>
-            <a:r>
-              <a:rPr>
-                <a:latin typeface="Courier"/>
-              </a:rPr>
-              <a:t>().</a:t>
-            </a:r>
-            <a:r>
-              <a:rPr>
-                <a:solidFill>
-                  <a:srgbClr val="008000"/>
-                </a:solidFill>
-                <a:latin typeface="Courier"/>
-              </a:rPr>
-              <a:t>round</a:t>
-            </a:r>
-            <a:r>
-              <a:rPr>
-                <a:latin typeface="Courier"/>
-              </a:rPr>
-              <a:t>(</a:t>
-            </a:r>
-            <a:r>
-              <a:rPr>
-                <a:solidFill>
-                  <a:srgbClr val="40A070"/>
-                </a:solidFill>
-                <a:latin typeface="Courier"/>
-              </a:rPr>
-              <a:t>3</a:t>
-            </a:r>
-            <a:r>
-              <a:rPr>
-                <a:latin typeface="Courier"/>
-              </a:rPr>
-              <a:t>))</a:t>
-            </a:r>
-          </a:p>
-          <a:p>
-            <a:pPr lvl="0" indent="0" marL="0">
-              <a:buNone/>
-            </a:pPr>
-            <a:r>
-              <a:rPr/>
-              <a:t>A spread of estimated effects is </a:t>
-            </a:r>
-            <a:r>
-              <a:rPr b="1"/>
-              <a:t>not</a:t>
-            </a:r>
-            <a:r>
-              <a:rPr/>
-              <a:t> evidence of heterogeneity. Noise produces spread. Test it — </a:t>
-            </a:r>
-            <a:r>
-              <a:rPr>
-                <a:latin typeface="Courier"/>
-              </a:rPr>
-              <a:t>cf.ate_inference()</a:t>
-            </a:r>
-            <a:r>
-              <a:rPr/>
-              <a:t>, or compare high- and low-effect groups with proper inference.</a:t>
-            </a:r>
-          </a:p>
-        </p:txBody>
-      </p:sp>
+      <mc:AlternateContent xmlns:mc="http://schemas.openxmlformats.org/markup-compatibility/2006">
+        <mc:Choice xmlns:a14="http://schemas.microsoft.com/office/drawing/2010/main" Requires="a14">
+          <p:sp>
+            <p:nvSpPr>
+              <p:cNvPr id="3" name="Content Placeholder 2"/>
+              <p:cNvSpPr>
+                <a:spLocks noGrp="1"/>
+              </p:cNvSpPr>
+              <p:nvPr>
+                <p:ph idx="1"/>
+              </p:nvPr>
+            </p:nvSpPr>
+            <p:spPr/>
+            <p:txBody>
+              <a:bodyPr/>
+              <a:lstStyle/>
+              <a:p>
+                <a:pPr lvl="0" indent="0" marL="0">
+                  <a:buNone/>
+                </a:pPr>
+                <a:r>
+                  <a:rPr/>
+                  <a:t>Searching over subgroups for large effects is </a:t>
+                </a:r>
+                <a:r>
+                  <a:rPr b="1"/>
+                  <a:t>multiple testing</a:t>
+                </a:r>
+                <a:r>
+                  <a:rPr/>
+                  <a:t>, and it will find something.</a:t>
+                </a:r>
+              </a:p>
+              <a:p>
+                <a:pPr lvl="0"/>
+                <a:r>
+                  <a:rPr b="1"/>
+                  <a:t>Pre-specify</a:t>
+                </a:r>
+                <a:r>
+                  <a:rPr/>
+                  <a:t> subgroups where possible</a:t>
+                </a:r>
+              </a:p>
+              <a:p>
+                <a:pPr lvl="0"/>
+                <a:r>
+                  <a:rPr/>
+                  <a:t>Otherwise use the </a:t>
+                </a:r>
+                <a:r>
+                  <a:rPr b="1"/>
+                  <a:t>best linear projection</a:t>
+                </a:r>
+                <a:r>
+                  <a:rPr/>
+                  <a:t> of </a:t>
+                </a:r>
+                <a14:m>
+                  <m:oMath xmlns:m="http://schemas.openxmlformats.org/officeDocument/2006/math">
+                    <m:acc>
+                      <m:accPr>
+                        <m:chr m:val="̂"/>
+                      </m:accPr>
+                      <m:e>
+                        <m:r>
+                          <m:t>τ</m:t>
+                        </m:r>
+                      </m:e>
+                    </m:acc>
+                    <m:d>
+                      <m:dPr>
+                        <m:begChr m:val="("/>
+                        <m:sepChr m:val=""/>
+                        <m:endChr m:val=")"/>
+                        <m:grow/>
+                      </m:dPr>
+                      <m:e>
+                        <m:r>
+                          <m:t>X</m:t>
+                        </m:r>
+                      </m:e>
+                    </m:d>
+                  </m:oMath>
+                </a14:m>
+                <a:r>
+                  <a:rPr/>
+                  <a:t> on a small set of covariates, or a calibration test — the </a:t>
+                </a:r>
+                <a:r>
+                  <a:rPr b="1"/>
+                  <a:t>GATES / CLAN</a:t>
+                </a:r>
+                <a:r>
+                  <a:rPr/>
+                  <a:t> procedures of Chernozhukov et al.</a:t>
+                </a:r>
+              </a:p>
+              <a:p>
+                <a:pPr lvl="0"/>
+                <a:r>
+                  <a:rPr/>
+                  <a:t>Report them as </a:t>
+                </a:r>
+                <a:r>
+                  <a:rPr b="1"/>
+                  <a:t>exploratory</a:t>
+                </a:r>
+              </a:p>
+            </p:txBody>
+          </p:sp>
+        </mc:Choice>
+      </mc:AlternateContent>
     </p:spTree>
   </p:cSld>
 </p:sld>
@@ -8044,7 +7416,12 @@
             <p:ph type="title"/>
           </p:nvPr>
         </p:nvSpPr>
-        <p:spPr/>
+        <p:spPr>
+          <a:xfrm>
+            <a:off x="722313" y="3305176"/>
+            <a:ext cx="7772400" cy="1021556"/>
+          </a:xfrm>
+        </p:spPr>
         <p:txBody>
           <a:bodyPr/>
           <a:lstStyle/>
@@ -8054,83 +7431,7 @@
             </a:pPr>
             <a:r>
               <a:rPr/>
-              <a:t>What to report</a:t>
-            </a:r>
-          </a:p>
-        </p:txBody>
-      </p:sp>
-      <p:sp>
-        <p:nvSpPr>
-          <p:cNvPr id="3" name="Content Placeholder 2"/>
-          <p:cNvSpPr>
-            <a:spLocks noGrp="1"/>
-          </p:cNvSpPr>
-          <p:nvPr>
-            <p:ph idx="1"/>
-          </p:nvPr>
-        </p:nvSpPr>
-        <p:spPr/>
-        <p:txBody>
-          <a:bodyPr/>
-          <a:lstStyle/>
-          <a:p>
-            <a:pPr lvl="0"/>
-            <a:r>
-              <a:rPr/>
-              <a:t>The </a:t>
-            </a:r>
-            <a:r>
-              <a:rPr b="1"/>
-              <a:t>estimand</a:t>
-            </a:r>
-            <a:r>
-              <a:rPr/>
-              <a:t>, stated before any estimation</a:t>
-            </a:r>
-          </a:p>
-          <a:p>
-            <a:pPr lvl="0"/>
-            <a:r>
-              <a:rPr/>
-              <a:t>The three assumptions, each argued or conceded — especially SUTVA here</a:t>
-            </a:r>
-          </a:p>
-          <a:p>
-            <a:pPr lvl="0"/>
-            <a:r>
-              <a:rPr/>
-              <a:t>Overlap evidence, and any trimming</a:t>
-            </a:r>
-          </a:p>
-          <a:p>
-            <a:pPr lvl="0"/>
-            <a:r>
-              <a:rPr/>
-              <a:t>Naive, controlled and DML estimates side by side</a:t>
-            </a:r>
-          </a:p>
-          <a:p>
-            <a:pPr lvl="0"/>
-            <a:r>
-              <a:rPr/>
-              <a:t>Confidence intervals from the cross-fitted score</a:t>
-            </a:r>
-          </a:p>
-          <a:p>
-            <a:pPr lvl="0" indent="0" marL="0">
-              <a:buNone/>
-            </a:pPr>
-            <a:r>
-              <a:rPr/>
-              <a:t>DML does not manufacture identification. It removes regularisation and overfitting bias </a:t>
-            </a:r>
-            <a:r>
-              <a:rPr b="1"/>
-              <a:t>given</a:t>
-            </a:r>
-            <a:r>
-              <a:rPr/>
-              <a:t> unconfoundedness. If a confounder is missing, DML gives you a precisely estimated wrong answer.</a:t>
+              <a:t>10.6 What this does not fix</a:t>
             </a:r>
           </a:p>
         </p:txBody>
@@ -8140,7 +7441,116 @@
 </p:sld>
 </file>
 
-<file path=ppt/slides/slide28.xml><?xml version="1.0" encoding="UTF-8"?><p:sld xmlns:a="http://schemas.openxmlformats.org/drawingml/2006/main" xmlns:r="http://schemas.openxmlformats.org/officeDocument/2006/relationships" xmlns:p="http://schemas.openxmlformats.org/presentationml/2006/main"><p:cSld><p:spTree><p:nvGrpSpPr><p:cNvPr id="1" name="" /><p:cNvGrpSpPr /><p:nvPr /></p:nvGrpSpPr><p:grpSpPr><a:xfrm><a:off x="0" y="0" /><a:ext cx="0" cy="0" /><a:chOff x="0" y="0" /><a:chExt cx="0" cy="0" /></a:xfrm></p:grpSpPr><p:sp><p:nvSpPr><p:cNvPr id="2" name="Title 1" /><p:cNvSpPr><a:spLocks noGrp="1" /></p:cNvSpPr><p:nvPr><p:ph type="title" /></p:nvPr></p:nvSpPr><p:spPr /><p:txBody><a:bodyPr /><a:lstStyle /><a:p><a:pPr lvl="0" indent="0" marL="0"><a:buNone /></a:pPr><a:r><a:rPr /><a:t>Common mistakes</a:t></a:r></a:p></p:txBody></p:sp><p:graphicFrame><p:nvGraphicFramePr><p:cNvPr id="6" name="Content Placeholder 5" /><p:cNvGraphicFramePr><a:graphicFrameLocks noGrp="1" /></p:cNvGraphicFramePr><p:nvPr><p:ph idx="1" /></p:nvPr></p:nvGraphicFramePr><p:xfrm><a:off x="457200" y="1193800" /><a:ext cx="8229600" cy="3390900" /></p:xfrm><a:graphic><a:graphicData uri="http://schemas.openxmlformats.org/drawingml/2006/table"><a:tbl><a:tblPr firstRow="1" bandRow="1"><a:tableStyleId>{5C22544A-7EE6-4342-B048-85BDC9FD1C3A}</a:tableStyleId></a:tblPr><a:tblGrid><a:gridCol w="4114800" /><a:gridCol w="4114800" /></a:tblGrid><a:tr h="0"><a:tc><a:txBody><a:bodyPr /><a:lstStyle /><a:p><a:pPr lvl="0" indent="0" marL="0"><a:buNone /></a:pPr><a:r><a:rPr /><a:t>Mistake</a:t></a:r></a:p></a:txBody><a:tcPr /></a:tc><a:tc><a:txBody><a:bodyPr /><a:lstStyle /><a:p><a:pPr lvl="0" indent="0" marL="0"><a:buNone /></a:pPr><a:r><a:rPr /><a:t>Consequence</a:t></a:r></a:p></a:txBody><a:tcPr /></a:tc></a:tr><a:tr h="0"><a:tc><a:txBody><a:bodyPr /><a:lstStyle /><a:p><a:pPr lvl="0" indent="0" marL="0"><a:buNone /></a:pPr><a:r><a:rPr /><a:t>ML controls, no orthogonalisation</a:t></a:r></a:p></a:txBody></a:tc><a:tc><a:txBody><a:bodyPr /><a:lstStyle /><a:p><a:pPr lvl="0" indent="0" marL="0"><a:buNone /></a:pPr><a:r><a:rPr /><a:t>Bias that does not vanish with </a:t></a:r><a14:m><m:oMath xmlns:m="http://schemas.openxmlformats.org/officeDocument/2006/math"><m:r><m:t>n</m:t></m:r></m:oMath></a14:m></a:p></a:txBody></a:tc></a:tr><a:tr h="0"><a:tc><a:txBody><a:bodyPr /><a:lstStyle /><a:p><a:pPr lvl="0" indent="0" marL="0"><a:buNone /></a:pPr><a:r><a:rPr /><a:t>No cross-fitting</a:t></a:r></a:p></a:txBody></a:tc><a:tc><a:txBody><a:bodyPr /><a:lstStyle /><a:p><a:pPr lvl="0" indent="0" marL="0"><a:buNone /></a:pPr><a:r><a:rPr /><a:t>Overfitting bias in </a:t></a:r><a14:m><m:oMath xmlns:m="http://schemas.openxmlformats.org/officeDocument/2006/math"><m:acc><m:accPr><m:chr m:val="̂" /></m:accPr><m:e><m:r><m:t>τ</m:t></m:r></m:e></m:acc></m:oMath></a14:m></a:p></a:txBody></a:tc></a:tr><a:tr h="0"><a:tc><a:txBody><a:bodyPr /><a:lstStyle /><a:p><a:pPr lvl="0" indent="0" marL="0"><a:buNone /></a:pPr><a:r><a:rPr /><a:t>Overlap unchecked</a:t></a:r></a:p></a:txBody></a:tc><a:tc><a:txBody><a:bodyPr /><a:lstStyle /><a:p><a:pPr lvl="0" indent="0" marL="0"><a:buNone /></a:pPr><a:r><a:rPr /><a:t>A few rows dominate the estimate</a:t></a:r></a:p></a:txBody></a:tc></a:tr><a:tr h="0"><a:tc><a:txBody><a:bodyPr /><a:lstStyle /><a:p><a:pPr lvl="0" indent="0" marL="0"><a:buNone /></a:pPr><a:r><a:rPr /><a:t>Heterogeneity read off raw spread</a:t></a:r></a:p></a:txBody></a:tc><a:tc><a:txBody><a:bodyPr /><a:lstStyle /><a:p><a:pPr lvl="0" indent="0" marL="0"><a:buNone /></a:pPr><a:r><a:rPr /><a:t>Noise mistaken for structure</a:t></a:r></a:p></a:txBody></a:tc></a:tr><a:tr h="0"><a:tc><a:txBody><a:bodyPr /><a:lstStyle /><a:p><a:pPr lvl="0" indent="0" marL="0"><a:buNone /></a:pPr><a:r><a:rPr /><a:t>Causal words on Session 07 output</a:t></a:r></a:p></a:txBody></a:tc><a:tc><a:txBody><a:bodyPr /><a:lstStyle /><a:p><a:pPr lvl="0" indent="0" marL="0"><a:buNone /></a:pPr><a:r><a:rPr /><a:t>The error this session exists to end</a:t></a:r></a:p></a:txBody></a:tc></a:tr></a:tbl></a:graphicData></a:graphic></p:graphicFrame></p:spTree></p:cSld></p:sld>
+<file path=ppt/slides/slide28.xml><?xml version="1.0" encoding="utf-8"?>
+<p:sld xmlns:a="http://schemas.openxmlformats.org/drawingml/2006/main" xmlns:r="http://schemas.openxmlformats.org/officeDocument/2006/relationships" xmlns:p="http://schemas.openxmlformats.org/presentationml/2006/main">
+  <p:cSld>
+    <p:spTree>
+      <p:nvGrpSpPr>
+        <p:cNvPr id="1" name=""/>
+        <p:cNvGrpSpPr/>
+        <p:nvPr/>
+      </p:nvGrpSpPr>
+      <p:grpSpPr>
+        <a:xfrm>
+          <a:off x="0" y="0"/>
+          <a:ext cx="0" cy="0"/>
+          <a:chOff x="0" y="0"/>
+          <a:chExt cx="0" cy="0"/>
+        </a:xfrm>
+      </p:grpSpPr>
+      <p:sp>
+        <p:nvSpPr>
+          <p:cNvPr id="2" name="Title 1"/>
+          <p:cNvSpPr>
+            <a:spLocks noGrp="1"/>
+          </p:cNvSpPr>
+          <p:nvPr>
+            <p:ph type="title"/>
+          </p:nvPr>
+        </p:nvSpPr>
+        <p:spPr/>
+        <p:txBody>
+          <a:bodyPr/>
+          <a:lstStyle/>
+          <a:p>
+            <a:pPr lvl="0" indent="0" marL="0">
+              <a:buNone/>
+            </a:pPr>
+            <a:r>
+              <a:rPr/>
+              <a:t>The limit of the method</a:t>
+            </a:r>
+          </a:p>
+        </p:txBody>
+      </p:sp>
+      <mc:AlternateContent xmlns:mc="http://schemas.openxmlformats.org/markup-compatibility/2006">
+        <mc:Choice xmlns:a14="http://schemas.microsoft.com/office/drawing/2010/main" Requires="a14">
+          <p:sp>
+            <p:nvSpPr>
+              <p:cNvPr id="3" name="Content Placeholder 2"/>
+              <p:cNvSpPr>
+                <a:spLocks noGrp="1"/>
+              </p:cNvSpPr>
+              <p:nvPr>
+                <p:ph idx="1"/>
+              </p:nvPr>
+            </p:nvSpPr>
+            <p:spPr/>
+            <p:txBody>
+              <a:bodyPr/>
+              <a:lstStyle/>
+              <a:p>
+                <a:pPr lvl="0" indent="0" marL="0">
+                  <a:buNone/>
+                </a:pPr>
+                <a:r>
+                  <a:rPr/>
+                  <a:t>DML delivers valid inference </a:t>
+                </a:r>
+                <a:r>
+                  <a:rPr b="1"/>
+                  <a:t>conditional on the identifying assumptions</a:t>
+                </a:r>
+                <a:r>
+                  <a:rPr/>
+                  <a:t>.</a:t>
+                </a:r>
+              </a:p>
+              <a:p>
+                <a:pPr lvl="0" indent="0" marL="0">
+                  <a:buNone/>
+                </a:pPr>
+                <a:r>
+                  <a:rPr/>
+                  <a:t>If treatment is confounded by something not in </a:t>
+                </a:r>
+                <a14:m>
+                  <m:oMath xmlns:m="http://schemas.openxmlformats.org/officeDocument/2006/math">
+                    <m:r>
+                      <m:t>X</m:t>
+                    </m:r>
+                  </m:oMath>
+                </a14:m>
+                <a:r>
+                  <a:rPr/>
+                  <a:t>, DML estimates a </a:t>
+                </a:r>
+                <a:r>
+                  <a:rPr b="1"/>
+                  <a:t>precisely-quantified wrong number</a:t>
+                </a:r>
+                <a:r>
+                  <a:rPr/>
+                  <a:t> — and its narrow confidence interval will make the wrong number look authoritative.</a:t>
+                </a:r>
+              </a:p>
+            </p:txBody>
+          </p:sp>
+        </mc:Choice>
+      </mc:AlternateContent>
+    </p:spTree>
+  </p:cSld>
+</p:sld>
 </file>
 
 <file path=ppt/slides/slide29.xml><?xml version="1.0" encoding="utf-8"?>
@@ -8180,7 +7590,7 @@
             </a:pPr>
             <a:r>
               <a:rPr/>
-              <a:t>In the lab</a:t>
+              <a:t>What it does and does not remove</a:t>
             </a:r>
           </a:p>
         </p:txBody>
@@ -8200,52 +7610,33 @@
           <a:bodyPr/>
           <a:lstStyle/>
           <a:p>
-            <a:pPr lvl="0" indent="-342900" marL="342900">
-              <a:buAutoNum type="arabicPeriod"/>
-            </a:pPr>
+            <a:pPr lvl="0"/>
             <a:r>
               <a:rPr/>
-              <a:t>Download Huber’s package and run one of his specifications</a:t>
-            </a:r>
-          </a:p>
-          <a:p>
-            <a:pPr lvl="0" indent="-342900" marL="342900">
-              <a:buAutoNum type="arabicPeriod"/>
-            </a:pPr>
+              <a:t>Flexible nuisance estimation removes </a:t>
+            </a:r>
+            <a:r>
+              <a:rPr b="1"/>
+              <a:t>functional-form error</a:t>
+            </a:r>
+          </a:p>
+          <a:p>
+            <a:pPr lvl="0"/>
             <a:r>
               <a:rPr/>
-              <a:t>On the spine: naive, then controlled, then DML — record all three</a:t>
-            </a:r>
-          </a:p>
-          <a:p>
-            <a:pPr lvl="0" indent="-342900" marL="342900">
-              <a:buAutoNum type="arabicPeriod"/>
-            </a:pPr>
+              <a:t>It does </a:t>
+            </a:r>
+            <a:r>
+              <a:rPr b="1"/>
+              <a:t>not</a:t>
+            </a:r>
             <a:r>
               <a:rPr/>
-              <a:t>Check overlap and report trimming</a:t>
-            </a:r>
-          </a:p>
-          <a:p>
-            <a:pPr lvl="0" indent="-342900" marL="342900">
-              <a:buAutoNum type="arabicPeriod"/>
-            </a:pPr>
-            <a:r>
-              <a:rPr/>
-              <a:t>Fit a causal forest and test whether heterogeneity is real</a:t>
-            </a:r>
-          </a:p>
-          <a:p>
-            <a:pPr lvl="0" indent="-342900" marL="342900">
-              <a:buAutoNum type="arabicPeriod"/>
-            </a:pPr>
+              <a:t> remove </a:t>
+            </a:r>
             <a:r>
               <a:rPr b="1"/>
-              <a:t>Bring me your ATE.</a:t>
-            </a:r>
-            <a:r>
-              <a:rPr/>
-              <a:t> I have the true value; we compare in class.</a:t>
+              <a:t>omitted-variable bias</a:t>
             </a:r>
           </a:p>
           <a:p>
@@ -8254,7 +7645,7 @@
             </a:pPr>
             <a:r>
               <a:rPr/>
-              <a:t>That last step is the point of a synthetic replication. You will not get to check your answer against the truth again.</a:t>
+              <a:t>Return to Session 03’s OVB formula. It still governs everything.</a:t>
             </a:r>
           </a:p>
         </p:txBody>
@@ -8301,7 +7692,7 @@
             </a:pPr>
             <a:r>
               <a:rPr/>
-              <a:t>The 90 minutes ahead</a:t>
+              <a:t>These slides follow the notes</a:t>
             </a:r>
           </a:p>
         </p:txBody>
@@ -8341,7 +7732,7 @@
                       </a:pPr>
                       <a:r>
                         <a:rPr b="1"/>
-                        <a:t>0–10</a:t>
+                        <a:t>10.1</a:t>
                       </a:r>
                     </a:p>
                   </a:txBody>
@@ -8356,7 +7747,7 @@
                       </a:pPr>
                       <a:r>
                         <a:rPr/>
-                        <a:t>Nine sessions of prediction. Now the other question.</a:t>
+                        <a:t>The setup</a:t>
                       </a:r>
                     </a:p>
                   </a:txBody>
@@ -8373,7 +7764,7 @@
                       </a:pPr>
                       <a:r>
                         <a:rPr b="1"/>
-                        <a:t>10–25</a:t>
+                        <a:t>10.2</a:t>
                       </a:r>
                     </a:p>
                   </a:txBody>
@@ -8388,7 +7779,7 @@
                       </a:pPr>
                       <a:r>
                         <a:rPr/>
-                        <a:t>What must be true to claim an effect</a:t>
+                        <a:t>Why the naive plug-in fails</a:t>
                       </a:r>
                     </a:p>
                   </a:txBody>
@@ -8405,7 +7796,7 @@
                       </a:pPr>
                       <a:r>
                         <a:rPr b="1"/>
-                        <a:t>25–45</a:t>
+                        <a:t>10.3</a:t>
                       </a:r>
                     </a:p>
                   </a:txBody>
@@ -8420,7 +7811,7 @@
                       </a:pPr>
                       <a:r>
                         <a:rPr/>
-                        <a:t>Why naive ML controls make it worse</a:t>
+                        <a:t>Fix 1 — Neyman orthogonality</a:t>
                       </a:r>
                     </a:p>
                   </a:txBody>
@@ -8437,7 +7828,7 @@
                       </a:pPr>
                       <a:r>
                         <a:rPr b="1"/>
-                        <a:t>45–70</a:t>
+                        <a:t>10.4</a:t>
                       </a:r>
                     </a:p>
                   </a:txBody>
@@ -8452,7 +7843,7 @@
                       </a:pPr>
                       <a:r>
                         <a:rPr/>
-                        <a:t>Double/debiased ML</a:t>
+                        <a:t>Fix 2 — cross-fitting</a:t>
                       </a:r>
                     </a:p>
                   </a:txBody>
@@ -8469,7 +7860,7 @@
                       </a:pPr>
                       <a:r>
                         <a:rPr b="1"/>
-                        <a:t>70–85</a:t>
+                        <a:t>10.5</a:t>
                       </a:r>
                     </a:p>
                   </a:txBody>
@@ -8484,7 +7875,7 @@
                       </a:pPr>
                       <a:r>
                         <a:rPr/>
-                        <a:t>Heterogeneous effects</a:t>
+                        <a:t>Heterogeneous treatment effects</a:t>
                       </a:r>
                     </a:p>
                   </a:txBody>
@@ -8501,7 +7892,7 @@
                       </a:pPr>
                       <a:r>
                         <a:rPr b="1"/>
-                        <a:t>85–90</a:t>
+                        <a:t>10.6</a:t>
                       </a:r>
                     </a:p>
                   </a:txBody>
@@ -8516,7 +7907,7 @@
                       </a:pPr>
                       <a:r>
                         <a:rPr/>
-                        <a:t>Handoff to the lab</a:t>
+                        <a:t>What this does not fix</a:t>
                       </a:r>
                     </a:p>
                   </a:txBody>
@@ -8531,198 +7922,7 @@
 </p:sld>
 </file>
 
-<file path=ppt/slides/slide4.xml><?xml version="1.0" encoding="utf-8"?>
-<p:sld xmlns:a="http://schemas.openxmlformats.org/drawingml/2006/main" xmlns:r="http://schemas.openxmlformats.org/officeDocument/2006/relationships" xmlns:p="http://schemas.openxmlformats.org/presentationml/2006/main">
-  <p:cSld>
-    <p:spTree>
-      <p:nvGrpSpPr>
-        <p:cNvPr id="1" name=""/>
-        <p:cNvGrpSpPr/>
-        <p:nvPr/>
-      </p:nvGrpSpPr>
-      <p:grpSpPr>
-        <a:xfrm>
-          <a:off x="0" y="0"/>
-          <a:ext cx="0" cy="0"/>
-          <a:chOff x="0" y="0"/>
-          <a:chExt cx="0" cy="0"/>
-        </a:xfrm>
-      </p:grpSpPr>
-      <p:sp>
-        <p:nvSpPr>
-          <p:cNvPr id="2" name="Title 1"/>
-          <p:cNvSpPr>
-            <a:spLocks noGrp="1"/>
-          </p:cNvSpPr>
-          <p:nvPr>
-            <p:ph type="title"/>
-          </p:nvPr>
-        </p:nvSpPr>
-        <p:spPr/>
-        <p:txBody>
-          <a:bodyPr/>
-          <a:lstStyle/>
-          <a:p>
-            <a:pPr lvl="0" indent="0" marL="0">
-              <a:buNone/>
-            </a:pPr>
-            <a:r>
-              <a:rPr/>
-              <a:t>Before class you read</a:t>
-            </a:r>
-          </a:p>
-        </p:txBody>
-      </p:sp>
-      <p:sp>
-        <p:nvSpPr>
-          <p:cNvPr id="3" name="Content Placeholder 2"/>
-          <p:cNvSpPr>
-            <a:spLocks noGrp="1"/>
-          </p:cNvSpPr>
-          <p:nvPr>
-            <p:ph idx="1"/>
-          </p:nvPr>
-        </p:nvSpPr>
-        <p:spPr/>
-        <p:txBody>
-          <a:bodyPr/>
-          <a:lstStyle/>
-          <a:p>
-            <a:pPr lvl="0" indent="0" marL="0">
-              <a:buNone/>
-            </a:pPr>
-            <a:r>
-              <a:rPr b="1"/>
-              <a:t>Huber</a:t>
-            </a:r>
-            <a:r>
-              <a:rPr/>
-              <a:t>, </a:t>
-            </a:r>
-            <a:r>
-              <a:rPr i="1"/>
-              <a:t>Evaluating (weighted) dynamic treatment effects by double machine learning</a:t>
-            </a:r>
-            <a:r>
-              <a:rPr/>
-              <a:t>.</a:t>
-            </a:r>
-          </a:p>
-          <a:p>
-            <a:pPr lvl="0" indent="0" marL="0">
-              <a:buNone/>
-            </a:pPr>
-            <a:r>
-              <a:rPr/>
-              <a:t>Harvard Dataverse, DOI 10.7910/DVN/FS0KBA · CC0 · includes R and Python code</a:t>
-            </a:r>
-          </a:p>
-          <a:p>
-            <a:pPr lvl="0" indent="0" marL="0">
-              <a:buNone/>
-            </a:pPr>
-            <a:r>
-              <a:rPr/>
-              <a:t>You work with the author’s own replication files today. Read the setup section carefully: what he assumes, and where he says the method fails.</a:t>
-            </a:r>
-          </a:p>
-        </p:txBody>
-      </p:sp>
-    </p:spTree>
-  </p:cSld>
-</p:sld>
-</file>
-
-<file path=ppt/slides/slide5.xml><?xml version="1.0" encoding="utf-8"?>
-<p:sld xmlns:a="http://schemas.openxmlformats.org/drawingml/2006/main" xmlns:r="http://schemas.openxmlformats.org/officeDocument/2006/relationships" xmlns:p="http://schemas.openxmlformats.org/presentationml/2006/main">
-  <p:cSld>
-    <p:spTree>
-      <p:nvGrpSpPr>
-        <p:cNvPr id="1" name=""/>
-        <p:cNvGrpSpPr/>
-        <p:nvPr/>
-      </p:nvGrpSpPr>
-      <p:grpSpPr>
-        <a:xfrm>
-          <a:off x="0" y="0"/>
-          <a:ext cx="0" cy="0"/>
-          <a:chOff x="0" y="0"/>
-          <a:chExt cx="0" cy="0"/>
-        </a:xfrm>
-      </p:grpSpPr>
-      <p:sp>
-        <p:nvSpPr>
-          <p:cNvPr id="2" name="Title 1"/>
-          <p:cNvSpPr>
-            <a:spLocks noGrp="1"/>
-          </p:cNvSpPr>
-          <p:nvPr>
-            <p:ph type="title"/>
-          </p:nvPr>
-        </p:nvSpPr>
-        <p:spPr/>
-        <p:txBody>
-          <a:bodyPr/>
-          <a:lstStyle/>
-          <a:p>
-            <a:pPr lvl="0" indent="0" marL="0">
-              <a:buNone/>
-            </a:pPr>
-            <a:r>
-              <a:rPr/>
-              <a:t>Today’s question</a:t>
-            </a:r>
-          </a:p>
-        </p:txBody>
-      </p:sp>
-      <p:sp>
-        <p:nvSpPr>
-          <p:cNvPr id="3" name="Content Placeholder 2"/>
-          <p:cNvSpPr>
-            <a:spLocks noGrp="1"/>
-          </p:cNvSpPr>
-          <p:nvPr>
-            <p:ph idx="1"/>
-          </p:nvPr>
-        </p:nvSpPr>
-        <p:spPr/>
-        <p:txBody>
-          <a:bodyPr/>
-          <a:lstStyle/>
-          <a:p>
-            <a:pPr lvl="0" indent="0" marL="1270000">
-              <a:buNone/>
-            </a:pPr>
-            <a:r>
-              <a:rPr sz="2000" i="1"/>
-              <a:t>Does having a national AI strategy raise enterprise AI adoption?</a:t>
-            </a:r>
-          </a:p>
-          <a:p>
-            <a:pPr lvl="0" indent="0" marL="0">
-              <a:buNone/>
-            </a:pPr>
-            <a:r>
-              <a:rPr/>
-              <a:t>Countries with AI strategies are </a:t>
-            </a:r>
-            <a:r>
-              <a:rPr b="1"/>
-              <a:t>not</a:t>
-            </a:r>
-            <a:r>
-              <a:rPr/>
-              <a:t> a random sample. They are richer, more digital, with more ICT specialists. Everything that made them adopt a strategy also makes them adopt AI.</a:t>
-            </a:r>
-          </a:p>
-        </p:txBody>
-      </p:sp>
-    </p:spTree>
-  </p:cSld>
-</p:sld>
-</file>
-
-<file path=ppt/slides/slide6.xml><?xml version="1.0" encoding="utf-8"?>
+<file path=ppt/slides/slide30.xml><?xml version="1.0" encoding="utf-8"?>
 <p:sld xmlns:a="http://schemas.openxmlformats.org/drawingml/2006/main" xmlns:r="http://schemas.openxmlformats.org/officeDocument/2006/relationships" xmlns:p="http://schemas.openxmlformats.org/presentationml/2006/main">
   <p:cSld>
     <p:spTree>
@@ -8764,7 +7964,7 @@
             </a:pPr>
             <a:r>
               <a:rPr/>
-              <a:t>The estimand</a:t>
+              <a:t>The lab</a:t>
             </a:r>
           </a:p>
         </p:txBody>
@@ -8774,7 +7974,7 @@
 </p:sld>
 </file>
 
-<file path=ppt/slides/slide7.xml><?xml version="1.0" encoding="utf-8"?>
+<file path=ppt/slides/slide31.xml><?xml version="1.0" encoding="utf-8"?>
 <p:sld xmlns:a="http://schemas.openxmlformats.org/drawingml/2006/main" xmlns:r="http://schemas.openxmlformats.org/officeDocument/2006/relationships" xmlns:p="http://schemas.openxmlformats.org/presentationml/2006/main">
   <p:cSld>
     <p:spTree>
@@ -8811,7 +8011,389 @@
             </a:pPr>
             <a:r>
               <a:rPr/>
-              <a:t>Say what you want before you estimate</a:t>
+              <a:t>What you do</a:t>
+            </a:r>
+          </a:p>
+        </p:txBody>
+      </p:sp>
+      <p:sp>
+        <p:nvSpPr>
+          <p:cNvPr id="3" name="Content Placeholder 2"/>
+          <p:cNvSpPr>
+            <a:spLocks noGrp="1"/>
+          </p:cNvSpPr>
+          <p:nvPr>
+            <p:ph idx="1"/>
+          </p:nvPr>
+        </p:nvSpPr>
+        <p:spPr/>
+        <p:txBody>
+          <a:bodyPr/>
+          <a:lstStyle/>
+          <a:p>
+            <a:pPr lvl="0" indent="-342900" marL="342900">
+              <a:buAutoNum type="arabicPeriod"/>
+            </a:pPr>
+            <a:r>
+              <a:rPr/>
+              <a:t>State the estimand and the three assumptions, in writing, before estimating</a:t>
+            </a:r>
+          </a:p>
+          <a:p>
+            <a:pPr lvl="0" indent="-342900" marL="342900">
+              <a:buAutoNum type="arabicPeriod"/>
+            </a:pPr>
+            <a:r>
+              <a:rPr/>
+              <a:t>Check </a:t>
+            </a:r>
+            <a:r>
+              <a:rPr b="1"/>
+              <a:t>overlap</a:t>
+            </a:r>
+            <a:r>
+              <a:rPr/>
+              <a:t>; report any trimming</a:t>
+            </a:r>
+          </a:p>
+          <a:p>
+            <a:pPr lvl="0" indent="-342900" marL="342900">
+              <a:buAutoNum type="arabicPeriod"/>
+            </a:pPr>
+            <a:r>
+              <a:rPr/>
+              <a:t>Naive, then ML-with-controls, then </a:t>
+            </a:r>
+            <a:r>
+              <a:rPr b="1"/>
+              <a:t>DML</a:t>
+            </a:r>
+            <a:r>
+              <a:rPr/>
+              <a:t> — record all three</a:t>
+            </a:r>
+          </a:p>
+          <a:p>
+            <a:pPr lvl="0" indent="-342900" marL="342900">
+              <a:buAutoNum type="arabicPeriod"/>
+            </a:pPr>
+            <a:r>
+              <a:rPr/>
+              <a:t>Fit a causal forest and test whether the heterogeneity is real</a:t>
+            </a:r>
+          </a:p>
+          <a:p>
+            <a:pPr lvl="0" indent="0" marL="0">
+              <a:buNone/>
+            </a:pPr>
+            <a:r>
+              <a:rPr/>
+              <a:t>The movement between the three estimates </a:t>
+            </a:r>
+            <a:r>
+              <a:rPr b="1"/>
+              <a:t>is</a:t>
+            </a:r>
+            <a:r>
+              <a:rPr/>
+              <a:t> your evidence that confounding mattered.</a:t>
+            </a:r>
+          </a:p>
+        </p:txBody>
+      </p:sp>
+    </p:spTree>
+  </p:cSld>
+</p:sld>
+</file>
+
+<file path=ppt/slides/slide32.xml><?xml version="1.0" encoding="utf-8"?>
+<p:sld xmlns:a="http://schemas.openxmlformats.org/drawingml/2006/main" xmlns:r="http://schemas.openxmlformats.org/officeDocument/2006/relationships" xmlns:p="http://schemas.openxmlformats.org/presentationml/2006/main">
+  <p:cSld>
+    <p:spTree>
+      <p:nvGrpSpPr>
+        <p:cNvPr id="1" name=""/>
+        <p:cNvGrpSpPr/>
+        <p:nvPr/>
+      </p:nvGrpSpPr>
+      <p:grpSpPr>
+        <a:xfrm>
+          <a:off x="0" y="0"/>
+          <a:ext cx="0" cy="0"/>
+          <a:chOff x="0" y="0"/>
+          <a:chExt cx="0" cy="0"/>
+        </a:xfrm>
+      </p:grpSpPr>
+      <p:sp>
+        <p:nvSpPr>
+          <p:cNvPr id="2" name="Title 1"/>
+          <p:cNvSpPr>
+            <a:spLocks noGrp="1"/>
+          </p:cNvSpPr>
+          <p:nvPr>
+            <p:ph type="title"/>
+          </p:nvPr>
+        </p:nvSpPr>
+        <p:spPr/>
+        <p:txBody>
+          <a:bodyPr/>
+          <a:lstStyle/>
+          <a:p>
+            <a:pPr lvl="0" indent="0" marL="0">
+              <a:buNone/>
+            </a:pPr>
+            <a:r>
+              <a:rPr/>
+              <a:t>The two-minute report</a:t>
+            </a:r>
+          </a:p>
+        </p:txBody>
+      </p:sp>
+      <mc:AlternateContent xmlns:mc="http://schemas.openxmlformats.org/markup-compatibility/2006">
+        <mc:Choice xmlns:a14="http://schemas.microsoft.com/office/drawing/2010/main" Requires="a14">
+          <p:sp>
+            <p:nvSpPr>
+              <p:cNvPr id="3" name="Content Placeholder 2"/>
+              <p:cNvSpPr>
+                <a:spLocks noGrp="1"/>
+              </p:cNvSpPr>
+              <p:nvPr>
+                <p:ph idx="1"/>
+              </p:nvPr>
+            </p:nvSpPr>
+            <p:spPr/>
+            <p:txBody>
+              <a:bodyPr/>
+              <a:lstStyle/>
+              <a:p>
+                <a:pPr lvl="0" indent="-342900" marL="342900">
+                  <a:buAutoNum type="arabicPeriod"/>
+                </a:pPr>
+                <a:r>
+                  <a:rPr b="1"/>
+                  <a:t>What I did</a:t>
+                </a:r>
+                <a:r>
+                  <a:rPr/>
+                  <a:t> — the estimand, and which assumption you are least sure of</a:t>
+                </a:r>
+              </a:p>
+              <a:p>
+                <a:pPr lvl="0" indent="-342900" marL="342900">
+                  <a:buAutoNum type="arabicPeriod"/>
+                </a:pPr>
+                <a:r>
+                  <a:rPr b="1"/>
+                  <a:t>The number</a:t>
+                </a:r>
+                <a:r>
+                  <a:rPr/>
+                  <a:t> — </a:t>
+                </a:r>
+                <a14:m>
+                  <m:oMath xmlns:m="http://schemas.openxmlformats.org/officeDocument/2006/math">
+                    <m:acc>
+                      <m:accPr>
+                        <m:chr m:val="̂"/>
+                      </m:accPr>
+                      <m:e>
+                        <m:r>
+                          <m:t>θ</m:t>
+                        </m:r>
+                      </m:e>
+                    </m:acc>
+                  </m:oMath>
+                </a14:m>
+                <a:r>
+                  <a:rPr/>
+                  <a:t> with its cross-fitted interval</a:t>
+                </a:r>
+              </a:p>
+              <a:p>
+                <a:pPr lvl="0" indent="-342900" marL="342900">
+                  <a:buAutoNum type="arabicPeriod"/>
+                </a:pPr>
+                <a:r>
+                  <a:rPr b="1"/>
+                  <a:t>The catch</a:t>
+                </a:r>
+                <a:r>
+                  <a:rPr/>
+                  <a:t> — the confounder DML cannot save you from</a:t>
+                </a:r>
+              </a:p>
+              <a:p>
+                <a:pPr lvl="0" indent="0" marL="0">
+                  <a:buNone/>
+                </a:pPr>
+                <a:r>
+                  <a:rPr/>
+                  <a:t>Full brief: </a:t>
+                </a:r>
+                <a:r>
+                  <a:rPr>
+                    <a:hlinkClick r:id="rId2"/>
+                    <a:latin typeface="Courier"/>
+                  </a:rPr>
+                  <a:t>02-lab/README.md</a:t>
+                </a:r>
+              </a:p>
+            </p:txBody>
+          </p:sp>
+        </mc:Choice>
+      </mc:AlternateContent>
+    </p:spTree>
+  </p:cSld>
+</p:sld>
+</file>
+
+<file path=ppt/slides/slide4.xml><?xml version="1.0" encoding="utf-8"?>
+<p:sld xmlns:a="http://schemas.openxmlformats.org/drawingml/2006/main" xmlns:r="http://schemas.openxmlformats.org/officeDocument/2006/relationships" xmlns:p="http://schemas.openxmlformats.org/presentationml/2006/main">
+  <p:cSld>
+    <p:spTree>
+      <p:nvGrpSpPr>
+        <p:cNvPr id="1" name=""/>
+        <p:cNvGrpSpPr/>
+        <p:nvPr/>
+      </p:nvGrpSpPr>
+      <p:grpSpPr>
+        <a:xfrm>
+          <a:off x="0" y="0"/>
+          <a:ext cx="0" cy="0"/>
+          <a:chOff x="0" y="0"/>
+          <a:chExt cx="0" cy="0"/>
+        </a:xfrm>
+      </p:grpSpPr>
+      <p:sp>
+        <p:nvSpPr>
+          <p:cNvPr id="3" name="Content Placeholder 2"/>
+          <p:cNvSpPr>
+            <a:spLocks noGrp="1"/>
+          </p:cNvSpPr>
+          <p:nvPr>
+            <p:ph idx="1"/>
+          </p:nvPr>
+        </p:nvSpPr>
+        <p:spPr/>
+        <p:txBody>
+          <a:bodyPr/>
+          <a:lstStyle/>
+          <a:p>
+            <a:pPr lvl="0" indent="0" marL="0">
+              <a:buNone/>
+            </a:pPr>
+            <a:r>
+              <a:rPr/>
+              <a:t>Same numbering as </a:t>
+            </a:r>
+            <a:r>
+              <a:rPr>
+                <a:hlinkClick r:id="rId2"/>
+                <a:latin typeface="Courier"/>
+              </a:rPr>
+              <a:t>01-lecture/README.md</a:t>
+            </a:r>
+            <a:r>
+              <a:rPr/>
+              <a:t>.</a:t>
+            </a:r>
+          </a:p>
+        </p:txBody>
+      </p:sp>
+    </p:spTree>
+  </p:cSld>
+</p:sld>
+</file>
+
+<file path=ppt/slides/slide5.xml><?xml version="1.0" encoding="utf-8"?>
+<p:sld xmlns:a="http://schemas.openxmlformats.org/drawingml/2006/main" xmlns:r="http://schemas.openxmlformats.org/officeDocument/2006/relationships" xmlns:p="http://schemas.openxmlformats.org/presentationml/2006/main">
+  <p:cSld>
+    <p:spTree>
+      <p:nvGrpSpPr>
+        <p:cNvPr id="1" name=""/>
+        <p:cNvGrpSpPr/>
+        <p:nvPr/>
+      </p:nvGrpSpPr>
+      <p:grpSpPr>
+        <a:xfrm>
+          <a:off x="0" y="0"/>
+          <a:ext cx="0" cy="0"/>
+          <a:chOff x="0" y="0"/>
+          <a:chExt cx="0" cy="0"/>
+        </a:xfrm>
+      </p:grpSpPr>
+      <p:sp>
+        <p:nvSpPr>
+          <p:cNvPr id="2" name="Title 1"/>
+          <p:cNvSpPr>
+            <a:spLocks noGrp="1"/>
+          </p:cNvSpPr>
+          <p:nvPr>
+            <p:ph type="title"/>
+          </p:nvPr>
+        </p:nvSpPr>
+        <p:spPr>
+          <a:xfrm>
+            <a:off x="722313" y="3305176"/>
+            <a:ext cx="7772400" cy="1021556"/>
+          </a:xfrm>
+        </p:spPr>
+        <p:txBody>
+          <a:bodyPr/>
+          <a:lstStyle/>
+          <a:p>
+            <a:pPr lvl="0" indent="0" marL="0">
+              <a:buNone/>
+            </a:pPr>
+            <a:r>
+              <a:rPr/>
+              <a:t>10.1 The setup</a:t>
+            </a:r>
+          </a:p>
+        </p:txBody>
+      </p:sp>
+    </p:spTree>
+  </p:cSld>
+</p:sld>
+</file>
+
+<file path=ppt/slides/slide6.xml><?xml version="1.0" encoding="utf-8"?>
+<p:sld xmlns:a="http://schemas.openxmlformats.org/drawingml/2006/main" xmlns:r="http://schemas.openxmlformats.org/officeDocument/2006/relationships" xmlns:p="http://schemas.openxmlformats.org/presentationml/2006/main">
+  <p:cSld>
+    <p:spTree>
+      <p:nvGrpSpPr>
+        <p:cNvPr id="1" name=""/>
+        <p:cNvGrpSpPr/>
+        <p:nvPr/>
+      </p:nvGrpSpPr>
+      <p:grpSpPr>
+        <a:xfrm>
+          <a:off x="0" y="0"/>
+          <a:ext cx="0" cy="0"/>
+          <a:chOff x="0" y="0"/>
+          <a:chExt cx="0" cy="0"/>
+        </a:xfrm>
+      </p:grpSpPr>
+      <p:sp>
+        <p:nvSpPr>
+          <p:cNvPr id="2" name="Title 1"/>
+          <p:cNvSpPr>
+            <a:spLocks noGrp="1"/>
+          </p:cNvSpPr>
+          <p:nvPr>
+            <p:ph type="title"/>
+          </p:nvPr>
+        </p:nvSpPr>
+        <p:spPr/>
+        <p:txBody>
+          <a:bodyPr/>
+          <a:lstStyle/>
+          <a:p>
+            <a:pPr lvl="0" indent="0" marL="0">
+              <a:buNone/>
+            </a:pPr>
+            <a:r>
+              <a:rPr/>
+              <a:t>The partially linear model</a:t>
             </a:r>
           </a:p>
         </p:txBody>
@@ -8836,23 +8418,6 @@
                 <a:pPr lvl="0" indent="0" marL="0">
                   <a:buNone/>
                 </a:pPr>
-                <a:r>
-                  <a:rPr/>
-                  <a:t>The </a:t>
-                </a:r>
-                <a:r>
-                  <a:rPr b="1"/>
-                  <a:t>average treatment effect</a:t>
-                </a:r>
-                <a:r>
-                  <a:rPr/>
-                  <a:t>:</a:t>
-                </a:r>
-              </a:p>
-              <a:p>
-                <a:pPr lvl="0" indent="0" marL="0">
-                  <a:buNone/>
-                </a:pPr>
                 <a14:m>
                   <m:oMathPara xmlns:m="http://schemas.openxmlformats.org/officeDocument/2006/math">
                     <m:oMathParaPr>
@@ -8860,13 +8425,77 @@
                     </m:oMathParaPr>
                     <m:oMath>
                       <m:r>
-                        <m:t>τ</m:t>
+                        <m:t>Y</m:t>
                       </m:r>
                       <m:r>
                         <m:rPr>
                           <m:sty m:val="p"/>
                         </m:rPr>
                         <m:t>=</m:t>
+                      </m:r>
+                      <m:sSub>
+                        <m:e>
+                          <m:r>
+                            <m:t>θ</m:t>
+                          </m:r>
+                        </m:e>
+                        <m:sub>
+                          <m:r>
+                            <m:t>0</m:t>
+                          </m:r>
+                        </m:sub>
+                      </m:sSub>
+                      <m:r>
+                        <m:t>D</m:t>
+                      </m:r>
+                      <m:r>
+                        <m:rPr>
+                          <m:sty m:val="p"/>
+                        </m:rPr>
+                        <m:t>+</m:t>
+                      </m:r>
+                      <m:sSub>
+                        <m:e>
+                          <m:r>
+                            <m:t>g</m:t>
+                          </m:r>
+                        </m:e>
+                        <m:sub>
+                          <m:r>
+                            <m:t>0</m:t>
+                          </m:r>
+                        </m:sub>
+                      </m:sSub>
+                      <m:d>
+                        <m:dPr>
+                          <m:begChr m:val="("/>
+                          <m:sepChr m:val=""/>
+                          <m:endChr m:val=")"/>
+                          <m:grow/>
+                        </m:dPr>
+                        <m:e>
+                          <m:r>
+                            <m:t>X</m:t>
+                          </m:r>
+                        </m:e>
+                      </m:d>
+                      <m:r>
+                        <m:rPr>
+                          <m:sty m:val="p"/>
+                        </m:rPr>
+                        <m:t>+</m:t>
+                      </m:r>
+                      <m:r>
+                        <m:t>U</m:t>
+                      </m:r>
+                      <m:r>
+                        <m:rPr>
+                          <m:sty m:val="p"/>
+                        </m:rPr>
+                        <m:t>,</m:t>
+                      </m:r>
+                      <m:r>
+                        <m:t>  </m:t>
                       </m:r>
                       <m:r>
                         <m:rPr>
@@ -8884,45 +8513,141 @@
                         </m:dPr>
                         <m:e>
                           <m:r>
-                            <m:t>Y</m:t>
+                            <m:t>U</m:t>
                           </m:r>
-                          <m:d>
-                            <m:dPr>
-                              <m:begChr m:val="("/>
-                              <m:sepChr m:val=""/>
-                              <m:endChr m:val=")"/>
-                              <m:grow/>
-                            </m:dPr>
-                            <m:e>
-                              <m:r>
-                                <m:t>1</m:t>
-                              </m:r>
-                            </m:e>
-                          </m:d>
                           <m:r>
                             <m:rPr>
                               <m:sty m:val="p"/>
                             </m:rPr>
-                            <m:t>−</m:t>
+                            <m:t>∣</m:t>
                           </m:r>
                           <m:r>
-                            <m:t>Y</m:t>
+                            <m:t>X</m:t>
                           </m:r>
-                          <m:d>
-                            <m:dPr>
-                              <m:begChr m:val="("/>
-                              <m:sepChr m:val=""/>
-                              <m:endChr m:val=")"/>
-                              <m:grow/>
-                            </m:dPr>
-                            <m:e>
-                              <m:r>
-                                <m:t>0</m:t>
-                              </m:r>
-                            </m:e>
-                          </m:d>
+                          <m:r>
+                            <m:rPr>
+                              <m:sty m:val="p"/>
+                            </m:rPr>
+                            <m:t>,</m:t>
+                          </m:r>
+                          <m:r>
+                            <m:t>D</m:t>
+                          </m:r>
                         </m:e>
                       </m:d>
+                      <m:r>
+                        <m:rPr>
+                          <m:sty m:val="p"/>
+                        </m:rPr>
+                        <m:t>=</m:t>
+                      </m:r>
+                      <m:r>
+                        <m:t>0</m:t>
+                      </m:r>
+                    </m:oMath>
+                  </m:oMathPara>
+                </a14:m>
+              </a:p>
+              <a:p>
+                <a:pPr lvl="0" indent="0" marL="0">
+                  <a:buNone/>
+                </a:pPr>
+                <a14:m>
+                  <m:oMathPara xmlns:m="http://schemas.openxmlformats.org/officeDocument/2006/math">
+                    <m:oMathParaPr>
+                      <m:jc m:val="center"/>
+                    </m:oMathParaPr>
+                    <m:oMath>
+                      <m:r>
+                        <m:t>D</m:t>
+                      </m:r>
+                      <m:r>
+                        <m:rPr>
+                          <m:sty m:val="p"/>
+                        </m:rPr>
+                        <m:t>=</m:t>
+                      </m:r>
+                      <m:sSub>
+                        <m:e>
+                          <m:r>
+                            <m:t>m</m:t>
+                          </m:r>
+                        </m:e>
+                        <m:sub>
+                          <m:r>
+                            <m:t>0</m:t>
+                          </m:r>
+                        </m:sub>
+                      </m:sSub>
+                      <m:d>
+                        <m:dPr>
+                          <m:begChr m:val="("/>
+                          <m:sepChr m:val=""/>
+                          <m:endChr m:val=")"/>
+                          <m:grow/>
+                        </m:dPr>
+                        <m:e>
+                          <m:r>
+                            <m:t>X</m:t>
+                          </m:r>
+                        </m:e>
+                      </m:d>
+                      <m:r>
+                        <m:rPr>
+                          <m:sty m:val="p"/>
+                        </m:rPr>
+                        <m:t>+</m:t>
+                      </m:r>
+                      <m:r>
+                        <m:t>V</m:t>
+                      </m:r>
+                      <m:r>
+                        <m:rPr>
+                          <m:sty m:val="p"/>
+                        </m:rPr>
+                        <m:t>,</m:t>
+                      </m:r>
+                      <m:r>
+                        <m:t>  </m:t>
+                      </m:r>
+                      <m:r>
+                        <m:rPr>
+                          <m:sty m:val="p"/>
+                          <m:scr m:val="double-struck"/>
+                        </m:rPr>
+                        <m:t>E</m:t>
+                      </m:r>
+                      <m:d>
+                        <m:dPr>
+                          <m:begChr m:val="["/>
+                          <m:sepChr m:val=""/>
+                          <m:endChr m:val="]"/>
+                          <m:grow/>
+                        </m:dPr>
+                        <m:e>
+                          <m:r>
+                            <m:t>V</m:t>
+                          </m:r>
+                          <m:r>
+                            <m:rPr>
+                              <m:sty m:val="p"/>
+                            </m:rPr>
+                            <m:t>∣</m:t>
+                          </m:r>
+                          <m:r>
+                            <m:t>X</m:t>
+                          </m:r>
+                        </m:e>
+                      </m:d>
+                      <m:r>
+                        <m:rPr>
+                          <m:sty m:val="p"/>
+                        </m:rPr>
+                        <m:t>=</m:t>
+                      </m:r>
+                      <m:r>
+                        <m:t>0</m:t>
+                      </m:r>
                     </m:oMath>
                   </m:oMathPara>
                 </a14:m>
@@ -8933,67 +8658,276 @@
                 </a:pPr>
                 <a14:m>
                   <m:oMath xmlns:m="http://schemas.openxmlformats.org/officeDocument/2006/math">
-                    <m:r>
-                      <m:t>Y</m:t>
-                    </m:r>
-                    <m:d>
-                      <m:dPr>
-                        <m:begChr m:val="("/>
-                        <m:sepChr m:val=""/>
-                        <m:endChr m:val=")"/>
-                        <m:grow/>
-                      </m:dPr>
+                    <m:sSub>
                       <m:e>
                         <m:r>
-                          <m:t>1</m:t>
+                          <m:t>θ</m:t>
                         </m:r>
                       </m:e>
-                    </m:d>
-                  </m:oMath>
-                </a14:m>
-                <a:r>
-                  <a:rPr/>
-                  <a:t> and </a:t>
-                </a:r>
-                <a14:m>
-                  <m:oMath xmlns:m="http://schemas.openxmlformats.org/officeDocument/2006/math">
-                    <m:r>
-                      <m:t>Y</m:t>
-                    </m:r>
-                    <m:d>
-                      <m:dPr>
-                        <m:begChr m:val="("/>
-                        <m:sepChr m:val=""/>
-                        <m:endChr m:val=")"/>
-                        <m:grow/>
-                      </m:dPr>
-                      <m:e>
+                      <m:sub>
                         <m:r>
                           <m:t>0</m:t>
                         </m:r>
-                      </m:e>
-                    </m:d>
+                      </m:sub>
+                    </m:sSub>
                   </m:oMath>
                 </a14:m>
                 <a:r>
                   <a:rPr/>
-                  <a:t> are the outcomes for the </a:t>
-                </a:r>
-                <a:r>
-                  <a:rPr i="1"/>
-                  <a:t>same</a:t>
-                </a:r>
+                  <a:t> is the parameter of interest; </a:t>
+                </a:r>
+                <a14:m>
+                  <m:oMath xmlns:m="http://schemas.openxmlformats.org/officeDocument/2006/math">
+                    <m:sSub>
+                      <m:e>
+                        <m:r>
+                          <m:t>g</m:t>
+                        </m:r>
+                      </m:e>
+                      <m:sub>
+                        <m:r>
+                          <m:t>0</m:t>
+                        </m:r>
+                      </m:sub>
+                    </m:sSub>
+                  </m:oMath>
+                </a14:m>
                 <a:r>
                   <a:rPr/>
-                  <a:t> country in both states of the world. You observe </a:t>
+                  <a:t> and </a:t>
+                </a:r>
+                <a14:m>
+                  <m:oMath xmlns:m="http://schemas.openxmlformats.org/officeDocument/2006/math">
+                    <m:sSub>
+                      <m:e>
+                        <m:r>
+                          <m:t>m</m:t>
+                        </m:r>
+                      </m:e>
+                      <m:sub>
+                        <m:r>
+                          <m:t>0</m:t>
+                        </m:r>
+                      </m:sub>
+                    </m:sSub>
+                  </m:oMath>
+                </a14:m>
+                <a:r>
+                  <a:rPr/>
+                  <a:t> are </a:t>
                 </a:r>
                 <a:r>
                   <a:rPr b="1"/>
-                  <a:t>one</a:t>
+                  <a:t>nuisance functions</a:t>
                 </a:r>
                 <a:r>
                   <a:rPr/>
-                  <a:t>. This is the fundamental problem of causal inference, and no amount of data fixes it.</a:t>
+                  <a:t> we do not care about but must handle.</a:t>
+                </a:r>
+              </a:p>
+            </p:txBody>
+          </p:sp>
+        </mc:Choice>
+      </mc:AlternateContent>
+    </p:spTree>
+  </p:cSld>
+</p:sld>
+</file>
+
+<file path=ppt/slides/slide7.xml><?xml version="1.0" encoding="utf-8"?>
+<p:sld xmlns:a="http://schemas.openxmlformats.org/drawingml/2006/main" xmlns:r="http://schemas.openxmlformats.org/officeDocument/2006/relationships" xmlns:p="http://schemas.openxmlformats.org/presentationml/2006/main">
+  <p:cSld>
+    <p:spTree>
+      <p:nvGrpSpPr>
+        <p:cNvPr id="1" name=""/>
+        <p:cNvGrpSpPr/>
+        <p:nvPr/>
+      </p:nvGrpSpPr>
+      <p:grpSpPr>
+        <a:xfrm>
+          <a:off x="0" y="0"/>
+          <a:ext cx="0" cy="0"/>
+          <a:chOff x="0" y="0"/>
+          <a:chExt cx="0" cy="0"/>
+        </a:xfrm>
+      </p:grpSpPr>
+      <mc:AlternateContent xmlns:mc="http://schemas.openxmlformats.org/markup-compatibility/2006">
+        <mc:Choice xmlns:a14="http://schemas.microsoft.com/office/drawing/2010/main" Requires="a14">
+          <p:sp>
+            <p:nvSpPr>
+              <p:cNvPr id="2" name="Title 1"/>
+              <p:cNvSpPr>
+                <a:spLocks noGrp="1"/>
+              </p:cNvSpPr>
+              <p:nvPr>
+                <p:ph type="title"/>
+              </p:nvPr>
+            </p:nvSpPr>
+            <p:spPr/>
+            <p:txBody>
+              <a:bodyPr/>
+              <a:lstStyle/>
+              <a:p>
+                <a:pPr lvl="0" indent="0" marL="0">
+                  <a:buNone/>
+                </a:pPr>
+                <a:r>
+                  <a:rPr/>
+                  <a:t>Why not just assume </a:t>
+                </a:r>
+                <a14:m>
+                  <m:oMath xmlns:m="http://schemas.openxmlformats.org/officeDocument/2006/math">
+                    <m:sSub>
+                      <m:e>
+                        <m:r>
+                          <m:t>g</m:t>
+                        </m:r>
+                      </m:e>
+                      <m:sub>
+                        <m:r>
+                          <m:t>0</m:t>
+                        </m:r>
+                      </m:sub>
+                    </m:sSub>
+                  </m:oMath>
+                </a14:m>
+                <a:r>
+                  <a:rPr/>
+                  <a:t> is linear</a:t>
+                </a:r>
+              </a:p>
+            </p:txBody>
+          </p:sp>
+        </mc:Choice>
+      </mc:AlternateContent>
+      <mc:AlternateContent xmlns:mc="http://schemas.openxmlformats.org/markup-compatibility/2006">
+        <mc:Choice xmlns:a14="http://schemas.microsoft.com/office/drawing/2010/main" Requires="a14">
+          <p:sp>
+            <p:nvSpPr>
+              <p:cNvPr id="3" name="Content Placeholder 2"/>
+              <p:cNvSpPr>
+                <a:spLocks noGrp="1"/>
+              </p:cNvSpPr>
+              <p:nvPr>
+                <p:ph idx="1"/>
+              </p:nvPr>
+            </p:nvSpPr>
+            <p:spPr/>
+            <p:txBody>
+              <a:bodyPr/>
+              <a:lstStyle/>
+              <a:p>
+                <a:pPr lvl="0" indent="0" marL="0">
+                  <a:buNone/>
+                </a:pPr>
+                <a:r>
+                  <a:rPr/>
+                  <a:t>In classical econometrics we would. The premise of DML is that we would rather estimate </a:t>
+                </a:r>
+                <a14:m>
+                  <m:oMath xmlns:m="http://schemas.openxmlformats.org/officeDocument/2006/math">
+                    <m:sSub>
+                      <m:e>
+                        <m:r>
+                          <m:t>g</m:t>
+                        </m:r>
+                      </m:e>
+                      <m:sub>
+                        <m:r>
+                          <m:t>0</m:t>
+                        </m:r>
+                      </m:sub>
+                    </m:sSub>
+                  </m:oMath>
+                </a14:m>
+                <a:r>
+                  <a:rPr/>
+                  <a:t> and </a:t>
+                </a:r>
+                <a14:m>
+                  <m:oMath xmlns:m="http://schemas.openxmlformats.org/officeDocument/2006/math">
+                    <m:sSub>
+                      <m:e>
+                        <m:r>
+                          <m:t>m</m:t>
+                        </m:r>
+                      </m:e>
+                      <m:sub>
+                        <m:r>
+                          <m:t>0</m:t>
+                        </m:r>
+                      </m:sub>
+                    </m:sSub>
+                  </m:oMath>
+                </a14:m>
+                <a:r>
+                  <a:rPr/>
+                  <a:t> </a:t>
+                </a:r>
+                <a:r>
+                  <a:rPr b="1"/>
+                  <a:t>flexibly</a:t>
+                </a:r>
+                <a:r>
+                  <a:rPr/>
+                  <a:t>, with the tools of Sessions 05–07 —</a:t>
+                </a:r>
+              </a:p>
+              <a:p>
+                <a:pPr lvl="0" indent="0" marL="0">
+                  <a:buNone/>
+                </a:pPr>
+                <a:r>
+                  <a:rPr/>
+                  <a:t>because functional-form error in </a:t>
+                </a:r>
+                <a14:m>
+                  <m:oMath xmlns:m="http://schemas.openxmlformats.org/officeDocument/2006/math">
+                    <m:sSub>
+                      <m:e>
+                        <m:r>
+                          <m:t>g</m:t>
+                        </m:r>
+                      </m:e>
+                      <m:sub>
+                        <m:r>
+                          <m:t>0</m:t>
+                        </m:r>
+                      </m:sub>
+                    </m:sSub>
+                  </m:oMath>
+                </a14:m>
+                <a:r>
+                  <a:rPr/>
+                  <a:t> </a:t>
+                </a:r>
+                <a:r>
+                  <a:rPr b="1"/>
+                  <a:t>contaminates</a:t>
+                </a:r>
+                <a:r>
+                  <a:rPr/>
+                  <a:t> </a:t>
+                </a:r>
+                <a14:m>
+                  <m:oMath xmlns:m="http://schemas.openxmlformats.org/officeDocument/2006/math">
+                    <m:sSub>
+                      <m:e>
+                        <m:r>
+                          <m:t>θ</m:t>
+                        </m:r>
+                      </m:e>
+                      <m:sub>
+                        <m:r>
+                          <m:t>0</m:t>
+                        </m:r>
+                      </m:sub>
+                    </m:sSub>
+                  </m:oMath>
+                </a14:m>
+                <a:r>
+                  <a:rPr/>
+                  <a:t>.</a:t>
                 </a:r>
               </a:p>
             </p:txBody>
@@ -9042,7 +8976,7 @@
             </a:pPr>
             <a:r>
               <a:rPr/>
-              <a:t>What makes it recoverable</a:t>
+              <a:t>Identification requires</a:t>
             </a:r>
           </a:p>
         </p:txBody>
@@ -9069,7 +9003,7 @@
                 </a:pPr>
                 <a:r>
                   <a:rPr b="1"/>
-                  <a:t>Unconfoundedness</a:t>
+                  <a:t>Conditional ignorability</a:t>
                 </a:r>
                 <a:r>
                   <a:rPr/>
@@ -9095,7 +9029,7 @@
                       </m:dPr>
                       <m:e>
                         <m:r>
-                          <m:t>0</m:t>
+                          <m:t>1</m:t>
                         </m:r>
                       </m:e>
                     </m:d>
@@ -9117,7 +9051,7 @@
                       </m:dPr>
                       <m:e>
                         <m:r>
-                          <m:t>1</m:t>
+                          <m:t>0</m:t>
                         </m:r>
                       </m:e>
                     </m:d>
@@ -9147,10 +9081,6 @@
                     </m:r>
                   </m:oMath>
                 </a14:m>
-                <a:r>
-                  <a:rPr/>
-                  <a:t>. Given the covariates, treatment is as good as random.</a:t>
-                </a:r>
               </a:p>
               <a:p>
                 <a:pPr lvl="0" indent="-342900" marL="342900">
@@ -9176,7 +9106,7 @@
                       <m:t>&lt;</m:t>
                     </m:r>
                     <m:r>
-                      <m:t>e</m:t>
+                      <m:t>P</m:t>
                     </m:r>
                     <m:d>
                       <m:dPr>
@@ -9186,6 +9116,24 @@
                         <m:grow/>
                       </m:dPr>
                       <m:e>
+                        <m:r>
+                          <m:t>D</m:t>
+                        </m:r>
+                        <m:r>
+                          <m:rPr>
+                            <m:sty m:val="p"/>
+                          </m:rPr>
+                          <m:t>=</m:t>
+                        </m:r>
+                        <m:r>
+                          <m:t>1</m:t>
+                        </m:r>
+                        <m:r>
+                          <m:rPr>
+                            <m:sty m:val="p"/>
+                          </m:rPr>
+                          <m:t>∣</m:t>
+                        </m:r>
                         <m:r>
                           <m:t>X</m:t>
                         </m:r>
@@ -9204,7 +9152,7 @@
                 </a14:m>
                 <a:r>
                   <a:rPr/>
-                  <a:t>. Every kind of country could have gone either way.</a:t>
+                  <a:t> almost surely</a:t>
                 </a:r>
               </a:p>
               <a:p>
@@ -9215,10 +9163,6 @@
                   <a:rPr b="1"/>
                   <a:t>SUTVA</a:t>
                 </a:r>
-                <a:r>
-                  <a:rPr/>
-                  <a:t> — one country’s strategy does not change another’s outcome.</a:t>
-                </a:r>
               </a:p>
               <a:p>
                 <a:pPr lvl="0" indent="0" marL="0">
@@ -9226,15 +9170,15 @@
                 </a:pPr>
                 <a:r>
                   <a:rPr/>
-                  <a:t>Assumption 1 is </a:t>
+                  <a:t>No amount of machine learning substitutes for these. They are assumptions </a:t>
                 </a:r>
                 <a:r>
                   <a:rPr b="1"/>
-                  <a:t>not testable</a:t>
+                  <a:t>about the world</a:t>
                 </a:r>
                 <a:r>
                   <a:rPr/>
-                  <a:t>. It is an argument you make from institutional knowledge, and your reader is entitled to reject it.</a:t>
+                  <a:t>, defended with institutional knowledge — not with cross-validation.</a:t>
                 </a:r>
               </a:p>
             </p:txBody>
@@ -9273,7 +9217,12 @@
             <p:ph type="title"/>
           </p:nvPr>
         </p:nvSpPr>
-        <p:spPr/>
+        <p:spPr>
+          <a:xfrm>
+            <a:off x="722313" y="3305176"/>
+            <a:ext cx="7772400" cy="1021556"/>
+          </a:xfrm>
+        </p:spPr>
         <p:txBody>
           <a:bodyPr/>
           <a:lstStyle/>
@@ -9283,49 +9232,7 @@
             </a:pPr>
             <a:r>
               <a:rPr/>
-              <a:t>SUTVA is doing real work here</a:t>
-            </a:r>
-          </a:p>
-        </p:txBody>
-      </p:sp>
-      <p:sp>
-        <p:nvSpPr>
-          <p:cNvPr id="3" name="Content Placeholder 2"/>
-          <p:cNvSpPr>
-            <a:spLocks noGrp="1"/>
-          </p:cNvSpPr>
-          <p:nvPr>
-            <p:ph idx="1"/>
-          </p:nvPr>
-        </p:nvSpPr>
-        <p:spPr/>
-        <p:txBody>
-          <a:bodyPr/>
-          <a:lstStyle/>
-          <a:p>
-            <a:pPr lvl="0" indent="0" marL="0">
-              <a:buNone/>
-            </a:pPr>
-            <a:r>
-              <a:rPr/>
-              <a:t>EU member states coordinate. A national AI strategy in one country plausibly shifts adoption in its neighbours through the single market and through Commission programmes.</a:t>
-            </a:r>
-          </a:p>
-          <a:p>
-            <a:pPr lvl="0" indent="0" marL="0">
-              <a:buNone/>
-            </a:pPr>
-            <a:r>
-              <a:rPr/>
-              <a:t>If that is true, SUTVA fails, and </a:t>
-            </a:r>
-            <a:r>
-              <a:rPr i="1"/>
-              <a:t>every</a:t>
-            </a:r>
-            <a:r>
-              <a:rPr/>
-              <a:t> method today is biased — including the sophisticated ones. Say so in your limitations. A named, unfixed threat is scholarship; an unmentioned one is not.</a:t>
+              <a:t>10.2 Why the naive plug-in fails</a:t>
             </a:r>
           </a:p>
         </p:txBody>

--- a/10-causal-machine-learning/slides.pptx
+++ b/10-causal-machine-learning/slides.pptx
@@ -7964,7 +7964,7 @@
             </a:pPr>
             <a:r>
               <a:rPr/>
-              <a:t>The lab</a:t>
+              <a:t>The practice</a:t>
             </a:r>
           </a:p>
         </p:txBody>
@@ -8234,7 +8234,7 @@
                     <a:hlinkClick r:id="rId2"/>
                     <a:latin typeface="Courier"/>
                   </a:rPr>
-                  <a:t>02-lab/README.md</a:t>
+                  <a:t>02-practice/README.md</a:t>
                 </a:r>
               </a:p>
             </p:txBody>

--- a/10-causal-machine-learning/slides.pptx
+++ b/10-causal-machine-learning/slides.pptx
@@ -4830,7 +4830,19 @@
                             <m:rPr>
                               <m:sty m:val="p"/>
                             </m:rPr>
-                            <m:t>Cov</m:t>
+                            <m:t>C</m:t>
+                          </m:r>
+                          <m:r>
+                            <m:rPr>
+                              <m:sty m:val="p"/>
+                            </m:rPr>
+                            <m:t>o</m:t>
+                          </m:r>
+                          <m:r>
+                            <m:rPr>
+                              <m:sty m:val="p"/>
+                            </m:rPr>
+                            <m:t>v</m:t>
                           </m:r>
                           <m:d>
                             <m:dPr>
@@ -4874,7 +4886,19 @@
                             <m:rPr>
                               <m:sty m:val="p"/>
                             </m:rPr>
-                            <m:t>Var</m:t>
+                            <m:t>V</m:t>
+                          </m:r>
+                          <m:r>
+                            <m:rPr>
+                              <m:sty m:val="p"/>
+                            </m:rPr>
+                            <m:t>a</m:t>
+                          </m:r>
+                          <m:r>
+                            <m:rPr>
+                              <m:sty m:val="p"/>
+                            </m:rPr>
+                            <m:t>r</m:t>
                           </m:r>
                           <m:d>
                             <m:dPr>

--- a/10-causal-machine-learning/slides.pptx
+++ b/10-causal-machine-learning/slides.pptx
@@ -937,15 +937,15 @@
         </p:nvSpPr>
         <p:spPr>
           <a:xfrm>
-            <a:off x="722313" y="3305176"/>
-            <a:ext cx="7772400" cy="1021556"/>
+            <a:off x="722313" y="1850000"/>
+            <a:ext cx="7772400" cy="1300000"/>
           </a:xfrm>
         </p:spPr>
         <p:txBody>
           <a:bodyPr anchor="t"/>
           <a:lstStyle>
             <a:lvl1pPr algn="l">
-              <a:defRPr sz="1850" b="1" cap="all"/>
+              <a:defRPr sz="2800" b="1" cap="none"/>
             </a:lvl1pPr>
           </a:lstStyle>
           <a:p>
@@ -968,8 +968,8 @@
         </p:nvSpPr>
         <p:spPr>
           <a:xfrm>
-            <a:off x="722313" y="2180035"/>
-            <a:ext cx="7772400" cy="1125140"/>
+            <a:off x="722313" y="3250000"/>
+            <a:ext cx="7772400" cy="700000"/>
           </a:xfrm>
         </p:spPr>
         <p:txBody>
@@ -4043,8 +4043,8 @@
         </p:nvSpPr>
         <p:spPr>
           <a:xfrm>
-            <a:off x="722313" y="3305176"/>
-            <a:ext cx="7772400" cy="1021556"/>
+            <a:off x="722313" y="1850000"/>
+            <a:ext cx="7772400" cy="1300000"/>
           </a:xfrm>
         </p:spPr>
         <p:txBody>
@@ -5584,8 +5584,8 @@
         </p:nvSpPr>
         <p:spPr>
           <a:xfrm>
-            <a:off x="722313" y="3305176"/>
-            <a:ext cx="7772400" cy="1021556"/>
+            <a:off x="722313" y="1850000"/>
+            <a:ext cx="7772400" cy="1300000"/>
           </a:xfrm>
         </p:spPr>
         <p:txBody>
@@ -6930,8 +6930,8 @@
         </p:nvSpPr>
         <p:spPr>
           <a:xfrm>
-            <a:off x="722313" y="3305176"/>
-            <a:ext cx="7772400" cy="1021556"/>
+            <a:off x="722313" y="1850000"/>
+            <a:ext cx="7772400" cy="1300000"/>
           </a:xfrm>
         </p:spPr>
         <p:txBody>
@@ -7442,8 +7442,8 @@
         </p:nvSpPr>
         <p:spPr>
           <a:xfrm>
-            <a:off x="722313" y="3305176"/>
-            <a:ext cx="7772400" cy="1021556"/>
+            <a:off x="722313" y="1850000"/>
+            <a:ext cx="7772400" cy="1300000"/>
           </a:xfrm>
         </p:spPr>
         <p:txBody>
@@ -7975,8 +7975,8 @@
         </p:nvSpPr>
         <p:spPr>
           <a:xfrm>
-            <a:off x="722313" y="3305176"/>
-            <a:ext cx="7772400" cy="1021556"/>
+            <a:off x="722313" y="1850000"/>
+            <a:ext cx="7772400" cy="1300000"/>
           </a:xfrm>
         </p:spPr>
         <p:txBody>
@@ -8357,8 +8357,8 @@
         </p:nvSpPr>
         <p:spPr>
           <a:xfrm>
-            <a:off x="722313" y="3305176"/>
-            <a:ext cx="7772400" cy="1021556"/>
+            <a:off x="722313" y="1850000"/>
+            <a:ext cx="7772400" cy="1300000"/>
           </a:xfrm>
         </p:spPr>
         <p:txBody>
@@ -9243,8 +9243,8 @@
         </p:nvSpPr>
         <p:spPr>
           <a:xfrm>
-            <a:off x="722313" y="3305176"/>
-            <a:ext cx="7772400" cy="1021556"/>
+            <a:off x="722313" y="1850000"/>
+            <a:ext cx="7772400" cy="1300000"/>
           </a:xfrm>
         </p:spPr>
         <p:txBody>

--- a/10-causal-machine-learning/slides.pptx
+++ b/10-causal-machine-learning/slides.pptx
@@ -37,6 +37,20 @@
     <p:sldId id="285" r:id="rId31"/>
     <p:sldId id="286" r:id="rId32"/>
     <p:sldId id="287" r:id="rId33"/>
+    <p:sldId id="288" r:id="rId34"/>
+    <p:sldId id="289" r:id="rId35"/>
+    <p:sldId id="290" r:id="rId36"/>
+    <p:sldId id="291" r:id="rId37"/>
+    <p:sldId id="292" r:id="rId38"/>
+    <p:sldId id="293" r:id="rId39"/>
+    <p:sldId id="294" r:id="rId40"/>
+    <p:sldId id="295" r:id="rId41"/>
+    <p:sldId id="296" r:id="rId42"/>
+    <p:sldId id="297" r:id="rId43"/>
+    <p:sldId id="298" r:id="rId44"/>
+    <p:sldId id="299" r:id="rId45"/>
+    <p:sldId id="300" r:id="rId46"/>
+    <p:sldId id="301" r:id="rId47"/>
   </p:sldIdLst>
   <p:sldSz cx="9144000" cy="5143500" type="screen16x9"/>
   <p:notesSz cx="6858000" cy="9144000"/>
@@ -3273,7 +3287,7 @@
             </a:pPr>
             <a:r>
               <a:rPr/>
-              <a:t>20 August 2026</a:t>
+              <a:t>22 August 2026</a:t>
             </a:r>
           </a:p>
         </p:txBody>
@@ -3320,7 +3334,1405 @@
             </a:pPr>
             <a:r>
               <a:rPr/>
-              <a:t>The decomposition</a:t>
+              <a:t>The number this produces</a:t>
+            </a:r>
+          </a:p>
+        </p:txBody>
+      </p:sp>
+      <p:sp>
+        <p:nvSpPr>
+          <p:cNvPr id="3" name="Content Placeholder 2"/>
+          <p:cNvSpPr>
+            <a:spLocks noGrp="1"/>
+          </p:cNvSpPr>
+          <p:nvPr>
+            <p:ph idx="1"/>
+          </p:nvPr>
+        </p:nvSpPr>
+        <p:spPr/>
+        <p:txBody>
+          <a:bodyPr/>
+          <a:lstStyle/>
+          <a:p>
+            <a:pPr lvl="0" indent="0">
+              <a:buNone/>
+            </a:pPr>
+            <a:r>
+              <a:rPr>
+                <a:solidFill>
+                  <a:srgbClr val="008000"/>
+                </a:solidFill>
+                <a:latin typeface="Courier"/>
+              </a:rPr>
+              <a:t>print</a:t>
+            </a:r>
+            <a:r>
+              <a:rPr>
+                <a:latin typeface="Courier"/>
+              </a:rPr>
+              <a:t>(</a:t>
+            </a:r>
+            <a:r>
+              <a:rPr>
+                <a:solidFill>
+                  <a:srgbClr val="BB6688"/>
+                </a:solidFill>
+                <a:latin typeface="Courier"/>
+              </a:rPr>
+              <a:t>f"mean digital intensity, has strategy : </a:t>
+            </a:r>
+            <a:r>
+              <a:rPr>
+                <a:solidFill>
+                  <a:srgbClr val="4070A0"/>
+                </a:solidFill>
+                <a:latin typeface="Courier"/>
+              </a:rPr>
+              <a:t>{</a:t>
+            </a:r>
+            <a:r>
+              <a:rPr>
+                <a:latin typeface="Courier"/>
+              </a:rPr>
+              <a:t>Yr[Dr</a:t>
+            </a:r>
+            <a:r>
+              <a:rPr>
+                <a:solidFill>
+                  <a:srgbClr val="666666"/>
+                </a:solidFill>
+                <a:latin typeface="Courier"/>
+              </a:rPr>
+              <a:t>==</a:t>
+            </a:r>
+            <a:r>
+              <a:rPr>
+                <a:solidFill>
+                  <a:srgbClr val="40A070"/>
+                </a:solidFill>
+                <a:latin typeface="Courier"/>
+              </a:rPr>
+              <a:t>1</a:t>
+            </a:r>
+            <a:r>
+              <a:rPr>
+                <a:latin typeface="Courier"/>
+              </a:rPr>
+              <a:t>]</a:t>
+            </a:r>
+            <a:r>
+              <a:rPr>
+                <a:solidFill>
+                  <a:srgbClr val="4070A0"/>
+                </a:solidFill>
+                <a:latin typeface="Courier"/>
+              </a:rPr>
+              <a:t>.</a:t>
+            </a:r>
+            <a:r>
+              <a:rPr>
+                <a:latin typeface="Courier"/>
+              </a:rPr>
+              <a:t>mean()</a:t>
+            </a:r>
+            <a:r>
+              <a:rPr>
+                <a:solidFill>
+                  <a:srgbClr val="4070A0"/>
+                </a:solidFill>
+                <a:latin typeface="Courier"/>
+              </a:rPr>
+              <a:t>:6.2f}</a:t>
+            </a:r>
+            <a:r>
+              <a:rPr>
+                <a:solidFill>
+                  <a:srgbClr val="BB6688"/>
+                </a:solidFill>
+                <a:latin typeface="Courier"/>
+              </a:rPr>
+              <a:t>"</a:t>
+            </a:r>
+            <a:r>
+              <a:rPr>
+                <a:latin typeface="Courier"/>
+              </a:rPr>
+              <a:t>)</a:t>
+            </a:r>
+            <a:br/>
+            <a:r>
+              <a:rPr>
+                <a:solidFill>
+                  <a:srgbClr val="008000"/>
+                </a:solidFill>
+                <a:latin typeface="Courier"/>
+              </a:rPr>
+              <a:t>print</a:t>
+            </a:r>
+            <a:r>
+              <a:rPr>
+                <a:latin typeface="Courier"/>
+              </a:rPr>
+              <a:t>(</a:t>
+            </a:r>
+            <a:r>
+              <a:rPr>
+                <a:solidFill>
+                  <a:srgbClr val="BB6688"/>
+                </a:solidFill>
+                <a:latin typeface="Courier"/>
+              </a:rPr>
+              <a:t>f"mean digital intensity, no strategy  : </a:t>
+            </a:r>
+            <a:r>
+              <a:rPr>
+                <a:solidFill>
+                  <a:srgbClr val="4070A0"/>
+                </a:solidFill>
+                <a:latin typeface="Courier"/>
+              </a:rPr>
+              <a:t>{</a:t>
+            </a:r>
+            <a:r>
+              <a:rPr>
+                <a:latin typeface="Courier"/>
+              </a:rPr>
+              <a:t>Yr[Dr</a:t>
+            </a:r>
+            <a:r>
+              <a:rPr>
+                <a:solidFill>
+                  <a:srgbClr val="666666"/>
+                </a:solidFill>
+                <a:latin typeface="Courier"/>
+              </a:rPr>
+              <a:t>==</a:t>
+            </a:r>
+            <a:r>
+              <a:rPr>
+                <a:solidFill>
+                  <a:srgbClr val="40A070"/>
+                </a:solidFill>
+                <a:latin typeface="Courier"/>
+              </a:rPr>
+              <a:t>0</a:t>
+            </a:r>
+            <a:r>
+              <a:rPr>
+                <a:latin typeface="Courier"/>
+              </a:rPr>
+              <a:t>]</a:t>
+            </a:r>
+            <a:r>
+              <a:rPr>
+                <a:solidFill>
+                  <a:srgbClr val="4070A0"/>
+                </a:solidFill>
+                <a:latin typeface="Courier"/>
+              </a:rPr>
+              <a:t>.</a:t>
+            </a:r>
+            <a:r>
+              <a:rPr>
+                <a:latin typeface="Courier"/>
+              </a:rPr>
+              <a:t>mean()</a:t>
+            </a:r>
+            <a:r>
+              <a:rPr>
+                <a:solidFill>
+                  <a:srgbClr val="4070A0"/>
+                </a:solidFill>
+                <a:latin typeface="Courier"/>
+              </a:rPr>
+              <a:t>:6.2f}</a:t>
+            </a:r>
+            <a:r>
+              <a:rPr>
+                <a:solidFill>
+                  <a:srgbClr val="BB6688"/>
+                </a:solidFill>
+                <a:latin typeface="Courier"/>
+              </a:rPr>
+              <a:t>"</a:t>
+            </a:r>
+            <a:r>
+              <a:rPr>
+                <a:latin typeface="Courier"/>
+              </a:rPr>
+              <a:t>)</a:t>
+            </a:r>
+            <a:br/>
+            <a:r>
+              <a:rPr>
+                <a:solidFill>
+                  <a:srgbClr val="008000"/>
+                </a:solidFill>
+                <a:latin typeface="Courier"/>
+              </a:rPr>
+              <a:t>print</a:t>
+            </a:r>
+            <a:r>
+              <a:rPr>
+                <a:latin typeface="Courier"/>
+              </a:rPr>
+              <a:t>(</a:t>
+            </a:r>
+            <a:r>
+              <a:rPr>
+                <a:solidFill>
+                  <a:srgbClr val="BB6688"/>
+                </a:solidFill>
+                <a:latin typeface="Courier"/>
+              </a:rPr>
+              <a:t>f"naive difference in means            : </a:t>
+            </a:r>
+            <a:r>
+              <a:rPr>
+                <a:solidFill>
+                  <a:srgbClr val="4070A0"/>
+                </a:solidFill>
+                <a:latin typeface="Courier"/>
+              </a:rPr>
+              <a:t>{</a:t>
+            </a:r>
+            <a:r>
+              <a:rPr>
+                <a:latin typeface="Courier"/>
+              </a:rPr>
+              <a:t>NAIVE</a:t>
+            </a:r>
+            <a:r>
+              <a:rPr>
+                <a:solidFill>
+                  <a:srgbClr val="4070A0"/>
+                </a:solidFill>
+                <a:latin typeface="Courier"/>
+              </a:rPr>
+              <a:t>:+6.2f}</a:t>
+            </a:r>
+            <a:r>
+              <a:rPr>
+                <a:solidFill>
+                  <a:srgbClr val="BB6688"/>
+                </a:solidFill>
+                <a:latin typeface="Courier"/>
+              </a:rPr>
+              <a:t> points"</a:t>
+            </a:r>
+            <a:r>
+              <a:rPr>
+                <a:latin typeface="Courier"/>
+              </a:rPr>
+              <a:t>)</a:t>
+            </a:r>
+          </a:p>
+          <a:p>
+            <a:pPr lvl="0" indent="0">
+              <a:buNone/>
+            </a:pPr>
+            <a:r>
+              <a:rPr>
+                <a:latin typeface="Courier"/>
+              </a:rPr>
+              <a:t>mean digital intensity, has strategy :  56.07
+mean digital intensity, no strategy  :  45.62
+naive difference in means            : +10.45 points</a:t>
+            </a:r>
+          </a:p>
+          <a:p>
+            <a:pPr lvl="0" indent="0" marL="0">
+              <a:buNone/>
+            </a:pPr>
+            <a:r>
+              <a:rPr/>
+              <a:t>Ten points. If you publish that as the effect of adopting a national AI strategy, you have published the difference between rich and poor countries wearing a policy label.</a:t>
+            </a:r>
+          </a:p>
+        </p:txBody>
+      </p:sp>
+    </p:spTree>
+  </p:cSld>
+</p:sld>
+</file>
+
+<file path=ppt/slides/slide11.xml><?xml version="1.0" encoding="utf-8"?>
+<p:sld xmlns:a="http://schemas.openxmlformats.org/drawingml/2006/main" xmlns:r="http://schemas.openxmlformats.org/officeDocument/2006/relationships" xmlns:p="http://schemas.openxmlformats.org/presentationml/2006/main">
+  <p:cSld>
+    <p:spTree>
+      <p:nvGrpSpPr>
+        <p:cNvPr id="1" name=""/>
+        <p:cNvGrpSpPr/>
+        <p:nvPr/>
+      </p:nvGrpSpPr>
+      <p:grpSpPr>
+        <a:xfrm>
+          <a:off x="0" y="0"/>
+          <a:ext cx="0" cy="0"/>
+          <a:chOff x="0" y="0"/>
+          <a:chExt cx="0" cy="0"/>
+        </a:xfrm>
+      </p:grpSpPr>
+      <p:sp>
+        <p:nvSpPr>
+          <p:cNvPr id="2" name="Title 1"/>
+          <p:cNvSpPr>
+            <a:spLocks noGrp="1"/>
+          </p:cNvSpPr>
+          <p:nvPr>
+            <p:ph type="title"/>
+          </p:nvPr>
+        </p:nvSpPr>
+        <p:spPr/>
+        <p:txBody>
+          <a:bodyPr/>
+          <a:lstStyle/>
+          <a:p>
+            <a:pPr lvl="0" indent="0" marL="0">
+              <a:buNone/>
+            </a:pPr>
+            <a:r>
+              <a:rPr/>
+              <a:t>What today adds</a:t>
+            </a:r>
+          </a:p>
+        </p:txBody>
+      </p:sp>
+      <p:sp>
+        <p:nvSpPr>
+          <p:cNvPr id="3" name="Content Placeholder 2"/>
+          <p:cNvSpPr>
+            <a:spLocks noGrp="1"/>
+          </p:cNvSpPr>
+          <p:nvPr>
+            <p:ph idx="1"/>
+          </p:nvPr>
+        </p:nvSpPr>
+        <p:spPr/>
+        <p:txBody>
+          <a:bodyPr/>
+          <a:lstStyle/>
+          <a:p>
+            <a:pPr lvl="0" indent="0" marL="1270000">
+              <a:buNone/>
+            </a:pPr>
+            <a:r>
+              <a:rPr sz="2000"/>
+              <a:t>A way to use the flexible learners of Sessions 05–07 for the </a:t>
+            </a:r>
+            <a:r>
+              <a:rPr sz="2000" b="1"/>
+              <a:t>nuisance</a:t>
+            </a:r>
+            <a:r>
+              <a:rPr sz="2000"/>
+              <a:t> parts of a causal question, while keeping the </a:t>
+            </a:r>
+            <a:r>
+              <a:rPr sz="2000" b="1"/>
+              <a:t>valid confidence interval</a:t>
+            </a:r>
+            <a:r>
+              <a:rPr sz="2000"/>
+              <a:t> of Session 03.</a:t>
+            </a:r>
+          </a:p>
+          <a:p>
+            <a:pPr lvl="0" indent="0" marL="0">
+              <a:buNone/>
+            </a:pPr>
+            <a:r>
+              <a:rPr/>
+              <a:t>This is the reconciliation of the two halves of the course. Everything before Session 05 had honest inference and rigid functional form; everything after had flexible fit and no inference. Today they meet.</a:t>
+            </a:r>
+          </a:p>
+        </p:txBody>
+      </p:sp>
+    </p:spTree>
+  </p:cSld>
+</p:sld>
+</file>
+
+<file path=ppt/slides/slide12.xml><?xml version="1.0" encoding="utf-8"?>
+<p:sld xmlns:a="http://schemas.openxmlformats.org/drawingml/2006/main" xmlns:r="http://schemas.openxmlformats.org/officeDocument/2006/relationships" xmlns:p="http://schemas.openxmlformats.org/presentationml/2006/main">
+  <p:cSld>
+    <p:spTree>
+      <p:nvGrpSpPr>
+        <p:cNvPr id="1" name=""/>
+        <p:cNvGrpSpPr/>
+        <p:nvPr/>
+      </p:nvGrpSpPr>
+      <p:grpSpPr>
+        <a:xfrm>
+          <a:off x="0" y="0"/>
+          <a:ext cx="0" cy="0"/>
+          <a:chOff x="0" y="0"/>
+          <a:chExt cx="0" cy="0"/>
+        </a:xfrm>
+      </p:grpSpPr>
+      <p:sp>
+        <p:nvSpPr>
+          <p:cNvPr id="2" name="Title 1"/>
+          <p:cNvSpPr>
+            <a:spLocks noGrp="1"/>
+          </p:cNvSpPr>
+          <p:nvPr>
+            <p:ph type="title"/>
+          </p:nvPr>
+        </p:nvSpPr>
+        <p:spPr>
+          <a:xfrm>
+            <a:off x="722313" y="1850000"/>
+            <a:ext cx="7772400" cy="1300000"/>
+          </a:xfrm>
+        </p:spPr>
+        <p:txBody>
+          <a:bodyPr/>
+          <a:lstStyle/>
+          <a:p>
+            <a:pPr lvl="0" indent="0" marL="0">
+              <a:buNone/>
+            </a:pPr>
+            <a:r>
+              <a:rPr/>
+              <a:t>2 · The setup</a:t>
+            </a:r>
+          </a:p>
+        </p:txBody>
+      </p:sp>
+    </p:spTree>
+  </p:cSld>
+</p:sld>
+</file>
+
+<file path=ppt/slides/slide13.xml><?xml version="1.0" encoding="utf-8"?>
+<p:sld xmlns:a="http://schemas.openxmlformats.org/drawingml/2006/main" xmlns:r="http://schemas.openxmlformats.org/officeDocument/2006/relationships" xmlns:p="http://schemas.openxmlformats.org/presentationml/2006/main">
+  <p:cSld>
+    <p:spTree>
+      <p:nvGrpSpPr>
+        <p:cNvPr id="1" name=""/>
+        <p:cNvGrpSpPr/>
+        <p:nvPr/>
+      </p:nvGrpSpPr>
+      <p:grpSpPr>
+        <a:xfrm>
+          <a:off x="0" y="0"/>
+          <a:ext cx="0" cy="0"/>
+          <a:chOff x="0" y="0"/>
+          <a:chExt cx="0" cy="0"/>
+        </a:xfrm>
+      </p:grpSpPr>
+      <p:sp>
+        <p:nvSpPr>
+          <p:cNvPr id="2" name="Title 1"/>
+          <p:cNvSpPr>
+            <a:spLocks noGrp="1"/>
+          </p:cNvSpPr>
+          <p:nvPr>
+            <p:ph type="title"/>
+          </p:nvPr>
+        </p:nvSpPr>
+        <p:spPr/>
+        <p:txBody>
+          <a:bodyPr/>
+          <a:lstStyle/>
+          <a:p>
+            <a:pPr lvl="0" indent="0" marL="0">
+              <a:buNone/>
+            </a:pPr>
+            <a:r>
+              <a:rPr/>
+              <a:t>The partially linear model</a:t>
+            </a:r>
+          </a:p>
+        </p:txBody>
+      </p:sp>
+      <mc:AlternateContent xmlns:mc="http://schemas.openxmlformats.org/markup-compatibility/2006">
+        <mc:Choice xmlns:a14="http://schemas.microsoft.com/office/drawing/2010/main" Requires="a14">
+          <p:sp>
+            <p:nvSpPr>
+              <p:cNvPr id="3" name="Content Placeholder 2"/>
+              <p:cNvSpPr>
+                <a:spLocks noGrp="1"/>
+              </p:cNvSpPr>
+              <p:nvPr>
+                <p:ph idx="1"/>
+              </p:nvPr>
+            </p:nvSpPr>
+            <p:spPr/>
+            <p:txBody>
+              <a:bodyPr/>
+              <a:lstStyle/>
+              <a:p>
+                <a:pPr lvl="0" indent="0" marL="0">
+                  <a:buNone/>
+                </a:pPr>
+                <a14:m>
+                  <m:oMathPara xmlns:m="http://schemas.openxmlformats.org/officeDocument/2006/math">
+                    <m:oMathParaPr>
+                      <m:jc m:val="center"/>
+                    </m:oMathParaPr>
+                    <m:oMath>
+                      <m:r>
+                        <m:t>Y</m:t>
+                      </m:r>
+                      <m:r>
+                        <m:rPr>
+                          <m:sty m:val="p"/>
+                        </m:rPr>
+                        <m:t>=</m:t>
+                      </m:r>
+                      <m:sSub>
+                        <m:e>
+                          <m:r>
+                            <m:t>θ</m:t>
+                          </m:r>
+                        </m:e>
+                        <m:sub>
+                          <m:r>
+                            <m:t>0</m:t>
+                          </m:r>
+                        </m:sub>
+                      </m:sSub>
+                      <m:r>
+                        <m:t>D</m:t>
+                      </m:r>
+                      <m:r>
+                        <m:rPr>
+                          <m:sty m:val="p"/>
+                        </m:rPr>
+                        <m:t>+</m:t>
+                      </m:r>
+                      <m:sSub>
+                        <m:e>
+                          <m:r>
+                            <m:t>g</m:t>
+                          </m:r>
+                        </m:e>
+                        <m:sub>
+                          <m:r>
+                            <m:t>0</m:t>
+                          </m:r>
+                        </m:sub>
+                      </m:sSub>
+                      <m:d>
+                        <m:dPr>
+                          <m:begChr m:val="("/>
+                          <m:sepChr m:val=""/>
+                          <m:endChr m:val=")"/>
+                          <m:grow/>
+                        </m:dPr>
+                        <m:e>
+                          <m:r>
+                            <m:t>X</m:t>
+                          </m:r>
+                        </m:e>
+                      </m:d>
+                      <m:r>
+                        <m:rPr>
+                          <m:sty m:val="p"/>
+                        </m:rPr>
+                        <m:t>+</m:t>
+                      </m:r>
+                      <m:r>
+                        <m:t>U</m:t>
+                      </m:r>
+                      <m:r>
+                        <m:rPr>
+                          <m:sty m:val="p"/>
+                        </m:rPr>
+                        <m:t>,</m:t>
+                      </m:r>
+                      <m:r>
+                        <m:t>  </m:t>
+                      </m:r>
+                      <m:r>
+                        <m:rPr>
+                          <m:sty m:val="p"/>
+                          <m:scr m:val="double-struck"/>
+                        </m:rPr>
+                        <m:t>E</m:t>
+                      </m:r>
+                      <m:d>
+                        <m:dPr>
+                          <m:begChr m:val="["/>
+                          <m:sepChr m:val=""/>
+                          <m:endChr m:val="]"/>
+                          <m:grow/>
+                        </m:dPr>
+                        <m:e>
+                          <m:r>
+                            <m:t>U</m:t>
+                          </m:r>
+                          <m:r>
+                            <m:rPr>
+                              <m:sty m:val="p"/>
+                            </m:rPr>
+                            <m:t>∣</m:t>
+                          </m:r>
+                          <m:r>
+                            <m:t>X</m:t>
+                          </m:r>
+                          <m:r>
+                            <m:rPr>
+                              <m:sty m:val="p"/>
+                            </m:rPr>
+                            <m:t>,</m:t>
+                          </m:r>
+                          <m:r>
+                            <m:t>D</m:t>
+                          </m:r>
+                        </m:e>
+                      </m:d>
+                      <m:r>
+                        <m:rPr>
+                          <m:sty m:val="p"/>
+                        </m:rPr>
+                        <m:t>=</m:t>
+                      </m:r>
+                      <m:r>
+                        <m:t>0</m:t>
+                      </m:r>
+                    </m:oMath>
+                  </m:oMathPara>
+                </a14:m>
+              </a:p>
+              <a:p>
+                <a:pPr lvl="0" indent="0" marL="0">
+                  <a:buNone/>
+                </a:pPr>
+                <a14:m>
+                  <m:oMathPara xmlns:m="http://schemas.openxmlformats.org/officeDocument/2006/math">
+                    <m:oMathParaPr>
+                      <m:jc m:val="center"/>
+                    </m:oMathParaPr>
+                    <m:oMath>
+                      <m:r>
+                        <m:t>D</m:t>
+                      </m:r>
+                      <m:r>
+                        <m:rPr>
+                          <m:sty m:val="p"/>
+                        </m:rPr>
+                        <m:t>=</m:t>
+                      </m:r>
+                      <m:sSub>
+                        <m:e>
+                          <m:r>
+                            <m:t>m</m:t>
+                          </m:r>
+                        </m:e>
+                        <m:sub>
+                          <m:r>
+                            <m:t>0</m:t>
+                          </m:r>
+                        </m:sub>
+                      </m:sSub>
+                      <m:d>
+                        <m:dPr>
+                          <m:begChr m:val="("/>
+                          <m:sepChr m:val=""/>
+                          <m:endChr m:val=")"/>
+                          <m:grow/>
+                        </m:dPr>
+                        <m:e>
+                          <m:r>
+                            <m:t>X</m:t>
+                          </m:r>
+                        </m:e>
+                      </m:d>
+                      <m:r>
+                        <m:rPr>
+                          <m:sty m:val="p"/>
+                        </m:rPr>
+                        <m:t>+</m:t>
+                      </m:r>
+                      <m:r>
+                        <m:t>V</m:t>
+                      </m:r>
+                      <m:r>
+                        <m:rPr>
+                          <m:sty m:val="p"/>
+                        </m:rPr>
+                        <m:t>,</m:t>
+                      </m:r>
+                      <m:r>
+                        <m:t>  </m:t>
+                      </m:r>
+                      <m:r>
+                        <m:rPr>
+                          <m:sty m:val="p"/>
+                          <m:scr m:val="double-struck"/>
+                        </m:rPr>
+                        <m:t>E</m:t>
+                      </m:r>
+                      <m:d>
+                        <m:dPr>
+                          <m:begChr m:val="["/>
+                          <m:sepChr m:val=""/>
+                          <m:endChr m:val="]"/>
+                          <m:grow/>
+                        </m:dPr>
+                        <m:e>
+                          <m:r>
+                            <m:t>V</m:t>
+                          </m:r>
+                          <m:r>
+                            <m:rPr>
+                              <m:sty m:val="p"/>
+                            </m:rPr>
+                            <m:t>∣</m:t>
+                          </m:r>
+                          <m:r>
+                            <m:t>X</m:t>
+                          </m:r>
+                        </m:e>
+                      </m:d>
+                      <m:r>
+                        <m:rPr>
+                          <m:sty m:val="p"/>
+                        </m:rPr>
+                        <m:t>=</m:t>
+                      </m:r>
+                      <m:r>
+                        <m:t>0</m:t>
+                      </m:r>
+                    </m:oMath>
+                  </m:oMathPara>
+                </a14:m>
+              </a:p>
+              <a:p>
+                <a:pPr lvl="0" indent="0" marL="0">
+                  <a:buNone/>
+                </a:pPr>
+                <a14:m>
+                  <m:oMath xmlns:m="http://schemas.openxmlformats.org/officeDocument/2006/math">
+                    <m:sSub>
+                      <m:e>
+                        <m:r>
+                          <m:t>θ</m:t>
+                        </m:r>
+                      </m:e>
+                      <m:sub>
+                        <m:r>
+                          <m:t>0</m:t>
+                        </m:r>
+                      </m:sub>
+                    </m:sSub>
+                  </m:oMath>
+                </a14:m>
+                <a:r>
+                  <a:rPr/>
+                  <a:t> is what you want. </a:t>
+                </a:r>
+                <a14:m>
+                  <m:oMath xmlns:m="http://schemas.openxmlformats.org/officeDocument/2006/math">
+                    <m:sSub>
+                      <m:e>
+                        <m:r>
+                          <m:t>g</m:t>
+                        </m:r>
+                      </m:e>
+                      <m:sub>
+                        <m:r>
+                          <m:t>0</m:t>
+                        </m:r>
+                      </m:sub>
+                    </m:sSub>
+                  </m:oMath>
+                </a14:m>
+                <a:r>
+                  <a:rPr/>
+                  <a:t> and </a:t>
+                </a:r>
+                <a14:m>
+                  <m:oMath xmlns:m="http://schemas.openxmlformats.org/officeDocument/2006/math">
+                    <m:sSub>
+                      <m:e>
+                        <m:r>
+                          <m:t>m</m:t>
+                        </m:r>
+                      </m:e>
+                      <m:sub>
+                        <m:r>
+                          <m:t>0</m:t>
+                        </m:r>
+                      </m:sub>
+                    </m:sSub>
+                  </m:oMath>
+                </a14:m>
+                <a:r>
+                  <a:rPr/>
+                  <a:t> are </a:t>
+                </a:r>
+                <a:r>
+                  <a:rPr b="1"/>
+                  <a:t>nuisance functions</a:t>
+                </a:r>
+                <a:r>
+                  <a:rPr/>
+                  <a:t> — you do not care about them, but you cannot avoid them.</a:t>
+                </a:r>
+              </a:p>
+              <a:p>
+                <a:pPr lvl="0" indent="0" marL="0">
+                  <a:buNone/>
+                </a:pPr>
+                <a:r>
+                  <a:rPr/>
+                  <a:t>Classical econometrics assumes </a:t>
+                </a:r>
+                <a14:m>
+                  <m:oMath xmlns:m="http://schemas.openxmlformats.org/officeDocument/2006/math">
+                    <m:sSub>
+                      <m:e>
+                        <m:r>
+                          <m:t>g</m:t>
+                        </m:r>
+                      </m:e>
+                      <m:sub>
+                        <m:r>
+                          <m:t>0</m:t>
+                        </m:r>
+                      </m:sub>
+                    </m:sSub>
+                  </m:oMath>
+                </a14:m>
+                <a:r>
+                  <a:rPr/>
+                  <a:t> is linear. DML’s premise is that you would rather estimate it flexibly — because </a:t>
+                </a:r>
+                <a:r>
+                  <a:rPr b="1"/>
+                  <a:t>functional-form error in </a:t>
+                </a:r>
+                <a14:m>
+                  <m:oMath xmlns:m="http://schemas.openxmlformats.org/officeDocument/2006/math">
+                    <m:sSub>
+                      <m:e>
+                        <m:r>
+                          <m:t>g</m:t>
+                        </m:r>
+                      </m:e>
+                      <m:sub>
+                        <m:r>
+                          <m:t>0</m:t>
+                        </m:r>
+                      </m:sub>
+                    </m:sSub>
+                  </m:oMath>
+                </a14:m>
+                <a:r>
+                  <a:rPr b="1"/>
+                  <a:t> contaminates </a:t>
+                </a:r>
+                <a14:m>
+                  <m:oMath xmlns:m="http://schemas.openxmlformats.org/officeDocument/2006/math">
+                    <m:sSub>
+                      <m:e>
+                        <m:r>
+                          <m:t>θ</m:t>
+                        </m:r>
+                      </m:e>
+                      <m:sub>
+                        <m:r>
+                          <m:t>0</m:t>
+                        </m:r>
+                      </m:sub>
+                    </m:sSub>
+                  </m:oMath>
+                </a14:m>
+                <a:r>
+                  <a:rPr/>
+                  <a:t>.</a:t>
+                </a:r>
+              </a:p>
+            </p:txBody>
+          </p:sp>
+        </mc:Choice>
+      </mc:AlternateContent>
+    </p:spTree>
+  </p:cSld>
+</p:sld>
+</file>
+
+<file path=ppt/slides/slide14.xml><?xml version="1.0" encoding="utf-8"?>
+<p:sld xmlns:a="http://schemas.openxmlformats.org/drawingml/2006/main" xmlns:r="http://schemas.openxmlformats.org/officeDocument/2006/relationships" xmlns:p="http://schemas.openxmlformats.org/presentationml/2006/main">
+  <p:cSld>
+    <p:spTree>
+      <p:nvGrpSpPr>
+        <p:cNvPr id="1" name=""/>
+        <p:cNvGrpSpPr/>
+        <p:nvPr/>
+      </p:nvGrpSpPr>
+      <p:grpSpPr>
+        <a:xfrm>
+          <a:off x="0" y="0"/>
+          <a:ext cx="0" cy="0"/>
+          <a:chOff x="0" y="0"/>
+          <a:chExt cx="0" cy="0"/>
+        </a:xfrm>
+      </p:grpSpPr>
+      <p:sp>
+        <p:nvSpPr>
+          <p:cNvPr id="2" name="Title 1"/>
+          <p:cNvSpPr>
+            <a:spLocks noGrp="1"/>
+          </p:cNvSpPr>
+          <p:nvPr>
+            <p:ph type="title"/>
+          </p:nvPr>
+        </p:nvSpPr>
+        <p:spPr/>
+        <p:txBody>
+          <a:bodyPr/>
+          <a:lstStyle/>
+          <a:p>
+            <a:pPr lvl="0" indent="0" marL="0">
+              <a:buNone/>
+            </a:pPr>
+            <a:r>
+              <a:rPr/>
+              <a:t>Identification requires three things</a:t>
+            </a:r>
+          </a:p>
+        </p:txBody>
+      </p:sp>
+      <mc:AlternateContent xmlns:mc="http://schemas.openxmlformats.org/markup-compatibility/2006">
+        <mc:Choice xmlns:a14="http://schemas.microsoft.com/office/drawing/2010/main" Requires="a14">
+          <p:sp>
+            <p:nvSpPr>
+              <p:cNvPr id="3" name="Content Placeholder 2"/>
+              <p:cNvSpPr>
+                <a:spLocks noGrp="1"/>
+              </p:cNvSpPr>
+              <p:nvPr>
+                <p:ph idx="1"/>
+              </p:nvPr>
+            </p:nvSpPr>
+            <p:spPr/>
+            <p:txBody>
+              <a:bodyPr/>
+              <a:lstStyle/>
+              <a:p>
+                <a:pPr lvl="0" indent="-342900" marL="342900">
+                  <a:buAutoNum type="arabicPeriod"/>
+                </a:pPr>
+                <a:r>
+                  <a:rPr b="1"/>
+                  <a:t>Conditional ignorability</a:t>
+                </a:r>
+                <a:r>
+                  <a:rPr/>
+                  <a:t> — </a:t>
+                </a:r>
+                <a14:m>
+                  <m:oMath xmlns:m="http://schemas.openxmlformats.org/officeDocument/2006/math">
+                    <m:r>
+                      <m:rPr>
+                        <m:sty m:val="p"/>
+                      </m:rPr>
+                      <m:t>{</m:t>
+                    </m:r>
+                    <m:r>
+                      <m:t>Y</m:t>
+                    </m:r>
+                    <m:d>
+                      <m:dPr>
+                        <m:begChr m:val="("/>
+                        <m:sepChr m:val=""/>
+                        <m:endChr m:val=")"/>
+                        <m:grow/>
+                      </m:dPr>
+                      <m:e>
+                        <m:r>
+                          <m:t>1</m:t>
+                        </m:r>
+                      </m:e>
+                    </m:d>
+                    <m:r>
+                      <m:rPr>
+                        <m:sty m:val="p"/>
+                      </m:rPr>
+                      <m:t>,</m:t>
+                    </m:r>
+                    <m:r>
+                      <m:t>Y</m:t>
+                    </m:r>
+                    <m:d>
+                      <m:dPr>
+                        <m:begChr m:val="("/>
+                        <m:sepChr m:val=""/>
+                        <m:endChr m:val=")"/>
+                        <m:grow/>
+                      </m:dPr>
+                      <m:e>
+                        <m:r>
+                          <m:t>0</m:t>
+                        </m:r>
+                      </m:e>
+                    </m:d>
+                    <m:r>
+                      <m:rPr>
+                        <m:sty m:val="p"/>
+                      </m:rPr>
+                      <m:t>}</m:t>
+                    </m:r>
+                    <m:r>
+                      <m:rPr>
+                        <m:sty m:val="p"/>
+                      </m:rPr>
+                      <m:t>⟂</m:t>
+                    </m:r>
+                    <m:r>
+                      <m:t>D</m:t>
+                    </m:r>
+                    <m:r>
+                      <m:rPr>
+                        <m:sty m:val="p"/>
+                      </m:rPr>
+                      <m:t>∣</m:t>
+                    </m:r>
+                    <m:r>
+                      <m:t>X</m:t>
+                    </m:r>
+                  </m:oMath>
+                </a14:m>
+              </a:p>
+              <a:p>
+                <a:pPr lvl="0" indent="-342900" marL="342900">
+                  <a:buAutoNum type="arabicPeriod"/>
+                </a:pPr>
+                <a:r>
+                  <a:rPr b="1"/>
+                  <a:t>Overlap</a:t>
+                </a:r>
+                <a:r>
+                  <a:rPr/>
+                  <a:t> — </a:t>
+                </a:r>
+                <a14:m>
+                  <m:oMath xmlns:m="http://schemas.openxmlformats.org/officeDocument/2006/math">
+                    <m:r>
+                      <m:t>0</m:t>
+                    </m:r>
+                    <m:r>
+                      <m:rPr>
+                        <m:sty m:val="p"/>
+                      </m:rPr>
+                      <m:t>&lt;</m:t>
+                    </m:r>
+                    <m:r>
+                      <m:t>P</m:t>
+                    </m:r>
+                    <m:d>
+                      <m:dPr>
+                        <m:begChr m:val="("/>
+                        <m:sepChr m:val=""/>
+                        <m:endChr m:val=")"/>
+                        <m:grow/>
+                      </m:dPr>
+                      <m:e>
+                        <m:r>
+                          <m:t>D</m:t>
+                        </m:r>
+                        <m:r>
+                          <m:rPr>
+                            <m:sty m:val="p"/>
+                          </m:rPr>
+                          <m:t>=</m:t>
+                        </m:r>
+                        <m:r>
+                          <m:t>1</m:t>
+                        </m:r>
+                        <m:r>
+                          <m:rPr>
+                            <m:sty m:val="p"/>
+                          </m:rPr>
+                          <m:t>∣</m:t>
+                        </m:r>
+                        <m:r>
+                          <m:t>X</m:t>
+                        </m:r>
+                      </m:e>
+                    </m:d>
+                    <m:r>
+                      <m:rPr>
+                        <m:sty m:val="p"/>
+                      </m:rPr>
+                      <m:t>&lt;</m:t>
+                    </m:r>
+                    <m:r>
+                      <m:t>1</m:t>
+                    </m:r>
+                  </m:oMath>
+                </a14:m>
+                <a:r>
+                  <a:rPr/>
+                  <a:t> almost surely</a:t>
+                </a:r>
+              </a:p>
+              <a:p>
+                <a:pPr lvl="0" indent="-342900" marL="342900">
+                  <a:buAutoNum type="arabicPeriod"/>
+                </a:pPr>
+                <a:r>
+                  <a:rPr b="1"/>
+                  <a:t>SUTVA</a:t>
+                </a:r>
+                <a:r>
+                  <a:rPr/>
+                  <a:t> — no interference between units, one version of treatment</a:t>
+                </a:r>
+              </a:p>
+              <a:p>
+                <a:pPr lvl="0" indent="0" marL="0">
+                  <a:buNone/>
+                </a:pPr>
+                <a:r>
+                  <a:rPr/>
+                  <a:t>No amount of machine learning substitutes for these. They are assumptions </a:t>
+                </a:r>
+                <a:r>
+                  <a:rPr b="1"/>
+                  <a:t>about the world</a:t>
+                </a:r>
+                <a:r>
+                  <a:rPr/>
+                  <a:t>, defended with institutional knowledge — not with cross-validation.</a:t>
+                </a:r>
+              </a:p>
+            </p:txBody>
+          </p:sp>
+        </mc:Choice>
+      </mc:AlternateContent>
+    </p:spTree>
+  </p:cSld>
+</p:sld>
+</file>
+
+<file path=ppt/slides/slide15.xml><?xml version="1.0" encoding="utf-8"?>
+<p:sld xmlns:a="http://schemas.openxmlformats.org/drawingml/2006/main" xmlns:r="http://schemas.openxmlformats.org/officeDocument/2006/relationships" xmlns:p="http://schemas.openxmlformats.org/presentationml/2006/main">
+  <p:cSld>
+    <p:spTree>
+      <p:nvGrpSpPr>
+        <p:cNvPr id="1" name=""/>
+        <p:cNvGrpSpPr/>
+        <p:nvPr/>
+      </p:nvGrpSpPr>
+      <p:grpSpPr>
+        <a:xfrm>
+          <a:off x="0" y="0"/>
+          <a:ext cx="0" cy="0"/>
+          <a:chOff x="0" y="0"/>
+          <a:chExt cx="0" cy="0"/>
+        </a:xfrm>
+      </p:grpSpPr>
+      <p:sp>
+        <p:nvSpPr>
+          <p:cNvPr id="2" name="Title 1"/>
+          <p:cNvSpPr>
+            <a:spLocks noGrp="1"/>
+          </p:cNvSpPr>
+          <p:nvPr>
+            <p:ph type="title"/>
+          </p:nvPr>
+        </p:nvSpPr>
+        <p:spPr/>
+        <p:txBody>
+          <a:bodyPr/>
+          <a:lstStyle/>
+          <a:p>
+            <a:pPr lvl="0" indent="0" marL="0">
+              <a:buNone/>
+            </a:pPr>
+            <a:r>
+              <a:rPr/>
+              <a:t>Check overlap before anything else</a:t>
+            </a:r>
+          </a:p>
+        </p:txBody>
+      </p:sp>
+      <p:pic>
+        <p:nvPicPr>
+          <p:cNvPr descr="slides_files/figure-pptx/cell-5-output-1.png" id="0" name="Picture 1"/>
+          <p:cNvPicPr>
+            <a:picLocks noGrp="1" noChangeAspect="1"/>
+          </p:cNvPicPr>
+          <p:nvPr/>
+        </p:nvPicPr>
+        <p:blipFill>
+          <a:blip r:embed="rId2"/>
+          <a:stretch>
+            <a:fillRect/>
+          </a:stretch>
+        </p:blipFill>
+        <p:spPr bwMode="auto">
+          <a:xfrm>
+            <a:off x="774700" y="1193800"/>
+            <a:ext cx="7594600" cy="3390900"/>
+          </a:xfrm>
+          <a:prstGeom prst="rect">
+            <a:avLst/>
+          </a:prstGeom>
+          <a:noFill/>
+          <a:ln w="9525">
+            <a:noFill/>
+            <a:headEnd/>
+            <a:tailEnd/>
+          </a:ln>
+        </p:spPr>
+      </p:pic>
+    </p:spTree>
+  </p:cSld>
+</p:sld>
+</file>
+
+<file path=ppt/slides/slide16.xml><?xml version="1.0" encoding="utf-8"?>
+<p:sld xmlns:a="http://schemas.openxmlformats.org/drawingml/2006/main" xmlns:r="http://schemas.openxmlformats.org/officeDocument/2006/relationships" xmlns:p="http://schemas.openxmlformats.org/presentationml/2006/main">
+  <p:cSld>
+    <p:spTree>
+      <p:nvGrpSpPr>
+        <p:cNvPr id="1" name=""/>
+        <p:cNvGrpSpPr/>
+        <p:nvPr/>
+      </p:nvGrpSpPr>
+      <p:grpSpPr>
+        <a:xfrm>
+          <a:off x="0" y="0"/>
+          <a:ext cx="0" cy="0"/>
+          <a:chOff x="0" y="0"/>
+          <a:chExt cx="0" cy="0"/>
+        </a:xfrm>
+      </p:grpSpPr>
+      <p:sp>
+        <p:nvSpPr>
+          <p:cNvPr id="3" name="Content Placeholder 2"/>
+          <p:cNvSpPr>
+            <a:spLocks noGrp="1"/>
+          </p:cNvSpPr>
+          <p:nvPr>
+            <p:ph idx="1"/>
+          </p:nvPr>
+        </p:nvSpPr>
+        <p:spPr/>
+        <p:txBody>
+          <a:bodyPr/>
+          <a:lstStyle/>
+          <a:p>
+            <a:pPr lvl="0" indent="0" marL="0">
+              <a:buNone/>
+            </a:pPr>
+            <a:r>
+              <a:rPr/>
+              <a:t>Two in five observations have almost no counterpart in the other arm. For those countries the data contain </a:t>
+            </a:r>
+            <a:r>
+              <a:rPr b="1"/>
+              <a:t>no comparison</a:t>
+            </a:r>
+            <a:r>
+              <a:rPr/>
+              <a:t>, and any estimate is extrapolation.</a:t>
+            </a:r>
+          </a:p>
+        </p:txBody>
+      </p:sp>
+    </p:spTree>
+  </p:cSld>
+</p:sld>
+</file>
+
+<file path=ppt/slides/slide17.xml><?xml version="1.0" encoding="utf-8"?>
+<p:sld xmlns:a="http://schemas.openxmlformats.org/drawingml/2006/main" xmlns:r="http://schemas.openxmlformats.org/officeDocument/2006/relationships" xmlns:p="http://schemas.openxmlformats.org/presentationml/2006/main">
+  <p:cSld>
+    <p:spTree>
+      <p:nvGrpSpPr>
+        <p:cNvPr id="1" name=""/>
+        <p:cNvGrpSpPr/>
+        <p:nvPr/>
+      </p:nvGrpSpPr>
+      <p:grpSpPr>
+        <a:xfrm>
+          <a:off x="0" y="0"/>
+          <a:ext cx="0" cy="0"/>
+          <a:chOff x="0" y="0"/>
+          <a:chExt cx="0" cy="0"/>
+        </a:xfrm>
+      </p:grpSpPr>
+      <p:sp>
+        <p:nvSpPr>
+          <p:cNvPr id="2" name="Title 1"/>
+          <p:cNvSpPr>
+            <a:spLocks noGrp="1"/>
+          </p:cNvSpPr>
+          <p:nvPr>
+            <p:ph type="title"/>
+          </p:nvPr>
+        </p:nvSpPr>
+        <p:spPr>
+          <a:xfrm>
+            <a:off x="722313" y="1850000"/>
+            <a:ext cx="7772400" cy="1300000"/>
+          </a:xfrm>
+        </p:spPr>
+        <p:txBody>
+          <a:bodyPr/>
+          <a:lstStyle/>
+          <a:p>
+            <a:pPr lvl="0" indent="0" marL="0">
+              <a:buNone/>
+            </a:pPr>
+            <a:r>
+              <a:rPr/>
+              <a:t>3 · Why the naive plug-in fails</a:t>
+            </a:r>
+          </a:p>
+        </p:txBody>
+      </p:sp>
+    </p:spTree>
+  </p:cSld>
+</p:sld>
+</file>
+
+<file path=ppt/slides/slide18.xml><?xml version="1.0" encoding="utf-8"?>
+<p:sld xmlns:a="http://schemas.openxmlformats.org/drawingml/2006/main" xmlns:r="http://schemas.openxmlformats.org/officeDocument/2006/relationships" xmlns:p="http://schemas.openxmlformats.org/presentationml/2006/main">
+  <p:cSld>
+    <p:spTree>
+      <p:nvGrpSpPr>
+        <p:cNvPr id="1" name=""/>
+        <p:cNvGrpSpPr/>
+        <p:nvPr/>
+      </p:nvGrpSpPr>
+      <p:grpSpPr>
+        <a:xfrm>
+          <a:off x="0" y="0"/>
+          <a:ext cx="0" cy="0"/>
+          <a:chOff x="0" y="0"/>
+          <a:chExt cx="0" cy="0"/>
+        </a:xfrm>
+      </p:grpSpPr>
+      <p:sp>
+        <p:nvSpPr>
+          <p:cNvPr id="2" name="Title 1"/>
+          <p:cNvSpPr>
+            <a:spLocks noGrp="1"/>
+          </p:cNvSpPr>
+          <p:nvPr>
+            <p:ph type="title"/>
+          </p:nvPr>
+        </p:nvSpPr>
+        <p:spPr/>
+        <p:txBody>
+          <a:bodyPr/>
+          <a:lstStyle/>
+          <a:p>
+            <a:pPr lvl="0" indent="0" marL="0">
+              <a:buNone/>
+            </a:pPr>
+            <a:r>
+              <a:rPr/>
+              <a:t>The obvious thing to do, and why it breaks</a:t>
             </a:r>
           </a:p>
         </p:txBody>
@@ -3374,7 +4786,7 @@
                 </a14:m>
                 <a:r>
                   <a:rPr/>
-                  <a:t> by lasso or a forest on the full sample, then regress </a:t>
+                  <a:t> with a lasso or a forest on the full sample, then regress </a:t>
                 </a:r>
                 <a14:m>
                   <m:oMath xmlns:m="http://schemas.openxmlformats.org/officeDocument/2006/math">
@@ -3434,7 +4846,7 @@
                 </a14:m>
                 <a:r>
                   <a:rPr/>
-                  <a:t>. Schematically:</a:t>
+                  <a:t>. Decomposing the error:</a:t>
                 </a:r>
               </a:p>
               <a:p>
@@ -3526,6 +4938,9 @@
                               <m:sty m:val="p"/>
                             </m:rPr>
                             <m:t>→</m:t>
+                          </m:r>
+                          <m:r>
+                            <m:t> </m:t>
                           </m:r>
                           <m:r>
                             <m:t>N</m:t>
@@ -3626,92 +5041,8 @@
                   </m:oMathPara>
                 </a14:m>
               </a:p>
-            </p:txBody>
-          </p:sp>
-        </mc:Choice>
-      </mc:AlternateContent>
-    </p:spTree>
-  </p:cSld>
-</p:sld>
-</file>
-
-<file path=ppt/slides/slide11.xml><?xml version="1.0" encoding="utf-8"?>
-<p:sld xmlns:a="http://schemas.openxmlformats.org/drawingml/2006/main" xmlns:r="http://schemas.openxmlformats.org/officeDocument/2006/relationships" xmlns:p="http://schemas.openxmlformats.org/presentationml/2006/main">
-  <p:cSld>
-    <p:spTree>
-      <p:nvGrpSpPr>
-        <p:cNvPr id="1" name=""/>
-        <p:cNvGrpSpPr/>
-        <p:nvPr/>
-      </p:nvGrpSpPr>
-      <p:grpSpPr>
-        <a:xfrm>
-          <a:off x="0" y="0"/>
-          <a:ext cx="0" cy="0"/>
-          <a:chOff x="0" y="0"/>
-          <a:chExt cx="0" cy="0"/>
-        </a:xfrm>
-      </p:grpSpPr>
-      <mc:AlternateContent xmlns:mc="http://schemas.openxmlformats.org/markup-compatibility/2006">
-        <mc:Choice xmlns:a14="http://schemas.microsoft.com/office/drawing/2010/main" Requires="a14">
-          <p:sp>
-            <p:nvSpPr>
-              <p:cNvPr id="2" name="Title 1"/>
-              <p:cNvSpPr>
-                <a:spLocks noGrp="1"/>
-              </p:cNvSpPr>
-              <p:nvPr>
-                <p:ph type="title"/>
-              </p:nvPr>
-            </p:nvSpPr>
-            <p:spPr/>
-            <p:txBody>
-              <a:bodyPr/>
-              <a:lstStyle/>
               <a:p>
-                <a:pPr lvl="0" indent="0" marL="0">
-                  <a:buNone/>
-                </a:pPr>
-                <a:r>
-                  <a:rPr/>
-                  <a:t>Term </a:t>
-                </a:r>
-                <a14:m>
-                  <m:oMath xmlns:m="http://schemas.openxmlformats.org/officeDocument/2006/math">
-                    <m:r>
-                      <m:t>b</m:t>
-                    </m:r>
-                  </m:oMath>
-                </a14:m>
-                <a:r>
-                  <a:rPr/>
-                  <a:t> diverges</a:t>
-                </a:r>
-              </a:p>
-            </p:txBody>
-          </p:sp>
-        </mc:Choice>
-      </mc:AlternateContent>
-      <mc:AlternateContent xmlns:mc="http://schemas.openxmlformats.org/markup-compatibility/2006">
-        <mc:Choice xmlns:a14="http://schemas.microsoft.com/office/drawing/2010/main" Requires="a14">
-          <p:sp>
-            <p:nvSpPr>
-              <p:cNvPr id="3" name="Content Placeholder 2"/>
-              <p:cNvSpPr>
-                <a:spLocks noGrp="1"/>
-              </p:cNvSpPr>
-              <p:nvPr>
-                <p:ph idx="1"/>
-              </p:nvPr>
-            </p:nvSpPr>
-            <p:spPr/>
-            <p:txBody>
-              <a:bodyPr/>
-              <a:lstStyle/>
-              <a:p>
-                <a:pPr lvl="0" indent="0" marL="0">
-                  <a:buNone/>
-                </a:pPr>
+                <a:pPr lvl="0"/>
                 <a14:m>
                   <m:oMath xmlns:m="http://schemas.openxmlformats.org/officeDocument/2006/math">
                     <m:r>
@@ -3795,16 +5126,7 @@
                 </a14:m>
                 <a:r>
                   <a:rPr/>
-                  <a:t>.</a:t>
-                </a:r>
-              </a:p>
-              <a:p>
-                <a:pPr lvl="0" indent="0" marL="0">
-                  <a:buNone/>
-                </a:pPr>
-                <a:r>
-                  <a:rPr/>
-                  <a:t>ML estimators converge at rates </a:t>
+                  <a:t>. ML estimators converge </a:t>
                 </a:r>
                 <a:r>
                   <a:rPr b="1"/>
@@ -3864,9 +5186,46 @@
                   <a:rPr b="1"/>
                   <a:t>diverges</a:t>
                 </a:r>
+              </a:p>
+              <a:p>
+                <a:pPr lvl="0"/>
+                <a14:m>
+                  <m:oMath xmlns:m="http://schemas.openxmlformats.org/officeDocument/2006/math">
+                    <m:r>
+                      <m:t>c</m:t>
+                    </m:r>
+                  </m:oMath>
+                </a14:m>
                 <a:r>
                   <a:rPr/>
-                  <a:t>.</a:t>
+                  <a:t> arises because </a:t>
+                </a:r>
+                <a14:m>
+                  <m:oMath xmlns:m="http://schemas.openxmlformats.org/officeDocument/2006/math">
+                    <m:sSub>
+                      <m:e>
+                        <m:acc>
+                          <m:accPr>
+                            <m:chr m:val="̂"/>
+                          </m:accPr>
+                          <m:e>
+                            <m:r>
+                              <m:t>g</m:t>
+                            </m:r>
+                          </m:e>
+                        </m:acc>
+                      </m:e>
+                      <m:sub>
+                        <m:r>
+                          <m:t>0</m:t>
+                        </m:r>
+                      </m:sub>
+                    </m:sSub>
+                  </m:oMath>
+                </a14:m>
+                <a:r>
+                  <a:rPr/>
+                  <a:t> was fitted on the same observations where it is evaluated</a:t>
                 </a:r>
               </a:p>
               <a:p>
@@ -3875,7 +5234,7 @@
                 </a:pPr>
                 <a:r>
                   <a:rPr/>
-                  <a:t>The estimator is not even consistent at the parametric rate, and confidence intervals are meaningless.</a:t>
+                  <a:t>Two distinct problems. Two distinct fixes.</a:t>
                 </a:r>
               </a:p>
             </p:txBody>
@@ -3887,7 +5246,7 @@
 </p:sld>
 </file>
 
-<file path=ppt/slides/slide12.xml><?xml version="1.0" encoding="utf-8"?>
+<file path=ppt/slides/slide19.xml><?xml version="1.0" encoding="utf-8"?>
 <p:sld xmlns:a="http://schemas.openxmlformats.org/drawingml/2006/main" xmlns:r="http://schemas.openxmlformats.org/officeDocument/2006/relationships" xmlns:p="http://schemas.openxmlformats.org/presentationml/2006/main">
   <p:cSld>
     <p:spTree>
@@ -3926,54 +5285,15 @@
                 </a:pPr>
                 <a:r>
                   <a:rPr/>
-                  <a:t>Term </a:t>
-                </a:r>
-                <a14:m>
-                  <m:oMath xmlns:m="http://schemas.openxmlformats.org/officeDocument/2006/math">
-                    <m:r>
-                      <m:t>c</m:t>
-                    </m:r>
-                  </m:oMath>
-                </a14:m>
-              </a:p>
-            </p:txBody>
-          </p:sp>
-        </mc:Choice>
-      </mc:AlternateContent>
-      <mc:AlternateContent xmlns:mc="http://schemas.openxmlformats.org/markup-compatibility/2006">
-        <mc:Choice xmlns:a14="http://schemas.microsoft.com/office/drawing/2010/main" Requires="a14">
-          <p:sp>
-            <p:nvSpPr>
-              <p:cNvPr id="3" name="Content Placeholder 2"/>
-              <p:cNvSpPr>
-                <a:spLocks noGrp="1"/>
-              </p:cNvSpPr>
-              <p:nvPr>
-                <p:ph idx="1"/>
-              </p:nvPr>
-            </p:nvSpPr>
-            <p:spPr/>
-            <p:txBody>
-              <a:bodyPr/>
-              <a:lstStyle/>
-              <a:p>
-                <a:pPr lvl="0" indent="0" marL="0">
-                  <a:buNone/>
-                </a:pPr>
+                  <a:t>Watch it happen, with </a:t>
+                </a:r>
                 <a14:m>
                   <m:oMath xmlns:m="http://schemas.openxmlformats.org/officeDocument/2006/math">
                     <m:sSub>
                       <m:e>
-                        <m:acc>
-                          <m:accPr>
-                            <m:chr m:val="̂"/>
-                          </m:accPr>
-                          <m:e>
-                            <m:r>
-                              <m:t>g</m:t>
-                            </m:r>
-                          </m:e>
-                        </m:acc>
+                        <m:r>
+                          <m:t>θ</m:t>
+                        </m:r>
                       </m:e>
                       <m:sub>
                         <m:r>
@@ -3985,36 +5305,1676 @@
                 </a14:m>
                 <a:r>
                   <a:rPr/>
-                  <a:t> was fitted using the </a:t>
-                </a:r>
-                <a:r>
-                  <a:rPr b="1"/>
-                  <a:t>same observations</a:t>
-                </a:r>
-                <a:r>
-                  <a:rPr/>
-                  <a:t> at which it is evaluated, inducing correlation between the estimated nuisance and the residual.</a:t>
-                </a:r>
-              </a:p>
-              <a:p>
-                <a:pPr lvl="0" indent="0" marL="0">
-                  <a:buNone/>
-                </a:pPr>
-                <a:r>
-                  <a:rPr/>
-                  <a:t>Two distinct problems requiring two distinct fixes.</a:t>
+                  <a:t> known</a:t>
                 </a:r>
               </a:p>
             </p:txBody>
           </p:sp>
         </mc:Choice>
       </mc:AlternateContent>
+      <p:sp>
+        <p:nvSpPr>
+          <p:cNvPr id="3" name="Content Placeholder 2"/>
+          <p:cNvSpPr>
+            <a:spLocks noGrp="1"/>
+          </p:cNvSpPr>
+          <p:nvPr>
+            <p:ph idx="1"/>
+          </p:nvPr>
+        </p:nvSpPr>
+        <p:spPr/>
+        <p:txBody>
+          <a:bodyPr/>
+          <a:lstStyle/>
+          <a:p>
+            <a:pPr lvl="0" indent="0">
+              <a:buNone/>
+            </a:pPr>
+            <a:r>
+              <a:rPr>
+                <a:latin typeface="Courier"/>
+              </a:rPr>
+              <a:t>THETA </a:t>
+            </a:r>
+            <a:r>
+              <a:rPr>
+                <a:solidFill>
+                  <a:srgbClr val="666666"/>
+                </a:solidFill>
+                <a:latin typeface="Courier"/>
+              </a:rPr>
+              <a:t>=</a:t>
+            </a:r>
+            <a:r>
+              <a:rPr>
+                <a:latin typeface="Courier"/>
+              </a:rPr>
+              <a:t> </a:t>
+            </a:r>
+            <a:r>
+              <a:rPr>
+                <a:solidFill>
+                  <a:srgbClr val="40A070"/>
+                </a:solidFill>
+                <a:latin typeface="Courier"/>
+              </a:rPr>
+              <a:t>0.5</a:t>
+            </a:r>
+            <a:br/>
+            <a:br/>
+            <a:r>
+              <a:rPr b="1">
+                <a:solidFill>
+                  <a:srgbClr val="007020"/>
+                </a:solidFill>
+                <a:latin typeface="Courier"/>
+              </a:rPr>
+              <a:t>def</a:t>
+            </a:r>
+            <a:r>
+              <a:rPr>
+                <a:latin typeface="Courier"/>
+              </a:rPr>
+              <a:t> simulate(n</a:t>
+            </a:r>
+            <a:r>
+              <a:rPr>
+                <a:solidFill>
+                  <a:srgbClr val="666666"/>
+                </a:solidFill>
+                <a:latin typeface="Courier"/>
+              </a:rPr>
+              <a:t>=</a:t>
+            </a:r>
+            <a:r>
+              <a:rPr>
+                <a:solidFill>
+                  <a:srgbClr val="40A070"/>
+                </a:solidFill>
+                <a:latin typeface="Courier"/>
+              </a:rPr>
+              <a:t>300</a:t>
+            </a:r>
+            <a:r>
+              <a:rPr>
+                <a:latin typeface="Courier"/>
+              </a:rPr>
+              <a:t>, p</a:t>
+            </a:r>
+            <a:r>
+              <a:rPr>
+                <a:solidFill>
+                  <a:srgbClr val="666666"/>
+                </a:solidFill>
+                <a:latin typeface="Courier"/>
+              </a:rPr>
+              <a:t>=</a:t>
+            </a:r>
+            <a:r>
+              <a:rPr>
+                <a:solidFill>
+                  <a:srgbClr val="40A070"/>
+                </a:solidFill>
+                <a:latin typeface="Courier"/>
+              </a:rPr>
+              <a:t>20</a:t>
+            </a:r>
+            <a:r>
+              <a:rPr>
+                <a:latin typeface="Courier"/>
+              </a:rPr>
+              <a:t>, seed</a:t>
+            </a:r>
+            <a:r>
+              <a:rPr>
+                <a:solidFill>
+                  <a:srgbClr val="666666"/>
+                </a:solidFill>
+                <a:latin typeface="Courier"/>
+              </a:rPr>
+              <a:t>=</a:t>
+            </a:r>
+            <a:r>
+              <a:rPr>
+                <a:solidFill>
+                  <a:srgbClr val="40A070"/>
+                </a:solidFill>
+                <a:latin typeface="Courier"/>
+              </a:rPr>
+              <a:t>0</a:t>
+            </a:r>
+            <a:r>
+              <a:rPr>
+                <a:latin typeface="Courier"/>
+              </a:rPr>
+              <a:t>):</a:t>
+            </a:r>
+            <a:br/>
+            <a:r>
+              <a:rPr>
+                <a:latin typeface="Courier"/>
+              </a:rPr>
+              <a:t>    </a:t>
+            </a:r>
+            <a:r>
+              <a:rPr i="1">
+                <a:solidFill>
+                  <a:srgbClr val="60A0B0"/>
+                </a:solidFill>
+                <a:latin typeface="Courier"/>
+              </a:rPr>
+              <a:t>"""Partially linear model with a genuinely non-linear g0 and m0."""</a:t>
+            </a:r>
+            <a:br/>
+            <a:r>
+              <a:rPr>
+                <a:latin typeface="Courier"/>
+              </a:rPr>
+              <a:t>    rng </a:t>
+            </a:r>
+            <a:r>
+              <a:rPr>
+                <a:solidFill>
+                  <a:srgbClr val="666666"/>
+                </a:solidFill>
+                <a:latin typeface="Courier"/>
+              </a:rPr>
+              <a:t>=</a:t>
+            </a:r>
+            <a:r>
+              <a:rPr>
+                <a:latin typeface="Courier"/>
+              </a:rPr>
+              <a:t> np.random.default_rng(seed)</a:t>
+            </a:r>
+            <a:br/>
+            <a:r>
+              <a:rPr>
+                <a:latin typeface="Courier"/>
+              </a:rPr>
+              <a:t>    X </a:t>
+            </a:r>
+            <a:r>
+              <a:rPr>
+                <a:solidFill>
+                  <a:srgbClr val="666666"/>
+                </a:solidFill>
+                <a:latin typeface="Courier"/>
+              </a:rPr>
+              <a:t>=</a:t>
+            </a:r>
+            <a:r>
+              <a:rPr>
+                <a:latin typeface="Courier"/>
+              </a:rPr>
+              <a:t> rng.normal(size</a:t>
+            </a:r>
+            <a:r>
+              <a:rPr>
+                <a:solidFill>
+                  <a:srgbClr val="666666"/>
+                </a:solidFill>
+                <a:latin typeface="Courier"/>
+              </a:rPr>
+              <a:t>=</a:t>
+            </a:r>
+            <a:r>
+              <a:rPr>
+                <a:latin typeface="Courier"/>
+              </a:rPr>
+              <a:t>(n, p))</a:t>
+            </a:r>
+            <a:br/>
+            <a:r>
+              <a:rPr>
+                <a:latin typeface="Courier"/>
+              </a:rPr>
+              <a:t>    g </a:t>
+            </a:r>
+            <a:r>
+              <a:rPr>
+                <a:solidFill>
+                  <a:srgbClr val="666666"/>
+                </a:solidFill>
+                <a:latin typeface="Courier"/>
+              </a:rPr>
+              <a:t>=</a:t>
+            </a:r>
+            <a:r>
+              <a:rPr>
+                <a:latin typeface="Courier"/>
+              </a:rPr>
+              <a:t> np.exp(X[:, </a:t>
+            </a:r>
+            <a:r>
+              <a:rPr>
+                <a:solidFill>
+                  <a:srgbClr val="40A070"/>
+                </a:solidFill>
+                <a:latin typeface="Courier"/>
+              </a:rPr>
+              <a:t>0</a:t>
+            </a:r>
+            <a:r>
+              <a:rPr>
+                <a:latin typeface="Courier"/>
+              </a:rPr>
+              <a:t>]) </a:t>
+            </a:r>
+            <a:r>
+              <a:rPr>
+                <a:solidFill>
+                  <a:srgbClr val="666666"/>
+                </a:solidFill>
+                <a:latin typeface="Courier"/>
+              </a:rPr>
+              <a:t>/</a:t>
+            </a:r>
+            <a:r>
+              <a:rPr>
+                <a:latin typeface="Courier"/>
+              </a:rPr>
+              <a:t> (</a:t>
+            </a:r>
+            <a:r>
+              <a:rPr>
+                <a:solidFill>
+                  <a:srgbClr val="40A070"/>
+                </a:solidFill>
+                <a:latin typeface="Courier"/>
+              </a:rPr>
+              <a:t>1</a:t>
+            </a:r>
+            <a:r>
+              <a:rPr>
+                <a:latin typeface="Courier"/>
+              </a:rPr>
+              <a:t> </a:t>
+            </a:r>
+            <a:r>
+              <a:rPr>
+                <a:solidFill>
+                  <a:srgbClr val="666666"/>
+                </a:solidFill>
+                <a:latin typeface="Courier"/>
+              </a:rPr>
+              <a:t>+</a:t>
+            </a:r>
+            <a:r>
+              <a:rPr>
+                <a:latin typeface="Courier"/>
+              </a:rPr>
+              <a:t> np.exp(X[:, </a:t>
+            </a:r>
+            <a:r>
+              <a:rPr>
+                <a:solidFill>
+                  <a:srgbClr val="40A070"/>
+                </a:solidFill>
+                <a:latin typeface="Courier"/>
+              </a:rPr>
+              <a:t>0</a:t>
+            </a:r>
+            <a:r>
+              <a:rPr>
+                <a:latin typeface="Courier"/>
+              </a:rPr>
+              <a:t>])) </a:t>
+            </a:r>
+            <a:r>
+              <a:rPr>
+                <a:solidFill>
+                  <a:srgbClr val="666666"/>
+                </a:solidFill>
+                <a:latin typeface="Courier"/>
+              </a:rPr>
+              <a:t>+</a:t>
+            </a:r>
+            <a:r>
+              <a:rPr>
+                <a:latin typeface="Courier"/>
+              </a:rPr>
+              <a:t> </a:t>
+            </a:r>
+            <a:r>
+              <a:rPr>
+                <a:solidFill>
+                  <a:srgbClr val="40A070"/>
+                </a:solidFill>
+                <a:latin typeface="Courier"/>
+              </a:rPr>
+              <a:t>0.25</a:t>
+            </a:r>
+            <a:r>
+              <a:rPr>
+                <a:latin typeface="Courier"/>
+              </a:rPr>
+              <a:t> </a:t>
+            </a:r>
+            <a:r>
+              <a:rPr>
+                <a:solidFill>
+                  <a:srgbClr val="666666"/>
+                </a:solidFill>
+                <a:latin typeface="Courier"/>
+              </a:rPr>
+              <a:t>*</a:t>
+            </a:r>
+            <a:r>
+              <a:rPr>
+                <a:latin typeface="Courier"/>
+              </a:rPr>
+              <a:t> np.cos(X[:, </a:t>
+            </a:r>
+            <a:r>
+              <a:rPr>
+                <a:solidFill>
+                  <a:srgbClr val="40A070"/>
+                </a:solidFill>
+                <a:latin typeface="Courier"/>
+              </a:rPr>
+              <a:t>1</a:t>
+            </a:r>
+            <a:r>
+              <a:rPr>
+                <a:latin typeface="Courier"/>
+              </a:rPr>
+              <a:t>]) </a:t>
+            </a:r>
+            <a:r>
+              <a:rPr>
+                <a:solidFill>
+                  <a:srgbClr val="666666"/>
+                </a:solidFill>
+                <a:latin typeface="Courier"/>
+              </a:rPr>
+              <a:t>*</a:t>
+            </a:r>
+            <a:r>
+              <a:rPr>
+                <a:latin typeface="Courier"/>
+              </a:rPr>
+              <a:t> X[:, </a:t>
+            </a:r>
+            <a:r>
+              <a:rPr>
+                <a:solidFill>
+                  <a:srgbClr val="40A070"/>
+                </a:solidFill>
+                <a:latin typeface="Courier"/>
+              </a:rPr>
+              <a:t>2</a:t>
+            </a:r>
+            <a:r>
+              <a:rPr>
+                <a:latin typeface="Courier"/>
+              </a:rPr>
+              <a:t>]</a:t>
+            </a:r>
+            <a:br/>
+            <a:r>
+              <a:rPr>
+                <a:latin typeface="Courier"/>
+              </a:rPr>
+              <a:t>    m </a:t>
+            </a:r>
+            <a:r>
+              <a:rPr>
+                <a:solidFill>
+                  <a:srgbClr val="666666"/>
+                </a:solidFill>
+                <a:latin typeface="Courier"/>
+              </a:rPr>
+              <a:t>=</a:t>
+            </a:r>
+            <a:r>
+              <a:rPr>
+                <a:latin typeface="Courier"/>
+              </a:rPr>
+              <a:t> </a:t>
+            </a:r>
+            <a:r>
+              <a:rPr>
+                <a:solidFill>
+                  <a:srgbClr val="40A070"/>
+                </a:solidFill>
+                <a:latin typeface="Courier"/>
+              </a:rPr>
+              <a:t>0.8</a:t>
+            </a:r>
+            <a:r>
+              <a:rPr>
+                <a:latin typeface="Courier"/>
+              </a:rPr>
+              <a:t> </a:t>
+            </a:r>
+            <a:r>
+              <a:rPr>
+                <a:solidFill>
+                  <a:srgbClr val="666666"/>
+                </a:solidFill>
+                <a:latin typeface="Courier"/>
+              </a:rPr>
+              <a:t>*</a:t>
+            </a:r>
+            <a:r>
+              <a:rPr>
+                <a:latin typeface="Courier"/>
+              </a:rPr>
+              <a:t> X[:, </a:t>
+            </a:r>
+            <a:r>
+              <a:rPr>
+                <a:solidFill>
+                  <a:srgbClr val="40A070"/>
+                </a:solidFill>
+                <a:latin typeface="Courier"/>
+              </a:rPr>
+              <a:t>0</a:t>
+            </a:r>
+            <a:r>
+              <a:rPr>
+                <a:latin typeface="Courier"/>
+              </a:rPr>
+              <a:t>] </a:t>
+            </a:r>
+            <a:r>
+              <a:rPr>
+                <a:solidFill>
+                  <a:srgbClr val="666666"/>
+                </a:solidFill>
+                <a:latin typeface="Courier"/>
+              </a:rPr>
+              <a:t>+</a:t>
+            </a:r>
+            <a:r>
+              <a:rPr>
+                <a:latin typeface="Courier"/>
+              </a:rPr>
+              <a:t> </a:t>
+            </a:r>
+            <a:r>
+              <a:rPr>
+                <a:solidFill>
+                  <a:srgbClr val="40A070"/>
+                </a:solidFill>
+                <a:latin typeface="Courier"/>
+              </a:rPr>
+              <a:t>0.25</a:t>
+            </a:r>
+            <a:r>
+              <a:rPr>
+                <a:latin typeface="Courier"/>
+              </a:rPr>
+              <a:t> </a:t>
+            </a:r>
+            <a:r>
+              <a:rPr>
+                <a:solidFill>
+                  <a:srgbClr val="666666"/>
+                </a:solidFill>
+                <a:latin typeface="Courier"/>
+              </a:rPr>
+              <a:t>*</a:t>
+            </a:r>
+            <a:r>
+              <a:rPr>
+                <a:latin typeface="Courier"/>
+              </a:rPr>
+              <a:t> np.sin(X[:, </a:t>
+            </a:r>
+            <a:r>
+              <a:rPr>
+                <a:solidFill>
+                  <a:srgbClr val="40A070"/>
+                </a:solidFill>
+                <a:latin typeface="Courier"/>
+              </a:rPr>
+              <a:t>1</a:t>
+            </a:r>
+            <a:r>
+              <a:rPr>
+                <a:latin typeface="Courier"/>
+              </a:rPr>
+              <a:t>])</a:t>
+            </a:r>
+            <a:br/>
+            <a:r>
+              <a:rPr>
+                <a:latin typeface="Courier"/>
+              </a:rPr>
+              <a:t>    D </a:t>
+            </a:r>
+            <a:r>
+              <a:rPr>
+                <a:solidFill>
+                  <a:srgbClr val="666666"/>
+                </a:solidFill>
+                <a:latin typeface="Courier"/>
+              </a:rPr>
+              <a:t>=</a:t>
+            </a:r>
+            <a:r>
+              <a:rPr>
+                <a:latin typeface="Courier"/>
+              </a:rPr>
+              <a:t> m </a:t>
+            </a:r>
+            <a:r>
+              <a:rPr>
+                <a:solidFill>
+                  <a:srgbClr val="666666"/>
+                </a:solidFill>
+                <a:latin typeface="Courier"/>
+              </a:rPr>
+              <a:t>+</a:t>
+            </a:r>
+            <a:r>
+              <a:rPr>
+                <a:latin typeface="Courier"/>
+              </a:rPr>
+              <a:t> rng.normal(</a:t>
+            </a:r>
+            <a:r>
+              <a:rPr>
+                <a:solidFill>
+                  <a:srgbClr val="40A070"/>
+                </a:solidFill>
+                <a:latin typeface="Courier"/>
+              </a:rPr>
+              <a:t>0</a:t>
+            </a:r>
+            <a:r>
+              <a:rPr>
+                <a:latin typeface="Courier"/>
+              </a:rPr>
+              <a:t>, </a:t>
+            </a:r>
+            <a:r>
+              <a:rPr>
+                <a:solidFill>
+                  <a:srgbClr val="40A070"/>
+                </a:solidFill>
+                <a:latin typeface="Courier"/>
+              </a:rPr>
+              <a:t>1</a:t>
+            </a:r>
+            <a:r>
+              <a:rPr>
+                <a:latin typeface="Courier"/>
+              </a:rPr>
+              <a:t>, n)</a:t>
+            </a:r>
+            <a:br/>
+            <a:r>
+              <a:rPr>
+                <a:latin typeface="Courier"/>
+              </a:rPr>
+              <a:t>    Y </a:t>
+            </a:r>
+            <a:r>
+              <a:rPr>
+                <a:solidFill>
+                  <a:srgbClr val="666666"/>
+                </a:solidFill>
+                <a:latin typeface="Courier"/>
+              </a:rPr>
+              <a:t>=</a:t>
+            </a:r>
+            <a:r>
+              <a:rPr>
+                <a:latin typeface="Courier"/>
+              </a:rPr>
+              <a:t> THETA </a:t>
+            </a:r>
+            <a:r>
+              <a:rPr>
+                <a:solidFill>
+                  <a:srgbClr val="666666"/>
+                </a:solidFill>
+                <a:latin typeface="Courier"/>
+              </a:rPr>
+              <a:t>*</a:t>
+            </a:r>
+            <a:r>
+              <a:rPr>
+                <a:latin typeface="Courier"/>
+              </a:rPr>
+              <a:t> D </a:t>
+            </a:r>
+            <a:r>
+              <a:rPr>
+                <a:solidFill>
+                  <a:srgbClr val="666666"/>
+                </a:solidFill>
+                <a:latin typeface="Courier"/>
+              </a:rPr>
+              <a:t>+</a:t>
+            </a:r>
+            <a:r>
+              <a:rPr>
+                <a:latin typeface="Courier"/>
+              </a:rPr>
+              <a:t> g </a:t>
+            </a:r>
+            <a:r>
+              <a:rPr>
+                <a:solidFill>
+                  <a:srgbClr val="666666"/>
+                </a:solidFill>
+                <a:latin typeface="Courier"/>
+              </a:rPr>
+              <a:t>+</a:t>
+            </a:r>
+            <a:r>
+              <a:rPr>
+                <a:latin typeface="Courier"/>
+              </a:rPr>
+              <a:t> rng.normal(</a:t>
+            </a:r>
+            <a:r>
+              <a:rPr>
+                <a:solidFill>
+                  <a:srgbClr val="40A070"/>
+                </a:solidFill>
+                <a:latin typeface="Courier"/>
+              </a:rPr>
+              <a:t>0</a:t>
+            </a:r>
+            <a:r>
+              <a:rPr>
+                <a:latin typeface="Courier"/>
+              </a:rPr>
+              <a:t>, </a:t>
+            </a:r>
+            <a:r>
+              <a:rPr>
+                <a:solidFill>
+                  <a:srgbClr val="40A070"/>
+                </a:solidFill>
+                <a:latin typeface="Courier"/>
+              </a:rPr>
+              <a:t>1</a:t>
+            </a:r>
+            <a:r>
+              <a:rPr>
+                <a:latin typeface="Courier"/>
+              </a:rPr>
+              <a:t>, n)</a:t>
+            </a:r>
+            <a:br/>
+            <a:r>
+              <a:rPr>
+                <a:latin typeface="Courier"/>
+              </a:rPr>
+              <a:t>    </a:t>
+            </a:r>
+            <a:r>
+              <a:rPr b="1">
+                <a:solidFill>
+                  <a:srgbClr val="007020"/>
+                </a:solidFill>
+                <a:latin typeface="Courier"/>
+              </a:rPr>
+              <a:t>return</a:t>
+            </a:r>
+            <a:r>
+              <a:rPr>
+                <a:latin typeface="Courier"/>
+              </a:rPr>
+              <a:t> X, D, Y</a:t>
+            </a:r>
+            <a:br/>
+            <a:br/>
+            <a:r>
+              <a:rPr b="1">
+                <a:solidFill>
+                  <a:srgbClr val="007020"/>
+                </a:solidFill>
+                <a:latin typeface="Courier"/>
+              </a:rPr>
+              <a:t>def</a:t>
+            </a:r>
+            <a:r>
+              <a:rPr>
+                <a:latin typeface="Courier"/>
+              </a:rPr>
+              <a:t> forest():</a:t>
+            </a:r>
+            <a:br/>
+            <a:r>
+              <a:rPr>
+                <a:latin typeface="Courier"/>
+              </a:rPr>
+              <a:t>    </a:t>
+            </a:r>
+            <a:r>
+              <a:rPr b="1">
+                <a:solidFill>
+                  <a:srgbClr val="007020"/>
+                </a:solidFill>
+                <a:latin typeface="Courier"/>
+              </a:rPr>
+              <a:t>return</a:t>
+            </a:r>
+            <a:r>
+              <a:rPr>
+                <a:latin typeface="Courier"/>
+              </a:rPr>
+              <a:t> RandomForestRegressor(</a:t>
+            </a:r>
+            <a:r>
+              <a:rPr>
+                <a:solidFill>
+                  <a:srgbClr val="40A070"/>
+                </a:solidFill>
+                <a:latin typeface="Courier"/>
+              </a:rPr>
+              <a:t>60</a:t>
+            </a:r>
+            <a:r>
+              <a:rPr>
+                <a:latin typeface="Courier"/>
+              </a:rPr>
+              <a:t>, min_samples_leaf</a:t>
+            </a:r>
+            <a:r>
+              <a:rPr>
+                <a:solidFill>
+                  <a:srgbClr val="666666"/>
+                </a:solidFill>
+                <a:latin typeface="Courier"/>
+              </a:rPr>
+              <a:t>=</a:t>
+            </a:r>
+            <a:r>
+              <a:rPr>
+                <a:solidFill>
+                  <a:srgbClr val="40A070"/>
+                </a:solidFill>
+                <a:latin typeface="Courier"/>
+              </a:rPr>
+              <a:t>2</a:t>
+            </a:r>
+            <a:r>
+              <a:rPr>
+                <a:latin typeface="Courier"/>
+              </a:rPr>
+              <a:t>, random_state</a:t>
+            </a:r>
+            <a:r>
+              <a:rPr>
+                <a:solidFill>
+                  <a:srgbClr val="666666"/>
+                </a:solidFill>
+                <a:latin typeface="Courier"/>
+              </a:rPr>
+              <a:t>=</a:t>
+            </a:r>
+            <a:r>
+              <a:rPr>
+                <a:solidFill>
+                  <a:srgbClr val="40A070"/>
+                </a:solidFill>
+                <a:latin typeface="Courier"/>
+              </a:rPr>
+              <a:t>0</a:t>
+            </a:r>
+            <a:r>
+              <a:rPr>
+                <a:latin typeface="Courier"/>
+              </a:rPr>
+              <a:t>, n_jobs</a:t>
+            </a:r>
+            <a:r>
+              <a:rPr>
+                <a:solidFill>
+                  <a:srgbClr val="666666"/>
+                </a:solidFill>
+                <a:latin typeface="Courier"/>
+              </a:rPr>
+              <a:t>=-</a:t>
+            </a:r>
+            <a:r>
+              <a:rPr>
+                <a:solidFill>
+                  <a:srgbClr val="40A070"/>
+                </a:solidFill>
+                <a:latin typeface="Courier"/>
+              </a:rPr>
+              <a:t>1</a:t>
+            </a:r>
+            <a:r>
+              <a:rPr>
+                <a:latin typeface="Courier"/>
+              </a:rPr>
+              <a:t>)</a:t>
+            </a:r>
+            <a:br/>
+            <a:br/>
+            <a:r>
+              <a:rPr b="1">
+                <a:solidFill>
+                  <a:srgbClr val="007020"/>
+                </a:solidFill>
+                <a:latin typeface="Courier"/>
+              </a:rPr>
+              <a:t>def</a:t>
+            </a:r>
+            <a:r>
+              <a:rPr>
+                <a:latin typeface="Courier"/>
+              </a:rPr>
+              <a:t> estimate(X, D, Y, mode):</a:t>
+            </a:r>
+            <a:br/>
+            <a:r>
+              <a:rPr>
+                <a:latin typeface="Courier"/>
+              </a:rPr>
+              <a:t>    n </a:t>
+            </a:r>
+            <a:r>
+              <a:rPr>
+                <a:solidFill>
+                  <a:srgbClr val="666666"/>
+                </a:solidFill>
+                <a:latin typeface="Courier"/>
+              </a:rPr>
+              <a:t>=</a:t>
+            </a:r>
+            <a:r>
+              <a:rPr>
+                <a:latin typeface="Courier"/>
+              </a:rPr>
+              <a:t> </a:t>
+            </a:r>
+            <a:r>
+              <a:rPr>
+                <a:solidFill>
+                  <a:srgbClr val="008000"/>
+                </a:solidFill>
+                <a:latin typeface="Courier"/>
+              </a:rPr>
+              <a:t>len</a:t>
+            </a:r>
+            <a:r>
+              <a:rPr>
+                <a:latin typeface="Courier"/>
+              </a:rPr>
+              <a:t>(Y)</a:t>
+            </a:r>
+            <a:br/>
+            <a:r>
+              <a:rPr>
+                <a:latin typeface="Courier"/>
+              </a:rPr>
+              <a:t>    </a:t>
+            </a:r>
+            <a:r>
+              <a:rPr b="1">
+                <a:solidFill>
+                  <a:srgbClr val="007020"/>
+                </a:solidFill>
+                <a:latin typeface="Courier"/>
+              </a:rPr>
+              <a:t>if</a:t>
+            </a:r>
+            <a:r>
+              <a:rPr>
+                <a:latin typeface="Courier"/>
+              </a:rPr>
+              <a:t> mode </a:t>
+            </a:r>
+            <a:r>
+              <a:rPr>
+                <a:solidFill>
+                  <a:srgbClr val="666666"/>
+                </a:solidFill>
+                <a:latin typeface="Courier"/>
+              </a:rPr>
+              <a:t>==</a:t>
+            </a:r>
+            <a:r>
+              <a:rPr>
+                <a:latin typeface="Courier"/>
+              </a:rPr>
+              <a:t> </a:t>
+            </a:r>
+            <a:r>
+              <a:rPr>
+                <a:solidFill>
+                  <a:srgbClr val="4070A0"/>
+                </a:solidFill>
+                <a:latin typeface="Courier"/>
+              </a:rPr>
+              <a:t>"naive"</a:t>
+            </a:r>
+            <a:r>
+              <a:rPr>
+                <a:latin typeface="Courier"/>
+              </a:rPr>
+              <a:t>:                       </a:t>
+            </a:r>
+            <a:r>
+              <a:rPr i="1">
+                <a:solidFill>
+                  <a:srgbClr val="60A0B0"/>
+                </a:solidFill>
+                <a:latin typeface="Courier"/>
+              </a:rPr>
+              <a:t># regress Y - ghat(X) on D</a:t>
+            </a:r>
+            <a:br/>
+            <a:r>
+              <a:rPr>
+                <a:latin typeface="Courier"/>
+              </a:rPr>
+              <a:t>        </a:t>
+            </a:r>
+            <a:r>
+              <a:rPr b="1">
+                <a:solidFill>
+                  <a:srgbClr val="007020"/>
+                </a:solidFill>
+                <a:latin typeface="Courier"/>
+              </a:rPr>
+              <a:t>return</a:t>
+            </a:r>
+            <a:r>
+              <a:rPr>
+                <a:latin typeface="Courier"/>
+              </a:rPr>
+              <a:t> (D </a:t>
+            </a:r>
+            <a:r>
+              <a:rPr>
+                <a:solidFill>
+                  <a:srgbClr val="666666"/>
+                </a:solidFill>
+                <a:latin typeface="Courier"/>
+              </a:rPr>
+              <a:t>@</a:t>
+            </a:r>
+            <a:r>
+              <a:rPr>
+                <a:latin typeface="Courier"/>
+              </a:rPr>
+              <a:t> (Y </a:t>
+            </a:r>
+            <a:r>
+              <a:rPr>
+                <a:solidFill>
+                  <a:srgbClr val="666666"/>
+                </a:solidFill>
+                <a:latin typeface="Courier"/>
+              </a:rPr>
+              <a:t>-</a:t>
+            </a:r>
+            <a:r>
+              <a:rPr>
+                <a:latin typeface="Courier"/>
+              </a:rPr>
+              <a:t> forest().fit(X, Y).predict(X))) </a:t>
+            </a:r>
+            <a:r>
+              <a:rPr>
+                <a:solidFill>
+                  <a:srgbClr val="666666"/>
+                </a:solidFill>
+                <a:latin typeface="Courier"/>
+              </a:rPr>
+              <a:t>/</a:t>
+            </a:r>
+            <a:r>
+              <a:rPr>
+                <a:latin typeface="Courier"/>
+              </a:rPr>
+              <a:t> (D </a:t>
+            </a:r>
+            <a:r>
+              <a:rPr>
+                <a:solidFill>
+                  <a:srgbClr val="666666"/>
+                </a:solidFill>
+                <a:latin typeface="Courier"/>
+              </a:rPr>
+              <a:t>@</a:t>
+            </a:r>
+            <a:r>
+              <a:rPr>
+                <a:latin typeface="Courier"/>
+              </a:rPr>
+              <a:t> D)</a:t>
+            </a:r>
+            <a:br/>
+            <a:r>
+              <a:rPr>
+                <a:latin typeface="Courier"/>
+              </a:rPr>
+              <a:t>    </a:t>
+            </a:r>
+            <a:r>
+              <a:rPr b="1">
+                <a:solidFill>
+                  <a:srgbClr val="007020"/>
+                </a:solidFill>
+                <a:latin typeface="Courier"/>
+              </a:rPr>
+              <a:t>if</a:t>
+            </a:r>
+            <a:r>
+              <a:rPr>
+                <a:latin typeface="Courier"/>
+              </a:rPr>
+              <a:t> mode </a:t>
+            </a:r>
+            <a:r>
+              <a:rPr>
+                <a:solidFill>
+                  <a:srgbClr val="666666"/>
+                </a:solidFill>
+                <a:latin typeface="Courier"/>
+              </a:rPr>
+              <a:t>==</a:t>
+            </a:r>
+            <a:r>
+              <a:rPr>
+                <a:latin typeface="Courier"/>
+              </a:rPr>
+              <a:t> </a:t>
+            </a:r>
+            <a:r>
+              <a:rPr>
+                <a:solidFill>
+                  <a:srgbClr val="4070A0"/>
+                </a:solidFill>
+                <a:latin typeface="Courier"/>
+              </a:rPr>
+              <a:t>"orthogonal"</a:t>
+            </a:r>
+            <a:r>
+              <a:rPr>
+                <a:latin typeface="Courier"/>
+              </a:rPr>
+              <a:t>:                  </a:t>
+            </a:r>
+            <a:r>
+              <a:rPr i="1">
+                <a:solidFill>
+                  <a:srgbClr val="60A0B0"/>
+                </a:solidFill>
+                <a:latin typeface="Courier"/>
+              </a:rPr>
+              <a:t># residualise BOTH, same sample</a:t>
+            </a:r>
+            <a:br/>
+            <a:r>
+              <a:rPr>
+                <a:latin typeface="Courier"/>
+              </a:rPr>
+              <a:t>        ty </a:t>
+            </a:r>
+            <a:r>
+              <a:rPr>
+                <a:solidFill>
+                  <a:srgbClr val="666666"/>
+                </a:solidFill>
+                <a:latin typeface="Courier"/>
+              </a:rPr>
+              <a:t>=</a:t>
+            </a:r>
+            <a:r>
+              <a:rPr>
+                <a:latin typeface="Courier"/>
+              </a:rPr>
+              <a:t> Y </a:t>
+            </a:r>
+            <a:r>
+              <a:rPr>
+                <a:solidFill>
+                  <a:srgbClr val="666666"/>
+                </a:solidFill>
+                <a:latin typeface="Courier"/>
+              </a:rPr>
+              <a:t>-</a:t>
+            </a:r>
+            <a:r>
+              <a:rPr>
+                <a:latin typeface="Courier"/>
+              </a:rPr>
+              <a:t> forest().fit(X, Y).predict(X)</a:t>
+            </a:r>
+            <a:br/>
+            <a:r>
+              <a:rPr>
+                <a:latin typeface="Courier"/>
+              </a:rPr>
+              <a:t>        td </a:t>
+            </a:r>
+            <a:r>
+              <a:rPr>
+                <a:solidFill>
+                  <a:srgbClr val="666666"/>
+                </a:solidFill>
+                <a:latin typeface="Courier"/>
+              </a:rPr>
+              <a:t>=</a:t>
+            </a:r>
+            <a:r>
+              <a:rPr>
+                <a:latin typeface="Courier"/>
+              </a:rPr>
+              <a:t> D </a:t>
+            </a:r>
+            <a:r>
+              <a:rPr>
+                <a:solidFill>
+                  <a:srgbClr val="666666"/>
+                </a:solidFill>
+                <a:latin typeface="Courier"/>
+              </a:rPr>
+              <a:t>-</a:t>
+            </a:r>
+            <a:r>
+              <a:rPr>
+                <a:latin typeface="Courier"/>
+              </a:rPr>
+              <a:t> forest().fit(X, D).predict(X)</a:t>
+            </a:r>
+            <a:br/>
+            <a:r>
+              <a:rPr>
+                <a:latin typeface="Courier"/>
+              </a:rPr>
+              <a:t>    </a:t>
+            </a:r>
+            <a:r>
+              <a:rPr b="1">
+                <a:solidFill>
+                  <a:srgbClr val="007020"/>
+                </a:solidFill>
+                <a:latin typeface="Courier"/>
+              </a:rPr>
+              <a:t>else</a:t>
+            </a:r>
+            <a:r>
+              <a:rPr>
+                <a:latin typeface="Courier"/>
+              </a:rPr>
+              <a:t>:                                     </a:t>
+            </a:r>
+            <a:r>
+              <a:rPr i="1">
+                <a:solidFill>
+                  <a:srgbClr val="60A0B0"/>
+                </a:solidFill>
+                <a:latin typeface="Courier"/>
+              </a:rPr>
+              <a:t># residualise BOTH, cross-fitted</a:t>
+            </a:r>
+            <a:br/>
+            <a:r>
+              <a:rPr>
+                <a:latin typeface="Courier"/>
+              </a:rPr>
+              <a:t>        ty, td </a:t>
+            </a:r>
+            <a:r>
+              <a:rPr>
+                <a:solidFill>
+                  <a:srgbClr val="666666"/>
+                </a:solidFill>
+                <a:latin typeface="Courier"/>
+              </a:rPr>
+              <a:t>=</a:t>
+            </a:r>
+            <a:r>
+              <a:rPr>
+                <a:latin typeface="Courier"/>
+              </a:rPr>
+              <a:t> np.zeros(n), np.zeros(n)</a:t>
+            </a:r>
+            <a:br/>
+            <a:r>
+              <a:rPr>
+                <a:latin typeface="Courier"/>
+              </a:rPr>
+              <a:t>        </a:t>
+            </a:r>
+            <a:r>
+              <a:rPr b="1">
+                <a:solidFill>
+                  <a:srgbClr val="007020"/>
+                </a:solidFill>
+                <a:latin typeface="Courier"/>
+              </a:rPr>
+              <a:t>for</a:t>
+            </a:r>
+            <a:r>
+              <a:rPr>
+                <a:latin typeface="Courier"/>
+              </a:rPr>
+              <a:t> tr, te </a:t>
+            </a:r>
+            <a:r>
+              <a:rPr b="1">
+                <a:solidFill>
+                  <a:srgbClr val="007020"/>
+                </a:solidFill>
+                <a:latin typeface="Courier"/>
+              </a:rPr>
+              <a:t>in</a:t>
+            </a:r>
+            <a:r>
+              <a:rPr>
+                <a:latin typeface="Courier"/>
+              </a:rPr>
+              <a:t> KFold(</a:t>
+            </a:r>
+            <a:r>
+              <a:rPr>
+                <a:solidFill>
+                  <a:srgbClr val="40A070"/>
+                </a:solidFill>
+                <a:latin typeface="Courier"/>
+              </a:rPr>
+              <a:t>5</a:t>
+            </a:r>
+            <a:r>
+              <a:rPr>
+                <a:latin typeface="Courier"/>
+              </a:rPr>
+              <a:t>, shuffle</a:t>
+            </a:r>
+            <a:r>
+              <a:rPr>
+                <a:solidFill>
+                  <a:srgbClr val="666666"/>
+                </a:solidFill>
+                <a:latin typeface="Courier"/>
+              </a:rPr>
+              <a:t>=</a:t>
+            </a:r>
+            <a:r>
+              <a:rPr>
+                <a:solidFill>
+                  <a:srgbClr val="19177C"/>
+                </a:solidFill>
+                <a:latin typeface="Courier"/>
+              </a:rPr>
+              <a:t>True</a:t>
+            </a:r>
+            <a:r>
+              <a:rPr>
+                <a:latin typeface="Courier"/>
+              </a:rPr>
+              <a:t>, random_state</a:t>
+            </a:r>
+            <a:r>
+              <a:rPr>
+                <a:solidFill>
+                  <a:srgbClr val="666666"/>
+                </a:solidFill>
+                <a:latin typeface="Courier"/>
+              </a:rPr>
+              <a:t>=</a:t>
+            </a:r>
+            <a:r>
+              <a:rPr>
+                <a:solidFill>
+                  <a:srgbClr val="40A070"/>
+                </a:solidFill>
+                <a:latin typeface="Courier"/>
+              </a:rPr>
+              <a:t>1</a:t>
+            </a:r>
+            <a:r>
+              <a:rPr>
+                <a:latin typeface="Courier"/>
+              </a:rPr>
+              <a:t>).split(X):</a:t>
+            </a:r>
+            <a:br/>
+            <a:r>
+              <a:rPr>
+                <a:latin typeface="Courier"/>
+              </a:rPr>
+              <a:t>            ty[te] </a:t>
+            </a:r>
+            <a:r>
+              <a:rPr>
+                <a:solidFill>
+                  <a:srgbClr val="666666"/>
+                </a:solidFill>
+                <a:latin typeface="Courier"/>
+              </a:rPr>
+              <a:t>=</a:t>
+            </a:r>
+            <a:r>
+              <a:rPr>
+                <a:latin typeface="Courier"/>
+              </a:rPr>
+              <a:t> Y[te] </a:t>
+            </a:r>
+            <a:r>
+              <a:rPr>
+                <a:solidFill>
+                  <a:srgbClr val="666666"/>
+                </a:solidFill>
+                <a:latin typeface="Courier"/>
+              </a:rPr>
+              <a:t>-</a:t>
+            </a:r>
+            <a:r>
+              <a:rPr>
+                <a:latin typeface="Courier"/>
+              </a:rPr>
+              <a:t> forest().fit(X[tr], Y[tr]).predict(X[te])</a:t>
+            </a:r>
+            <a:br/>
+            <a:r>
+              <a:rPr>
+                <a:latin typeface="Courier"/>
+              </a:rPr>
+              <a:t>            td[te] </a:t>
+            </a:r>
+            <a:r>
+              <a:rPr>
+                <a:solidFill>
+                  <a:srgbClr val="666666"/>
+                </a:solidFill>
+                <a:latin typeface="Courier"/>
+              </a:rPr>
+              <a:t>=</a:t>
+            </a:r>
+            <a:r>
+              <a:rPr>
+                <a:latin typeface="Courier"/>
+              </a:rPr>
+              <a:t> D[te] </a:t>
+            </a:r>
+            <a:r>
+              <a:rPr>
+                <a:solidFill>
+                  <a:srgbClr val="666666"/>
+                </a:solidFill>
+                <a:latin typeface="Courier"/>
+              </a:rPr>
+              <a:t>-</a:t>
+            </a:r>
+            <a:r>
+              <a:rPr>
+                <a:latin typeface="Courier"/>
+              </a:rPr>
+              <a:t> forest().fit(X[tr], D[tr]).predict(X[te])</a:t>
+            </a:r>
+            <a:br/>
+            <a:r>
+              <a:rPr>
+                <a:latin typeface="Courier"/>
+              </a:rPr>
+              <a:t>    </a:t>
+            </a:r>
+            <a:r>
+              <a:rPr b="1">
+                <a:solidFill>
+                  <a:srgbClr val="007020"/>
+                </a:solidFill>
+                <a:latin typeface="Courier"/>
+              </a:rPr>
+              <a:t>return</a:t>
+            </a:r>
+            <a:r>
+              <a:rPr>
+                <a:latin typeface="Courier"/>
+              </a:rPr>
+              <a:t> (td </a:t>
+            </a:r>
+            <a:r>
+              <a:rPr>
+                <a:solidFill>
+                  <a:srgbClr val="666666"/>
+                </a:solidFill>
+                <a:latin typeface="Courier"/>
+              </a:rPr>
+              <a:t>@</a:t>
+            </a:r>
+            <a:r>
+              <a:rPr>
+                <a:latin typeface="Courier"/>
+              </a:rPr>
+              <a:t> ty) </a:t>
+            </a:r>
+            <a:r>
+              <a:rPr>
+                <a:solidFill>
+                  <a:srgbClr val="666666"/>
+                </a:solidFill>
+                <a:latin typeface="Courier"/>
+              </a:rPr>
+              <a:t>/</a:t>
+            </a:r>
+            <a:r>
+              <a:rPr>
+                <a:latin typeface="Courier"/>
+              </a:rPr>
+              <a:t> (td </a:t>
+            </a:r>
+            <a:r>
+              <a:rPr>
+                <a:solidFill>
+                  <a:srgbClr val="666666"/>
+                </a:solidFill>
+                <a:latin typeface="Courier"/>
+              </a:rPr>
+              <a:t>@</a:t>
+            </a:r>
+            <a:r>
+              <a:rPr>
+                <a:latin typeface="Courier"/>
+              </a:rPr>
+              <a:t> td)</a:t>
+            </a:r>
+          </a:p>
+        </p:txBody>
+      </p:sp>
     </p:spTree>
   </p:cSld>
 </p:sld>
 </file>
 
-<file path=ppt/slides/slide13.xml><?xml version="1.0" encoding="utf-8"?>
+<file path=ppt/slides/slide2.xml><?xml version="1.0" encoding="utf-8"?>
+<p:sld xmlns:a="http://schemas.openxmlformats.org/drawingml/2006/main" xmlns:r="http://schemas.openxmlformats.org/officeDocument/2006/relationships" xmlns:p="http://schemas.openxmlformats.org/presentationml/2006/main">
+  <p:cSld>
+    <p:spTree>
+      <p:nvGrpSpPr>
+        <p:cNvPr id="1" name=""/>
+        <p:cNvGrpSpPr/>
+        <p:nvPr/>
+      </p:nvGrpSpPr>
+      <p:grpSpPr>
+        <a:xfrm>
+          <a:off x="0" y="0"/>
+          <a:ext cx="0" cy="0"/>
+          <a:chOff x="0" y="0"/>
+          <a:chExt cx="0" cy="0"/>
+        </a:xfrm>
+      </p:grpSpPr>
+      <p:sp>
+        <p:nvSpPr>
+          <p:cNvPr id="3" name="Content Placeholder 2"/>
+          <p:cNvSpPr>
+            <a:spLocks noGrp="1"/>
+          </p:cNvSpPr>
+          <p:nvPr>
+            <p:ph idx="1"/>
+          </p:nvPr>
+        </p:nvSpPr>
+        <p:spPr/>
+        <p:txBody>
+          <a:bodyPr/>
+          <a:lstStyle/>
+          <a:p>
+            <a:pPr lvl="0" indent="0" marL="0">
+              <a:spcBef>
+                <a:spcPts val="3000"/>
+              </a:spcBef>
+              <a:buNone/>
+            </a:pPr>
+            <a:r>
+              <a:rPr b="1"/>
+              <a:t>You have a superb predictive model. Why can you still not use it to choose a policy?</a:t>
+            </a:r>
+          </a:p>
+        </p:txBody>
+      </p:sp>
+    </p:spTree>
+  </p:cSld>
+</p:sld>
+</file>
+
+<file path=ppt/slides/slide20.xml><?xml version="1.0" encoding="utf-8"?>
+<p:sld xmlns:a="http://schemas.openxmlformats.org/drawingml/2006/main" xmlns:r="http://schemas.openxmlformats.org/officeDocument/2006/relationships" xmlns:p="http://schemas.openxmlformats.org/presentationml/2006/main">
+  <p:cSld>
+    <p:spTree>
+      <p:nvGrpSpPr>
+        <p:cNvPr id="1" name=""/>
+        <p:cNvGrpSpPr/>
+        <p:nvPr/>
+      </p:nvGrpSpPr>
+      <p:grpSpPr>
+        <a:xfrm>
+          <a:off x="0" y="0"/>
+          <a:ext cx="0" cy="0"/>
+          <a:chOff x="0" y="0"/>
+          <a:chExt cx="0" cy="0"/>
+        </a:xfrm>
+      </p:grpSpPr>
+      <p:sp>
+        <p:nvSpPr>
+          <p:cNvPr id="2" name="Title 1"/>
+          <p:cNvSpPr>
+            <a:spLocks noGrp="1"/>
+          </p:cNvSpPr>
+          <p:nvPr>
+            <p:ph type="title"/>
+          </p:nvPr>
+        </p:nvSpPr>
+        <p:spPr/>
+        <p:txBody>
+          <a:bodyPr/>
+          <a:lstStyle/>
+          <a:p>
+            <a:pPr lvl="0" indent="0" marL="0">
+              <a:buNone/>
+            </a:pPr>
+            <a:r>
+              <a:rPr/>
+              <a:t>Fifty replications, three estimators</a:t>
+            </a:r>
+          </a:p>
+        </p:txBody>
+      </p:sp>
+      <p:pic>
+        <p:nvPicPr>
+          <p:cNvPr descr="slides_files/figure-pptx/cell-7-output-1.png" id="0" name="Picture 1"/>
+          <p:cNvPicPr>
+            <a:picLocks noGrp="1" noChangeAspect="1"/>
+          </p:cNvPicPr>
+          <p:nvPr/>
+        </p:nvPicPr>
+        <p:blipFill>
+          <a:blip r:embed="rId2"/>
+          <a:stretch>
+            <a:fillRect/>
+          </a:stretch>
+        </p:blipFill>
+        <p:spPr bwMode="auto">
+          <a:xfrm>
+            <a:off x="558800" y="1193800"/>
+            <a:ext cx="8026400" cy="3390900"/>
+          </a:xfrm>
+          <a:prstGeom prst="rect">
+            <a:avLst/>
+          </a:prstGeom>
+          <a:noFill/>
+          <a:ln w="9525">
+            <a:noFill/>
+            <a:headEnd/>
+            <a:tailEnd/>
+          </a:ln>
+        </p:spPr>
+      </p:pic>
+    </p:spTree>
+  </p:cSld>
+</p:sld>
+</file>
+
+<file path=ppt/slides/slide21.xml><?xml version="1.0" encoding="utf-8"?>
+<p:sld xmlns:a="http://schemas.openxmlformats.org/drawingml/2006/main" xmlns:r="http://schemas.openxmlformats.org/officeDocument/2006/relationships" xmlns:p="http://schemas.openxmlformats.org/presentationml/2006/main">
+  <p:cSld>
+    <p:spTree>
+      <p:nvGrpSpPr>
+        <p:cNvPr id="1" name=""/>
+        <p:cNvGrpSpPr/>
+        <p:nvPr/>
+      </p:nvGrpSpPr>
+      <p:grpSpPr>
+        <a:xfrm>
+          <a:off x="0" y="0"/>
+          <a:ext cx="0" cy="0"/>
+          <a:chOff x="0" y="0"/>
+          <a:chExt cx="0" cy="0"/>
+        </a:xfrm>
+      </p:grpSpPr>
+      <p:sp>
+        <p:nvSpPr>
+          <p:cNvPr id="3" name="Content Placeholder 2"/>
+          <p:cNvSpPr>
+            <a:spLocks noGrp="1"/>
+          </p:cNvSpPr>
+          <p:nvPr>
+            <p:ph idx="1"/>
+          </p:nvPr>
+        </p:nvSpPr>
+        <p:spPr/>
+        <p:txBody>
+          <a:bodyPr/>
+          <a:lstStyle/>
+          <a:p>
+            <a:pPr lvl="0" indent="0" marL="0">
+              <a:buNone/>
+            </a:pPr>
+            <a:r>
+              <a:rPr/>
+              <a:t>The naive estimator misses by </a:t>
+            </a:r>
+            <a:r>
+              <a:rPr b="1"/>
+              <a:t>more than half the true effect</a:t>
+            </a:r>
+            <a:r>
+              <a:rPr/>
+              <a:t>, and its spread is </a:t>
+            </a:r>
+            <a:r>
+              <a:rPr i="1"/>
+              <a:t>narrow</a:t>
+            </a:r>
+            <a:r>
+              <a:rPr/>
+              <a:t> — it is confidently wrong. A tight confidence interval around it would be worse than no estimate.</a:t>
+            </a:r>
+          </a:p>
+        </p:txBody>
+      </p:sp>
+    </p:spTree>
+  </p:cSld>
+</p:sld>
+</file>
+
+<file path=ppt/slides/slide22.xml><?xml version="1.0" encoding="utf-8"?>
 <p:sld xmlns:a="http://schemas.openxmlformats.org/drawingml/2006/main" xmlns:r="http://schemas.openxmlformats.org/officeDocument/2006/relationships" xmlns:p="http://schemas.openxmlformats.org/presentationml/2006/main">
   <p:cSld>
     <p:spTree>
@@ -4056,7 +7016,7 @@
             </a:pPr>
             <a:r>
               <a:rPr/>
-              <a:t>10.3 Neyman orthogonality</a:t>
+              <a:t>4 · Fix 1 — orthogonality</a:t>
             </a:r>
           </a:p>
         </p:txBody>
@@ -4066,7 +7026,7 @@
 </p:sld>
 </file>
 
-<file path=ppt/slides/slide14.xml><?xml version="1.0" encoding="utf-8"?>
+<file path=ppt/slides/slide23.xml><?xml version="1.0" encoding="utf-8"?>
 <p:sld xmlns:a="http://schemas.openxmlformats.org/drawingml/2006/main" xmlns:r="http://schemas.openxmlformats.org/officeDocument/2006/relationships" xmlns:p="http://schemas.openxmlformats.org/presentationml/2006/main">
   <p:cSld>
     <p:spTree>
@@ -4103,7 +7063,7 @@
             </a:pPr>
             <a:r>
               <a:rPr/>
-              <a:t>The partialling-out score</a:t>
+              <a:t>Use a different score</a:t>
             </a:r>
           </a:p>
         </p:txBody>
@@ -4228,9 +7188,6 @@
                           <m:r>
                             <m:t>θ</m:t>
                           </m:r>
-                          <m:r>
-                            <m:t> </m:t>
-                          </m:r>
                           <m:d>
                             <m:dPr>
                               <m:begChr m:val="("/>
@@ -4530,76 +7487,46 @@
                 </a14:m>
                 <a:r>
                   <a:rPr/>
-                  <a:t>.</a:t>
+                  <a:t>. Solving </a:t>
+                </a:r>
+                <a14:m>
+                  <m:oMath xmlns:m="http://schemas.openxmlformats.org/officeDocument/2006/math">
+                    <m:r>
+                      <m:rPr>
+                        <m:sty m:val="p"/>
+                        <m:scr m:val="double-struck"/>
+                      </m:rPr>
+                      <m:t>E</m:t>
+                    </m:r>
+                    <m:d>
+                      <m:dPr>
+                        <m:begChr m:val="["/>
+                        <m:sepChr m:val=""/>
+                        <m:endChr m:val="]"/>
+                        <m:grow/>
+                      </m:dPr>
+                      <m:e>
+                        <m:r>
+                          <m:t>ψ</m:t>
+                        </m:r>
+                      </m:e>
+                    </m:d>
+                    <m:r>
+                      <m:rPr>
+                        <m:sty m:val="p"/>
+                      </m:rPr>
+                      <m:t>=</m:t>
+                    </m:r>
+                    <m:r>
+                      <m:t>0</m:t>
+                    </m:r>
+                  </m:oMath>
+                </a14:m>
+                <a:r>
+                  <a:rPr/>
+                  <a:t>:</a:t>
                 </a:r>
               </a:p>
-            </p:txBody>
-          </p:sp>
-        </mc:Choice>
-      </mc:AlternateContent>
-    </p:spTree>
-  </p:cSld>
-</p:sld>
-</file>
-
-<file path=ppt/slides/slide15.xml><?xml version="1.0" encoding="utf-8"?>
-<p:sld xmlns:a="http://schemas.openxmlformats.org/drawingml/2006/main" xmlns:r="http://schemas.openxmlformats.org/officeDocument/2006/relationships" xmlns:p="http://schemas.openxmlformats.org/presentationml/2006/main">
-  <p:cSld>
-    <p:spTree>
-      <p:nvGrpSpPr>
-        <p:cNvPr id="1" name=""/>
-        <p:cNvGrpSpPr/>
-        <p:nvPr/>
-      </p:nvGrpSpPr>
-      <p:grpSpPr>
-        <a:xfrm>
-          <a:off x="0" y="0"/>
-          <a:ext cx="0" cy="0"/>
-          <a:chOff x="0" y="0"/>
-          <a:chExt cx="0" cy="0"/>
-        </a:xfrm>
-      </p:grpSpPr>
-      <p:sp>
-        <p:nvSpPr>
-          <p:cNvPr id="2" name="Title 1"/>
-          <p:cNvSpPr>
-            <a:spLocks noGrp="1"/>
-          </p:cNvSpPr>
-          <p:nvPr>
-            <p:ph type="title"/>
-          </p:nvPr>
-        </p:nvSpPr>
-        <p:spPr/>
-        <p:txBody>
-          <a:bodyPr/>
-          <a:lstStyle/>
-          <a:p>
-            <a:pPr lvl="0" indent="0" marL="0">
-              <a:buNone/>
-            </a:pPr>
-            <a:r>
-              <a:rPr/>
-              <a:t>Solving it gives FWL</a:t>
-            </a:r>
-          </a:p>
-        </p:txBody>
-      </p:sp>
-      <mc:AlternateContent xmlns:mc="http://schemas.openxmlformats.org/markup-compatibility/2006">
-        <mc:Choice xmlns:a14="http://schemas.microsoft.com/office/drawing/2010/main" Requires="a14">
-          <p:sp>
-            <p:nvSpPr>
-              <p:cNvPr id="3" name="Content Placeholder 2"/>
-              <p:cNvSpPr>
-                <a:spLocks noGrp="1"/>
-              </p:cNvSpPr>
-              <p:nvPr>
-                <p:ph idx="1"/>
-              </p:nvPr>
-            </p:nvSpPr>
-            <p:spPr/>
-            <p:txBody>
-              <a:bodyPr/>
-              <a:lstStyle/>
               <a:p>
                 <a:pPr lvl="0" indent="0" marL="0">
                   <a:buNone/>
@@ -4932,11 +7859,15 @@
                 </a:pPr>
                 <a:r>
                   <a:rPr/>
-                  <a:t>Precisely Frisch–Waugh–Lovell from Session 02: </a:t>
+                  <a:t>That is </a:t>
                 </a:r>
                 <a:r>
                   <a:rPr b="1"/>
-                  <a:t>regress residualised </a:t>
+                  <a:t>exactly Frisch–Waugh–Lovell</a:t>
+                </a:r>
+                <a:r>
+                  <a:rPr/>
+                  <a:t> from Session 02: regress residualised </a:t>
                 </a:r>
                 <a14:m>
                   <m:oMath xmlns:m="http://schemas.openxmlformats.org/officeDocument/2006/math">
@@ -4946,7 +7877,7 @@
                   </m:oMath>
                 </a14:m>
                 <a:r>
-                  <a:rPr b="1"/>
+                  <a:rPr/>
                   <a:t> on residualised </a:t>
                 </a:r>
                 <a14:m>
@@ -4957,12 +7888,8 @@
                   </m:oMath>
                 </a14:m>
                 <a:r>
-                  <a:rPr b="1"/>
-                  <a:t>.</a:t>
-                </a:r>
-                <a:r>
                   <a:rPr/>
-                  <a:t> Eight sessions later, the same theorem.</a:t>
+                  <a:t>. The only change is that the residualising is done by a forest instead of a projection matrix.</a:t>
                 </a:r>
               </a:p>
             </p:txBody>
@@ -4974,7 +7901,7 @@
 </p:sld>
 </file>
 
-<file path=ppt/slides/slide16.xml><?xml version="1.0" encoding="utf-8"?>
+<file path=ppt/slides/slide24.xml><?xml version="1.0" encoding="utf-8"?>
 <p:sld xmlns:a="http://schemas.openxmlformats.org/drawingml/2006/main" xmlns:r="http://schemas.openxmlformats.org/officeDocument/2006/relationships" xmlns:p="http://schemas.openxmlformats.org/presentationml/2006/main">
   <p:cSld>
     <p:spTree>
@@ -5011,7 +7938,7 @@
             </a:pPr>
             <a:r>
               <a:rPr/>
-              <a:t>The orthogonality property</a:t>
+              <a:t>What “orthogonal” means</a:t>
             </a:r>
           </a:p>
         </p:txBody>
@@ -5038,7 +7965,7 @@
                 </a:pPr>
                 <a:r>
                   <a:rPr/>
-                  <a:t>The Gateaux derivative of </a:t>
+                  <a:t>The directional derivative of </a:t>
                 </a:r>
                 <a14:m>
                   <m:oMath xmlns:m="http://schemas.openxmlformats.org/officeDocument/2006/math">
@@ -5066,18 +7993,15 @@
                 </a14:m>
                 <a:r>
                   <a:rPr/>
-                  <a:t> with respect to </a:t>
-                </a:r>
-                <a14:m>
-                  <m:oMath xmlns:m="http://schemas.openxmlformats.org/officeDocument/2006/math">
-                    <m:r>
-                      <m:t>η</m:t>
-                    </m:r>
-                  </m:oMath>
-                </a14:m>
+                  <a:t> with respect to the nuisance, at the truth, is </a:t>
+                </a:r>
+                <a:r>
+                  <a:rPr b="1"/>
+                  <a:t>zero</a:t>
+                </a:r>
                 <a:r>
                   <a:rPr/>
-                  <a:t>, at the truth, is zero:</a:t>
+                  <a:t>:</a:t>
                 </a:r>
               </a:p>
               <a:p>
@@ -5227,7 +8151,7 @@
                 </a:pPr>
                 <a:r>
                   <a:rPr/>
-                  <a:t>Consequently small errors in </a:t>
+                  <a:t>So a small error in </a:t>
                 </a:r>
                 <a14:m>
                   <m:oMath xmlns:m="http://schemas.openxmlformats.org/officeDocument/2006/math">
@@ -5245,7 +8169,7 @@
                 </a14:m>
                 <a:r>
                   <a:rPr/>
-                  <a:t> have only a </a:t>
+                  <a:t> has only a </a:t>
                 </a:r>
                 <a:r>
                   <a:rPr b="1"/>
@@ -5271,83 +8195,7 @@
                 </a14:m>
                 <a:r>
                   <a:rPr/>
-                  <a:t>.</a:t>
-                </a:r>
-              </a:p>
-            </p:txBody>
-          </p:sp>
-        </mc:Choice>
-      </mc:AlternateContent>
-    </p:spTree>
-  </p:cSld>
-</p:sld>
-</file>
-
-<file path=ppt/slides/slide17.xml><?xml version="1.0" encoding="utf-8"?>
-<p:sld xmlns:a="http://schemas.openxmlformats.org/drawingml/2006/main" xmlns:r="http://schemas.openxmlformats.org/officeDocument/2006/relationships" xmlns:p="http://schemas.openxmlformats.org/presentationml/2006/main">
-  <p:cSld>
-    <p:spTree>
-      <p:nvGrpSpPr>
-        <p:cNvPr id="1" name=""/>
-        <p:cNvGrpSpPr/>
-        <p:nvPr/>
-      </p:nvGrpSpPr>
-      <p:grpSpPr>
-        <a:xfrm>
-          <a:off x="0" y="0"/>
-          <a:ext cx="0" cy="0"/>
-          <a:chOff x="0" y="0"/>
-          <a:chExt cx="0" cy="0"/>
-        </a:xfrm>
-      </p:grpSpPr>
-      <p:sp>
-        <p:nvSpPr>
-          <p:cNvPr id="2" name="Title 1"/>
-          <p:cNvSpPr>
-            <a:spLocks noGrp="1"/>
-          </p:cNvSpPr>
-          <p:nvPr>
-            <p:ph type="title"/>
-          </p:nvPr>
-        </p:nvSpPr>
-        <p:spPr/>
-        <p:txBody>
-          <a:bodyPr/>
-          <a:lstStyle/>
-          <a:p>
-            <a:pPr lvl="0" indent="0" marL="0">
-              <a:buNone/>
-            </a:pPr>
-            <a:r>
-              <a:rPr/>
-              <a:t>Two slow rates multiply</a:t>
-            </a:r>
-          </a:p>
-        </p:txBody>
-      </p:sp>
-      <mc:AlternateContent xmlns:mc="http://schemas.openxmlformats.org/markup-compatibility/2006">
-        <mc:Choice xmlns:a14="http://schemas.microsoft.com/office/drawing/2010/main" Requires="a14">
-          <p:sp>
-            <p:nvSpPr>
-              <p:cNvPr id="3" name="Content Placeholder 2"/>
-              <p:cNvSpPr>
-                <a:spLocks noGrp="1"/>
-              </p:cNvSpPr>
-              <p:nvPr>
-                <p:ph idx="1"/>
-              </p:nvPr>
-            </p:nvSpPr>
-            <p:spPr/>
-            <p:txBody>
-              <a:bodyPr/>
-              <a:lstStyle/>
-              <a:p>
-                <a:pPr lvl="0" indent="0" marL="0">
-                  <a:buNone/>
-                </a:pPr>
-                <a:r>
-                  <a:rPr/>
-                  <a:t>The bias term becomes of order</a:t>
+                  <a:t>. The bias term becomes</a:t>
                 </a:r>
               </a:p>
               <a:p>
@@ -5473,13 +8321,167 @@
                   </m:oMathPara>
                 </a14:m>
               </a:p>
+            </p:txBody>
+          </p:sp>
+        </mc:Choice>
+      </mc:AlternateContent>
+    </p:spTree>
+  </p:cSld>
+</p:sld>
+</file>
+
+<file path=ppt/slides/slide25.xml><?xml version="1.0" encoding="utf-8"?>
+<p:sld xmlns:a="http://schemas.openxmlformats.org/drawingml/2006/main" xmlns:r="http://schemas.openxmlformats.org/officeDocument/2006/relationships" xmlns:p="http://schemas.openxmlformats.org/presentationml/2006/main">
+  <p:cSld>
+    <p:spTree>
+      <p:nvGrpSpPr>
+        <p:cNvPr id="1" name=""/>
+        <p:cNvGrpSpPr/>
+        <p:nvPr/>
+      </p:nvGrpSpPr>
+      <p:grpSpPr>
+        <a:xfrm>
+          <a:off x="0" y="0"/>
+          <a:ext cx="0" cy="0"/>
+          <a:chOff x="0" y="0"/>
+          <a:chExt cx="0" cy="0"/>
+        </a:xfrm>
+      </p:grpSpPr>
+      <p:sp>
+        <p:nvSpPr>
+          <p:cNvPr id="2" name="Title 1"/>
+          <p:cNvSpPr>
+            <a:spLocks noGrp="1"/>
+          </p:cNvSpPr>
+          <p:nvPr>
+            <p:ph type="title"/>
+          </p:nvPr>
+        </p:nvSpPr>
+        <p:spPr/>
+        <p:txBody>
+          <a:bodyPr/>
+          <a:lstStyle/>
+          <a:p>
+            <a:pPr lvl="0" indent="0" marL="0">
+              <a:buNone/>
+            </a:pPr>
+            <a:r>
+              <a:rPr/>
+              <a:t>Two slow rates multiply into a fast one</a:t>
+            </a:r>
+          </a:p>
+        </p:txBody>
+      </p:sp>
+      <p:pic>
+        <p:nvPicPr>
+          <p:cNvPr descr="slides_files/figure-pptx/cell-8-output-1.png" id="0" name="Picture 1"/>
+          <p:cNvPicPr>
+            <a:picLocks noGrp="1" noChangeAspect="1"/>
+          </p:cNvPicPr>
+          <p:nvPr/>
+        </p:nvPicPr>
+        <p:blipFill>
+          <a:blip r:embed="rId2"/>
+          <a:stretch>
+            <a:fillRect/>
+          </a:stretch>
+        </p:blipFill>
+        <p:spPr bwMode="auto">
+          <a:xfrm>
+            <a:off x="736600" y="1193800"/>
+            <a:ext cx="7683500" cy="3390900"/>
+          </a:xfrm>
+          <a:prstGeom prst="rect">
+            <a:avLst/>
+          </a:prstGeom>
+          <a:noFill/>
+          <a:ln w="9525">
+            <a:noFill/>
+            <a:headEnd/>
+            <a:tailEnd/>
+          </a:ln>
+        </p:spPr>
+      </p:pic>
+    </p:spTree>
+  </p:cSld>
+</p:sld>
+</file>
+
+<file path=ppt/slides/slide26.xml><?xml version="1.0" encoding="utf-8"?>
+<p:sld xmlns:a="http://schemas.openxmlformats.org/drawingml/2006/main" xmlns:r="http://schemas.openxmlformats.org/officeDocument/2006/relationships" xmlns:p="http://schemas.openxmlformats.org/presentationml/2006/main">
+  <p:cSld>
+    <p:spTree>
+      <p:nvGrpSpPr>
+        <p:cNvPr id="1" name=""/>
+        <p:cNvGrpSpPr/>
+        <p:nvPr/>
+      </p:nvGrpSpPr>
+      <p:grpSpPr>
+        <a:xfrm>
+          <a:off x="0" y="0"/>
+          <a:ext cx="0" cy="0"/>
+          <a:chOff x="0" y="0"/>
+          <a:chExt cx="0" cy="0"/>
+        </a:xfrm>
+      </p:grpSpPr>
+      <mc:AlternateContent xmlns:mc="http://schemas.openxmlformats.org/markup-compatibility/2006">
+        <mc:Choice xmlns:a14="http://schemas.microsoft.com/office/drawing/2010/main" Requires="a14">
+          <p:sp>
+            <p:nvSpPr>
+              <p:cNvPr id="3" name="Content Placeholder 2"/>
+              <p:cNvSpPr>
+                <a:spLocks noGrp="1"/>
+              </p:cNvSpPr>
+              <p:nvPr>
+                <p:ph idx="1"/>
+              </p:nvPr>
+            </p:nvSpPr>
+            <p:spPr/>
+            <p:txBody>
+              <a:bodyPr/>
+              <a:lstStyle/>
               <a:p>
                 <a:pPr lvl="0" indent="0" marL="0">
                   <a:buNone/>
                 </a:pPr>
                 <a:r>
                   <a:rPr/>
-                  <a:t>so it vanishes provided each nuisance converges faster than </a:t>
+                  <a:t>Neither nuisance need converge at </a:t>
+                </a:r>
+                <a14:m>
+                  <m:oMath xmlns:m="http://schemas.openxmlformats.org/officeDocument/2006/math">
+                    <m:sSup>
+                      <m:e>
+                        <m:r>
+                          <m:t>n</m:t>
+                        </m:r>
+                      </m:e>
+                      <m:sup>
+                        <m:r>
+                          <m:rPr>
+                            <m:sty m:val="p"/>
+                          </m:rPr>
+                          <m:t>−</m:t>
+                        </m:r>
+                        <m:r>
+                          <m:t>1</m:t>
+                        </m:r>
+                        <m:r>
+                          <m:rPr>
+                            <m:sty m:val="p"/>
+                          </m:rPr>
+                          <m:t>/</m:t>
+                        </m:r>
+                        <m:r>
+                          <m:t>2</m:t>
+                        </m:r>
+                      </m:sup>
+                    </m:sSup>
+                  </m:oMath>
+                </a14:m>
+                <a:r>
+                  <a:rPr/>
+                  <a:t>. Each need only beat </a:t>
                 </a:r>
                 <a14:m>
                   <m:oMath xmlns:m="http://schemas.openxmlformats.org/officeDocument/2006/math">
@@ -5514,28 +8516,15 @@
                 </a14:m>
                 <a:r>
                   <a:rPr/>
-                  <a:t> — a rate lasso, forests and boosting </a:t>
+                  <a:t> — a rate lasso, forests and boosting achieve under reasonable conditions. </a:t>
                 </a:r>
                 <a:r>
                   <a:rPr b="1"/>
-                  <a:t>can</a:t>
+                  <a:t>Two slow rates multiply into one fast enough rate.</a:t>
                 </a:r>
                 <a:r>
                   <a:rPr/>
-                  <a:t> achieve under reasonable conditions.</a:t>
-                </a:r>
-              </a:p>
-              <a:p>
-                <a:pPr lvl="0" indent="0" marL="0">
-                  <a:buNone/>
-                </a:pPr>
-                <a:r>
-                  <a:rPr b="1"/>
-                  <a:t>Note the structure: two slow rates multiply into one fast enough rate.</a:t>
-                </a:r>
-                <a:r>
-                  <a:rPr/>
-                  <a:t> That is the whole trick, and it is why the method is called </a:t>
+                  <a:t> That is why it is called </a:t>
                 </a:r>
                 <a:r>
                   <a:rPr i="1"/>
@@ -5555,7 +8544,7 @@
 </p:sld>
 </file>
 
-<file path=ppt/slides/slide18.xml><?xml version="1.0" encoding="utf-8"?>
+<file path=ppt/slides/slide27.xml><?xml version="1.0" encoding="utf-8"?>
 <p:sld xmlns:a="http://schemas.openxmlformats.org/drawingml/2006/main" xmlns:r="http://schemas.openxmlformats.org/officeDocument/2006/relationships" xmlns:p="http://schemas.openxmlformats.org/presentationml/2006/main">
   <p:cSld>
     <p:spTree>
@@ -5597,7 +8586,7 @@
             </a:pPr>
             <a:r>
               <a:rPr/>
-              <a:t>10.4 Cross-fitting</a:t>
+              <a:t>5 · Fix 2 — cross-fitting</a:t>
             </a:r>
           </a:p>
         </p:txBody>
@@ -5607,7 +8596,7 @@
 </p:sld>
 </file>
 
-<file path=ppt/slides/slide19.xml><?xml version="1.0" encoding="utf-8"?>
+<file path=ppt/slides/slide28.xml><?xml version="1.0" encoding="utf-8"?>
 <p:sld xmlns:a="http://schemas.openxmlformats.org/drawingml/2006/main" xmlns:r="http://schemas.openxmlformats.org/officeDocument/2006/relationships" xmlns:p="http://schemas.openxmlformats.org/presentationml/2006/main">
   <p:cSld>
     <p:spTree>
@@ -5644,7 +8633,7 @@
             </a:pPr>
             <a:r>
               <a:rPr/>
-              <a:t>The procedure</a:t>
+              <a:t>The remaining bias, and the split that removes it</a:t>
             </a:r>
           </a:p>
         </p:txBody>
@@ -5671,382 +8660,75 @@
                 </a:pPr>
                 <a:r>
                   <a:rPr/>
-                  <a:t>Split into </a:t>
+                  <a:t>Term </a:t>
                 </a:r>
                 <a14:m>
                   <m:oMath xmlns:m="http://schemas.openxmlformats.org/officeDocument/2006/math">
                     <m:r>
-                      <m:t>K</m:t>
+                      <m:t>c</m:t>
                     </m:r>
                   </m:oMath>
                 </a14:m>
                 <a:r>
                   <a:rPr/>
-                  <a:t> folds. For each </a:t>
+                  <a:t> exists because </a:t>
                 </a:r>
                 <a14:m>
                   <m:oMath xmlns:m="http://schemas.openxmlformats.org/officeDocument/2006/math">
-                    <m:r>
-                      <m:t>k</m:t>
-                    </m:r>
+                    <m:acc>
+                      <m:accPr>
+                        <m:chr m:val="̂"/>
+                      </m:accPr>
+                      <m:e>
+                        <m:r>
+                          <m:rPr>
+                            <m:sty m:val="p"/>
+                          </m:rPr>
+                          <m:t>ℓ</m:t>
+                        </m:r>
+                      </m:e>
+                    </m:acc>
                   </m:oMath>
                 </a14:m>
                 <a:r>
                   <a:rPr/>
-                  <a:t>:</a:t>
+                  <a:t> and </a:t>
+                </a:r>
+                <a14:m>
+                  <m:oMath xmlns:m="http://schemas.openxmlformats.org/officeDocument/2006/math">
+                    <m:acc>
+                      <m:accPr>
+                        <m:chr m:val="̂"/>
+                      </m:accPr>
+                      <m:e>
+                        <m:r>
+                          <m:t>m</m:t>
+                        </m:r>
+                      </m:e>
+                    </m:acc>
+                  </m:oMath>
+                </a14:m>
+                <a:r>
+                  <a:rPr/>
+                  <a:t> were fitted using the very observations at which they are then evaluated. That correlates the estimated nuisance with the residual.</a:t>
                 </a:r>
               </a:p>
               <a:p>
-                <a:pPr lvl="0" indent="-342900" marL="342900">
-                  <a:buAutoNum type="arabicPeriod"/>
+                <a:pPr lvl="0" indent="0" marL="0">
+                  <a:buNone/>
                 </a:pPr>
                 <a:r>
                   <a:rPr/>
-                  <a:t>Estimate </a:t>
-                </a:r>
-                <a14:m>
-                  <m:oMath xmlns:m="http://schemas.openxmlformats.org/officeDocument/2006/math">
-                    <m:sSup>
-                      <m:e>
-                        <m:acc>
-                          <m:accPr>
-                            <m:chr m:val="̂"/>
-                          </m:accPr>
-                          <m:e>
-                            <m:r>
-                              <m:rPr>
-                                <m:sty m:val="p"/>
-                              </m:rPr>
-                              <m:t>ℓ</m:t>
-                            </m:r>
-                          </m:e>
-                        </m:acc>
-                      </m:e>
-                      <m:sup>
-                        <m:d>
-                          <m:dPr>
-                            <m:begChr m:val="("/>
-                            <m:sepChr m:val=""/>
-                            <m:endChr m:val=")"/>
-                            <m:grow/>
-                          </m:dPr>
-                          <m:e>
-                            <m:r>
-                              <m:rPr>
-                                <m:sty m:val="p"/>
-                              </m:rPr>
-                              <m:t>−</m:t>
-                            </m:r>
-                            <m:r>
-                              <m:t>k</m:t>
-                            </m:r>
-                          </m:e>
-                        </m:d>
-                      </m:sup>
-                    </m:sSup>
-                  </m:oMath>
-                </a14:m>
+                  <a:t>The fix is the one you already know from Session 04: </a:t>
+                </a:r>
+                <a:r>
+                  <a:rPr b="1"/>
+                  <a:t>never evaluate a fit on data it was fitted on</a:t>
+                </a:r>
                 <a:r>
                   <a:rPr/>
-                  <a:t> and </a:t>
-                </a:r>
-                <a14:m>
-                  <m:oMath xmlns:m="http://schemas.openxmlformats.org/officeDocument/2006/math">
-                    <m:sSup>
-                      <m:e>
-                        <m:acc>
-                          <m:accPr>
-                            <m:chr m:val="̂"/>
-                          </m:accPr>
-                          <m:e>
-                            <m:r>
-                              <m:t>m</m:t>
-                            </m:r>
-                          </m:e>
-                        </m:acc>
-                      </m:e>
-                      <m:sup>
-                        <m:d>
-                          <m:dPr>
-                            <m:begChr m:val="("/>
-                            <m:sepChr m:val=""/>
-                            <m:endChr m:val=")"/>
-                            <m:grow/>
-                          </m:dPr>
-                          <m:e>
-                            <m:r>
-                              <m:rPr>
-                                <m:sty m:val="p"/>
-                              </m:rPr>
-                              <m:t>−</m:t>
-                            </m:r>
-                            <m:r>
-                              <m:t>k</m:t>
-                            </m:r>
-                          </m:e>
-                        </m:d>
-                      </m:sup>
-                    </m:sSup>
-                  </m:oMath>
-                </a14:m>
-                <a:r>
-                  <a:rPr/>
-                  <a:t> on all folds </a:t>
-                </a:r>
-                <a:r>
-                  <a:rPr b="1"/>
-                  <a:t>except</a:t>
-                </a:r>
-                <a:r>
-                  <a:rPr/>
-                  <a:t> </a:t>
-                </a:r>
-                <a14:m>
-                  <m:oMath xmlns:m="http://schemas.openxmlformats.org/officeDocument/2006/math">
-                    <m:r>
-                      <m:t>k</m:t>
-                    </m:r>
-                  </m:oMath>
-                </a14:m>
-              </a:p>
-              <a:p>
-                <a:pPr lvl="0" indent="-342900" marL="342900">
-                  <a:buAutoNum type="arabicPeriod"/>
-                </a:pPr>
-                <a:r>
-                  <a:rPr/>
-                  <a:t>Form residuals </a:t>
-                </a:r>
-                <a:r>
-                  <a:rPr b="1"/>
-                  <a:t>on fold </a:t>
-                </a:r>
-                <a14:m>
-                  <m:oMath xmlns:m="http://schemas.openxmlformats.org/officeDocument/2006/math">
-                    <m:r>
-                      <m:t>k</m:t>
-                    </m:r>
-                  </m:oMath>
-                </a14:m>
-                <a:r>
-                  <a:rPr/>
-                  <a:t>: </a:t>
-                </a:r>
-                <a14:m>
-                  <m:oMath xmlns:m="http://schemas.openxmlformats.org/officeDocument/2006/math">
-                    <m:sSub>
-                      <m:e>
-                        <m:acc>
-                          <m:accPr>
-                            <m:chr m:val="̃"/>
-                          </m:accPr>
-                          <m:e>
-                            <m:r>
-                              <m:t>Y</m:t>
-                            </m:r>
-                          </m:e>
-                        </m:acc>
-                      </m:e>
-                      <m:sub>
-                        <m:r>
-                          <m:t>i</m:t>
-                        </m:r>
-                      </m:sub>
-                    </m:sSub>
-                    <m:r>
-                      <m:rPr>
-                        <m:sty m:val="p"/>
-                      </m:rPr>
-                      <m:t>=</m:t>
-                    </m:r>
-                    <m:sSub>
-                      <m:e>
-                        <m:r>
-                          <m:t>Y</m:t>
-                        </m:r>
-                      </m:e>
-                      <m:sub>
-                        <m:r>
-                          <m:t>i</m:t>
-                        </m:r>
-                      </m:sub>
-                    </m:sSub>
-                    <m:r>
-                      <m:rPr>
-                        <m:sty m:val="p"/>
-                      </m:rPr>
-                      <m:t>−</m:t>
-                    </m:r>
-                    <m:sSup>
-                      <m:e>
-                        <m:acc>
-                          <m:accPr>
-                            <m:chr m:val="̂"/>
-                          </m:accPr>
-                          <m:e>
-                            <m:r>
-                              <m:rPr>
-                                <m:sty m:val="p"/>
-                              </m:rPr>
-                              <m:t>ℓ</m:t>
-                            </m:r>
-                          </m:e>
-                        </m:acc>
-                      </m:e>
-                      <m:sup>
-                        <m:d>
-                          <m:dPr>
-                            <m:begChr m:val="("/>
-                            <m:sepChr m:val=""/>
-                            <m:endChr m:val=")"/>
-                            <m:grow/>
-                          </m:dPr>
-                          <m:e>
-                            <m:r>
-                              <m:rPr>
-                                <m:sty m:val="p"/>
-                              </m:rPr>
-                              <m:t>−</m:t>
-                            </m:r>
-                            <m:r>
-                              <m:t>k</m:t>
-                            </m:r>
-                          </m:e>
-                        </m:d>
-                      </m:sup>
-                    </m:sSup>
-                    <m:d>
-                      <m:dPr>
-                        <m:begChr m:val="("/>
-                        <m:sepChr m:val=""/>
-                        <m:endChr m:val=")"/>
-                        <m:grow/>
-                      </m:dPr>
-                      <m:e>
-                        <m:sSub>
-                          <m:e>
-                            <m:r>
-                              <m:t>X</m:t>
-                            </m:r>
-                          </m:e>
-                          <m:sub>
-                            <m:r>
-                              <m:t>i</m:t>
-                            </m:r>
-                          </m:sub>
-                        </m:sSub>
-                      </m:e>
-                    </m:d>
-                  </m:oMath>
-                </a14:m>
-                <a:r>
-                  <a:rPr/>
-                  <a:t>, </a:t>
-                </a:r>
-                <a14:m>
-                  <m:oMath xmlns:m="http://schemas.openxmlformats.org/officeDocument/2006/math">
-                    <m:sSub>
-                      <m:e>
-                        <m:acc>
-                          <m:accPr>
-                            <m:chr m:val="̃"/>
-                          </m:accPr>
-                          <m:e>
-                            <m:r>
-                              <m:t>D</m:t>
-                            </m:r>
-                          </m:e>
-                        </m:acc>
-                      </m:e>
-                      <m:sub>
-                        <m:r>
-                          <m:t>i</m:t>
-                        </m:r>
-                      </m:sub>
-                    </m:sSub>
-                    <m:r>
-                      <m:rPr>
-                        <m:sty m:val="p"/>
-                      </m:rPr>
-                      <m:t>=</m:t>
-                    </m:r>
-                    <m:sSub>
-                      <m:e>
-                        <m:r>
-                          <m:t>D</m:t>
-                        </m:r>
-                      </m:e>
-                      <m:sub>
-                        <m:r>
-                          <m:t>i</m:t>
-                        </m:r>
-                      </m:sub>
-                    </m:sSub>
-                    <m:r>
-                      <m:rPr>
-                        <m:sty m:val="p"/>
-                      </m:rPr>
-                      <m:t>−</m:t>
-                    </m:r>
-                    <m:sSup>
-                      <m:e>
-                        <m:acc>
-                          <m:accPr>
-                            <m:chr m:val="̂"/>
-                          </m:accPr>
-                          <m:e>
-                            <m:r>
-                              <m:t>m</m:t>
-                            </m:r>
-                          </m:e>
-                        </m:acc>
-                      </m:e>
-                      <m:sup>
-                        <m:d>
-                          <m:dPr>
-                            <m:begChr m:val="("/>
-                            <m:sepChr m:val=""/>
-                            <m:endChr m:val=")"/>
-                            <m:grow/>
-                          </m:dPr>
-                          <m:e>
-                            <m:r>
-                              <m:rPr>
-                                <m:sty m:val="p"/>
-                              </m:rPr>
-                              <m:t>−</m:t>
-                            </m:r>
-                            <m:r>
-                              <m:t>k</m:t>
-                            </m:r>
-                          </m:e>
-                        </m:d>
-                      </m:sup>
-                    </m:sSup>
-                    <m:d>
-                      <m:dPr>
-                        <m:begChr m:val="("/>
-                        <m:sepChr m:val=""/>
-                        <m:endChr m:val=")"/>
-                        <m:grow/>
-                      </m:dPr>
-                      <m:e>
-                        <m:sSub>
-                          <m:e>
-                            <m:r>
-                              <m:t>X</m:t>
-                            </m:r>
-                          </m:e>
-                          <m:sub>
-                            <m:r>
-                              <m:t>i</m:t>
-                            </m:r>
-                          </m:sub>
-                        </m:sSub>
-                      </m:e>
-                    </m:d>
-                  </m:oMath>
-                </a14:m>
+                  <a:t>. Here it is applied to the nuisance step.</a:t>
+                </a:r>
               </a:p>
             </p:txBody>
           </p:sp>
@@ -6057,7 +8739,391 @@
 </p:sld>
 </file>
 
-<file path=ppt/slides/slide2.xml><?xml version="1.0" encoding="utf-8"?>
+<file path=ppt/slides/slide29.xml><?xml version="1.0" encoding="utf-8"?>
+<p:sld xmlns:a="http://schemas.openxmlformats.org/drawingml/2006/main" xmlns:r="http://schemas.openxmlformats.org/officeDocument/2006/relationships" xmlns:p="http://schemas.openxmlformats.org/presentationml/2006/main">
+  <p:cSld>
+    <p:spTree>
+      <p:nvGrpSpPr>
+        <p:cNvPr id="1" name=""/>
+        <p:cNvGrpSpPr/>
+        <p:nvPr/>
+      </p:nvGrpSpPr>
+      <p:grpSpPr>
+        <a:xfrm>
+          <a:off x="0" y="0"/>
+          <a:ext cx="0" cy="0"/>
+          <a:chOff x="0" y="0"/>
+          <a:chExt cx="0" cy="0"/>
+        </a:xfrm>
+      </p:grpSpPr>
+      <p:sp>
+        <p:nvSpPr>
+          <p:cNvPr id="2" name="Title 1"/>
+          <p:cNvSpPr>
+            <a:spLocks noGrp="1"/>
+          </p:cNvSpPr>
+          <p:nvPr>
+            <p:ph type="title"/>
+          </p:nvPr>
+        </p:nvSpPr>
+        <p:spPr/>
+        <p:txBody>
+          <a:bodyPr/>
+          <a:lstStyle/>
+          <a:p>
+            <a:pPr lvl="0" indent="0" marL="0">
+              <a:buNone/>
+            </a:pPr>
+            <a:r>
+              <a:rPr/>
+              <a:t>The procedure, drawn</a:t>
+            </a:r>
+          </a:p>
+        </p:txBody>
+      </p:sp>
+      <p:pic>
+        <p:nvPicPr>
+          <p:cNvPr descr="slides_files/figure-pptx/cell-9-output-1.png" id="0" name="Picture 1"/>
+          <p:cNvPicPr>
+            <a:picLocks noGrp="1" noChangeAspect="1"/>
+          </p:cNvPicPr>
+          <p:nvPr/>
+        </p:nvPicPr>
+        <p:blipFill>
+          <a:blip r:embed="rId2"/>
+          <a:stretch>
+            <a:fillRect/>
+          </a:stretch>
+        </p:blipFill>
+        <p:spPr bwMode="auto">
+          <a:xfrm>
+            <a:off x="457200" y="1257300"/>
+            <a:ext cx="8229600" cy="3263900"/>
+          </a:xfrm>
+          <a:prstGeom prst="rect">
+            <a:avLst/>
+          </a:prstGeom>
+          <a:noFill/>
+          <a:ln w="9525">
+            <a:noFill/>
+            <a:headEnd/>
+            <a:tailEnd/>
+          </a:ln>
+        </p:spPr>
+      </p:pic>
+    </p:spTree>
+  </p:cSld>
+</p:sld>
+</file>
+
+<file path=ppt/slides/slide3.xml><?xml version="1.0" encoding="utf-8"?>
+<p:sld xmlns:a="http://schemas.openxmlformats.org/drawingml/2006/main" xmlns:r="http://schemas.openxmlformats.org/officeDocument/2006/relationships" xmlns:p="http://schemas.openxmlformats.org/presentationml/2006/main">
+  <p:cSld>
+    <p:spTree>
+      <p:nvGrpSpPr>
+        <p:cNvPr id="1" name=""/>
+        <p:cNvGrpSpPr/>
+        <p:nvPr/>
+      </p:nvGrpSpPr>
+      <p:grpSpPr>
+        <a:xfrm>
+          <a:off x="0" y="0"/>
+          <a:ext cx="0" cy="0"/>
+          <a:chOff x="0" y="0"/>
+          <a:chExt cx="0" cy="0"/>
+        </a:xfrm>
+      </p:grpSpPr>
+      <p:sp>
+        <p:nvSpPr>
+          <p:cNvPr id="2" name="Title 1"/>
+          <p:cNvSpPr>
+            <a:spLocks noGrp="1"/>
+          </p:cNvSpPr>
+          <p:nvPr>
+            <p:ph type="title"/>
+          </p:nvPr>
+        </p:nvSpPr>
+        <p:spPr/>
+        <p:txBody>
+          <a:bodyPr/>
+          <a:lstStyle/>
+          <a:p>
+            <a:pPr lvl="0" indent="0" marL="0">
+              <a:buNone/>
+            </a:pPr>
+            <a:r>
+              <a:rPr/>
+              <a:t>Outline</a:t>
+            </a:r>
+          </a:p>
+        </p:txBody>
+      </p:sp>
+      <p:graphicFrame>
+        <p:nvGraphicFramePr>
+          <p:cNvPr id="6" name="Content Placeholder 5"/>
+          <p:cNvGraphicFramePr>
+            <a:graphicFrameLocks noGrp="1"/>
+          </p:cNvGraphicFramePr>
+          <p:nvPr>
+            <p:ph idx="1"/>
+          </p:nvPr>
+        </p:nvGraphicFramePr>
+        <p:xfrm>
+          <a:off x="457200" y="1193800"/>
+          <a:ext cx="8229600" cy="3390900"/>
+        </p:xfrm>
+        <a:graphic>
+          <a:graphicData uri="http://schemas.openxmlformats.org/drawingml/2006/table">
+            <a:tbl>
+              <a:tblPr firstRow="0" bandRow="1">
+                <a:tableStyleId>{5C22544A-7EE6-4342-B048-85BDC9FD1C3A}</a:tableStyleId>
+              </a:tblPr>
+              <a:tblGrid>
+                <a:gridCol w="4114800"/>
+                <a:gridCol w="4114800"/>
+              </a:tblGrid>
+              <a:tr h="0">
+                <a:tc>
+                  <a:txBody>
+                    <a:bodyPr/>
+                    <a:lstStyle/>
+                    <a:p>
+                      <a:pPr lvl="0" indent="0" marL="0">
+                        <a:buNone/>
+                      </a:pPr>
+                      <a:r>
+                        <a:rPr b="1"/>
+                        <a:t>1</a:t>
+                      </a:r>
+                    </a:p>
+                  </a:txBody>
+                </a:tc>
+                <a:tc>
+                  <a:txBody>
+                    <a:bodyPr/>
+                    <a:lstStyle/>
+                    <a:p>
+                      <a:pPr lvl="0" indent="0" marL="0">
+                        <a:buNone/>
+                      </a:pPr>
+                      <a:r>
+                        <a:rPr/>
+                        <a:t>Where we are, and what this adds</a:t>
+                      </a:r>
+                    </a:p>
+                  </a:txBody>
+                </a:tc>
+              </a:tr>
+              <a:tr h="0">
+                <a:tc>
+                  <a:txBody>
+                    <a:bodyPr/>
+                    <a:lstStyle/>
+                    <a:p>
+                      <a:pPr lvl="0" indent="0" marL="0">
+                        <a:buNone/>
+                      </a:pPr>
+                      <a:r>
+                        <a:rPr b="1"/>
+                        <a:t>2</a:t>
+                      </a:r>
+                    </a:p>
+                  </a:txBody>
+                </a:tc>
+                <a:tc>
+                  <a:txBody>
+                    <a:bodyPr/>
+                    <a:lstStyle/>
+                    <a:p>
+                      <a:pPr lvl="0" indent="0" marL="0">
+                        <a:buNone/>
+                      </a:pPr>
+                      <a:r>
+                        <a:rPr/>
+                        <a:t>The setup, and what identification requires</a:t>
+                      </a:r>
+                    </a:p>
+                  </a:txBody>
+                </a:tc>
+              </a:tr>
+              <a:tr h="0">
+                <a:tc>
+                  <a:txBody>
+                    <a:bodyPr/>
+                    <a:lstStyle/>
+                    <a:p>
+                      <a:pPr lvl="0" indent="0" marL="0">
+                        <a:buNone/>
+                      </a:pPr>
+                      <a:r>
+                        <a:rPr b="1"/>
+                        <a:t>3</a:t>
+                      </a:r>
+                    </a:p>
+                  </a:txBody>
+                </a:tc>
+                <a:tc>
+                  <a:txBody>
+                    <a:bodyPr/>
+                    <a:lstStyle/>
+                    <a:p>
+                      <a:pPr lvl="0" indent="0" marL="0">
+                        <a:buNone/>
+                      </a:pPr>
+                      <a:r>
+                        <a:rPr/>
+                        <a:t>Why the naive plug-in fails</a:t>
+                      </a:r>
+                    </a:p>
+                  </a:txBody>
+                </a:tc>
+              </a:tr>
+              <a:tr h="0">
+                <a:tc>
+                  <a:txBody>
+                    <a:bodyPr/>
+                    <a:lstStyle/>
+                    <a:p>
+                      <a:pPr lvl="0" indent="0" marL="0">
+                        <a:buNone/>
+                      </a:pPr>
+                      <a:r>
+                        <a:rPr b="1"/>
+                        <a:t>4</a:t>
+                      </a:r>
+                    </a:p>
+                  </a:txBody>
+                </a:tc>
+                <a:tc>
+                  <a:txBody>
+                    <a:bodyPr/>
+                    <a:lstStyle/>
+                    <a:p>
+                      <a:pPr lvl="0" indent="0" marL="0">
+                        <a:buNone/>
+                      </a:pPr>
+                      <a:r>
+                        <a:rPr/>
+                        <a:t>Fix 1 — Neyman orthogonality</a:t>
+                      </a:r>
+                    </a:p>
+                  </a:txBody>
+                </a:tc>
+              </a:tr>
+              <a:tr h="0">
+                <a:tc>
+                  <a:txBody>
+                    <a:bodyPr/>
+                    <a:lstStyle/>
+                    <a:p>
+                      <a:pPr lvl="0" indent="0" marL="0">
+                        <a:buNone/>
+                      </a:pPr>
+                      <a:r>
+                        <a:rPr b="1"/>
+                        <a:t>5</a:t>
+                      </a:r>
+                    </a:p>
+                  </a:txBody>
+                </a:tc>
+                <a:tc>
+                  <a:txBody>
+                    <a:bodyPr/>
+                    <a:lstStyle/>
+                    <a:p>
+                      <a:pPr lvl="0" indent="0" marL="0">
+                        <a:buNone/>
+                      </a:pPr>
+                      <a:r>
+                        <a:rPr/>
+                        <a:t>Fix 2 — cross-fitting</a:t>
+                      </a:r>
+                    </a:p>
+                  </a:txBody>
+                </a:tc>
+              </a:tr>
+              <a:tr h="0">
+                <a:tc>
+                  <a:txBody>
+                    <a:bodyPr/>
+                    <a:lstStyle/>
+                    <a:p>
+                      <a:pPr lvl="0" indent="0" marL="0">
+                        <a:buNone/>
+                      </a:pPr>
+                      <a:r>
+                        <a:rPr b="1"/>
+                        <a:t>6</a:t>
+                      </a:r>
+                    </a:p>
+                  </a:txBody>
+                </a:tc>
+                <a:tc>
+                  <a:txBody>
+                    <a:bodyPr/>
+                    <a:lstStyle/>
+                    <a:p>
+                      <a:pPr lvl="0" indent="0" marL="0">
+                        <a:buNone/>
+                      </a:pPr>
+                      <a:r>
+                        <a:rPr/>
+                        <a:t>Heterogeneous effects</a:t>
+                      </a:r>
+                    </a:p>
+                  </a:txBody>
+                </a:tc>
+              </a:tr>
+              <a:tr h="0">
+                <a:tc>
+                  <a:txBody>
+                    <a:bodyPr/>
+                    <a:lstStyle/>
+                    <a:p>
+                      <a:pPr lvl="0" indent="0" marL="0">
+                        <a:buNone/>
+                      </a:pPr>
+                      <a:r>
+                        <a:rPr b="1"/>
+                        <a:t>7</a:t>
+                      </a:r>
+                    </a:p>
+                  </a:txBody>
+                </a:tc>
+                <a:tc>
+                  <a:txBody>
+                    <a:bodyPr/>
+                    <a:lstStyle/>
+                    <a:p>
+                      <a:pPr lvl="0" indent="0" marL="0">
+                        <a:buNone/>
+                      </a:pPr>
+                      <a:r>
+                        <a:rPr/>
+                        <a:t>What this does </a:t>
+                      </a:r>
+                      <a:r>
+                        <a:rPr i="1"/>
+                        <a:t>not</a:t>
+                      </a:r>
+                      <a:r>
+                        <a:rPr/>
+                        <a:t> fix</a:t>
+                      </a:r>
+                    </a:p>
+                  </a:txBody>
+                </a:tc>
+              </a:tr>
+            </a:tbl>
+          </a:graphicData>
+        </a:graphic>
+      </p:graphicFrame>
+    </p:spTree>
+  </p:cSld>
+</p:sld>
+</file>
+
+<file path=ppt/slides/slide30.xml><?xml version="1.0" encoding="utf-8"?>
 <p:sld xmlns:a="http://schemas.openxmlformats.org/drawingml/2006/main" xmlns:r="http://schemas.openxmlformats.org/officeDocument/2006/relationships" xmlns:p="http://schemas.openxmlformats.org/presentationml/2006/main">
   <p:cSld>
     <p:spTree>
@@ -6090,14 +9156,11 @@
           <a:lstStyle/>
           <a:p>
             <a:pPr lvl="0" indent="0" marL="0">
-              <a:spcBef>
-                <a:spcPts val="3000"/>
-              </a:spcBef>
               <a:buNone/>
             </a:pPr>
             <a:r>
-              <a:rPr b="1"/>
-              <a:t>You have a superb predictive model. Why can’t you choose a policy with it?</a:t>
+              <a:rPr/>
+              <a:t>Every observation gets a residual, and no observation’s residual used a nuisance fitted on itself.</a:t>
             </a:r>
           </a:p>
         </p:txBody>
@@ -6107,7 +9170,7 @@
 </p:sld>
 </file>
 
-<file path=ppt/slides/slide20.xml><?xml version="1.0" encoding="utf-8"?>
+<file path=ppt/slides/slide31.xml><?xml version="1.0" encoding="utf-8"?>
 <p:sld xmlns:a="http://schemas.openxmlformats.org/drawingml/2006/main" xmlns:r="http://schemas.openxmlformats.org/officeDocument/2006/relationships" xmlns:p="http://schemas.openxmlformats.org/presentationml/2006/main">
   <p:cSld>
     <p:spTree>
@@ -6144,7 +9207,7 @@
             </a:pPr>
             <a:r>
               <a:rPr/>
-              <a:t>Then pool</a:t>
+              <a:t>Then pool, and get a standard error</a:t>
             </a:r>
           </a:p>
         </p:txBody>
@@ -6302,20 +9365,15 @@
                           </m:nary>
                         </m:den>
                       </m:f>
-                    </m:oMath>
-                  </m:oMathPara>
-                </a14:m>
-              </a:p>
-              <a:p>
-                <a:pPr lvl="0" indent="0" marL="0">
-                  <a:buNone/>
-                </a:pPr>
-                <a14:m>
-                  <m:oMathPara xmlns:m="http://schemas.openxmlformats.org/officeDocument/2006/math">
-                    <m:oMathParaPr>
-                      <m:jc m:val="center"/>
-                    </m:oMathParaPr>
-                    <m:oMath>
+                      <m:r>
+                        <m:rPr>
+                          <m:sty m:val="p"/>
+                        </m:rPr>
+                        <m:t>,</m:t>
+                      </m:r>
+                      <m:r>
+                        <m:t>  </m:t>
+                      </m:r>
                       <m:sSup>
                         <m:e>
                           <m:acc>
@@ -6571,27 +9629,144 @@
                   <a:buNone/>
                 </a:pPr>
                 <a:r>
+                  <a:rPr b="1"/>
+                  <a:t>Result:</a:t>
+                </a:r>
+                <a:r>
                   <a:rPr/>
-                  <a:t>Because the nuisance was never fitted on the observation where it is evaluated, </a:t>
-                </a:r>
-                <a:r>
-                  <a:rPr b="1"/>
-                  <a:t>term </a:t>
+                  <a:t> </a:t>
                 </a:r>
                 <a14:m>
                   <m:oMath xmlns:m="http://schemas.openxmlformats.org/officeDocument/2006/math">
+                    <m:rad>
+                      <m:radPr>
+                        <m:degHide m:val="on"/>
+                      </m:radPr>
+                      <m:deg/>
+                      <m:e>
+                        <m:r>
+                          <m:t>n</m:t>
+                        </m:r>
+                      </m:e>
+                    </m:rad>
+                    <m:d>
+                      <m:dPr>
+                        <m:begChr m:val="("/>
+                        <m:sepChr m:val=""/>
+                        <m:endChr m:val=")"/>
+                        <m:grow/>
+                      </m:dPr>
+                      <m:e>
+                        <m:acc>
+                          <m:accPr>
+                            <m:chr m:val="̂"/>
+                          </m:accPr>
+                          <m:e>
+                            <m:r>
+                              <m:t>θ</m:t>
+                            </m:r>
+                          </m:e>
+                        </m:acc>
+                        <m:r>
+                          <m:rPr>
+                            <m:sty m:val="p"/>
+                          </m:rPr>
+                          <m:t>−</m:t>
+                        </m:r>
+                        <m:sSub>
+                          <m:e>
+                            <m:r>
+                              <m:t>θ</m:t>
+                            </m:r>
+                          </m:e>
+                          <m:sub>
+                            <m:r>
+                              <m:t>0</m:t>
+                            </m:r>
+                          </m:sub>
+                        </m:sSub>
+                      </m:e>
+                    </m:d>
                     <m:r>
-                      <m:t>c</m:t>
+                      <m:rPr>
+                        <m:sty m:val="p"/>
+                      </m:rPr>
+                      <m:t>→</m:t>
                     </m:r>
+                    <m:r>
+                      <m:t>N</m:t>
+                    </m:r>
+                    <m:d>
+                      <m:dPr>
+                        <m:begChr m:val="("/>
+                        <m:sepChr m:val=""/>
+                        <m:endChr m:val=")"/>
+                        <m:grow/>
+                      </m:dPr>
+                      <m:e>
+                        <m:r>
+                          <m:t>0</m:t>
+                        </m:r>
+                        <m:r>
+                          <m:rPr>
+                            <m:sty m:val="p"/>
+                          </m:rPr>
+                          <m:t>,</m:t>
+                        </m:r>
+                        <m:sSup>
+                          <m:e>
+                            <m:r>
+                              <m:t>σ</m:t>
+                            </m:r>
+                          </m:e>
+                          <m:sup>
+                            <m:r>
+                              <m:t>2</m:t>
+                            </m:r>
+                          </m:sup>
+                        </m:sSup>
+                      </m:e>
+                    </m:d>
                   </m:oMath>
                 </a14:m>
                 <a:r>
+                  <a:rPr/>
+                  <a:t>. Ordinary confidence intervals are valid — despite black-box learners in the nuisance step. That is the whole point of the session.</a:t>
+                </a:r>
+              </a:p>
+              <a:p>
+                <a:pPr lvl="0" indent="0" marL="0">
+                  <a:buNone/>
+                </a:pPr>
+                <a:r>
+                  <a:rPr/>
+                  <a:t>Repeat over several random splits and take the </a:t>
+                </a:r>
+                <a:r>
                   <a:rPr b="1"/>
-                  <a:t> vanishes</a:t>
+                  <a:t>median</a:t>
                 </a:r>
                 <a:r>
                   <a:rPr/>
-                  <a:t>.</a:t>
+                  <a:t> of </a:t>
+                </a:r>
+                <a14:m>
+                  <m:oMath xmlns:m="http://schemas.openxmlformats.org/officeDocument/2006/math">
+                    <m:acc>
+                      <m:accPr>
+                        <m:chr m:val="̂"/>
+                      </m:accPr>
+                      <m:e>
+                        <m:r>
+                          <m:t>θ</m:t>
+                        </m:r>
+                      </m:e>
+                    </m:acc>
+                  </m:oMath>
+                </a14:m>
+                <a:r>
+                  <a:rPr/>
+                  <a:t>, to remove split sensitivity.</a:t>
                 </a:r>
               </a:p>
             </p:txBody>
@@ -6603,7 +9778,7 @@
 </p:sld>
 </file>
 
-<file path=ppt/slides/slide21.xml><?xml version="1.0" encoding="utf-8"?>
+<file path=ppt/slides/slide32.xml><?xml version="1.0" encoding="utf-8"?>
 <p:sld xmlns:a="http://schemas.openxmlformats.org/drawingml/2006/main" xmlns:r="http://schemas.openxmlformats.org/officeDocument/2006/relationships" xmlns:p="http://schemas.openxmlformats.org/presentationml/2006/main">
   <p:cSld>
     <p:spTree>
@@ -6640,72 +9815,1549 @@
             </a:pPr>
             <a:r>
               <a:rPr/>
-              <a:t>Remove split sensitivity</a:t>
+              <a:t>Now do it on the real question</a:t>
             </a:r>
           </a:p>
         </p:txBody>
       </p:sp>
-      <mc:AlternateContent xmlns:mc="http://schemas.openxmlformats.org/markup-compatibility/2006">
-        <mc:Choice xmlns:a14="http://schemas.microsoft.com/office/drawing/2010/main" Requires="a14">
-          <p:sp>
-            <p:nvSpPr>
-              <p:cNvPr id="3" name="Content Placeholder 2"/>
-              <p:cNvSpPr>
-                <a:spLocks noGrp="1"/>
-              </p:cNvSpPr>
-              <p:nvPr>
-                <p:ph idx="1"/>
-              </p:nvPr>
-            </p:nvSpPr>
-            <p:spPr/>
-            <p:txBody>
-              <a:bodyPr/>
-              <a:lstStyle/>
-              <a:p>
-                <a:pPr lvl="0" indent="0" marL="0">
-                  <a:buNone/>
-                </a:pPr>
-                <a:r>
-                  <a:rPr/>
-                  <a:t>Repeat the whole procedure over several random splits and take the </a:t>
-                </a:r>
-                <a:r>
-                  <a:rPr b="1"/>
-                  <a:t>median</a:t>
-                </a:r>
-                <a:r>
-                  <a:rPr/>
-                  <a:t> of </a:t>
-                </a:r>
-                <a14:m>
-                  <m:oMath xmlns:m="http://schemas.openxmlformats.org/officeDocument/2006/math">
-                    <m:acc>
-                      <m:accPr>
-                        <m:chr m:val="̂"/>
-                      </m:accPr>
-                      <m:e>
-                        <m:r>
-                          <m:t>θ</m:t>
-                        </m:r>
-                      </m:e>
-                    </m:acc>
-                  </m:oMath>
-                </a14:m>
-                <a:r>
-                  <a:rPr/>
-                  <a:t>.</a:t>
-                </a:r>
-              </a:p>
-            </p:txBody>
-          </p:sp>
-        </mc:Choice>
-      </mc:AlternateContent>
+      <p:sp>
+        <p:nvSpPr>
+          <p:cNvPr id="3" name="Content Placeholder 2"/>
+          <p:cNvSpPr>
+            <a:spLocks noGrp="1"/>
+          </p:cNvSpPr>
+          <p:nvPr>
+            <p:ph idx="1"/>
+          </p:nvPr>
+        </p:nvSpPr>
+        <p:spPr/>
+        <p:txBody>
+          <a:bodyPr/>
+          <a:lstStyle/>
+          <a:p>
+            <a:pPr lvl="0" indent="0">
+              <a:buNone/>
+            </a:pPr>
+            <a:r>
+              <a:rPr b="1">
+                <a:solidFill>
+                  <a:srgbClr val="007020"/>
+                </a:solidFill>
+                <a:latin typeface="Courier"/>
+              </a:rPr>
+              <a:t>def</a:t>
+            </a:r>
+            <a:r>
+              <a:rPr>
+                <a:latin typeface="Courier"/>
+              </a:rPr>
+              <a:t> dml_real(seed, K</a:t>
+            </a:r>
+            <a:r>
+              <a:rPr>
+                <a:solidFill>
+                  <a:srgbClr val="666666"/>
+                </a:solidFill>
+                <a:latin typeface="Courier"/>
+              </a:rPr>
+              <a:t>=</a:t>
+            </a:r>
+            <a:r>
+              <a:rPr>
+                <a:solidFill>
+                  <a:srgbClr val="40A070"/>
+                </a:solidFill>
+                <a:latin typeface="Courier"/>
+              </a:rPr>
+              <a:t>5</a:t>
+            </a:r>
+            <a:r>
+              <a:rPr>
+                <a:latin typeface="Courier"/>
+              </a:rPr>
+              <a:t>):</a:t>
+            </a:r>
+            <a:br/>
+            <a:r>
+              <a:rPr>
+                <a:latin typeface="Courier"/>
+              </a:rPr>
+              <a:t>    n </a:t>
+            </a:r>
+            <a:r>
+              <a:rPr>
+                <a:solidFill>
+                  <a:srgbClr val="666666"/>
+                </a:solidFill>
+                <a:latin typeface="Courier"/>
+              </a:rPr>
+              <a:t>=</a:t>
+            </a:r>
+            <a:r>
+              <a:rPr>
+                <a:latin typeface="Courier"/>
+              </a:rPr>
+              <a:t> </a:t>
+            </a:r>
+            <a:r>
+              <a:rPr>
+                <a:solidFill>
+                  <a:srgbClr val="008000"/>
+                </a:solidFill>
+                <a:latin typeface="Courier"/>
+              </a:rPr>
+              <a:t>len</a:t>
+            </a:r>
+            <a:r>
+              <a:rPr>
+                <a:latin typeface="Courier"/>
+              </a:rPr>
+              <a:t>(Yr)</a:t>
+            </a:r>
+            <a:r>
+              <a:rPr>
+                <a:solidFill>
+                  <a:srgbClr val="666666"/>
+                </a:solidFill>
+                <a:latin typeface="Courier"/>
+              </a:rPr>
+              <a:t>;</a:t>
+            </a:r>
+            <a:r>
+              <a:rPr>
+                <a:latin typeface="Courier"/>
+              </a:rPr>
+              <a:t> ty, td </a:t>
+            </a:r>
+            <a:r>
+              <a:rPr>
+                <a:solidFill>
+                  <a:srgbClr val="666666"/>
+                </a:solidFill>
+                <a:latin typeface="Courier"/>
+              </a:rPr>
+              <a:t>=</a:t>
+            </a:r>
+            <a:r>
+              <a:rPr>
+                <a:latin typeface="Courier"/>
+              </a:rPr>
+              <a:t> np.zeros(n), np.zeros(n)</a:t>
+            </a:r>
+            <a:br/>
+            <a:r>
+              <a:rPr>
+                <a:latin typeface="Courier"/>
+              </a:rPr>
+              <a:t>    </a:t>
+            </a:r>
+            <a:r>
+              <a:rPr b="1">
+                <a:solidFill>
+                  <a:srgbClr val="007020"/>
+                </a:solidFill>
+                <a:latin typeface="Courier"/>
+              </a:rPr>
+              <a:t>for</a:t>
+            </a:r>
+            <a:r>
+              <a:rPr>
+                <a:latin typeface="Courier"/>
+              </a:rPr>
+              <a:t> tr, te </a:t>
+            </a:r>
+            <a:r>
+              <a:rPr b="1">
+                <a:solidFill>
+                  <a:srgbClr val="007020"/>
+                </a:solidFill>
+                <a:latin typeface="Courier"/>
+              </a:rPr>
+              <a:t>in</a:t>
+            </a:r>
+            <a:r>
+              <a:rPr>
+                <a:latin typeface="Courier"/>
+              </a:rPr>
+              <a:t> KFold(K, shuffle</a:t>
+            </a:r>
+            <a:r>
+              <a:rPr>
+                <a:solidFill>
+                  <a:srgbClr val="666666"/>
+                </a:solidFill>
+                <a:latin typeface="Courier"/>
+              </a:rPr>
+              <a:t>=</a:t>
+            </a:r>
+            <a:r>
+              <a:rPr>
+                <a:solidFill>
+                  <a:srgbClr val="19177C"/>
+                </a:solidFill>
+                <a:latin typeface="Courier"/>
+              </a:rPr>
+              <a:t>True</a:t>
+            </a:r>
+            <a:r>
+              <a:rPr>
+                <a:latin typeface="Courier"/>
+              </a:rPr>
+              <a:t>, random_state</a:t>
+            </a:r>
+            <a:r>
+              <a:rPr>
+                <a:solidFill>
+                  <a:srgbClr val="666666"/>
+                </a:solidFill>
+                <a:latin typeface="Courier"/>
+              </a:rPr>
+              <a:t>=</a:t>
+            </a:r>
+            <a:r>
+              <a:rPr>
+                <a:latin typeface="Courier"/>
+              </a:rPr>
+              <a:t>seed).split(Xr):</a:t>
+            </a:r>
+            <a:br/>
+            <a:r>
+              <a:rPr>
+                <a:latin typeface="Courier"/>
+              </a:rPr>
+              <a:t>        ty[te] </a:t>
+            </a:r>
+            <a:r>
+              <a:rPr>
+                <a:solidFill>
+                  <a:srgbClr val="666666"/>
+                </a:solidFill>
+                <a:latin typeface="Courier"/>
+              </a:rPr>
+              <a:t>=</a:t>
+            </a:r>
+            <a:r>
+              <a:rPr>
+                <a:latin typeface="Courier"/>
+              </a:rPr>
+              <a:t> Yr[te] </a:t>
+            </a:r>
+            <a:r>
+              <a:rPr>
+                <a:solidFill>
+                  <a:srgbClr val="666666"/>
+                </a:solidFill>
+                <a:latin typeface="Courier"/>
+              </a:rPr>
+              <a:t>-</a:t>
+            </a:r>
+            <a:r>
+              <a:rPr>
+                <a:latin typeface="Courier"/>
+              </a:rPr>
+              <a:t> RandomForestRegressor(</a:t>
+            </a:r>
+            <a:r>
+              <a:rPr>
+                <a:solidFill>
+                  <a:srgbClr val="40A070"/>
+                </a:solidFill>
+                <a:latin typeface="Courier"/>
+              </a:rPr>
+              <a:t>300</a:t>
+            </a:r>
+            <a:r>
+              <a:rPr>
+                <a:latin typeface="Courier"/>
+              </a:rPr>
+              <a:t>, min_samples_leaf</a:t>
+            </a:r>
+            <a:r>
+              <a:rPr>
+                <a:solidFill>
+                  <a:srgbClr val="666666"/>
+                </a:solidFill>
+                <a:latin typeface="Courier"/>
+              </a:rPr>
+              <a:t>=</a:t>
+            </a:r>
+            <a:r>
+              <a:rPr>
+                <a:solidFill>
+                  <a:srgbClr val="40A070"/>
+                </a:solidFill>
+                <a:latin typeface="Courier"/>
+              </a:rPr>
+              <a:t>5</a:t>
+            </a:r>
+            <a:r>
+              <a:rPr>
+                <a:latin typeface="Courier"/>
+              </a:rPr>
+              <a:t>, random_state</a:t>
+            </a:r>
+            <a:r>
+              <a:rPr>
+                <a:solidFill>
+                  <a:srgbClr val="666666"/>
+                </a:solidFill>
+                <a:latin typeface="Courier"/>
+              </a:rPr>
+              <a:t>=</a:t>
+            </a:r>
+            <a:r>
+              <a:rPr>
+                <a:solidFill>
+                  <a:srgbClr val="40A070"/>
+                </a:solidFill>
+                <a:latin typeface="Courier"/>
+              </a:rPr>
+              <a:t>0</a:t>
+            </a:r>
+            <a:r>
+              <a:rPr>
+                <a:latin typeface="Courier"/>
+              </a:rPr>
+              <a:t>,</a:t>
+            </a:r>
+            <a:br/>
+            <a:r>
+              <a:rPr>
+                <a:latin typeface="Courier"/>
+              </a:rPr>
+              <a:t>                                                n_jobs</a:t>
+            </a:r>
+            <a:r>
+              <a:rPr>
+                <a:solidFill>
+                  <a:srgbClr val="666666"/>
+                </a:solidFill>
+                <a:latin typeface="Courier"/>
+              </a:rPr>
+              <a:t>=-</a:t>
+            </a:r>
+            <a:r>
+              <a:rPr>
+                <a:solidFill>
+                  <a:srgbClr val="40A070"/>
+                </a:solidFill>
+                <a:latin typeface="Courier"/>
+              </a:rPr>
+              <a:t>1</a:t>
+            </a:r>
+            <a:r>
+              <a:rPr>
+                <a:latin typeface="Courier"/>
+              </a:rPr>
+              <a:t>).fit(Xr[tr], Yr[tr]).predict(Xr[te])</a:t>
+            </a:r>
+            <a:br/>
+            <a:r>
+              <a:rPr>
+                <a:latin typeface="Courier"/>
+              </a:rPr>
+              <a:t>        td[te] </a:t>
+            </a:r>
+            <a:r>
+              <a:rPr>
+                <a:solidFill>
+                  <a:srgbClr val="666666"/>
+                </a:solidFill>
+                <a:latin typeface="Courier"/>
+              </a:rPr>
+              <a:t>=</a:t>
+            </a:r>
+            <a:r>
+              <a:rPr>
+                <a:latin typeface="Courier"/>
+              </a:rPr>
+              <a:t> Dr[te] </a:t>
+            </a:r>
+            <a:r>
+              <a:rPr>
+                <a:solidFill>
+                  <a:srgbClr val="666666"/>
+                </a:solidFill>
+                <a:latin typeface="Courier"/>
+              </a:rPr>
+              <a:t>-</a:t>
+            </a:r>
+            <a:r>
+              <a:rPr>
+                <a:latin typeface="Courier"/>
+              </a:rPr>
+              <a:t> RandomForestClassifier(</a:t>
+            </a:r>
+            <a:r>
+              <a:rPr>
+                <a:solidFill>
+                  <a:srgbClr val="40A070"/>
+                </a:solidFill>
+                <a:latin typeface="Courier"/>
+              </a:rPr>
+              <a:t>300</a:t>
+            </a:r>
+            <a:r>
+              <a:rPr>
+                <a:latin typeface="Courier"/>
+              </a:rPr>
+              <a:t>, min_samples_leaf</a:t>
+            </a:r>
+            <a:r>
+              <a:rPr>
+                <a:solidFill>
+                  <a:srgbClr val="666666"/>
+                </a:solidFill>
+                <a:latin typeface="Courier"/>
+              </a:rPr>
+              <a:t>=</a:t>
+            </a:r>
+            <a:r>
+              <a:rPr>
+                <a:solidFill>
+                  <a:srgbClr val="40A070"/>
+                </a:solidFill>
+                <a:latin typeface="Courier"/>
+              </a:rPr>
+              <a:t>5</a:t>
+            </a:r>
+            <a:r>
+              <a:rPr>
+                <a:latin typeface="Courier"/>
+              </a:rPr>
+              <a:t>, random_state</a:t>
+            </a:r>
+            <a:r>
+              <a:rPr>
+                <a:solidFill>
+                  <a:srgbClr val="666666"/>
+                </a:solidFill>
+                <a:latin typeface="Courier"/>
+              </a:rPr>
+              <a:t>=</a:t>
+            </a:r>
+            <a:r>
+              <a:rPr>
+                <a:solidFill>
+                  <a:srgbClr val="40A070"/>
+                </a:solidFill>
+                <a:latin typeface="Courier"/>
+              </a:rPr>
+              <a:t>0</a:t>
+            </a:r>
+            <a:r>
+              <a:rPr>
+                <a:latin typeface="Courier"/>
+              </a:rPr>
+              <a:t>,</a:t>
+            </a:r>
+            <a:br/>
+            <a:r>
+              <a:rPr>
+                <a:latin typeface="Courier"/>
+              </a:rPr>
+              <a:t>                                                 n_jobs</a:t>
+            </a:r>
+            <a:r>
+              <a:rPr>
+                <a:solidFill>
+                  <a:srgbClr val="666666"/>
+                </a:solidFill>
+                <a:latin typeface="Courier"/>
+              </a:rPr>
+              <a:t>=-</a:t>
+            </a:r>
+            <a:r>
+              <a:rPr>
+                <a:solidFill>
+                  <a:srgbClr val="40A070"/>
+                </a:solidFill>
+                <a:latin typeface="Courier"/>
+              </a:rPr>
+              <a:t>1</a:t>
+            </a:r>
+            <a:r>
+              <a:rPr>
+                <a:latin typeface="Courier"/>
+              </a:rPr>
+              <a:t>).fit(Xr[tr], Dr[tr]).predict_proba(Xr[te])[:, </a:t>
+            </a:r>
+            <a:r>
+              <a:rPr>
+                <a:solidFill>
+                  <a:srgbClr val="40A070"/>
+                </a:solidFill>
+                <a:latin typeface="Courier"/>
+              </a:rPr>
+              <a:t>1</a:t>
+            </a:r>
+            <a:r>
+              <a:rPr>
+                <a:latin typeface="Courier"/>
+              </a:rPr>
+              <a:t>]</a:t>
+            </a:r>
+            <a:br/>
+            <a:r>
+              <a:rPr>
+                <a:latin typeface="Courier"/>
+              </a:rPr>
+              <a:t>    th </a:t>
+            </a:r>
+            <a:r>
+              <a:rPr>
+                <a:solidFill>
+                  <a:srgbClr val="666666"/>
+                </a:solidFill>
+                <a:latin typeface="Courier"/>
+              </a:rPr>
+              <a:t>=</a:t>
+            </a:r>
+            <a:r>
+              <a:rPr>
+                <a:latin typeface="Courier"/>
+              </a:rPr>
+              <a:t> (td </a:t>
+            </a:r>
+            <a:r>
+              <a:rPr>
+                <a:solidFill>
+                  <a:srgbClr val="666666"/>
+                </a:solidFill>
+                <a:latin typeface="Courier"/>
+              </a:rPr>
+              <a:t>@</a:t>
+            </a:r>
+            <a:r>
+              <a:rPr>
+                <a:latin typeface="Courier"/>
+              </a:rPr>
+              <a:t> ty) </a:t>
+            </a:r>
+            <a:r>
+              <a:rPr>
+                <a:solidFill>
+                  <a:srgbClr val="666666"/>
+                </a:solidFill>
+                <a:latin typeface="Courier"/>
+              </a:rPr>
+              <a:t>/</a:t>
+            </a:r>
+            <a:r>
+              <a:rPr>
+                <a:latin typeface="Courier"/>
+              </a:rPr>
+              <a:t> (td </a:t>
+            </a:r>
+            <a:r>
+              <a:rPr>
+                <a:solidFill>
+                  <a:srgbClr val="666666"/>
+                </a:solidFill>
+                <a:latin typeface="Courier"/>
+              </a:rPr>
+              <a:t>@</a:t>
+            </a:r>
+            <a:r>
+              <a:rPr>
+                <a:latin typeface="Courier"/>
+              </a:rPr>
+              <a:t> td)</a:t>
+            </a:r>
+            <a:br/>
+            <a:r>
+              <a:rPr>
+                <a:latin typeface="Courier"/>
+              </a:rPr>
+              <a:t>    se </a:t>
+            </a:r>
+            <a:r>
+              <a:rPr>
+                <a:solidFill>
+                  <a:srgbClr val="666666"/>
+                </a:solidFill>
+                <a:latin typeface="Courier"/>
+              </a:rPr>
+              <a:t>=</a:t>
+            </a:r>
+            <a:r>
+              <a:rPr>
+                <a:latin typeface="Courier"/>
+              </a:rPr>
+              <a:t> np.sqrt(np.mean(td</a:t>
+            </a:r>
+            <a:r>
+              <a:rPr>
+                <a:solidFill>
+                  <a:srgbClr val="666666"/>
+                </a:solidFill>
+                <a:latin typeface="Courier"/>
+              </a:rPr>
+              <a:t>**</a:t>
+            </a:r>
+            <a:r>
+              <a:rPr>
+                <a:solidFill>
+                  <a:srgbClr val="40A070"/>
+                </a:solidFill>
+                <a:latin typeface="Courier"/>
+              </a:rPr>
+              <a:t>2</a:t>
+            </a:r>
+            <a:r>
+              <a:rPr>
+                <a:latin typeface="Courier"/>
+              </a:rPr>
+              <a:t> </a:t>
+            </a:r>
+            <a:r>
+              <a:rPr>
+                <a:solidFill>
+                  <a:srgbClr val="666666"/>
+                </a:solidFill>
+                <a:latin typeface="Courier"/>
+              </a:rPr>
+              <a:t>*</a:t>
+            </a:r>
+            <a:r>
+              <a:rPr>
+                <a:latin typeface="Courier"/>
+              </a:rPr>
+              <a:t> (ty </a:t>
+            </a:r>
+            <a:r>
+              <a:rPr>
+                <a:solidFill>
+                  <a:srgbClr val="666666"/>
+                </a:solidFill>
+                <a:latin typeface="Courier"/>
+              </a:rPr>
+              <a:t>-</a:t>
+            </a:r>
+            <a:r>
+              <a:rPr>
+                <a:latin typeface="Courier"/>
+              </a:rPr>
+              <a:t> th </a:t>
+            </a:r>
+            <a:r>
+              <a:rPr>
+                <a:solidFill>
+                  <a:srgbClr val="666666"/>
+                </a:solidFill>
+                <a:latin typeface="Courier"/>
+              </a:rPr>
+              <a:t>*</a:t>
+            </a:r>
+            <a:r>
+              <a:rPr>
+                <a:latin typeface="Courier"/>
+              </a:rPr>
+              <a:t> td)</a:t>
+            </a:r>
+            <a:r>
+              <a:rPr>
+                <a:solidFill>
+                  <a:srgbClr val="666666"/>
+                </a:solidFill>
+                <a:latin typeface="Courier"/>
+              </a:rPr>
+              <a:t>**</a:t>
+            </a:r>
+            <a:r>
+              <a:rPr>
+                <a:solidFill>
+                  <a:srgbClr val="40A070"/>
+                </a:solidFill>
+                <a:latin typeface="Courier"/>
+              </a:rPr>
+              <a:t>2</a:t>
+            </a:r>
+            <a:r>
+              <a:rPr>
+                <a:latin typeface="Courier"/>
+              </a:rPr>
+              <a:t>)) </a:t>
+            </a:r>
+            <a:r>
+              <a:rPr>
+                <a:solidFill>
+                  <a:srgbClr val="666666"/>
+                </a:solidFill>
+                <a:latin typeface="Courier"/>
+              </a:rPr>
+              <a:t>/</a:t>
+            </a:r>
+            <a:r>
+              <a:rPr>
+                <a:latin typeface="Courier"/>
+              </a:rPr>
+              <a:t> (np.mean(td</a:t>
+            </a:r>
+            <a:r>
+              <a:rPr>
+                <a:solidFill>
+                  <a:srgbClr val="666666"/>
+                </a:solidFill>
+                <a:latin typeface="Courier"/>
+              </a:rPr>
+              <a:t>**</a:t>
+            </a:r>
+            <a:r>
+              <a:rPr>
+                <a:solidFill>
+                  <a:srgbClr val="40A070"/>
+                </a:solidFill>
+                <a:latin typeface="Courier"/>
+              </a:rPr>
+              <a:t>2</a:t>
+            </a:r>
+            <a:r>
+              <a:rPr>
+                <a:latin typeface="Courier"/>
+              </a:rPr>
+              <a:t>) </a:t>
+            </a:r>
+            <a:r>
+              <a:rPr>
+                <a:solidFill>
+                  <a:srgbClr val="666666"/>
+                </a:solidFill>
+                <a:latin typeface="Courier"/>
+              </a:rPr>
+              <a:t>*</a:t>
+            </a:r>
+            <a:r>
+              <a:rPr>
+                <a:latin typeface="Courier"/>
+              </a:rPr>
+              <a:t> np.sqrt(n))</a:t>
+            </a:r>
+            <a:br/>
+            <a:r>
+              <a:rPr>
+                <a:latin typeface="Courier"/>
+              </a:rPr>
+              <a:t>    </a:t>
+            </a:r>
+            <a:r>
+              <a:rPr b="1">
+                <a:solidFill>
+                  <a:srgbClr val="007020"/>
+                </a:solidFill>
+                <a:latin typeface="Courier"/>
+              </a:rPr>
+              <a:t>return</a:t>
+            </a:r>
+            <a:r>
+              <a:rPr>
+                <a:latin typeface="Courier"/>
+              </a:rPr>
+              <a:t> th, se, ty, td</a:t>
+            </a:r>
+            <a:br/>
+            <a:br/>
+            <a:r>
+              <a:rPr>
+                <a:latin typeface="Courier"/>
+              </a:rPr>
+              <a:t>runs </a:t>
+            </a:r>
+            <a:r>
+              <a:rPr>
+                <a:solidFill>
+                  <a:srgbClr val="666666"/>
+                </a:solidFill>
+                <a:latin typeface="Courier"/>
+              </a:rPr>
+              <a:t>=</a:t>
+            </a:r>
+            <a:r>
+              <a:rPr>
+                <a:latin typeface="Courier"/>
+              </a:rPr>
+              <a:t> [dml_real(s) </a:t>
+            </a:r>
+            <a:r>
+              <a:rPr b="1">
+                <a:solidFill>
+                  <a:srgbClr val="007020"/>
+                </a:solidFill>
+                <a:latin typeface="Courier"/>
+              </a:rPr>
+              <a:t>for</a:t>
+            </a:r>
+            <a:r>
+              <a:rPr>
+                <a:latin typeface="Courier"/>
+              </a:rPr>
+              <a:t> s </a:t>
+            </a:r>
+            <a:r>
+              <a:rPr b="1">
+                <a:solidFill>
+                  <a:srgbClr val="007020"/>
+                </a:solidFill>
+                <a:latin typeface="Courier"/>
+              </a:rPr>
+              <a:t>in</a:t>
+            </a:r>
+            <a:r>
+              <a:rPr>
+                <a:latin typeface="Courier"/>
+              </a:rPr>
+              <a:t> (</a:t>
+            </a:r>
+            <a:r>
+              <a:rPr>
+                <a:solidFill>
+                  <a:srgbClr val="40A070"/>
+                </a:solidFill>
+                <a:latin typeface="Courier"/>
+              </a:rPr>
+              <a:t>1</a:t>
+            </a:r>
+            <a:r>
+              <a:rPr>
+                <a:latin typeface="Courier"/>
+              </a:rPr>
+              <a:t>, </a:t>
+            </a:r>
+            <a:r>
+              <a:rPr>
+                <a:solidFill>
+                  <a:srgbClr val="40A070"/>
+                </a:solidFill>
+                <a:latin typeface="Courier"/>
+              </a:rPr>
+              <a:t>2</a:t>
+            </a:r>
+            <a:r>
+              <a:rPr>
+                <a:latin typeface="Courier"/>
+              </a:rPr>
+              <a:t>, </a:t>
+            </a:r>
+            <a:r>
+              <a:rPr>
+                <a:solidFill>
+                  <a:srgbClr val="40A070"/>
+                </a:solidFill>
+                <a:latin typeface="Courier"/>
+              </a:rPr>
+              <a:t>3</a:t>
+            </a:r>
+            <a:r>
+              <a:rPr>
+                <a:latin typeface="Courier"/>
+              </a:rPr>
+              <a:t>, </a:t>
+            </a:r>
+            <a:r>
+              <a:rPr>
+                <a:solidFill>
+                  <a:srgbClr val="40A070"/>
+                </a:solidFill>
+                <a:latin typeface="Courier"/>
+              </a:rPr>
+              <a:t>4</a:t>
+            </a:r>
+            <a:r>
+              <a:rPr>
+                <a:latin typeface="Courier"/>
+              </a:rPr>
+              <a:t>, </a:t>
+            </a:r>
+            <a:r>
+              <a:rPr>
+                <a:solidFill>
+                  <a:srgbClr val="40A070"/>
+                </a:solidFill>
+                <a:latin typeface="Courier"/>
+              </a:rPr>
+              <a:t>5</a:t>
+            </a:r>
+            <a:r>
+              <a:rPr>
+                <a:latin typeface="Courier"/>
+              </a:rPr>
+              <a:t>)]</a:t>
+            </a:r>
+            <a:br/>
+            <a:r>
+              <a:rPr>
+                <a:latin typeface="Courier"/>
+              </a:rPr>
+              <a:t>TH </a:t>
+            </a:r>
+            <a:r>
+              <a:rPr>
+                <a:solidFill>
+                  <a:srgbClr val="666666"/>
+                </a:solidFill>
+                <a:latin typeface="Courier"/>
+              </a:rPr>
+              <a:t>=</a:t>
+            </a:r>
+            <a:r>
+              <a:rPr>
+                <a:latin typeface="Courier"/>
+              </a:rPr>
+              <a:t> </a:t>
+            </a:r>
+            <a:r>
+              <a:rPr>
+                <a:solidFill>
+                  <a:srgbClr val="008000"/>
+                </a:solidFill>
+                <a:latin typeface="Courier"/>
+              </a:rPr>
+              <a:t>float</a:t>
+            </a:r>
+            <a:r>
+              <a:rPr>
+                <a:latin typeface="Courier"/>
+              </a:rPr>
+              <a:t>(np.median([r[</a:t>
+            </a:r>
+            <a:r>
+              <a:rPr>
+                <a:solidFill>
+                  <a:srgbClr val="40A070"/>
+                </a:solidFill>
+                <a:latin typeface="Courier"/>
+              </a:rPr>
+              <a:t>0</a:t>
+            </a:r>
+            <a:r>
+              <a:rPr>
+                <a:latin typeface="Courier"/>
+              </a:rPr>
+              <a:t>] </a:t>
+            </a:r>
+            <a:r>
+              <a:rPr b="1">
+                <a:solidFill>
+                  <a:srgbClr val="007020"/>
+                </a:solidFill>
+                <a:latin typeface="Courier"/>
+              </a:rPr>
+              <a:t>for</a:t>
+            </a:r>
+            <a:r>
+              <a:rPr>
+                <a:latin typeface="Courier"/>
+              </a:rPr>
+              <a:t> r </a:t>
+            </a:r>
+            <a:r>
+              <a:rPr b="1">
+                <a:solidFill>
+                  <a:srgbClr val="007020"/>
+                </a:solidFill>
+                <a:latin typeface="Courier"/>
+              </a:rPr>
+              <a:t>in</a:t>
+            </a:r>
+            <a:r>
+              <a:rPr>
+                <a:latin typeface="Courier"/>
+              </a:rPr>
+              <a:t> runs]))</a:t>
+            </a:r>
+            <a:br/>
+            <a:r>
+              <a:rPr>
+                <a:latin typeface="Courier"/>
+              </a:rPr>
+              <a:t>SE </a:t>
+            </a:r>
+            <a:r>
+              <a:rPr>
+                <a:solidFill>
+                  <a:srgbClr val="666666"/>
+                </a:solidFill>
+                <a:latin typeface="Courier"/>
+              </a:rPr>
+              <a:t>=</a:t>
+            </a:r>
+            <a:r>
+              <a:rPr>
+                <a:latin typeface="Courier"/>
+              </a:rPr>
+              <a:t> </a:t>
+            </a:r>
+            <a:r>
+              <a:rPr>
+                <a:solidFill>
+                  <a:srgbClr val="008000"/>
+                </a:solidFill>
+                <a:latin typeface="Courier"/>
+              </a:rPr>
+              <a:t>float</a:t>
+            </a:r>
+            <a:r>
+              <a:rPr>
+                <a:latin typeface="Courier"/>
+              </a:rPr>
+              <a:t>(np.median([r[</a:t>
+            </a:r>
+            <a:r>
+              <a:rPr>
+                <a:solidFill>
+                  <a:srgbClr val="40A070"/>
+                </a:solidFill>
+                <a:latin typeface="Courier"/>
+              </a:rPr>
+              <a:t>1</a:t>
+            </a:r>
+            <a:r>
+              <a:rPr>
+                <a:latin typeface="Courier"/>
+              </a:rPr>
+              <a:t>] </a:t>
+            </a:r>
+            <a:r>
+              <a:rPr b="1">
+                <a:solidFill>
+                  <a:srgbClr val="007020"/>
+                </a:solidFill>
+                <a:latin typeface="Courier"/>
+              </a:rPr>
+              <a:t>for</a:t>
+            </a:r>
+            <a:r>
+              <a:rPr>
+                <a:latin typeface="Courier"/>
+              </a:rPr>
+              <a:t> r </a:t>
+            </a:r>
+            <a:r>
+              <a:rPr b="1">
+                <a:solidFill>
+                  <a:srgbClr val="007020"/>
+                </a:solidFill>
+                <a:latin typeface="Courier"/>
+              </a:rPr>
+              <a:t>in</a:t>
+            </a:r>
+            <a:r>
+              <a:rPr>
+                <a:latin typeface="Courier"/>
+              </a:rPr>
+              <a:t> runs]))</a:t>
+            </a:r>
+            <a:br/>
+            <a:r>
+              <a:rPr>
+                <a:latin typeface="Courier"/>
+              </a:rPr>
+              <a:t>ols </a:t>
+            </a:r>
+            <a:r>
+              <a:rPr>
+                <a:solidFill>
+                  <a:srgbClr val="666666"/>
+                </a:solidFill>
+                <a:latin typeface="Courier"/>
+              </a:rPr>
+              <a:t>=</a:t>
+            </a:r>
+            <a:r>
+              <a:rPr>
+                <a:latin typeface="Courier"/>
+              </a:rPr>
+              <a:t> sm.OLS(Yr, sm.add_constant(np.c_[Dr, Xr])).fit()</a:t>
+            </a:r>
+            <a:br/>
+            <a:br/>
+            <a:r>
+              <a:rPr>
+                <a:solidFill>
+                  <a:srgbClr val="008000"/>
+                </a:solidFill>
+                <a:latin typeface="Courier"/>
+              </a:rPr>
+              <a:t>print</a:t>
+            </a:r>
+            <a:r>
+              <a:rPr>
+                <a:latin typeface="Courier"/>
+              </a:rPr>
+              <a:t>(</a:t>
+            </a:r>
+            <a:r>
+              <a:rPr>
+                <a:solidFill>
+                  <a:srgbClr val="BB6688"/>
+                </a:solidFill>
+                <a:latin typeface="Courier"/>
+              </a:rPr>
+              <a:t>f"naive difference in means : </a:t>
+            </a:r>
+            <a:r>
+              <a:rPr>
+                <a:solidFill>
+                  <a:srgbClr val="4070A0"/>
+                </a:solidFill>
+                <a:latin typeface="Courier"/>
+              </a:rPr>
+              <a:t>{</a:t>
+            </a:r>
+            <a:r>
+              <a:rPr>
+                <a:latin typeface="Courier"/>
+              </a:rPr>
+              <a:t>NAIVE</a:t>
+            </a:r>
+            <a:r>
+              <a:rPr>
+                <a:solidFill>
+                  <a:srgbClr val="4070A0"/>
+                </a:solidFill>
+                <a:latin typeface="Courier"/>
+              </a:rPr>
+              <a:t>:+6.2f}</a:t>
+            </a:r>
+            <a:r>
+              <a:rPr>
+                <a:solidFill>
+                  <a:srgbClr val="BB6688"/>
+                </a:solidFill>
+                <a:latin typeface="Courier"/>
+              </a:rPr>
+              <a:t>"</a:t>
+            </a:r>
+            <a:r>
+              <a:rPr>
+                <a:latin typeface="Courier"/>
+              </a:rPr>
+              <a:t>)</a:t>
+            </a:r>
+            <a:br/>
+            <a:r>
+              <a:rPr>
+                <a:solidFill>
+                  <a:srgbClr val="008000"/>
+                </a:solidFill>
+                <a:latin typeface="Courier"/>
+              </a:rPr>
+              <a:t>print</a:t>
+            </a:r>
+            <a:r>
+              <a:rPr>
+                <a:latin typeface="Courier"/>
+              </a:rPr>
+              <a:t>(</a:t>
+            </a:r>
+            <a:r>
+              <a:rPr>
+                <a:solidFill>
+                  <a:srgbClr val="BB6688"/>
+                </a:solidFill>
+                <a:latin typeface="Courier"/>
+              </a:rPr>
+              <a:t>f"OLS, linear controls      : </a:t>
+            </a:r>
+            <a:r>
+              <a:rPr>
+                <a:solidFill>
+                  <a:srgbClr val="4070A0"/>
+                </a:solidFill>
+                <a:latin typeface="Courier"/>
+              </a:rPr>
+              <a:t>{</a:t>
+            </a:r>
+            <a:r>
+              <a:rPr>
+                <a:latin typeface="Courier"/>
+              </a:rPr>
+              <a:t>ols</a:t>
+            </a:r>
+            <a:r>
+              <a:rPr>
+                <a:solidFill>
+                  <a:srgbClr val="4070A0"/>
+                </a:solidFill>
+                <a:latin typeface="Courier"/>
+              </a:rPr>
+              <a:t>.</a:t>
+            </a:r>
+            <a:r>
+              <a:rPr>
+                <a:latin typeface="Courier"/>
+              </a:rPr>
+              <a:t>params[</a:t>
+            </a:r>
+            <a:r>
+              <a:rPr>
+                <a:solidFill>
+                  <a:srgbClr val="40A070"/>
+                </a:solidFill>
+                <a:latin typeface="Courier"/>
+              </a:rPr>
+              <a:t>1</a:t>
+            </a:r>
+            <a:r>
+              <a:rPr>
+                <a:latin typeface="Courier"/>
+              </a:rPr>
+              <a:t>]</a:t>
+            </a:r>
+            <a:r>
+              <a:rPr>
+                <a:solidFill>
+                  <a:srgbClr val="4070A0"/>
+                </a:solidFill>
+                <a:latin typeface="Courier"/>
+              </a:rPr>
+              <a:t>:+6.2f}</a:t>
+            </a:r>
+            <a:r>
+              <a:rPr>
+                <a:solidFill>
+                  <a:srgbClr val="BB6688"/>
+                </a:solidFill>
+                <a:latin typeface="Courier"/>
+              </a:rPr>
+              <a:t>  (se </a:t>
+            </a:r>
+            <a:r>
+              <a:rPr>
+                <a:solidFill>
+                  <a:srgbClr val="4070A0"/>
+                </a:solidFill>
+                <a:latin typeface="Courier"/>
+              </a:rPr>
+              <a:t>{</a:t>
+            </a:r>
+            <a:r>
+              <a:rPr>
+                <a:latin typeface="Courier"/>
+              </a:rPr>
+              <a:t>ols</a:t>
+            </a:r>
+            <a:r>
+              <a:rPr>
+                <a:solidFill>
+                  <a:srgbClr val="4070A0"/>
+                </a:solidFill>
+                <a:latin typeface="Courier"/>
+              </a:rPr>
+              <a:t>.</a:t>
+            </a:r>
+            <a:r>
+              <a:rPr>
+                <a:latin typeface="Courier"/>
+              </a:rPr>
+              <a:t>bse[</a:t>
+            </a:r>
+            <a:r>
+              <a:rPr>
+                <a:solidFill>
+                  <a:srgbClr val="40A070"/>
+                </a:solidFill>
+                <a:latin typeface="Courier"/>
+              </a:rPr>
+              <a:t>1</a:t>
+            </a:r>
+            <a:r>
+              <a:rPr>
+                <a:latin typeface="Courier"/>
+              </a:rPr>
+              <a:t>]</a:t>
+            </a:r>
+            <a:r>
+              <a:rPr>
+                <a:solidFill>
+                  <a:srgbClr val="4070A0"/>
+                </a:solidFill>
+                <a:latin typeface="Courier"/>
+              </a:rPr>
+              <a:t>:.2f}</a:t>
+            </a:r>
+            <a:r>
+              <a:rPr>
+                <a:solidFill>
+                  <a:srgbClr val="BB6688"/>
+                </a:solidFill>
+                <a:latin typeface="Courier"/>
+              </a:rPr>
+              <a:t>)"</a:t>
+            </a:r>
+            <a:r>
+              <a:rPr>
+                <a:latin typeface="Courier"/>
+              </a:rPr>
+              <a:t>)</a:t>
+            </a:r>
+            <a:br/>
+            <a:r>
+              <a:rPr>
+                <a:solidFill>
+                  <a:srgbClr val="008000"/>
+                </a:solidFill>
+                <a:latin typeface="Courier"/>
+              </a:rPr>
+              <a:t>print</a:t>
+            </a:r>
+            <a:r>
+              <a:rPr>
+                <a:latin typeface="Courier"/>
+              </a:rPr>
+              <a:t>(</a:t>
+            </a:r>
+            <a:r>
+              <a:rPr>
+                <a:solidFill>
+                  <a:srgbClr val="BB6688"/>
+                </a:solidFill>
+                <a:latin typeface="Courier"/>
+              </a:rPr>
+              <a:t>f"DML, cross-fitted forests : </a:t>
+            </a:r>
+            <a:r>
+              <a:rPr>
+                <a:solidFill>
+                  <a:srgbClr val="4070A0"/>
+                </a:solidFill>
+                <a:latin typeface="Courier"/>
+              </a:rPr>
+              <a:t>{</a:t>
+            </a:r>
+            <a:r>
+              <a:rPr>
+                <a:latin typeface="Courier"/>
+              </a:rPr>
+              <a:t>TH</a:t>
+            </a:r>
+            <a:r>
+              <a:rPr>
+                <a:solidFill>
+                  <a:srgbClr val="4070A0"/>
+                </a:solidFill>
+                <a:latin typeface="Courier"/>
+              </a:rPr>
+              <a:t>:+6.2f}</a:t>
+            </a:r>
+            <a:r>
+              <a:rPr>
+                <a:solidFill>
+                  <a:srgbClr val="BB6688"/>
+                </a:solidFill>
+                <a:latin typeface="Courier"/>
+              </a:rPr>
+              <a:t>  (se </a:t>
+            </a:r>
+            <a:r>
+              <a:rPr>
+                <a:solidFill>
+                  <a:srgbClr val="4070A0"/>
+                </a:solidFill>
+                <a:latin typeface="Courier"/>
+              </a:rPr>
+              <a:t>{</a:t>
+            </a:r>
+            <a:r>
+              <a:rPr>
+                <a:latin typeface="Courier"/>
+              </a:rPr>
+              <a:t>SE</a:t>
+            </a:r>
+            <a:r>
+              <a:rPr>
+                <a:solidFill>
+                  <a:srgbClr val="4070A0"/>
+                </a:solidFill>
+                <a:latin typeface="Courier"/>
+              </a:rPr>
+              <a:t>:.2f}</a:t>
+            </a:r>
+            <a:r>
+              <a:rPr>
+                <a:solidFill>
+                  <a:srgbClr val="BB6688"/>
+                </a:solidFill>
+                <a:latin typeface="Courier"/>
+              </a:rPr>
+              <a:t>)"</a:t>
+            </a:r>
+            <a:br/>
+            <a:r>
+              <a:rPr>
+                <a:latin typeface="Courier"/>
+              </a:rPr>
+              <a:t>      </a:t>
+            </a:r>
+            <a:r>
+              <a:rPr>
+                <a:solidFill>
+                  <a:srgbClr val="BB6688"/>
+                </a:solidFill>
+                <a:latin typeface="Courier"/>
+              </a:rPr>
+              <a:t>f"   95% CI [</a:t>
+            </a:r>
+            <a:r>
+              <a:rPr>
+                <a:solidFill>
+                  <a:srgbClr val="4070A0"/>
+                </a:solidFill>
+                <a:latin typeface="Courier"/>
+              </a:rPr>
+              <a:t>{</a:t>
+            </a:r>
+            <a:r>
+              <a:rPr>
+                <a:latin typeface="Courier"/>
+              </a:rPr>
+              <a:t>TH</a:t>
+            </a:r>
+            <a:r>
+              <a:rPr>
+                <a:solidFill>
+                  <a:srgbClr val="666666"/>
+                </a:solidFill>
+                <a:latin typeface="Courier"/>
+              </a:rPr>
+              <a:t>-</a:t>
+            </a:r>
+            <a:r>
+              <a:rPr>
+                <a:solidFill>
+                  <a:srgbClr val="40A070"/>
+                </a:solidFill>
+                <a:latin typeface="Courier"/>
+              </a:rPr>
+              <a:t>1.96</a:t>
+            </a:r>
+            <a:r>
+              <a:rPr>
+                <a:solidFill>
+                  <a:srgbClr val="666666"/>
+                </a:solidFill>
+                <a:latin typeface="Courier"/>
+              </a:rPr>
+              <a:t>*</a:t>
+            </a:r>
+            <a:r>
+              <a:rPr>
+                <a:latin typeface="Courier"/>
+              </a:rPr>
+              <a:t>SE</a:t>
+            </a:r>
+            <a:r>
+              <a:rPr>
+                <a:solidFill>
+                  <a:srgbClr val="4070A0"/>
+                </a:solidFill>
+                <a:latin typeface="Courier"/>
+              </a:rPr>
+              <a:t>:+.2f}</a:t>
+            </a:r>
+            <a:r>
+              <a:rPr>
+                <a:solidFill>
+                  <a:srgbClr val="BB6688"/>
+                </a:solidFill>
+                <a:latin typeface="Courier"/>
+              </a:rPr>
+              <a:t>, </a:t>
+            </a:r>
+            <a:r>
+              <a:rPr>
+                <a:solidFill>
+                  <a:srgbClr val="4070A0"/>
+                </a:solidFill>
+                <a:latin typeface="Courier"/>
+              </a:rPr>
+              <a:t>{</a:t>
+            </a:r>
+            <a:r>
+              <a:rPr>
+                <a:latin typeface="Courier"/>
+              </a:rPr>
+              <a:t>TH</a:t>
+            </a:r>
+            <a:r>
+              <a:rPr>
+                <a:solidFill>
+                  <a:srgbClr val="666666"/>
+                </a:solidFill>
+                <a:latin typeface="Courier"/>
+              </a:rPr>
+              <a:t>+</a:t>
+            </a:r>
+            <a:r>
+              <a:rPr>
+                <a:solidFill>
+                  <a:srgbClr val="40A070"/>
+                </a:solidFill>
+                <a:latin typeface="Courier"/>
+              </a:rPr>
+              <a:t>1.96</a:t>
+            </a:r>
+            <a:r>
+              <a:rPr>
+                <a:solidFill>
+                  <a:srgbClr val="666666"/>
+                </a:solidFill>
+                <a:latin typeface="Courier"/>
+              </a:rPr>
+              <a:t>*</a:t>
+            </a:r>
+            <a:r>
+              <a:rPr>
+                <a:latin typeface="Courier"/>
+              </a:rPr>
+              <a:t>SE</a:t>
+            </a:r>
+            <a:r>
+              <a:rPr>
+                <a:solidFill>
+                  <a:srgbClr val="4070A0"/>
+                </a:solidFill>
+                <a:latin typeface="Courier"/>
+              </a:rPr>
+              <a:t>:+.2f}</a:t>
+            </a:r>
+            <a:r>
+              <a:rPr>
+                <a:solidFill>
+                  <a:srgbClr val="BB6688"/>
+                </a:solidFill>
+                <a:latin typeface="Courier"/>
+              </a:rPr>
+              <a:t>]"</a:t>
+            </a:r>
+            <a:r>
+              <a:rPr>
+                <a:latin typeface="Courier"/>
+              </a:rPr>
+              <a:t>)</a:t>
+            </a:r>
+          </a:p>
+          <a:p>
+            <a:pPr lvl="0" indent="0">
+              <a:buNone/>
+            </a:pPr>
+            <a:r>
+              <a:rPr>
+                <a:latin typeface="Courier"/>
+              </a:rPr>
+              <a:t>naive difference in means : +10.45
+OLS, linear controls      :  -0.10  (se 1.27)
+DML, cross-fitted forests :  -0.61  (se 1.49)   95% CI [-3.54, +2.31]</a:t>
+            </a:r>
+          </a:p>
+        </p:txBody>
+      </p:sp>
     </p:spTree>
   </p:cSld>
 </p:sld>
 </file>
 
-<file path=ppt/slides/slide22.xml><?xml version="1.0" encoding="utf-8"?>
+<file path=ppt/slides/slide33.xml><?xml version="1.0" encoding="utf-8"?>
 <p:sld xmlns:a="http://schemas.openxmlformats.org/drawingml/2006/main" xmlns:r="http://schemas.openxmlformats.org/officeDocument/2006/relationships" xmlns:p="http://schemas.openxmlformats.org/presentationml/2006/main">
   <p:cSld>
     <p:spTree>
@@ -6742,166 +11394,230 @@
             </a:pPr>
             <a:r>
               <a:rPr/>
-              <a:t>The result</a:t>
+              <a:t>The three answers, side by side</a:t>
             </a:r>
           </a:p>
         </p:txBody>
       </p:sp>
-      <mc:AlternateContent xmlns:mc="http://schemas.openxmlformats.org/markup-compatibility/2006">
-        <mc:Choice xmlns:a14="http://schemas.microsoft.com/office/drawing/2010/main" Requires="a14">
-          <p:sp>
-            <p:nvSpPr>
-              <p:cNvPr id="3" name="Content Placeholder 2"/>
-              <p:cNvSpPr>
-                <a:spLocks noGrp="1"/>
-              </p:cNvSpPr>
-              <p:nvPr>
-                <p:ph idx="1"/>
-              </p:nvPr>
-            </p:nvSpPr>
-            <p:spPr/>
-            <p:txBody>
-              <a:bodyPr/>
-              <a:lstStyle/>
-              <a:p>
-                <a:pPr lvl="0" indent="0" marL="0">
-                  <a:buNone/>
-                </a:pPr>
-                <a14:m>
-                  <m:oMathPara xmlns:m="http://schemas.openxmlformats.org/officeDocument/2006/math">
-                    <m:oMathParaPr>
-                      <m:jc m:val="center"/>
-                    </m:oMathParaPr>
-                    <m:oMath>
-                      <m:rad>
-                        <m:radPr>
-                          <m:degHide m:val="on"/>
-                        </m:radPr>
-                        <m:deg/>
-                        <m:e>
-                          <m:r>
-                            <m:t>n</m:t>
-                          </m:r>
-                        </m:e>
-                      </m:rad>
-                      <m:d>
-                        <m:dPr>
-                          <m:begChr m:val="("/>
-                          <m:sepChr m:val=""/>
-                          <m:endChr m:val=")"/>
-                          <m:grow/>
-                        </m:dPr>
-                        <m:e>
-                          <m:acc>
-                            <m:accPr>
-                              <m:chr m:val="̂"/>
-                            </m:accPr>
-                            <m:e>
-                              <m:r>
-                                <m:t>θ</m:t>
-                              </m:r>
-                            </m:e>
-                          </m:acc>
-                          <m:r>
-                            <m:rPr>
-                              <m:sty m:val="p"/>
-                            </m:rPr>
-                            <m:t>−</m:t>
-                          </m:r>
-                          <m:sSub>
-                            <m:e>
-                              <m:r>
-                                <m:t>θ</m:t>
-                              </m:r>
-                            </m:e>
-                            <m:sub>
-                              <m:r>
-                                <m:t>0</m:t>
-                              </m:r>
-                            </m:sub>
-                          </m:sSub>
-                        </m:e>
-                      </m:d>
-                      <m:r>
-                        <m:rPr>
-                          <m:sty m:val="p"/>
-                        </m:rPr>
-                        <m:t>→</m:t>
-                      </m:r>
-                      <m:r>
-                        <m:t>N</m:t>
-                      </m:r>
-                      <m:d>
-                        <m:dPr>
-                          <m:begChr m:val="("/>
-                          <m:sepChr m:val=""/>
-                          <m:endChr m:val=")"/>
-                          <m:grow/>
-                        </m:dPr>
-                        <m:e>
-                          <m:r>
-                            <m:t>0</m:t>
-                          </m:r>
-                          <m:r>
-                            <m:rPr>
-                              <m:sty m:val="p"/>
-                            </m:rPr>
-                            <m:t>,</m:t>
-                          </m:r>
-                          <m:sSup>
-                            <m:e>
-                              <m:r>
-                                <m:t>σ</m:t>
-                              </m:r>
-                            </m:e>
-                            <m:sup>
-                              <m:r>
-                                <m:t>2</m:t>
-                              </m:r>
-                            </m:sup>
-                          </m:sSup>
-                        </m:e>
-                      </m:d>
-                    </m:oMath>
-                  </m:oMathPara>
-                </a14:m>
-              </a:p>
-              <a:p>
-                <a:pPr lvl="0" indent="0" marL="0">
-                  <a:buNone/>
-                </a:pPr>
-                <a:r>
-                  <a:rPr/>
-                  <a:t>so </a:t>
-                </a:r>
-                <a:r>
-                  <a:rPr b="1"/>
-                  <a:t>ordinary confidence intervals are valid</a:t>
-                </a:r>
-                <a:r>
-                  <a:rPr/>
-                  <a:t> — despite having used black-box learners for the nuisances.</a:t>
-                </a:r>
-              </a:p>
-              <a:p>
-                <a:pPr lvl="0" indent="0" marL="0">
-                  <a:buNone/>
-                </a:pPr>
-                <a:r>
-                  <a:rPr/>
-                  <a:t>This is the reconciliation of Sessions 05–07 with Session 03.</a:t>
-                </a:r>
-              </a:p>
-            </p:txBody>
-          </p:sp>
-        </mc:Choice>
-      </mc:AlternateContent>
+      <p:pic>
+        <p:nvPicPr>
+          <p:cNvPr descr="slides_files/figure-pptx/cell-11-output-1.png" id="0" name="Picture 1"/>
+          <p:cNvPicPr>
+            <a:picLocks noGrp="1" noChangeAspect="1"/>
+          </p:cNvPicPr>
+          <p:nvPr/>
+        </p:nvPicPr>
+        <p:blipFill>
+          <a:blip r:embed="rId2"/>
+          <a:stretch>
+            <a:fillRect/>
+          </a:stretch>
+        </p:blipFill>
+        <p:spPr bwMode="auto">
+          <a:xfrm>
+            <a:off x="457200" y="1333500"/>
+            <a:ext cx="8229600" cy="3098800"/>
+          </a:xfrm>
+          <a:prstGeom prst="rect">
+            <a:avLst/>
+          </a:prstGeom>
+          <a:noFill/>
+          <a:ln w="9525">
+            <a:noFill/>
+            <a:headEnd/>
+            <a:tailEnd/>
+          </a:ln>
+        </p:spPr>
+      </p:pic>
     </p:spTree>
   </p:cSld>
 </p:sld>
 </file>
 
-<file path=ppt/slides/slide23.xml><?xml version="1.0" encoding="utf-8"?>
+<file path=ppt/slides/slide34.xml><?xml version="1.0" encoding="utf-8"?>
+<p:sld xmlns:a="http://schemas.openxmlformats.org/drawingml/2006/main" xmlns:r="http://schemas.openxmlformats.org/officeDocument/2006/relationships" xmlns:p="http://schemas.openxmlformats.org/presentationml/2006/main">
+  <p:cSld>
+    <p:spTree>
+      <p:nvGrpSpPr>
+        <p:cNvPr id="1" name=""/>
+        <p:cNvGrpSpPr/>
+        <p:nvPr/>
+      </p:nvGrpSpPr>
+      <p:grpSpPr>
+        <a:xfrm>
+          <a:off x="0" y="0"/>
+          <a:ext cx="0" cy="0"/>
+          <a:chOff x="0" y="0"/>
+          <a:chExt cx="0" cy="0"/>
+        </a:xfrm>
+      </p:grpSpPr>
+      <p:sp>
+        <p:nvSpPr>
+          <p:cNvPr id="3" name="Content Placeholder 2"/>
+          <p:cNvSpPr>
+            <a:spLocks noGrp="1"/>
+          </p:cNvSpPr>
+          <p:nvPr>
+            <p:ph idx="1"/>
+          </p:nvPr>
+        </p:nvSpPr>
+        <p:spPr/>
+        <p:txBody>
+          <a:bodyPr/>
+          <a:lstStyle/>
+          <a:p>
+            <a:pPr lvl="0" indent="0" marL="0">
+              <a:buNone/>
+            </a:pPr>
+            <a:r>
+              <a:rPr/>
+              <a:t>Ten points becomes </a:t>
+            </a:r>
+            <a:r>
+              <a:rPr b="1"/>
+              <a:t>indistinguishable from zero</a:t>
+            </a:r>
+            <a:r>
+              <a:rPr/>
+              <a:t>. The right-hand panel is the whole estimate: one slope, through residualised data — Session 02’s FWL picture, with forests doing the residualising.</a:t>
+            </a:r>
+          </a:p>
+        </p:txBody>
+      </p:sp>
+    </p:spTree>
+  </p:cSld>
+</p:sld>
+</file>
+
+<file path=ppt/slides/slide35.xml><?xml version="1.0" encoding="utf-8"?>
+<p:sld xmlns:a="http://schemas.openxmlformats.org/drawingml/2006/main" xmlns:r="http://schemas.openxmlformats.org/officeDocument/2006/relationships" xmlns:p="http://schemas.openxmlformats.org/presentationml/2006/main">
+  <p:cSld>
+    <p:spTree>
+      <p:nvGrpSpPr>
+        <p:cNvPr id="1" name=""/>
+        <p:cNvGrpSpPr/>
+        <p:nvPr/>
+      </p:nvGrpSpPr>
+      <p:grpSpPr>
+        <a:xfrm>
+          <a:off x="0" y="0"/>
+          <a:ext cx="0" cy="0"/>
+          <a:chOff x="0" y="0"/>
+          <a:chExt cx="0" cy="0"/>
+        </a:xfrm>
+      </p:grpSpPr>
+      <p:sp>
+        <p:nvSpPr>
+          <p:cNvPr id="2" name="Title 1"/>
+          <p:cNvSpPr>
+            <a:spLocks noGrp="1"/>
+          </p:cNvSpPr>
+          <p:nvPr>
+            <p:ph type="title"/>
+          </p:nvPr>
+        </p:nvSpPr>
+        <p:spPr/>
+        <p:txBody>
+          <a:bodyPr/>
+          <a:lstStyle/>
+          <a:p>
+            <a:pPr lvl="0" indent="0" marL="0">
+              <a:buNone/>
+            </a:pPr>
+            <a:r>
+              <a:rPr/>
+              <a:t>Why the median over splits</a:t>
+            </a:r>
+          </a:p>
+        </p:txBody>
+      </p:sp>
+      <p:pic>
+        <p:nvPicPr>
+          <p:cNvPr descr="slides_files/figure-pptx/cell-12-output-1.png" id="0" name="Picture 1"/>
+          <p:cNvPicPr>
+            <a:picLocks noGrp="1" noChangeAspect="1"/>
+          </p:cNvPicPr>
+          <p:nvPr/>
+        </p:nvPicPr>
+        <p:blipFill>
+          <a:blip r:embed="rId2"/>
+          <a:stretch>
+            <a:fillRect/>
+          </a:stretch>
+        </p:blipFill>
+        <p:spPr bwMode="auto">
+          <a:xfrm>
+            <a:off x="457200" y="1257300"/>
+            <a:ext cx="8229600" cy="3263900"/>
+          </a:xfrm>
+          <a:prstGeom prst="rect">
+            <a:avLst/>
+          </a:prstGeom>
+          <a:noFill/>
+          <a:ln w="9525">
+            <a:noFill/>
+            <a:headEnd/>
+            <a:tailEnd/>
+          </a:ln>
+        </p:spPr>
+      </p:pic>
+    </p:spTree>
+  </p:cSld>
+</p:sld>
+</file>
+
+<file path=ppt/slides/slide36.xml><?xml version="1.0" encoding="utf-8"?>
+<p:sld xmlns:a="http://schemas.openxmlformats.org/drawingml/2006/main" xmlns:r="http://schemas.openxmlformats.org/officeDocument/2006/relationships" xmlns:p="http://schemas.openxmlformats.org/presentationml/2006/main">
+  <p:cSld>
+    <p:spTree>
+      <p:nvGrpSpPr>
+        <p:cNvPr id="1" name=""/>
+        <p:cNvGrpSpPr/>
+        <p:nvPr/>
+      </p:nvGrpSpPr>
+      <p:grpSpPr>
+        <a:xfrm>
+          <a:off x="0" y="0"/>
+          <a:ext cx="0" cy="0"/>
+          <a:chOff x="0" y="0"/>
+          <a:chExt cx="0" cy="0"/>
+        </a:xfrm>
+      </p:grpSpPr>
+      <p:sp>
+        <p:nvSpPr>
+          <p:cNvPr id="3" name="Content Placeholder 2"/>
+          <p:cNvSpPr>
+            <a:spLocks noGrp="1"/>
+          </p:cNvSpPr>
+          <p:nvPr>
+            <p:ph idx="1"/>
+          </p:nvPr>
+        </p:nvSpPr>
+        <p:spPr/>
+        <p:txBody>
+          <a:bodyPr/>
+          <a:lstStyle/>
+          <a:p>
+            <a:pPr lvl="0" indent="0" marL="0">
+              <a:buNone/>
+            </a:pPr>
+            <a:r>
+              <a:rPr/>
+              <a:t>The same data, the same code, five different random fold assignments — and estimates that differ by more than a point. </a:t>
+            </a:r>
+            <a:r>
+              <a:rPr b="1"/>
+              <a:t>Report the median across splits, and report the spread.</a:t>
+            </a:r>
+          </a:p>
+        </p:txBody>
+      </p:sp>
+    </p:spTree>
+  </p:cSld>
+</p:sld>
+</file>
+
+<file path=ppt/slides/slide37.xml><?xml version="1.0" encoding="utf-8"?>
 <p:sld xmlns:a="http://schemas.openxmlformats.org/drawingml/2006/main" xmlns:r="http://schemas.openxmlformats.org/officeDocument/2006/relationships" xmlns:p="http://schemas.openxmlformats.org/presentationml/2006/main">
   <p:cSld>
     <p:spTree>
@@ -6943,7 +11659,7 @@
             </a:pPr>
             <a:r>
               <a:rPr/>
-              <a:t>10.5 Heterogeneous effects</a:t>
+              <a:t>6 · Heterogeneous effects</a:t>
             </a:r>
           </a:p>
         </p:txBody>
@@ -6953,7 +11669,7 @@
 </p:sld>
 </file>
 
-<file path=ppt/slides/slide24.xml><?xml version="1.0" encoding="utf-8"?>
+<file path=ppt/slides/slide38.xml><?xml version="1.0" encoding="utf-8"?>
 <p:sld xmlns:a="http://schemas.openxmlformats.org/drawingml/2006/main" xmlns:r="http://schemas.openxmlformats.org/officeDocument/2006/relationships" xmlns:p="http://schemas.openxmlformats.org/presentationml/2006/main">
   <p:cSld>
     <p:spTree>
@@ -6990,7 +11706,11 @@
             </a:pPr>
             <a:r>
               <a:rPr/>
-              <a:t>For whom, not on average</a:t>
+              <a:t>The question is often </a:t>
+            </a:r>
+            <a:r>
+              <a:rPr i="1"/>
+              <a:t>for whom</a:t>
             </a:r>
           </a:p>
         </p:txBody>
@@ -7125,8 +11845,64 @@
                   <a:buNone/>
                 </a:pPr>
                 <a:r>
+                  <a:rPr b="1"/>
+                  <a:t>Causal forests</a:t>
+                </a:r>
+                <a:r>
                   <a:rPr/>
-                  <a:t>Often the interesting question. “Does a strategy help?” is less useful than “where does it help?” — and only the second tells anyone what to do.</a:t>
+                  <a:t> (Wager &amp; Athey) adapt random forests in three ways:</a:t>
+                </a:r>
+              </a:p>
+              <a:p>
+                <a:pPr lvl="0" indent="-342900" marL="342900">
+                  <a:buAutoNum type="arabicPeriod"/>
+                </a:pPr>
+                <a:r>
+                  <a:rPr/>
+                  <a:t>Splits maximise heterogeneity in the </a:t>
+                </a:r>
+                <a:r>
+                  <a:rPr b="1"/>
+                  <a:t>treatment effect</a:t>
+                </a:r>
+                <a:r>
+                  <a:rPr/>
+                  <a:t>, not in the outcome</a:t>
+                </a:r>
+              </a:p>
+              <a:p>
+                <a:pPr lvl="0" indent="-342900" marL="342900">
+                  <a:buAutoNum type="arabicPeriod"/>
+                </a:pPr>
+                <a:r>
+                  <a:rPr b="1"/>
+                  <a:t>Honesty</a:t>
+                </a:r>
+                <a:r>
+                  <a:rPr/>
+                  <a:t> — the observations that choose the splits are disjoint from those that estimate the leaf effects</a:t>
+                </a:r>
+              </a:p>
+              <a:p>
+                <a:pPr lvl="0" indent="-342900" marL="342900">
+                  <a:buAutoNum type="arabicPeriod"/>
+                </a:pPr>
+                <a:r>
+                  <a:rPr/>
+                  <a:t>The estimator is asymptotically normal and pointwise consistent, so </a:t>
+                </a:r>
+                <a:r>
+                  <a:rPr b="1"/>
+                  <a:t>confidence intervals exist</a:t>
+                </a:r>
+              </a:p>
+              <a:p>
+                <a:pPr lvl="0" indent="0" marL="0">
+                  <a:buNone/>
+                </a:pPr>
+                <a:r>
+                  <a:rPr/>
+                  <a:t>Point 2 is Session 04’s discipline again, moved inside the tree.</a:t>
                 </a:r>
               </a:p>
             </p:txBody>
@@ -7138,7 +11914,7 @@
 </p:sld>
 </file>
 
-<file path=ppt/slides/slide25.xml><?xml version="1.0" encoding="utf-8"?>
+<file path=ppt/slides/slide39.xml><?xml version="1.0" encoding="utf-8"?>
 <p:sld xmlns:a="http://schemas.openxmlformats.org/drawingml/2006/main" xmlns:r="http://schemas.openxmlformats.org/officeDocument/2006/relationships" xmlns:p="http://schemas.openxmlformats.org/presentationml/2006/main">
   <p:cSld>
     <p:spTree>
@@ -7175,85 +11951,137 @@
             </a:pPr>
             <a:r>
               <a:rPr/>
-              <a:t>Causal forests</a:t>
+              <a:t>The discipline that must come with it</a:t>
             </a:r>
           </a:p>
         </p:txBody>
       </p:sp>
-      <p:sp>
-        <p:nvSpPr>
-          <p:cNvPr id="3" name="Content Placeholder 2"/>
-          <p:cNvSpPr>
-            <a:spLocks noGrp="1"/>
-          </p:cNvSpPr>
-          <p:nvPr>
-            <p:ph idx="1"/>
-          </p:nvPr>
-        </p:nvSpPr>
-        <p:spPr/>
-        <p:txBody>
-          <a:bodyPr/>
-          <a:lstStyle/>
-          <a:p>
-            <a:pPr lvl="0" indent="0" marL="0">
-              <a:buNone/>
-            </a:pPr>
-            <a:r>
-              <a:rPr/>
-              <a:t>Wager &amp; Athey adapt random forests in three ways:</a:t>
-            </a:r>
-          </a:p>
-          <a:p>
-            <a:pPr lvl="0" indent="-342900" marL="342900">
-              <a:buAutoNum type="arabicPeriod"/>
-            </a:pPr>
-            <a:r>
-              <a:rPr/>
-              <a:t>Splits are chosen to maximise </a:t>
-            </a:r>
-            <a:r>
-              <a:rPr b="1"/>
-              <a:t>heterogeneity in the treatment effect</a:t>
-            </a:r>
-            <a:r>
-              <a:rPr/>
-              <a:t>, not in the outcome</a:t>
-            </a:r>
-          </a:p>
-          <a:p>
-            <a:pPr lvl="0" indent="-342900" marL="342900">
-              <a:buAutoNum type="arabicPeriod"/>
-            </a:pPr>
-            <a:r>
-              <a:rPr b="1"/>
-              <a:t>Honesty</a:t>
-            </a:r>
-            <a:r>
-              <a:rPr/>
-              <a:t> — the observations used to choose splits are disjoint from those used to estimate the leaf effects</a:t>
-            </a:r>
-          </a:p>
-          <a:p>
-            <a:pPr lvl="0" indent="-342900" marL="342900">
-              <a:buAutoNum type="arabicPeriod"/>
-            </a:pPr>
-            <a:r>
-              <a:rPr/>
-              <a:t>The estimator is asymptotically normal and pointwise consistent, so </a:t>
-            </a:r>
-            <a:r>
-              <a:rPr b="1"/>
-              <a:t>confidence intervals are available</a:t>
-            </a:r>
-          </a:p>
-        </p:txBody>
-      </p:sp>
+      <mc:AlternateContent xmlns:mc="http://schemas.openxmlformats.org/markup-compatibility/2006">
+        <mc:Choice xmlns:a14="http://schemas.microsoft.com/office/drawing/2010/main" Requires="a14">
+          <p:sp>
+            <p:nvSpPr>
+              <p:cNvPr id="3" name="Content Placeholder 2"/>
+              <p:cNvSpPr>
+                <a:spLocks noGrp="1"/>
+              </p:cNvSpPr>
+              <p:nvPr>
+                <p:ph idx="1"/>
+              </p:nvPr>
+            </p:nvSpPr>
+            <p:spPr/>
+            <p:txBody>
+              <a:bodyPr/>
+              <a:lstStyle/>
+              <a:p>
+                <a:pPr lvl="0" indent="0" marL="0">
+                  <a:buNone/>
+                </a:pPr>
+                <a:r>
+                  <a:rPr/>
+                  <a:t>Searching over subgroups for large effects is </a:t>
+                </a:r>
+                <a:r>
+                  <a:rPr b="1"/>
+                  <a:t>multiple testing</a:t>
+                </a:r>
+                <a:r>
+                  <a:rPr/>
+                  <a:t>, and it will find something. With twenty subgroups and a 5% test, one significant result is the </a:t>
+                </a:r>
+                <a:r>
+                  <a:rPr i="1"/>
+                  <a:t>expected</a:t>
+                </a:r>
+                <a:r>
+                  <a:rPr/>
+                  <a:t> outcome under no effect at all.</a:t>
+                </a:r>
+              </a:p>
+              <a:p>
+                <a:pPr lvl="0"/>
+                <a:r>
+                  <a:rPr b="1"/>
+                  <a:t>Pre-specify</a:t>
+                </a:r>
+                <a:r>
+                  <a:rPr/>
+                  <a:t> subgroups wherever possible</a:t>
+                </a:r>
+              </a:p>
+              <a:p>
+                <a:pPr lvl="0"/>
+                <a:r>
+                  <a:rPr/>
+                  <a:t>Otherwise report the </a:t>
+                </a:r>
+                <a:r>
+                  <a:rPr b="1"/>
+                  <a:t>best linear projection</a:t>
+                </a:r>
+                <a:r>
+                  <a:rPr/>
+                  <a:t> of </a:t>
+                </a:r>
+                <a14:m>
+                  <m:oMath xmlns:m="http://schemas.openxmlformats.org/officeDocument/2006/math">
+                    <m:acc>
+                      <m:accPr>
+                        <m:chr m:val="̂"/>
+                      </m:accPr>
+                      <m:e>
+                        <m:r>
+                          <m:t>τ</m:t>
+                        </m:r>
+                      </m:e>
+                    </m:acc>
+                    <m:d>
+                      <m:dPr>
+                        <m:begChr m:val="("/>
+                        <m:sepChr m:val=""/>
+                        <m:endChr m:val=")"/>
+                        <m:grow/>
+                      </m:dPr>
+                      <m:e>
+                        <m:r>
+                          <m:t>X</m:t>
+                        </m:r>
+                      </m:e>
+                    </m:d>
+                  </m:oMath>
+                </a14:m>
+                <a:r>
+                  <a:rPr/>
+                  <a:t> on a small covariate set</a:t>
+                </a:r>
+              </a:p>
+              <a:p>
+                <a:pPr lvl="0"/>
+                <a:r>
+                  <a:rPr/>
+                  <a:t>Or use a calibration test — the GATES / CLAN procedures of Chernozhukov et al.</a:t>
+                </a:r>
+              </a:p>
+              <a:p>
+                <a:pPr lvl="0"/>
+                <a:r>
+                  <a:rPr/>
+                  <a:t>And label the whole section </a:t>
+                </a:r>
+                <a:r>
+                  <a:rPr b="1"/>
+                  <a:t>exploratory</a:t>
+                </a:r>
+              </a:p>
+            </p:txBody>
+          </p:sp>
+        </mc:Choice>
+      </mc:AlternateContent>
     </p:spTree>
   </p:cSld>
 </p:sld>
 </file>
 
-<file path=ppt/slides/slide26.xml><?xml version="1.0" encoding="utf-8"?>
+<file path=ppt/slides/slide4.xml><?xml version="1.0" encoding="utf-8"?>
 <p:sld xmlns:a="http://schemas.openxmlformats.org/drawingml/2006/main" xmlns:r="http://schemas.openxmlformats.org/officeDocument/2006/relationships" xmlns:p="http://schemas.openxmlformats.org/presentationml/2006/main">
   <p:cSld>
     <p:spTree>
@@ -7290,130 +12118,96 @@
             </a:pPr>
             <a:r>
               <a:rPr/>
-              <a:t>Discipline in reporting heterogeneity</a:t>
+              <a:t>Learning objectives</a:t>
             </a:r>
           </a:p>
         </p:txBody>
       </p:sp>
-      <mc:AlternateContent xmlns:mc="http://schemas.openxmlformats.org/markup-compatibility/2006">
-        <mc:Choice xmlns:a14="http://schemas.microsoft.com/office/drawing/2010/main" Requires="a14">
-          <p:sp>
-            <p:nvSpPr>
-              <p:cNvPr id="3" name="Content Placeholder 2"/>
-              <p:cNvSpPr>
-                <a:spLocks noGrp="1"/>
-              </p:cNvSpPr>
-              <p:nvPr>
-                <p:ph idx="1"/>
-              </p:nvPr>
-            </p:nvSpPr>
-            <p:spPr/>
-            <p:txBody>
-              <a:bodyPr/>
-              <a:lstStyle/>
-              <a:p>
-                <a:pPr lvl="0" indent="0" marL="0">
-                  <a:buNone/>
-                </a:pPr>
-                <a:r>
-                  <a:rPr/>
-                  <a:t>Searching over subgroups for large effects is </a:t>
-                </a:r>
-                <a:r>
-                  <a:rPr b="1"/>
-                  <a:t>multiple testing</a:t>
-                </a:r>
-                <a:r>
-                  <a:rPr/>
-                  <a:t>, and it will find something.</a:t>
-                </a:r>
-              </a:p>
-              <a:p>
-                <a:pPr lvl="0"/>
-                <a:r>
-                  <a:rPr b="1"/>
-                  <a:t>Pre-specify</a:t>
-                </a:r>
-                <a:r>
-                  <a:rPr/>
-                  <a:t> subgroups where possible</a:t>
-                </a:r>
-              </a:p>
-              <a:p>
-                <a:pPr lvl="0"/>
-                <a:r>
-                  <a:rPr/>
-                  <a:t>Otherwise use the </a:t>
-                </a:r>
-                <a:r>
-                  <a:rPr b="1"/>
-                  <a:t>best linear projection</a:t>
-                </a:r>
-                <a:r>
-                  <a:rPr/>
-                  <a:t> of </a:t>
-                </a:r>
-                <a14:m>
-                  <m:oMath xmlns:m="http://schemas.openxmlformats.org/officeDocument/2006/math">
-                    <m:acc>
-                      <m:accPr>
-                        <m:chr m:val="̂"/>
-                      </m:accPr>
-                      <m:e>
-                        <m:r>
-                          <m:t>τ</m:t>
-                        </m:r>
-                      </m:e>
-                    </m:acc>
-                    <m:d>
-                      <m:dPr>
-                        <m:begChr m:val="("/>
-                        <m:sepChr m:val=""/>
-                        <m:endChr m:val=")"/>
-                        <m:grow/>
-                      </m:dPr>
-                      <m:e>
-                        <m:r>
-                          <m:t>X</m:t>
-                        </m:r>
-                      </m:e>
-                    </m:d>
-                  </m:oMath>
-                </a14:m>
-                <a:r>
-                  <a:rPr/>
-                  <a:t> on a small set of covariates, or a calibration test — the </a:t>
-                </a:r>
-                <a:r>
-                  <a:rPr b="1"/>
-                  <a:t>GATES / CLAN</a:t>
-                </a:r>
-                <a:r>
-                  <a:rPr/>
-                  <a:t> procedures of Chernozhukov et al.</a:t>
-                </a:r>
-              </a:p>
-              <a:p>
-                <a:pPr lvl="0"/>
-                <a:r>
-                  <a:rPr/>
-                  <a:t>Report them as </a:t>
-                </a:r>
-                <a:r>
-                  <a:rPr b="1"/>
-                  <a:t>exploratory</a:t>
-                </a:r>
-              </a:p>
-            </p:txBody>
-          </p:sp>
-        </mc:Choice>
-      </mc:AlternateContent>
+      <p:sp>
+        <p:nvSpPr>
+          <p:cNvPr id="3" name="Content Placeholder 2"/>
+          <p:cNvSpPr>
+            <a:spLocks noGrp="1"/>
+          </p:cNvSpPr>
+          <p:nvPr>
+            <p:ph idx="1"/>
+          </p:nvPr>
+        </p:nvSpPr>
+        <p:spPr/>
+        <p:txBody>
+          <a:bodyPr/>
+          <a:lstStyle/>
+          <a:p>
+            <a:pPr lvl="0"/>
+            <a:r>
+              <a:rPr/>
+              <a:t>State the partially linear model and name the </a:t>
+            </a:r>
+            <a:r>
+              <a:rPr b="1"/>
+              <a:t>nuisance functions</a:t>
+            </a:r>
+          </a:p>
+          <a:p>
+            <a:pPr lvl="0"/>
+            <a:r>
+              <a:rPr/>
+              <a:t>Decompose the naive estimator’s error into </a:t>
+            </a:r>
+            <a:r>
+              <a:rPr b="1"/>
+              <a:t>regularisation</a:t>
+            </a:r>
+            <a:r>
+              <a:rPr/>
+              <a:t> and </a:t>
+            </a:r>
+            <a:r>
+              <a:rPr b="1"/>
+              <a:t>overfitting</a:t>
+            </a:r>
+            <a:r>
+              <a:rPr/>
+              <a:t> bias</a:t>
+            </a:r>
+          </a:p>
+          <a:p>
+            <a:pPr lvl="0"/>
+            <a:r>
+              <a:rPr/>
+              <a:t>Explain why an orthogonal score turns two slow rates into one fast enough one</a:t>
+            </a:r>
+          </a:p>
+          <a:p>
+            <a:pPr lvl="0"/>
+            <a:r>
+              <a:rPr/>
+              <a:t>Implement cross-fitting, and say precisely which bias it removes</a:t>
+            </a:r>
+          </a:p>
+          <a:p>
+            <a:pPr lvl="0"/>
+            <a:r>
+              <a:rPr/>
+              <a:t>Report a heterogeneous effect </a:t>
+            </a:r>
+            <a:r>
+              <a:rPr b="1"/>
+              <a:t>without</a:t>
+            </a:r>
+            <a:r>
+              <a:rPr/>
+              <a:t> doing undisclosed multiple testing</a:t>
+            </a:r>
+          </a:p>
+        </p:txBody>
+      </p:sp>
     </p:spTree>
   </p:cSld>
 </p:sld>
 </file>
 
-<file path=ppt/slides/slide27.xml><?xml version="1.0" encoding="utf-8"?>
+<file path=ppt/slides/slide40.xml><?xml version="1.0" encoding="utf-8"?>
 <p:sld xmlns:a="http://schemas.openxmlformats.org/drawingml/2006/main" xmlns:r="http://schemas.openxmlformats.org/officeDocument/2006/relationships" xmlns:p="http://schemas.openxmlformats.org/presentationml/2006/main">
   <p:cSld>
     <p:spTree>
@@ -7455,7 +12249,7 @@
             </a:pPr>
             <a:r>
               <a:rPr/>
-              <a:t>10.6 What this does not fix</a:t>
+              <a:t>7 · What this does not fix</a:t>
             </a:r>
           </a:p>
         </p:txBody>
@@ -7465,7 +12259,7 @@
 </p:sld>
 </file>
 
-<file path=ppt/slides/slide28.xml><?xml version="1.0" encoding="utf-8"?>
+<file path=ppt/slides/slide41.xml><?xml version="1.0" encoding="utf-8"?>
 <p:sld xmlns:a="http://schemas.openxmlformats.org/drawingml/2006/main" xmlns:r="http://schemas.openxmlformats.org/officeDocument/2006/relationships" xmlns:p="http://schemas.openxmlformats.org/presentationml/2006/main">
   <p:cSld>
     <p:spTree>
@@ -7502,7 +12296,7 @@
             </a:pPr>
             <a:r>
               <a:rPr/>
-              <a:t>The limit of the method</a:t>
+              <a:t>Read this slide twice</a:t>
             </a:r>
           </a:p>
         </p:txBody>
@@ -7537,16 +12331,7 @@
                 </a:r>
                 <a:r>
                   <a:rPr/>
-                  <a:t>.</a:t>
-                </a:r>
-              </a:p>
-              <a:p>
-                <a:pPr lvl="0" indent="0" marL="0">
-                  <a:buNone/>
-                </a:pPr>
-                <a:r>
-                  <a:rPr/>
-                  <a:t>If treatment is confounded by something not in </a:t>
+                  <a:t>. If treatment is confounded by something not in </a:t>
                 </a:r>
                 <a14:m>
                   <m:oMath xmlns:m="http://schemas.openxmlformats.org/officeDocument/2006/math">
@@ -7557,16 +12342,115 @@
                 </a14:m>
                 <a:r>
                   <a:rPr/>
-                  <a:t>, DML estimates a </a:t>
+                  <a:t>, DML estimates a precisely-quantified </a:t>
                 </a:r>
                 <a:r>
                   <a:rPr b="1"/>
-                  <a:t>precisely-quantified wrong number</a:t>
+                  <a:t>wrong number</a:t>
                 </a:r>
                 <a:r>
                   <a:rPr/>
                   <a:t> — and its narrow confidence interval will make the wrong number look authoritative.</a:t>
                 </a:r>
+              </a:p>
+              <a:p>
+                <a:pPr lvl="0" indent="0" marL="0">
+                  <a:buNone/>
+                </a:pPr>
+                <a:r>
+                  <a:rPr/>
+                  <a:t>Flexible nuisance estimation removes </a:t>
+                </a:r>
+                <a:r>
+                  <a:rPr b="1"/>
+                  <a:t>functional-form error</a:t>
+                </a:r>
+                <a:r>
+                  <a:rPr/>
+                  <a:t>. It does not remove </a:t>
+                </a:r>
+                <a:r>
+                  <a:rPr b="1"/>
+                  <a:t>omitted-variable bias</a:t>
+                </a:r>
+                <a:r>
+                  <a:rPr/>
+                  <a:t>. Session 03’s OVB formula still governs everything:</a:t>
+                </a:r>
+              </a:p>
+              <a:p>
+                <a:pPr lvl="0" indent="0" marL="0">
+                  <a:buNone/>
+                </a:pPr>
+                <a14:m>
+                  <m:oMathPara xmlns:m="http://schemas.openxmlformats.org/officeDocument/2006/math">
+                    <m:oMathParaPr>
+                      <m:jc m:val="center"/>
+                    </m:oMathParaPr>
+                    <m:oMath>
+                      <m:sSub>
+                        <m:e>
+                          <m:acc>
+                            <m:accPr>
+                              <m:chr m:val="̂"/>
+                            </m:accPr>
+                            <m:e>
+                              <m:r>
+                                <m:t>β</m:t>
+                              </m:r>
+                            </m:e>
+                          </m:acc>
+                        </m:e>
+                        <m:sub>
+                          <m:r>
+                            <m:rPr>
+                              <m:nor/>
+                              <m:sty m:val="p"/>
+                            </m:rPr>
+                            <m:t>short</m:t>
+                          </m:r>
+                        </m:sub>
+                      </m:sSub>
+                      <m:r>
+                        <m:rPr>
+                          <m:sty m:val="p"/>
+                        </m:rPr>
+                        <m:t>→</m:t>
+                      </m:r>
+                      <m:sSub>
+                        <m:e>
+                          <m:r>
+                            <m:t>β</m:t>
+                          </m:r>
+                        </m:e>
+                        <m:sub>
+                          <m:r>
+                            <m:rPr>
+                              <m:nor/>
+                              <m:sty m:val="p"/>
+                            </m:rPr>
+                            <m:t>long</m:t>
+                          </m:r>
+                        </m:sub>
+                      </m:sSub>
+                      <m:r>
+                        <m:rPr>
+                          <m:sty m:val="p"/>
+                        </m:rPr>
+                        <m:t>+</m:t>
+                      </m:r>
+                      <m:r>
+                        <m:t>γ</m:t>
+                      </m:r>
+                      <m:r>
+                        <m:t> </m:t>
+                      </m:r>
+                      <m:r>
+                        <m:t>δ</m:t>
+                      </m:r>
+                    </m:oMath>
+                  </m:oMathPara>
+                </a14:m>
               </a:p>
             </p:txBody>
           </p:sp>
@@ -7577,7 +12461,7 @@
 </p:sld>
 </file>
 
-<file path=ppt/slides/slide29.xml><?xml version="1.0" encoding="utf-8"?>
+<file path=ppt/slides/slide42.xml><?xml version="1.0" encoding="utf-8"?>
 <p:sld xmlns:a="http://schemas.openxmlformats.org/drawingml/2006/main" xmlns:r="http://schemas.openxmlformats.org/officeDocument/2006/relationships" xmlns:p="http://schemas.openxmlformats.org/presentationml/2006/main">
   <p:cSld>
     <p:spTree>
@@ -7614,339 +12498,108 @@
             </a:pPr>
             <a:r>
               <a:rPr/>
-              <a:t>What it does and does not remove</a:t>
+              <a:t>Which means the hard part is not the code</a:t>
             </a:r>
           </a:p>
         </p:txBody>
       </p:sp>
-      <p:sp>
-        <p:nvSpPr>
-          <p:cNvPr id="3" name="Content Placeholder 2"/>
-          <p:cNvSpPr>
-            <a:spLocks noGrp="1"/>
-          </p:cNvSpPr>
-          <p:nvPr>
-            <p:ph idx="1"/>
-          </p:nvPr>
-        </p:nvSpPr>
-        <p:spPr/>
-        <p:txBody>
-          <a:bodyPr/>
-          <a:lstStyle/>
-          <a:p>
-            <a:pPr lvl="0"/>
-            <a:r>
-              <a:rPr/>
-              <a:t>Flexible nuisance estimation removes </a:t>
-            </a:r>
-            <a:r>
-              <a:rPr b="1"/>
-              <a:t>functional-form error</a:t>
-            </a:r>
-          </a:p>
-          <a:p>
-            <a:pPr lvl="0"/>
-            <a:r>
-              <a:rPr/>
-              <a:t>It does </a:t>
-            </a:r>
-            <a:r>
-              <a:rPr b="1"/>
-              <a:t>not</a:t>
-            </a:r>
-            <a:r>
-              <a:rPr/>
-              <a:t> remove </a:t>
-            </a:r>
-            <a:r>
-              <a:rPr b="1"/>
-              <a:t>omitted-variable bias</a:t>
-            </a:r>
-          </a:p>
-          <a:p>
-            <a:pPr lvl="0" indent="0" marL="0">
-              <a:buNone/>
-            </a:pPr>
-            <a:r>
-              <a:rPr/>
-              <a:t>Return to Session 03’s OVB formula. It still governs everything.</a:t>
-            </a:r>
-          </a:p>
-        </p:txBody>
-      </p:sp>
+      <mc:AlternateContent xmlns:mc="http://schemas.openxmlformats.org/markup-compatibility/2006">
+        <mc:Choice xmlns:a14="http://schemas.microsoft.com/office/drawing/2010/main" Requires="a14">
+          <p:sp>
+            <p:nvSpPr>
+              <p:cNvPr id="3" name="Content Placeholder 2"/>
+              <p:cNvSpPr>
+                <a:spLocks noGrp="1"/>
+              </p:cNvSpPr>
+              <p:nvPr>
+                <p:ph idx="1"/>
+              </p:nvPr>
+            </p:nvSpPr>
+            <p:spPr/>
+            <p:txBody>
+              <a:bodyPr/>
+              <a:lstStyle/>
+              <a:p>
+                <a:pPr lvl="0"/>
+                <a:r>
+                  <a:rPr/>
+                  <a:t>The code is thirty lines and you have just read all of them</a:t>
+                </a:r>
+              </a:p>
+              <a:p>
+                <a:pPr lvl="0"/>
+                <a:r>
+                  <a:rPr/>
+                  <a:t>The </a:t>
+                </a:r>
+                <a:r>
+                  <a:rPr b="1"/>
+                  <a:t>argument</a:t>
+                </a:r>
+                <a:r>
+                  <a:rPr/>
+                  <a:t> — why </a:t>
+                </a:r>
+                <a14:m>
+                  <m:oMath xmlns:m="http://schemas.openxmlformats.org/officeDocument/2006/math">
+                    <m:r>
+                      <m:t>X</m:t>
+                    </m:r>
+                  </m:oMath>
+                </a14:m>
+                <a:r>
+                  <a:rPr/>
+                  <a:t> contains everything that drives both </a:t>
+                </a:r>
+                <a14:m>
+                  <m:oMath xmlns:m="http://schemas.openxmlformats.org/officeDocument/2006/math">
+                    <m:r>
+                      <m:t>D</m:t>
+                    </m:r>
+                  </m:oMath>
+                </a14:m>
+                <a:r>
+                  <a:rPr/>
+                  <a:t> and </a:t>
+                </a:r>
+                <a14:m>
+                  <m:oMath xmlns:m="http://schemas.openxmlformats.org/officeDocument/2006/math">
+                    <m:r>
+                      <m:t>Y</m:t>
+                    </m:r>
+                  </m:oMath>
+                </a14:m>
+                <a:r>
+                  <a:rPr/>
+                  <a:t> — is the paper</a:t>
+                </a:r>
+              </a:p>
+              <a:p>
+                <a:pPr lvl="0"/>
+                <a:r>
+                  <a:rPr/>
+                  <a:t>That argument is made with institutional knowledge, not with cross-validation</a:t>
+                </a:r>
+              </a:p>
+              <a:p>
+                <a:pPr lvl="0" indent="0" marL="0">
+                  <a:buNone/>
+                </a:pPr>
+                <a:r>
+                  <a:rPr/>
+                  <a:t>On our own example, 41% of observations failed the overlap check. That fact belongs in the abstract, not in a footnote.</a:t>
+                </a:r>
+              </a:p>
+            </p:txBody>
+          </p:sp>
+        </mc:Choice>
+      </mc:AlternateContent>
     </p:spTree>
   </p:cSld>
 </p:sld>
 </file>
 
-<file path=ppt/slides/slide3.xml><?xml version="1.0" encoding="utf-8"?>
-<p:sld xmlns:a="http://schemas.openxmlformats.org/drawingml/2006/main" xmlns:r="http://schemas.openxmlformats.org/officeDocument/2006/relationships" xmlns:p="http://schemas.openxmlformats.org/presentationml/2006/main">
-  <p:cSld>
-    <p:spTree>
-      <p:nvGrpSpPr>
-        <p:cNvPr id="1" name=""/>
-        <p:cNvGrpSpPr/>
-        <p:nvPr/>
-      </p:nvGrpSpPr>
-      <p:grpSpPr>
-        <a:xfrm>
-          <a:off x="0" y="0"/>
-          <a:ext cx="0" cy="0"/>
-          <a:chOff x="0" y="0"/>
-          <a:chExt cx="0" cy="0"/>
-        </a:xfrm>
-      </p:grpSpPr>
-      <p:sp>
-        <p:nvSpPr>
-          <p:cNvPr id="2" name="Title 1"/>
-          <p:cNvSpPr>
-            <a:spLocks noGrp="1"/>
-          </p:cNvSpPr>
-          <p:nvPr>
-            <p:ph type="title"/>
-          </p:nvPr>
-        </p:nvSpPr>
-        <p:spPr/>
-        <p:txBody>
-          <a:bodyPr/>
-          <a:lstStyle/>
-          <a:p>
-            <a:pPr lvl="0" indent="0" marL="0">
-              <a:buNone/>
-            </a:pPr>
-            <a:r>
-              <a:rPr/>
-              <a:t>These slides follow the notes</a:t>
-            </a:r>
-          </a:p>
-        </p:txBody>
-      </p:sp>
-      <p:graphicFrame>
-        <p:nvGraphicFramePr>
-          <p:cNvPr id="6" name="Content Placeholder 5"/>
-          <p:cNvGraphicFramePr>
-            <a:graphicFrameLocks noGrp="1"/>
-          </p:cNvGraphicFramePr>
-          <p:nvPr>
-            <p:ph idx="1"/>
-          </p:nvPr>
-        </p:nvGraphicFramePr>
-        <p:xfrm>
-          <a:off x="457200" y="1193800"/>
-          <a:ext cx="8229600" cy="3390900"/>
-        </p:xfrm>
-        <a:graphic>
-          <a:graphicData uri="http://schemas.openxmlformats.org/drawingml/2006/table">
-            <a:tbl>
-              <a:tblPr firstRow="0" bandRow="1">
-                <a:tableStyleId>{5C22544A-7EE6-4342-B048-85BDC9FD1C3A}</a:tableStyleId>
-              </a:tblPr>
-              <a:tblGrid>
-                <a:gridCol w="4114800"/>
-                <a:gridCol w="4114800"/>
-              </a:tblGrid>
-              <a:tr h="0">
-                <a:tc>
-                  <a:txBody>
-                    <a:bodyPr/>
-                    <a:lstStyle/>
-                    <a:p>
-                      <a:pPr lvl="0" indent="0" marL="0">
-                        <a:buNone/>
-                      </a:pPr>
-                      <a:r>
-                        <a:rPr b="1"/>
-                        <a:t>10.1</a:t>
-                      </a:r>
-                    </a:p>
-                  </a:txBody>
-                </a:tc>
-                <a:tc>
-                  <a:txBody>
-                    <a:bodyPr/>
-                    <a:lstStyle/>
-                    <a:p>
-                      <a:pPr lvl="0" indent="0" marL="0">
-                        <a:buNone/>
-                      </a:pPr>
-                      <a:r>
-                        <a:rPr/>
-                        <a:t>The setup</a:t>
-                      </a:r>
-                    </a:p>
-                  </a:txBody>
-                </a:tc>
-              </a:tr>
-              <a:tr h="0">
-                <a:tc>
-                  <a:txBody>
-                    <a:bodyPr/>
-                    <a:lstStyle/>
-                    <a:p>
-                      <a:pPr lvl="0" indent="0" marL="0">
-                        <a:buNone/>
-                      </a:pPr>
-                      <a:r>
-                        <a:rPr b="1"/>
-                        <a:t>10.2</a:t>
-                      </a:r>
-                    </a:p>
-                  </a:txBody>
-                </a:tc>
-                <a:tc>
-                  <a:txBody>
-                    <a:bodyPr/>
-                    <a:lstStyle/>
-                    <a:p>
-                      <a:pPr lvl="0" indent="0" marL="0">
-                        <a:buNone/>
-                      </a:pPr>
-                      <a:r>
-                        <a:rPr/>
-                        <a:t>Why the naive plug-in fails</a:t>
-                      </a:r>
-                    </a:p>
-                  </a:txBody>
-                </a:tc>
-              </a:tr>
-              <a:tr h="0">
-                <a:tc>
-                  <a:txBody>
-                    <a:bodyPr/>
-                    <a:lstStyle/>
-                    <a:p>
-                      <a:pPr lvl="0" indent="0" marL="0">
-                        <a:buNone/>
-                      </a:pPr>
-                      <a:r>
-                        <a:rPr b="1"/>
-                        <a:t>10.3</a:t>
-                      </a:r>
-                    </a:p>
-                  </a:txBody>
-                </a:tc>
-                <a:tc>
-                  <a:txBody>
-                    <a:bodyPr/>
-                    <a:lstStyle/>
-                    <a:p>
-                      <a:pPr lvl="0" indent="0" marL="0">
-                        <a:buNone/>
-                      </a:pPr>
-                      <a:r>
-                        <a:rPr/>
-                        <a:t>Fix 1 — Neyman orthogonality</a:t>
-                      </a:r>
-                    </a:p>
-                  </a:txBody>
-                </a:tc>
-              </a:tr>
-              <a:tr h="0">
-                <a:tc>
-                  <a:txBody>
-                    <a:bodyPr/>
-                    <a:lstStyle/>
-                    <a:p>
-                      <a:pPr lvl="0" indent="0" marL="0">
-                        <a:buNone/>
-                      </a:pPr>
-                      <a:r>
-                        <a:rPr b="1"/>
-                        <a:t>10.4</a:t>
-                      </a:r>
-                    </a:p>
-                  </a:txBody>
-                </a:tc>
-                <a:tc>
-                  <a:txBody>
-                    <a:bodyPr/>
-                    <a:lstStyle/>
-                    <a:p>
-                      <a:pPr lvl="0" indent="0" marL="0">
-                        <a:buNone/>
-                      </a:pPr>
-                      <a:r>
-                        <a:rPr/>
-                        <a:t>Fix 2 — cross-fitting</a:t>
-                      </a:r>
-                    </a:p>
-                  </a:txBody>
-                </a:tc>
-              </a:tr>
-              <a:tr h="0">
-                <a:tc>
-                  <a:txBody>
-                    <a:bodyPr/>
-                    <a:lstStyle/>
-                    <a:p>
-                      <a:pPr lvl="0" indent="0" marL="0">
-                        <a:buNone/>
-                      </a:pPr>
-                      <a:r>
-                        <a:rPr b="1"/>
-                        <a:t>10.5</a:t>
-                      </a:r>
-                    </a:p>
-                  </a:txBody>
-                </a:tc>
-                <a:tc>
-                  <a:txBody>
-                    <a:bodyPr/>
-                    <a:lstStyle/>
-                    <a:p>
-                      <a:pPr lvl="0" indent="0" marL="0">
-                        <a:buNone/>
-                      </a:pPr>
-                      <a:r>
-                        <a:rPr/>
-                        <a:t>Heterogeneous treatment effects</a:t>
-                      </a:r>
-                    </a:p>
-                  </a:txBody>
-                </a:tc>
-              </a:tr>
-              <a:tr h="0">
-                <a:tc>
-                  <a:txBody>
-                    <a:bodyPr/>
-                    <a:lstStyle/>
-                    <a:p>
-                      <a:pPr lvl="0" indent="0" marL="0">
-                        <a:buNone/>
-                      </a:pPr>
-                      <a:r>
-                        <a:rPr b="1"/>
-                        <a:t>10.6</a:t>
-                      </a:r>
-                    </a:p>
-                  </a:txBody>
-                </a:tc>
-                <a:tc>
-                  <a:txBody>
-                    <a:bodyPr/>
-                    <a:lstStyle/>
-                    <a:p>
-                      <a:pPr lvl="0" indent="0" marL="0">
-                        <a:buNone/>
-                      </a:pPr>
-                      <a:r>
-                        <a:rPr/>
-                        <a:t>What this does not fix</a:t>
-                      </a:r>
-                    </a:p>
-                  </a:txBody>
-                </a:tc>
-              </a:tr>
-            </a:tbl>
-          </a:graphicData>
-        </a:graphic>
-      </p:graphicFrame>
-    </p:spTree>
-  </p:cSld>
-</p:sld>
-</file>
-
-<file path=ppt/slides/slide30.xml><?xml version="1.0" encoding="utf-8"?>
+<file path=ppt/slides/slide43.xml><?xml version="1.0" encoding="utf-8"?>
 <p:sld xmlns:a="http://schemas.openxmlformats.org/drawingml/2006/main" xmlns:r="http://schemas.openxmlformats.org/officeDocument/2006/relationships" xmlns:p="http://schemas.openxmlformats.org/presentationml/2006/main">
   <p:cSld>
     <p:spTree>
@@ -7988,7 +12641,7 @@
             </a:pPr>
             <a:r>
               <a:rPr/>
-              <a:t>The practice</a:t>
+              <a:t>Takeaways</a:t>
             </a:r>
           </a:p>
         </p:txBody>
@@ -7998,7 +12651,7 @@
 </p:sld>
 </file>
 
-<file path=ppt/slides/slide31.xml><?xml version="1.0" encoding="utf-8"?>
+<file path=ppt/slides/slide44.xml><?xml version="1.0" encoding="utf-8"?>
 <p:sld xmlns:a="http://schemas.openxmlformats.org/drawingml/2006/main" xmlns:r="http://schemas.openxmlformats.org/officeDocument/2006/relationships" xmlns:p="http://schemas.openxmlformats.org/presentationml/2006/main">
   <p:cSld>
     <p:spTree>
@@ -8035,102 +12688,242 @@
             </a:pPr>
             <a:r>
               <a:rPr/>
-              <a:t>What you do</a:t>
+              <a:t>Key takeaways</a:t>
             </a:r>
           </a:p>
         </p:txBody>
       </p:sp>
-      <p:sp>
-        <p:nvSpPr>
-          <p:cNvPr id="3" name="Content Placeholder 2"/>
-          <p:cNvSpPr>
-            <a:spLocks noGrp="1"/>
-          </p:cNvSpPr>
-          <p:nvPr>
-            <p:ph idx="1"/>
-          </p:nvPr>
-        </p:nvSpPr>
-        <p:spPr/>
-        <p:txBody>
-          <a:bodyPr/>
-          <a:lstStyle/>
-          <a:p>
-            <a:pPr lvl="0" indent="-342900" marL="342900">
-              <a:buAutoNum type="arabicPeriod"/>
-            </a:pPr>
-            <a:r>
-              <a:rPr/>
-              <a:t>State the estimand and the three assumptions, in writing, before estimating</a:t>
-            </a:r>
-          </a:p>
-          <a:p>
-            <a:pPr lvl="0" indent="-342900" marL="342900">
-              <a:buAutoNum type="arabicPeriod"/>
-            </a:pPr>
-            <a:r>
-              <a:rPr/>
-              <a:t>Check </a:t>
-            </a:r>
-            <a:r>
-              <a:rPr b="1"/>
-              <a:t>overlap</a:t>
-            </a:r>
-            <a:r>
-              <a:rPr/>
-              <a:t>; report any trimming</a:t>
-            </a:r>
-          </a:p>
-          <a:p>
-            <a:pPr lvl="0" indent="-342900" marL="342900">
-              <a:buAutoNum type="arabicPeriod"/>
-            </a:pPr>
-            <a:r>
-              <a:rPr/>
-              <a:t>Naive, then ML-with-controls, then </a:t>
-            </a:r>
-            <a:r>
-              <a:rPr b="1"/>
-              <a:t>DML</a:t>
-            </a:r>
-            <a:r>
-              <a:rPr/>
-              <a:t> — record all three</a:t>
-            </a:r>
-          </a:p>
-          <a:p>
-            <a:pPr lvl="0" indent="-342900" marL="342900">
-              <a:buAutoNum type="arabicPeriod"/>
-            </a:pPr>
-            <a:r>
-              <a:rPr/>
-              <a:t>Fit a causal forest and test whether the heterogeneity is real</a:t>
-            </a:r>
-          </a:p>
-          <a:p>
-            <a:pPr lvl="0" indent="0" marL="0">
-              <a:buNone/>
-            </a:pPr>
-            <a:r>
-              <a:rPr/>
-              <a:t>The movement between the three estimates </a:t>
-            </a:r>
-            <a:r>
-              <a:rPr b="1"/>
-              <a:t>is</a:t>
-            </a:r>
-            <a:r>
-              <a:rPr/>
-              <a:t> your evidence that confounding mattered.</a:t>
-            </a:r>
-          </a:p>
-        </p:txBody>
-      </p:sp>
+      <mc:AlternateContent xmlns:mc="http://schemas.openxmlformats.org/markup-compatibility/2006">
+        <mc:Choice xmlns:a14="http://schemas.microsoft.com/office/drawing/2010/main" Requires="a14">
+          <p:sp>
+            <p:nvSpPr>
+              <p:cNvPr id="3" name="Content Placeholder 2"/>
+              <p:cNvSpPr>
+                <a:spLocks noGrp="1"/>
+              </p:cNvSpPr>
+              <p:nvPr>
+                <p:ph idx="1"/>
+              </p:nvPr>
+            </p:nvSpPr>
+            <p:spPr/>
+            <p:txBody>
+              <a:bodyPr/>
+              <a:lstStyle/>
+              <a:p>
+                <a:pPr lvl="0" indent="-342900" marL="342900">
+                  <a:buAutoNum type="arabicPeriod"/>
+                </a:pPr>
+                <a:r>
+                  <a:rPr/>
+                  <a:t>Prediction accuracy and causal validity are </a:t>
+                </a:r>
+                <a:r>
+                  <a:rPr b="1"/>
+                  <a:t>different properties</a:t>
+                </a:r>
+                <a:r>
+                  <a:rPr/>
+                  <a:t>. One does not imply the other</a:t>
+                </a:r>
+              </a:p>
+              <a:p>
+                <a:pPr lvl="0" indent="-342900" marL="342900">
+                  <a:buAutoNum type="arabicPeriod"/>
+                </a:pPr>
+                <a:r>
+                  <a:rPr/>
+                  <a:t>The naive plug-in has two biases: regularisation (</a:t>
+                </a:r>
+                <a14:m>
+                  <m:oMath xmlns:m="http://schemas.openxmlformats.org/officeDocument/2006/math">
+                    <m:r>
+                      <m:t>b</m:t>
+                    </m:r>
+                  </m:oMath>
+                </a14:m>
+                <a:r>
+                  <a:rPr/>
+                  <a:t>) and overfitting (</a:t>
+                </a:r>
+                <a14:m>
+                  <m:oMath xmlns:m="http://schemas.openxmlformats.org/officeDocument/2006/math">
+                    <m:r>
+                      <m:t>c</m:t>
+                    </m:r>
+                  </m:oMath>
+                </a14:m>
+                <a:r>
+                  <a:rPr/>
+                  <a:t>)</a:t>
+                </a:r>
+              </a:p>
+              <a:p>
+                <a:pPr lvl="0" indent="-342900" marL="342900">
+                  <a:buAutoNum type="arabicPeriod"/>
+                </a:pPr>
+                <a:r>
+                  <a:rPr/>
+                  <a:t>An </a:t>
+                </a:r>
+                <a:r>
+                  <a:rPr b="1"/>
+                  <a:t>orthogonal score</a:t>
+                </a:r>
+                <a:r>
+                  <a:rPr/>
+                  <a:t> kills </a:t>
+                </a:r>
+                <a14:m>
+                  <m:oMath xmlns:m="http://schemas.openxmlformats.org/officeDocument/2006/math">
+                    <m:r>
+                      <m:t>b</m:t>
+                    </m:r>
+                  </m:oMath>
+                </a14:m>
+                <a:r>
+                  <a:rPr/>
+                  <a:t> — errors in the nuisance become second-order</a:t>
+                </a:r>
+              </a:p>
+              <a:p>
+                <a:pPr lvl="0" indent="-342900" marL="342900">
+                  <a:buAutoNum type="arabicPeriod"/>
+                </a:pPr>
+                <a:r>
+                  <a:rPr b="1"/>
+                  <a:t>Cross-fitting</a:t>
+                </a:r>
+                <a:r>
+                  <a:rPr/>
+                  <a:t> kills </a:t>
+                </a:r>
+                <a14:m>
+                  <m:oMath xmlns:m="http://schemas.openxmlformats.org/officeDocument/2006/math">
+                    <m:r>
+                      <m:t>c</m:t>
+                    </m:r>
+                  </m:oMath>
+                </a14:m>
+                <a:r>
+                  <a:rPr/>
+                  <a:t> — never evaluate a fit on its own training rows</a:t>
+                </a:r>
+              </a:p>
+              <a:p>
+                <a:pPr lvl="0" indent="-342900" marL="342900">
+                  <a:buAutoNum type="arabicPeriod"/>
+                </a:pPr>
+                <a:r>
+                  <a:rPr/>
+                  <a:t>Two </a:t>
+                </a:r>
+                <a14:m>
+                  <m:oMath xmlns:m="http://schemas.openxmlformats.org/officeDocument/2006/math">
+                    <m:sSup>
+                      <m:e>
+                        <m:r>
+                          <m:t>n</m:t>
+                        </m:r>
+                      </m:e>
+                      <m:sup>
+                        <m:r>
+                          <m:rPr>
+                            <m:sty m:val="p"/>
+                          </m:rPr>
+                          <m:t>−</m:t>
+                        </m:r>
+                        <m:r>
+                          <m:t>1</m:t>
+                        </m:r>
+                        <m:r>
+                          <m:rPr>
+                            <m:sty m:val="p"/>
+                          </m:rPr>
+                          <m:t>/</m:t>
+                        </m:r>
+                        <m:r>
+                          <m:t>4</m:t>
+                        </m:r>
+                      </m:sup>
+                    </m:sSup>
+                  </m:oMath>
+                </a14:m>
+                <a:r>
+                  <a:rPr/>
+                  <a:t> rates multiply into </a:t>
+                </a:r>
+                <a14:m>
+                  <m:oMath xmlns:m="http://schemas.openxmlformats.org/officeDocument/2006/math">
+                    <m:sSup>
+                      <m:e>
+                        <m:r>
+                          <m:t>n</m:t>
+                        </m:r>
+                      </m:e>
+                      <m:sup>
+                        <m:r>
+                          <m:rPr>
+                            <m:sty m:val="p"/>
+                          </m:rPr>
+                          <m:t>−</m:t>
+                        </m:r>
+                        <m:r>
+                          <m:t>1</m:t>
+                        </m:r>
+                        <m:r>
+                          <m:rPr>
+                            <m:sty m:val="p"/>
+                          </m:rPr>
+                          <m:t>/</m:t>
+                        </m:r>
+                        <m:r>
+                          <m:t>2</m:t>
+                        </m:r>
+                      </m:sup>
+                    </m:sSup>
+                  </m:oMath>
+                </a14:m>
+                <a:r>
+                  <a:rPr/>
+                  <a:t>. Hence </a:t>
+                </a:r>
+                <a:r>
+                  <a:rPr i="1"/>
+                  <a:t>double</a:t>
+                </a:r>
+              </a:p>
+              <a:p>
+                <a:pPr lvl="0" indent="-342900" marL="342900">
+                  <a:buAutoNum type="arabicPeriod"/>
+                </a:pPr>
+                <a:r>
+                  <a:rPr/>
+                  <a:t>Heterogeneity searching is multiple testing. Pre-specify or label it exploratory</a:t>
+                </a:r>
+              </a:p>
+              <a:p>
+                <a:pPr lvl="0" indent="-342900" marL="342900">
+                  <a:buAutoNum type="arabicPeriod"/>
+                </a:pPr>
+                <a:r>
+                  <a:rPr/>
+                  <a:t>None of this identifies anything. </a:t>
+                </a:r>
+                <a:r>
+                  <a:rPr b="1"/>
+                  <a:t>The assumptions do that</a:t>
+                </a:r>
+              </a:p>
+            </p:txBody>
+          </p:sp>
+        </mc:Choice>
+      </mc:AlternateContent>
     </p:spTree>
   </p:cSld>
 </p:sld>
 </file>
 
-<file path=ppt/slides/slide32.xml><?xml version="1.0" encoding="utf-8"?>
+<file path=ppt/slides/slide45.xml><?xml version="1.0" encoding="utf-8"?>
 <p:sld xmlns:a="http://schemas.openxmlformats.org/drawingml/2006/main" xmlns:r="http://schemas.openxmlformats.org/officeDocument/2006/relationships" xmlns:p="http://schemas.openxmlformats.org/presentationml/2006/main">
   <p:cSld>
     <p:spTree>
@@ -8167,7 +12960,7 @@
             </a:pPr>
             <a:r>
               <a:rPr/>
-              <a:t>The two-minute report</a:t>
+              <a:t>What loses marks</a:t>
             </a:r>
           </a:p>
         </p:txBody>
@@ -8189,76 +12982,64 @@
               <a:bodyPr/>
               <a:lstStyle/>
               <a:p>
-                <a:pPr lvl="0" indent="-342900" marL="342900">
-                  <a:buAutoNum type="arabicPeriod"/>
-                </a:pPr>
+                <a:pPr lvl="0"/>
+                <a:r>
+                  <a:rPr/>
+                  <a:t>Reporting a DML estimate with </a:t>
+                </a:r>
                 <a:r>
                   <a:rPr b="1"/>
-                  <a:t>What I did</a:t>
-                </a:r>
-                <a:r>
-                  <a:rPr/>
-                  <a:t> — the estimand, and which assumption you are least sure of</a:t>
+                  <a:t>no overlap diagnostic</a:t>
                 </a:r>
               </a:p>
               <a:p>
-                <a:pPr lvl="0" indent="-342900" marL="342900">
-                  <a:buAutoNum type="arabicPeriod"/>
-                </a:pPr>
-                <a:r>
-                  <a:rPr b="1"/>
-                  <a:t>The number</a:t>
-                </a:r>
+                <a:pPr lvl="0"/>
                 <a:r>
                   <a:rPr/>
-                  <a:t> — </a:t>
+                  <a:t>Fitting nuisances on the full sample (that is the naive plug-in, with extra steps)</a:t>
+                </a:r>
+              </a:p>
+              <a:p>
+                <a:pPr lvl="0"/>
+                <a:r>
+                  <a:rPr/>
+                  <a:t>Reporting one fold assignment instead of the median over several</a:t>
+                </a:r>
+              </a:p>
+              <a:p>
+                <a:pPr lvl="0"/>
+                <a:r>
+                  <a:rPr/>
+                  <a:t>Presenting a subgroup effect found by searching, without saying you searched</a:t>
+                </a:r>
+              </a:p>
+              <a:p>
+                <a:pPr lvl="0"/>
+                <a:r>
+                  <a:rPr/>
+                  <a:t>Any sentence of the form “the model shows that </a:t>
                 </a:r>
                 <a14:m>
                   <m:oMath xmlns:m="http://schemas.openxmlformats.org/officeDocument/2006/math">
-                    <m:acc>
-                      <m:accPr>
-                        <m:chr m:val="̂"/>
-                      </m:accPr>
-                      <m:e>
-                        <m:r>
-                          <m:t>θ</m:t>
-                        </m:r>
-                      </m:e>
-                    </m:acc>
+                    <m:r>
+                      <m:t>X</m:t>
+                    </m:r>
                   </m:oMath>
                 </a14:m>
                 <a:r>
                   <a:rPr/>
-                  <a:t> with its cross-fitted interval</a:t>
-                </a:r>
-              </a:p>
-              <a:p>
-                <a:pPr lvl="0" indent="-342900" marL="342900">
-                  <a:buAutoNum type="arabicPeriod"/>
-                </a:pPr>
-                <a:r>
-                  <a:rPr b="1"/>
-                  <a:t>The catch</a:t>
-                </a:r>
+                  <a:t> causes </a:t>
+                </a:r>
+                <a14:m>
+                  <m:oMath xmlns:m="http://schemas.openxmlformats.org/officeDocument/2006/math">
+                    <m:r>
+                      <m:t>Y</m:t>
+                    </m:r>
+                  </m:oMath>
+                </a14:m>
                 <a:r>
                   <a:rPr/>
-                  <a:t> — the confounder DML cannot save you from</a:t>
-                </a:r>
-              </a:p>
-              <a:p>
-                <a:pPr lvl="0" indent="0" marL="0">
-                  <a:buNone/>
-                </a:pPr>
-                <a:r>
-                  <a:rPr/>
-                  <a:t>Full brief: </a:t>
-                </a:r>
-                <a:r>
-                  <a:rPr>
-                    <a:hlinkClick r:id="rId2"/>
-                    <a:latin typeface="Courier"/>
-                  </a:rPr>
-                  <a:t>02-practice/README.md</a:t>
+                  <a:t>”</a:t>
                 </a:r>
               </a:p>
             </p:txBody>
@@ -8270,7 +13051,7 @@
 </p:sld>
 </file>
 
-<file path=ppt/slides/slide4.xml><?xml version="1.0" encoding="utf-8"?>
+<file path=ppt/slides/slide46.xml><?xml version="1.0" encoding="utf-8"?>
 <p:sld xmlns:a="http://schemas.openxmlformats.org/drawingml/2006/main" xmlns:r="http://schemas.openxmlformats.org/officeDocument/2006/relationships" xmlns:p="http://schemas.openxmlformats.org/presentationml/2006/main">
   <p:cSld>
     <p:spTree>
@@ -8289,6 +13070,31 @@
       </p:grpSpPr>
       <p:sp>
         <p:nvSpPr>
+          <p:cNvPr id="2" name="Title 1"/>
+          <p:cNvSpPr>
+            <a:spLocks noGrp="1"/>
+          </p:cNvSpPr>
+          <p:nvPr>
+            <p:ph type="title"/>
+          </p:nvPr>
+        </p:nvSpPr>
+        <p:spPr/>
+        <p:txBody>
+          <a:bodyPr/>
+          <a:lstStyle/>
+          <a:p>
+            <a:pPr lvl="0" indent="0" marL="0">
+              <a:buNone/>
+            </a:pPr>
+            <a:r>
+              <a:rPr/>
+              <a:t>Now, the practice</a:t>
+            </a:r>
+          </a:p>
+        </p:txBody>
+      </p:sp>
+      <p:sp>
+        <p:nvSpPr>
           <p:cNvPr id="3" name="Content Placeholder 2"/>
           <p:cNvSpPr>
             <a:spLocks noGrp="1"/>
@@ -8307,7 +13113,16 @@
             </a:pPr>
             <a:r>
               <a:rPr/>
-              <a:t>Same numbering as </a:t>
+              <a:t>Ninety minutes, in your groups. You will estimate one treatment effect three ways — naive, linear controls, and cross-fitted DML — check overlap first, and write the paragraph defending conditional ignorability. That paragraph carries the marks.</a:t>
+            </a:r>
+          </a:p>
+          <a:p>
+            <a:pPr lvl="0" indent="0" marL="0">
+              <a:buNone/>
+            </a:pPr>
+            <a:r>
+              <a:rPr/>
+              <a:t>Notes: </a:t>
             </a:r>
             <a:r>
               <a:rPr>
@@ -8318,7 +13133,14 @@
             </a:r>
             <a:r>
               <a:rPr/>
-              <a:t>.</a:t>
+              <a:t> · practice brief: </a:t>
+            </a:r>
+            <a:r>
+              <a:rPr>
+                <a:hlinkClick r:id="rId3"/>
+                <a:latin typeface="Courier"/>
+              </a:rPr>
+              <a:t>02-practice/README.md</a:t>
             </a:r>
           </a:p>
         </p:txBody>
@@ -8370,7 +13192,7 @@
             </a:pPr>
             <a:r>
               <a:rPr/>
-              <a:t>10.1 The setup</a:t>
+              <a:t>1 · What this adds</a:t>
             </a:r>
           </a:p>
         </p:txBody>
@@ -8417,342 +13239,169 @@
             </a:pPr>
             <a:r>
               <a:rPr/>
-              <a:t>The partially linear model</a:t>
+              <a:t>Sessions 05–09 gave you prediction</a:t>
             </a:r>
           </a:p>
         </p:txBody>
       </p:sp>
-      <mc:AlternateContent xmlns:mc="http://schemas.openxmlformats.org/markup-compatibility/2006">
-        <mc:Choice xmlns:a14="http://schemas.microsoft.com/office/drawing/2010/main" Requires="a14">
-          <p:sp>
-            <p:nvSpPr>
-              <p:cNvPr id="3" name="Content Placeholder 2"/>
-              <p:cNvSpPr>
-                <a:spLocks noGrp="1"/>
-              </p:cNvSpPr>
-              <p:nvPr>
-                <p:ph idx="1"/>
-              </p:nvPr>
-            </p:nvSpPr>
-            <p:spPr/>
-            <p:txBody>
-              <a:bodyPr/>
-              <a:lstStyle/>
-              <a:p>
-                <a:pPr lvl="0" indent="0" marL="0">
-                  <a:buNone/>
-                </a:pPr>
-                <a14:m>
-                  <m:oMathPara xmlns:m="http://schemas.openxmlformats.org/officeDocument/2006/math">
-                    <m:oMathParaPr>
-                      <m:jc m:val="center"/>
-                    </m:oMathParaPr>
-                    <m:oMath>
-                      <m:r>
-                        <m:t>Y</m:t>
-                      </m:r>
-                      <m:r>
-                        <m:rPr>
-                          <m:sty m:val="p"/>
-                        </m:rPr>
-                        <m:t>=</m:t>
-                      </m:r>
-                      <m:sSub>
-                        <m:e>
-                          <m:r>
-                            <m:t>θ</m:t>
-                          </m:r>
-                        </m:e>
-                        <m:sub>
-                          <m:r>
-                            <m:t>0</m:t>
-                          </m:r>
-                        </m:sub>
-                      </m:sSub>
-                      <m:r>
-                        <m:t>D</m:t>
-                      </m:r>
-                      <m:r>
-                        <m:rPr>
-                          <m:sty m:val="p"/>
-                        </m:rPr>
-                        <m:t>+</m:t>
-                      </m:r>
-                      <m:sSub>
-                        <m:e>
-                          <m:r>
-                            <m:t>g</m:t>
-                          </m:r>
-                        </m:e>
-                        <m:sub>
-                          <m:r>
-                            <m:t>0</m:t>
-                          </m:r>
-                        </m:sub>
-                      </m:sSub>
-                      <m:d>
-                        <m:dPr>
-                          <m:begChr m:val="("/>
-                          <m:sepChr m:val=""/>
-                          <m:endChr m:val=")"/>
-                          <m:grow/>
-                        </m:dPr>
-                        <m:e>
-                          <m:r>
-                            <m:t>X</m:t>
-                          </m:r>
-                        </m:e>
-                      </m:d>
-                      <m:r>
-                        <m:rPr>
-                          <m:sty m:val="p"/>
-                        </m:rPr>
-                        <m:t>+</m:t>
-                      </m:r>
-                      <m:r>
-                        <m:t>U</m:t>
-                      </m:r>
-                      <m:r>
-                        <m:rPr>
-                          <m:sty m:val="p"/>
-                        </m:rPr>
-                        <m:t>,</m:t>
-                      </m:r>
-                      <m:r>
-                        <m:t>  </m:t>
-                      </m:r>
-                      <m:r>
-                        <m:rPr>
-                          <m:sty m:val="p"/>
-                          <m:scr m:val="double-struck"/>
-                        </m:rPr>
-                        <m:t>E</m:t>
-                      </m:r>
-                      <m:d>
-                        <m:dPr>
-                          <m:begChr m:val="["/>
-                          <m:sepChr m:val=""/>
-                          <m:endChr m:val="]"/>
-                          <m:grow/>
-                        </m:dPr>
-                        <m:e>
-                          <m:r>
-                            <m:t>U</m:t>
-                          </m:r>
-                          <m:r>
-                            <m:rPr>
-                              <m:sty m:val="p"/>
-                            </m:rPr>
-                            <m:t>∣</m:t>
-                          </m:r>
-                          <m:r>
-                            <m:t>X</m:t>
-                          </m:r>
-                          <m:r>
-                            <m:rPr>
-                              <m:sty m:val="p"/>
-                            </m:rPr>
-                            <m:t>,</m:t>
-                          </m:r>
-                          <m:r>
-                            <m:t>D</m:t>
-                          </m:r>
-                        </m:e>
-                      </m:d>
-                      <m:r>
-                        <m:rPr>
-                          <m:sty m:val="p"/>
-                        </m:rPr>
-                        <m:t>=</m:t>
-                      </m:r>
-                      <m:r>
-                        <m:t>0</m:t>
-                      </m:r>
-                    </m:oMath>
-                  </m:oMathPara>
-                </a14:m>
-              </a:p>
-              <a:p>
-                <a:pPr lvl="0" indent="0" marL="0">
-                  <a:buNone/>
-                </a:pPr>
-                <a14:m>
-                  <m:oMathPara xmlns:m="http://schemas.openxmlformats.org/officeDocument/2006/math">
-                    <m:oMathParaPr>
-                      <m:jc m:val="center"/>
-                    </m:oMathParaPr>
-                    <m:oMath>
-                      <m:r>
-                        <m:t>D</m:t>
-                      </m:r>
-                      <m:r>
-                        <m:rPr>
-                          <m:sty m:val="p"/>
-                        </m:rPr>
-                        <m:t>=</m:t>
-                      </m:r>
-                      <m:sSub>
-                        <m:e>
-                          <m:r>
-                            <m:t>m</m:t>
-                          </m:r>
-                        </m:e>
-                        <m:sub>
-                          <m:r>
-                            <m:t>0</m:t>
-                          </m:r>
-                        </m:sub>
-                      </m:sSub>
-                      <m:d>
-                        <m:dPr>
-                          <m:begChr m:val="("/>
-                          <m:sepChr m:val=""/>
-                          <m:endChr m:val=")"/>
-                          <m:grow/>
-                        </m:dPr>
-                        <m:e>
-                          <m:r>
-                            <m:t>X</m:t>
-                          </m:r>
-                        </m:e>
-                      </m:d>
-                      <m:r>
-                        <m:rPr>
-                          <m:sty m:val="p"/>
-                        </m:rPr>
-                        <m:t>+</m:t>
-                      </m:r>
-                      <m:r>
-                        <m:t>V</m:t>
-                      </m:r>
-                      <m:r>
-                        <m:rPr>
-                          <m:sty m:val="p"/>
-                        </m:rPr>
-                        <m:t>,</m:t>
-                      </m:r>
-                      <m:r>
-                        <m:t>  </m:t>
-                      </m:r>
-                      <m:r>
-                        <m:rPr>
-                          <m:sty m:val="p"/>
-                          <m:scr m:val="double-struck"/>
-                        </m:rPr>
-                        <m:t>E</m:t>
-                      </m:r>
-                      <m:d>
-                        <m:dPr>
-                          <m:begChr m:val="["/>
-                          <m:sepChr m:val=""/>
-                          <m:endChr m:val="]"/>
-                          <m:grow/>
-                        </m:dPr>
-                        <m:e>
-                          <m:r>
-                            <m:t>V</m:t>
-                          </m:r>
-                          <m:r>
-                            <m:rPr>
-                              <m:sty m:val="p"/>
-                            </m:rPr>
-                            <m:t>∣</m:t>
-                          </m:r>
-                          <m:r>
-                            <m:t>X</m:t>
-                          </m:r>
-                        </m:e>
-                      </m:d>
-                      <m:r>
-                        <m:rPr>
-                          <m:sty m:val="p"/>
-                        </m:rPr>
-                        <m:t>=</m:t>
-                      </m:r>
-                      <m:r>
-                        <m:t>0</m:t>
-                      </m:r>
-                    </m:oMath>
-                  </m:oMathPara>
-                </a14:m>
-              </a:p>
-              <a:p>
-                <a:pPr lvl="0" indent="0" marL="0">
-                  <a:buNone/>
-                </a:pPr>
-                <a14:m>
-                  <m:oMath xmlns:m="http://schemas.openxmlformats.org/officeDocument/2006/math">
-                    <m:sSub>
-                      <m:e>
-                        <m:r>
-                          <m:t>θ</m:t>
-                        </m:r>
-                      </m:e>
-                      <m:sub>
-                        <m:r>
-                          <m:t>0</m:t>
-                        </m:r>
-                      </m:sub>
-                    </m:sSub>
-                  </m:oMath>
-                </a14:m>
-                <a:r>
-                  <a:rPr/>
-                  <a:t> is the parameter of interest; </a:t>
-                </a:r>
-                <a14:m>
-                  <m:oMath xmlns:m="http://schemas.openxmlformats.org/officeDocument/2006/math">
-                    <m:sSub>
-                      <m:e>
-                        <m:r>
-                          <m:t>g</m:t>
-                        </m:r>
-                      </m:e>
-                      <m:sub>
-                        <m:r>
-                          <m:t>0</m:t>
-                        </m:r>
-                      </m:sub>
-                    </m:sSub>
-                  </m:oMath>
-                </a14:m>
-                <a:r>
-                  <a:rPr/>
-                  <a:t> and </a:t>
-                </a:r>
-                <a14:m>
-                  <m:oMath xmlns:m="http://schemas.openxmlformats.org/officeDocument/2006/math">
-                    <m:sSub>
-                      <m:e>
-                        <m:r>
-                          <m:t>m</m:t>
-                        </m:r>
-                      </m:e>
-                      <m:sub>
-                        <m:r>
-                          <m:t>0</m:t>
-                        </m:r>
-                      </m:sub>
-                    </m:sSub>
-                  </m:oMath>
-                </a14:m>
-                <a:r>
-                  <a:rPr/>
-                  <a:t> are </a:t>
-                </a:r>
-                <a:r>
-                  <a:rPr b="1"/>
-                  <a:t>nuisance functions</a:t>
-                </a:r>
-                <a:r>
-                  <a:rPr/>
-                  <a:t> we do not care about but must handle.</a:t>
-                </a:r>
-              </a:p>
-            </p:txBody>
-          </p:sp>
-        </mc:Choice>
-      </mc:AlternateContent>
+      <p:graphicFrame>
+        <p:nvGraphicFramePr>
+          <p:cNvPr id="6" name="Content Placeholder 5"/>
+          <p:cNvGraphicFramePr>
+            <a:graphicFrameLocks noGrp="1"/>
+          </p:cNvGraphicFramePr>
+          <p:nvPr>
+            <p:ph idx="1"/>
+          </p:nvPr>
+        </p:nvGraphicFramePr>
+        <p:xfrm>
+          <a:off x="457200" y="1193800"/>
+          <a:ext cx="8229600" cy="3390900"/>
+        </p:xfrm>
+        <a:graphic>
+          <a:graphicData uri="http://schemas.openxmlformats.org/drawingml/2006/table">
+            <a:tbl>
+              <a:tblPr firstRow="1" bandRow="1">
+                <a:tableStyleId>{5C22544A-7EE6-4342-B048-85BDC9FD1C3A}</a:tableStyleId>
+              </a:tblPr>
+              <a:tblGrid>
+                <a:gridCol w="4114800"/>
+                <a:gridCol w="4114800"/>
+              </a:tblGrid>
+              <a:tr h="0">
+                <a:tc>
+                  <a:txBody>
+                    <a:bodyPr/>
+                    <a:lstStyle/>
+                    <a:p>
+                      <a:pPr lvl="0" indent="0" marL="0">
+                        <a:buNone/>
+                      </a:pPr>
+                      <a:r>
+                        <a:rPr/>
+                        <a:t>Session</a:t>
+                      </a:r>
+                    </a:p>
+                  </a:txBody>
+                  <a:tcPr/>
+                </a:tc>
+                <a:tc>
+                  <a:txBody>
+                    <a:bodyPr/>
+                    <a:lstStyle/>
+                    <a:p>
+                      <a:pPr lvl="0" indent="0" marL="0">
+                        <a:buNone/>
+                      </a:pPr>
+                      <a:r>
+                        <a:rPr/>
+                        <a:t>What you can now do</a:t>
+                      </a:r>
+                    </a:p>
+                  </a:txBody>
+                  <a:tcPr/>
+                </a:tc>
+              </a:tr>
+              <a:tr h="0">
+                <a:tc>
+                  <a:txBody>
+                    <a:bodyPr/>
+                    <a:lstStyle/>
+                    <a:p>
+                      <a:pPr lvl="0" indent="0" marL="0">
+                        <a:buNone/>
+                      </a:pPr>
+                      <a:r>
+                        <a:rPr b="1"/>
+                        <a:t>05</a:t>
+                      </a:r>
+                    </a:p>
+                  </a:txBody>
+                </a:tc>
+                <a:tc>
+                  <a:txBody>
+                    <a:bodyPr/>
+                    <a:lstStyle/>
+                    <a:p>
+                      <a:pPr lvl="0" indent="0" marL="0">
+                        <a:buNone/>
+                      </a:pPr>
+                      <a:r>
+                        <a:rPr/>
+                        <a:t>fit well with more predictors than rows</a:t>
+                      </a:r>
+                    </a:p>
+                  </a:txBody>
+                </a:tc>
+              </a:tr>
+              <a:tr h="0">
+                <a:tc>
+                  <a:txBody>
+                    <a:bodyPr/>
+                    <a:lstStyle/>
+                    <a:p>
+                      <a:pPr lvl="0" indent="0" marL="0">
+                        <a:buNone/>
+                      </a:pPr>
+                      <a:r>
+                        <a:rPr b="1"/>
+                        <a:t>06–07</a:t>
+                      </a:r>
+                    </a:p>
+                  </a:txBody>
+                </a:tc>
+                <a:tc>
+                  <a:txBody>
+                    <a:bodyPr/>
+                    <a:lstStyle/>
+                    <a:p>
+                      <a:pPr lvl="0" indent="0" marL="0">
+                        <a:buNone/>
+                      </a:pPr>
+                      <a:r>
+                        <a:rPr/>
+                        <a:t>classify, and fit arbitrary non-linear surfaces</a:t>
+                      </a:r>
+                    </a:p>
+                  </a:txBody>
+                </a:tc>
+              </a:tr>
+              <a:tr h="0">
+                <a:tc>
+                  <a:txBody>
+                    <a:bodyPr/>
+                    <a:lstStyle/>
+                    <a:p>
+                      <a:pPr lvl="0" indent="0" marL="0">
+                        <a:buNone/>
+                      </a:pPr>
+                      <a:r>
+                        <a:rPr b="1"/>
+                        <a:t>08–09</a:t>
+                      </a:r>
+                    </a:p>
+                  </a:txBody>
+                </a:tc>
+                <a:tc>
+                  <a:txBody>
+                    <a:bodyPr/>
+                    <a:lstStyle/>
+                    <a:p>
+                      <a:pPr lvl="0" indent="0" marL="0">
+                        <a:buNone/>
+                      </a:pPr>
+                      <a:r>
+                        <a:rPr/>
+                        <a:t>compress and cluster without an outcome at all</a:t>
+                      </a:r>
+                    </a:p>
+                  </a:txBody>
+                </a:tc>
+              </a:tr>
+            </a:tbl>
+          </a:graphicData>
+        </a:graphic>
+      </p:graphicFrame>
     </p:spTree>
   </p:cSld>
 </p:sld>
@@ -8775,189 +13424,35 @@
           <a:chExt cx="0" cy="0"/>
         </a:xfrm>
       </p:grpSpPr>
-      <mc:AlternateContent xmlns:mc="http://schemas.openxmlformats.org/markup-compatibility/2006">
-        <mc:Choice xmlns:a14="http://schemas.microsoft.com/office/drawing/2010/main" Requires="a14">
-          <p:sp>
-            <p:nvSpPr>
-              <p:cNvPr id="2" name="Title 1"/>
-              <p:cNvSpPr>
-                <a:spLocks noGrp="1"/>
-              </p:cNvSpPr>
-              <p:nvPr>
-                <p:ph type="title"/>
-              </p:nvPr>
-            </p:nvSpPr>
-            <p:spPr/>
-            <p:txBody>
-              <a:bodyPr/>
-              <a:lstStyle/>
-              <a:p>
-                <a:pPr lvl="0" indent="0" marL="0">
-                  <a:buNone/>
-                </a:pPr>
-                <a:r>
-                  <a:rPr/>
-                  <a:t>Why not just assume </a:t>
-                </a:r>
-                <a14:m>
-                  <m:oMath xmlns:m="http://schemas.openxmlformats.org/officeDocument/2006/math">
-                    <m:sSub>
-                      <m:e>
-                        <m:r>
-                          <m:t>g</m:t>
-                        </m:r>
-                      </m:e>
-                      <m:sub>
-                        <m:r>
-                          <m:t>0</m:t>
-                        </m:r>
-                      </m:sub>
-                    </m:sSub>
-                  </m:oMath>
-                </a14:m>
-                <a:r>
-                  <a:rPr/>
-                  <a:t> is linear</a:t>
-                </a:r>
-              </a:p>
-            </p:txBody>
-          </p:sp>
-        </mc:Choice>
-      </mc:AlternateContent>
-      <mc:AlternateContent xmlns:mc="http://schemas.openxmlformats.org/markup-compatibility/2006">
-        <mc:Choice xmlns:a14="http://schemas.microsoft.com/office/drawing/2010/main" Requires="a14">
-          <p:sp>
-            <p:nvSpPr>
-              <p:cNvPr id="3" name="Content Placeholder 2"/>
-              <p:cNvSpPr>
-                <a:spLocks noGrp="1"/>
-              </p:cNvSpPr>
-              <p:nvPr>
-                <p:ph idx="1"/>
-              </p:nvPr>
-            </p:nvSpPr>
-            <p:spPr/>
-            <p:txBody>
-              <a:bodyPr/>
-              <a:lstStyle/>
-              <a:p>
-                <a:pPr lvl="0" indent="0" marL="0">
-                  <a:buNone/>
-                </a:pPr>
-                <a:r>
-                  <a:rPr/>
-                  <a:t>In classical econometrics we would. The premise of DML is that we would rather estimate </a:t>
-                </a:r>
-                <a14:m>
-                  <m:oMath xmlns:m="http://schemas.openxmlformats.org/officeDocument/2006/math">
-                    <m:sSub>
-                      <m:e>
-                        <m:r>
-                          <m:t>g</m:t>
-                        </m:r>
-                      </m:e>
-                      <m:sub>
-                        <m:r>
-                          <m:t>0</m:t>
-                        </m:r>
-                      </m:sub>
-                    </m:sSub>
-                  </m:oMath>
-                </a14:m>
-                <a:r>
-                  <a:rPr/>
-                  <a:t> and </a:t>
-                </a:r>
-                <a14:m>
-                  <m:oMath xmlns:m="http://schemas.openxmlformats.org/officeDocument/2006/math">
-                    <m:sSub>
-                      <m:e>
-                        <m:r>
-                          <m:t>m</m:t>
-                        </m:r>
-                      </m:e>
-                      <m:sub>
-                        <m:r>
-                          <m:t>0</m:t>
-                        </m:r>
-                      </m:sub>
-                    </m:sSub>
-                  </m:oMath>
-                </a14:m>
-                <a:r>
-                  <a:rPr/>
-                  <a:t> </a:t>
-                </a:r>
-                <a:r>
-                  <a:rPr b="1"/>
-                  <a:t>flexibly</a:t>
-                </a:r>
-                <a:r>
-                  <a:rPr/>
-                  <a:t>, with the tools of Sessions 05–07 —</a:t>
-                </a:r>
-              </a:p>
-              <a:p>
-                <a:pPr lvl="0" indent="0" marL="0">
-                  <a:buNone/>
-                </a:pPr>
-                <a:r>
-                  <a:rPr/>
-                  <a:t>because functional-form error in </a:t>
-                </a:r>
-                <a14:m>
-                  <m:oMath xmlns:m="http://schemas.openxmlformats.org/officeDocument/2006/math">
-                    <m:sSub>
-                      <m:e>
-                        <m:r>
-                          <m:t>g</m:t>
-                        </m:r>
-                      </m:e>
-                      <m:sub>
-                        <m:r>
-                          <m:t>0</m:t>
-                        </m:r>
-                      </m:sub>
-                    </m:sSub>
-                  </m:oMath>
-                </a14:m>
-                <a:r>
-                  <a:rPr/>
-                  <a:t> </a:t>
-                </a:r>
-                <a:r>
-                  <a:rPr b="1"/>
-                  <a:t>contaminates</a:t>
-                </a:r>
-                <a:r>
-                  <a:rPr/>
-                  <a:t> </a:t>
-                </a:r>
-                <a14:m>
-                  <m:oMath xmlns:m="http://schemas.openxmlformats.org/officeDocument/2006/math">
-                    <m:sSub>
-                      <m:e>
-                        <m:r>
-                          <m:t>θ</m:t>
-                        </m:r>
-                      </m:e>
-                      <m:sub>
-                        <m:r>
-                          <m:t>0</m:t>
-                        </m:r>
-                      </m:sub>
-                    </m:sSub>
-                  </m:oMath>
-                </a14:m>
-                <a:r>
-                  <a:rPr/>
-                  <a:t>.</a:t>
-                </a:r>
-              </a:p>
-            </p:txBody>
-          </p:sp>
-        </mc:Choice>
-      </mc:AlternateContent>
+      <p:sp>
+        <p:nvSpPr>
+          <p:cNvPr id="3" name="Content Placeholder 2"/>
+          <p:cNvSpPr>
+            <a:spLocks noGrp="1"/>
+          </p:cNvSpPr>
+          <p:nvPr>
+            <p:ph idx="1"/>
+          </p:nvPr>
+        </p:nvSpPr>
+        <p:spPr/>
+        <p:txBody>
+          <a:bodyPr/>
+          <a:lstStyle/>
+          <a:p>
+            <a:pPr lvl="0" indent="0" marL="0">
+              <a:buNone/>
+            </a:pPr>
+            <a:r>
+              <a:rPr/>
+              <a:t>And none of it answers the only question a minister ever asks: </a:t>
+            </a:r>
+            <a:r>
+              <a:rPr b="1"/>
+              <a:t>if we do this, what happens?</a:t>
+            </a:r>
+          </a:p>
+        </p:txBody>
+      </p:sp>
     </p:spTree>
   </p:cSld>
 </p:sld>
@@ -9000,215 +13495,41 @@
             </a:pPr>
             <a:r>
               <a:rPr/>
-              <a:t>Identification requires</a:t>
+              <a:t>The gap, made concrete</a:t>
             </a:r>
           </a:p>
         </p:txBody>
       </p:sp>
-      <mc:AlternateContent xmlns:mc="http://schemas.openxmlformats.org/markup-compatibility/2006">
-        <mc:Choice xmlns:a14="http://schemas.microsoft.com/office/drawing/2010/main" Requires="a14">
-          <p:sp>
-            <p:nvSpPr>
-              <p:cNvPr id="3" name="Content Placeholder 2"/>
-              <p:cNvSpPr>
-                <a:spLocks noGrp="1"/>
-              </p:cNvSpPr>
-              <p:nvPr>
-                <p:ph idx="1"/>
-              </p:nvPr>
-            </p:nvSpPr>
-            <p:spPr/>
-            <p:txBody>
-              <a:bodyPr/>
-              <a:lstStyle/>
-              <a:p>
-                <a:pPr lvl="0" indent="-342900" marL="342900">
-                  <a:buAutoNum type="arabicPeriod"/>
-                </a:pPr>
-                <a:r>
-                  <a:rPr b="1"/>
-                  <a:t>Conditional ignorability</a:t>
-                </a:r>
-                <a:r>
-                  <a:rPr/>
-                  <a:t> — </a:t>
-                </a:r>
-                <a14:m>
-                  <m:oMath xmlns:m="http://schemas.openxmlformats.org/officeDocument/2006/math">
-                    <m:r>
-                      <m:rPr>
-                        <m:sty m:val="p"/>
-                      </m:rPr>
-                      <m:t>{</m:t>
-                    </m:r>
-                    <m:r>
-                      <m:t>Y</m:t>
-                    </m:r>
-                    <m:d>
-                      <m:dPr>
-                        <m:begChr m:val="("/>
-                        <m:sepChr m:val=""/>
-                        <m:endChr m:val=")"/>
-                        <m:grow/>
-                      </m:dPr>
-                      <m:e>
-                        <m:r>
-                          <m:t>1</m:t>
-                        </m:r>
-                      </m:e>
-                    </m:d>
-                    <m:r>
-                      <m:rPr>
-                        <m:sty m:val="p"/>
-                      </m:rPr>
-                      <m:t>,</m:t>
-                    </m:r>
-                    <m:r>
-                      <m:t>Y</m:t>
-                    </m:r>
-                    <m:d>
-                      <m:dPr>
-                        <m:begChr m:val="("/>
-                        <m:sepChr m:val=""/>
-                        <m:endChr m:val=")"/>
-                        <m:grow/>
-                      </m:dPr>
-                      <m:e>
-                        <m:r>
-                          <m:t>0</m:t>
-                        </m:r>
-                      </m:e>
-                    </m:d>
-                    <m:r>
-                      <m:rPr>
-                        <m:sty m:val="p"/>
-                      </m:rPr>
-                      <m:t>}</m:t>
-                    </m:r>
-                    <m:r>
-                      <m:rPr>
-                        <m:sty m:val="p"/>
-                      </m:rPr>
-                      <m:t>⟂</m:t>
-                    </m:r>
-                    <m:r>
-                      <m:t>D</m:t>
-                    </m:r>
-                    <m:r>
-                      <m:rPr>
-                        <m:sty m:val="p"/>
-                      </m:rPr>
-                      <m:t>∣</m:t>
-                    </m:r>
-                    <m:r>
-                      <m:t>X</m:t>
-                    </m:r>
-                  </m:oMath>
-                </a14:m>
-              </a:p>
-              <a:p>
-                <a:pPr lvl="0" indent="-342900" marL="342900">
-                  <a:buAutoNum type="arabicPeriod"/>
-                </a:pPr>
-                <a:r>
-                  <a:rPr b="1"/>
-                  <a:t>Overlap</a:t>
-                </a:r>
-                <a:r>
-                  <a:rPr/>
-                  <a:t> — </a:t>
-                </a:r>
-                <a14:m>
-                  <m:oMath xmlns:m="http://schemas.openxmlformats.org/officeDocument/2006/math">
-                    <m:r>
-                      <m:t>0</m:t>
-                    </m:r>
-                    <m:r>
-                      <m:rPr>
-                        <m:sty m:val="p"/>
-                      </m:rPr>
-                      <m:t>&lt;</m:t>
-                    </m:r>
-                    <m:r>
-                      <m:t>P</m:t>
-                    </m:r>
-                    <m:d>
-                      <m:dPr>
-                        <m:begChr m:val="("/>
-                        <m:sepChr m:val=""/>
-                        <m:endChr m:val=")"/>
-                        <m:grow/>
-                      </m:dPr>
-                      <m:e>
-                        <m:r>
-                          <m:t>D</m:t>
-                        </m:r>
-                        <m:r>
-                          <m:rPr>
-                            <m:sty m:val="p"/>
-                          </m:rPr>
-                          <m:t>=</m:t>
-                        </m:r>
-                        <m:r>
-                          <m:t>1</m:t>
-                        </m:r>
-                        <m:r>
-                          <m:rPr>
-                            <m:sty m:val="p"/>
-                          </m:rPr>
-                          <m:t>∣</m:t>
-                        </m:r>
-                        <m:r>
-                          <m:t>X</m:t>
-                        </m:r>
-                      </m:e>
-                    </m:d>
-                    <m:r>
-                      <m:rPr>
-                        <m:sty m:val="p"/>
-                      </m:rPr>
-                      <m:t>&lt;</m:t>
-                    </m:r>
-                    <m:r>
-                      <m:t>1</m:t>
-                    </m:r>
-                  </m:oMath>
-                </a14:m>
-                <a:r>
-                  <a:rPr/>
-                  <a:t> almost surely</a:t>
-                </a:r>
-              </a:p>
-              <a:p>
-                <a:pPr lvl="0" indent="-342900" marL="342900">
-                  <a:buAutoNum type="arabicPeriod"/>
-                </a:pPr>
-                <a:r>
-                  <a:rPr b="1"/>
-                  <a:t>SUTVA</a:t>
-                </a:r>
-              </a:p>
-              <a:p>
-                <a:pPr lvl="0" indent="0" marL="0">
-                  <a:buNone/>
-                </a:pPr>
-                <a:r>
-                  <a:rPr/>
-                  <a:t>No amount of machine learning substitutes for these. They are assumptions </a:t>
-                </a:r>
-                <a:r>
-                  <a:rPr b="1"/>
-                  <a:t>about the world</a:t>
-                </a:r>
-                <a:r>
-                  <a:rPr/>
-                  <a:t>, defended with institutional knowledge — not with cross-validation.</a:t>
-                </a:r>
-              </a:p>
-            </p:txBody>
-          </p:sp>
-        </mc:Choice>
-      </mc:AlternateContent>
+      <p:pic>
+        <p:nvPicPr>
+          <p:cNvPr descr="slides_files/figure-pptx/cell-3-output-1.png" id="0" name="Picture 1"/>
+          <p:cNvPicPr>
+            <a:picLocks noGrp="1" noChangeAspect="1"/>
+          </p:cNvPicPr>
+          <p:nvPr/>
+        </p:nvPicPr>
+        <p:blipFill>
+          <a:blip r:embed="rId2"/>
+          <a:stretch>
+            <a:fillRect/>
+          </a:stretch>
+        </p:blipFill>
+        <p:spPr bwMode="auto">
+          <a:xfrm>
+            <a:off x="457200" y="1358900"/>
+            <a:ext cx="8229600" cy="3048000"/>
+          </a:xfrm>
+          <a:prstGeom prst="rect">
+            <a:avLst/>
+          </a:prstGeom>
+          <a:noFill/>
+          <a:ln w="9525">
+            <a:noFill/>
+            <a:headEnd/>
+            <a:tailEnd/>
+          </a:ln>
+        </p:spPr>
+      </p:pic>
     </p:spTree>
   </p:cSld>
 </p:sld>
@@ -9233,20 +13554,15 @@
       </p:grpSpPr>
       <p:sp>
         <p:nvSpPr>
-          <p:cNvPr id="2" name="Title 1"/>
+          <p:cNvPr id="3" name="Content Placeholder 2"/>
           <p:cNvSpPr>
             <a:spLocks noGrp="1"/>
           </p:cNvSpPr>
           <p:nvPr>
-            <p:ph type="title"/>
+            <p:ph idx="1"/>
           </p:nvPr>
         </p:nvSpPr>
-        <p:spPr>
-          <a:xfrm>
-            <a:off x="722313" y="1850000"/>
-            <a:ext cx="7772400" cy="1300000"/>
-          </a:xfrm>
-        </p:spPr>
+        <p:spPr/>
         <p:txBody>
           <a:bodyPr/>
           <a:lstStyle/>
@@ -9256,7 +13572,23 @@
             </a:pPr>
             <a:r>
               <a:rPr/>
-              <a:t>10.2 Why the naive plug-in fails</a:t>
+              <a:t>Countries that adopt AI strategies are </a:t>
+            </a:r>
+            <a:r>
+              <a:rPr b="1"/>
+              <a:t>richer</a:t>
+            </a:r>
+            <a:r>
+              <a:rPr/>
+              <a:t>, and they adopt </a:t>
+            </a:r>
+            <a:r>
+              <a:rPr b="1"/>
+              <a:t>later</a:t>
+            </a:r>
+            <a:r>
+              <a:rPr/>
+              <a:t>. Treatment is not random, and no amount of predictive accuracy repairs that.</a:t>
             </a:r>
           </a:p>
         </p:txBody>
